--- a/AUTOCAD INTECAP/apuntes powerpoint/CLASE 10, Miercoles 18 Marzo.pptx
+++ b/AUTOCAD INTECAP/apuntes powerpoint/CLASE 10, Miercoles 18 Marzo.pptx
@@ -14,18 +14,29 @@
     <p:sldId id="266" r:id="rId8"/>
     <p:sldId id="267" r:id="rId9"/>
     <p:sldId id="268" r:id="rId10"/>
-    <p:sldId id="269" r:id="rId11"/>
-    <p:sldId id="270" r:id="rId12"/>
-    <p:sldId id="271" r:id="rId13"/>
-    <p:sldId id="272" r:id="rId14"/>
-    <p:sldId id="273" r:id="rId15"/>
-    <p:sldId id="274" r:id="rId16"/>
-    <p:sldId id="275" r:id="rId17"/>
-    <p:sldId id="276" r:id="rId18"/>
-    <p:sldId id="258" r:id="rId19"/>
-    <p:sldId id="259" r:id="rId20"/>
-    <p:sldId id="260" r:id="rId21"/>
-    <p:sldId id="261" r:id="rId22"/>
+    <p:sldId id="277" r:id="rId11"/>
+    <p:sldId id="278" r:id="rId12"/>
+    <p:sldId id="279" r:id="rId13"/>
+    <p:sldId id="280" r:id="rId14"/>
+    <p:sldId id="281" r:id="rId15"/>
+    <p:sldId id="282" r:id="rId16"/>
+    <p:sldId id="283" r:id="rId17"/>
+    <p:sldId id="284" r:id="rId18"/>
+    <p:sldId id="286" r:id="rId19"/>
+    <p:sldId id="287" r:id="rId20"/>
+    <p:sldId id="288" r:id="rId21"/>
+    <p:sldId id="269" r:id="rId22"/>
+    <p:sldId id="270" r:id="rId23"/>
+    <p:sldId id="271" r:id="rId24"/>
+    <p:sldId id="272" r:id="rId25"/>
+    <p:sldId id="273" r:id="rId26"/>
+    <p:sldId id="274" r:id="rId27"/>
+    <p:sldId id="275" r:id="rId28"/>
+    <p:sldId id="276" r:id="rId29"/>
+    <p:sldId id="258" r:id="rId30"/>
+    <p:sldId id="259" r:id="rId31"/>
+    <p:sldId id="260" r:id="rId32"/>
+    <p:sldId id="261" r:id="rId33"/>
   </p:sldIdLst>
   <p:sldSz cx="12192000" cy="6858000"/>
   <p:notesSz cx="6858000" cy="9144000"/>
@@ -132,6 +143,238 @@
 </p:presentation>
 </file>
 
+<file path=ppt/ink/ink1.xml><?xml version="1.0" encoding="utf-8"?>
+<inkml:ink xmlns:inkml="http://www.w3.org/2003/InkML">
+  <inkml:definitions>
+    <inkml:context xml:id="ctx0">
+      <inkml:inkSource xml:id="inkSrc0">
+        <inkml:traceFormat>
+          <inkml:channel name="X" type="integer" min="-2.14748E9" max="2.14748E9" units="cm"/>
+          <inkml:channel name="Y" type="integer" min="-2.14748E9" max="2.14748E9" units="cm"/>
+        </inkml:traceFormat>
+        <inkml:channelProperties>
+          <inkml:channelProperty channel="X" name="resolution" value="1000" units="1/cm"/>
+          <inkml:channelProperty channel="Y" name="resolution" value="1000" units="1/cm"/>
+        </inkml:channelProperties>
+      </inkml:inkSource>
+      <inkml:timestamp xml:id="ts0" timeString="2026-04-06T16:37:01.385"/>
+    </inkml:context>
+    <inkml:brush xml:id="br0">
+      <inkml:brushProperty name="width" value="0.3" units="cm"/>
+      <inkml:brushProperty name="height" value="0.6" units="cm"/>
+      <inkml:brushProperty name="color" value="#FFFC00"/>
+      <inkml:brushProperty name="tip" value="rectangle"/>
+      <inkml:brushProperty name="rasterOp" value="maskPen"/>
+      <inkml:brushProperty name="ignorePressure" value="1"/>
+    </inkml:brush>
+  </inkml:definitions>
+  <inkml:trace contextRef="#ctx0" brushRef="#br0">1061 1063,'42'0,"1"-2,-1-2,1-1,66-18,-89 16,0 0,0-1,-1 0,0-2,0 0,-1-2,0 0,-1 0,-1-2,0 0,15-19,-26 29,-2 0,1-1,-1 0,1 0,-1 0,-1 0,1 0,-1 0,0-1,0 1,0-1,-1 0,0 0,1-6,-3 5,1 1,-1-1,0 0,-1 1,1-1,-1 1,-1-1,1 1,-1 0,0 0,-1 0,-5-8,-10-10,0 0,-1 2,-2 0,0 2,-29-22,-134-83,108 79,-3 4,-2 3,-98-32,-259-58,298 99,83 19,1-3,-60-22,106 30,13 3,22 2,92 8,144 28,-241-31,0 0,0 1,-1 1,1 1,29 16,-45-22,0 1,0 0,-1 0,1 0,-1 1,0-1,0 1,0-1,0 1,0 0,0-1,-1 1,1 0,-1 0,0 0,0 0,0 0,0 1,-1-1,1 0,-1 0,0 1,0-1,0 6,-2 6,-1 0,-1 0,0 0,-7 17,-3 10,12-36,1 1,-1-1,1 1,1-1,-1 1,1 0,0-1,1 1,0 0,0-1,0 1,1-1,-1 0,2 1,4 9,-3-9,1 0,0 0,1 0,0 0,0-1,0 0,1 0,0 0,0-1,12 7,9 1,0 0,1-2,0-1,1-2,54 9,59 4,185 1,147-22,-425-1,79-1</inkml:trace>
+</inkml:ink>
+</file>
+
+<file path=ppt/ink/ink2.xml><?xml version="1.0" encoding="utf-8"?>
+<inkml:ink xmlns:inkml="http://www.w3.org/2003/InkML">
+  <inkml:definitions>
+    <inkml:context xml:id="ctx0">
+      <inkml:inkSource xml:id="inkSrc0">
+        <inkml:traceFormat>
+          <inkml:channel name="X" type="integer" min="-2.14748E9" max="2.14748E9" units="cm"/>
+          <inkml:channel name="Y" type="integer" min="-2.14748E9" max="2.14748E9" units="cm"/>
+        </inkml:traceFormat>
+        <inkml:channelProperties>
+          <inkml:channelProperty channel="X" name="resolution" value="1000" units="1/cm"/>
+          <inkml:channelProperty channel="Y" name="resolution" value="1000" units="1/cm"/>
+        </inkml:channelProperties>
+      </inkml:inkSource>
+      <inkml:timestamp xml:id="ts0" timeString="2026-04-06T16:37:03.792"/>
+    </inkml:context>
+    <inkml:brush xml:id="br0">
+      <inkml:brushProperty name="width" value="0.3" units="cm"/>
+      <inkml:brushProperty name="height" value="0.6" units="cm"/>
+      <inkml:brushProperty name="color" value="#FFFC00"/>
+      <inkml:brushProperty name="tip" value="rectangle"/>
+      <inkml:brushProperty name="rasterOp" value="maskPen"/>
+      <inkml:brushProperty name="ignorePressure" value="1"/>
+    </inkml:brush>
+  </inkml:definitions>
+  <inkml:trace contextRef="#ctx0" brushRef="#br0">39 796,'-7'20,"0"1,1 0,1 0,2 0,0 0,1 1,1 34,-1-10,0-21,1-1,1 1,2 0,0-1,11 46,-12-64,1-1,0 0,0 1,0-1,1 0,0 0,0 0,0 0,0-1,1 1,0-1,0 0,0 0,0 0,1-1,0 1,-1-1,1 0,0 0,1-1,-1 0,0 0,1 0,-1 0,1-1,0 0,-1 0,1-1,0 1,11-2,2-1,0-1,-1 0,1-2,-1 0,0-1,0-1,-1 0,0-2,0 0,20-14,9-10,-2-2,50-48,-48 37,81-100,-113 126,0-1,0 0,-2 0,-1-1,-1-1,0 0,-2 0,7-33,-14 55,-1 0,1 0,-1-1,0 1,1-1,-1 1,0 0,0-1,0 1,0-1,0 1,0 0,0-1,-1 1,1-1,0 1,-1 0,1-1,-1 1,0 0,1 0,-1-1,0 1,0 0,1 0,-1 0,-2-2,1 3,1 0,0 1,-1-1,1 0,-1 0,1 1,0-1,-1 1,1 0,0-1,0 1,-1 0,1-1,0 1,0 0,0 0,0 0,0 0,0 0,0 0,0 1,1-1,-1 0,0 0,0 3,-5 6,1-1,0 1,1 1,0-1,1 1,0-1,-3 18,6-26,-1 1,1-1,0 1,0-1,-1 0,1 1,1-1,-1 1,0-1,1 0,-1 1,1-1,0 0,-1 0,1 1,0-1,1 0,-1 0,0 0,0 0,1 0,0 0,-1-1,1 1,0 0,0-1,-1 1,1-1,0 0,1 1,-1-1,0 0,0-1,0 1,1 0,-1 0,0-1,1 0,-1 1,1-1,3 0,5-1,0 1,-1-2,1 1,0-2,-1 1,0-1,17-8,1-2,44-28,-9-4,-2-2,-2-4,-2-1,-3-3,-2-3,-3-2,66-102,-102 142,-1-1,16-39,-26 53,1-1,-1 0,0 1,0-1,-1 0,0 0,-1 0,0 0,0 0,0 0,-3-12,-9-4,3 22,0 16,5 7,0-1,1 1,1 1,2 33,-1-31,-1 39,-1-13,3 0,1 0,3 0,15 78,-17-119,1 0,0 0,0 0,1-1,0 1,1-1,0 0,7 8,-10-13,1 0,0-1,0 1,0-1,0 1,0-1,0 0,1-1,-1 1,1 0,-1-1,1 0,-1 0,1 0,0 0,0 0,0-1,-1 0,1 0,0 0,0 0,6-2,2-1,0 0,-1-1,1-1,-1 0,0-1,0 0,-1 0,1-1,-1-1,-1 0,10-10,-7 7,-1 0,-1-1,0-1,-1 1,0-2,0 1,-2-1,9-20,-15 31,0 1,-1-1,1 0,0 1,-1-1,0 0,1 1,-1-1,0 0,-1 0,1 1,0-1,-1 0,1 1,-1-1,0 0,0 1,0-1,0 1,-1-1,1 1,-2-3,1 4,1 0,-1 0,1 0,-1 0,1 0,-1 0,0 1,1-1,-1 1,0-1,0 1,1-1,-1 1,0 0,0 0,0 0,1 0,-1 0,0 1,0-1,1 0,-1 1,0-1,0 1,1 0,-1 0,1-1,-1 1,1 0,-1 0,1 0,-1 1,1-1,-2 3,-10 9,1 0,0 2,1-1,1 1,0 1,1 0,-13 33,-1-2,12-25,1-7,2 0,0 1,1 0,0 1,1 0,1 0,1 0,1 0,-3 29,6-45,-1 0,1 0,0 1,0-1,0 0,0 1,0-1,0 0,1 1,-1-1,0 0,1 0,-1 1,1-1,-1 0,1 0,-1 0,1 0,0 0,0 1,-1-1,1-1,0 1,0 0,0 0,0 0,0 0,0-1,0 1,1 0,-1-1,0 1,0-1,3 1,-3 0,0-1,0 1,0-1,0 1,0 0,0 0,0-1,0 1,0 0,0 0,-1 0,1 0,0 0,-1 0,1 0,0 0,-1 0,0 1,1-1,-1 0,1 0,-1 0,0 0,0 1,0-1,0 0,0 0,0 1,0 1,-7 47,4-33,-33 165,-11 79,46-255,0 1,1 0,0-1,0 1,0 0,1-1,3 13,-4-17,1-1,0 1,0-1,0 1,0-1,0 0,0 1,0-1,0 0,1 0,-1 0,1 0,-1 0,0 0,1 0,-1 0,1-1,0 1,-1-1,1 1,0-1,-1 1,1-1,0 0,-1 0,1 0,0 0,-1 0,1 0,0-1,-1 1,1 0,0-1,-1 0,1 1,-1-1,3-1,26-10,0-2,-1-2,0 0,48-38,-69 49,221-176,-197 152,-1-1,-2-2,-2-1,42-65,-37 32,-30 62,-1 0,0 0,1 0,-2 0,1 0,0 0,-1 0,0 0,0 0,0 0,-1 0,1 0,-2-7,1 11,1-1,0 0,0 0,-1 0,1 1,-1-1,1 0,-1 0,1 1,-1-1,1 0,-1 1,0-1,1 1,-1-1,0 1,1-1,-1 1,0-1,0 1,1 0,-1-1,0 1,0 0,0 0,0 0,0-1,1 1,-1 0,0 0,0 0,0 1,0-1,0 0,1 0,-1 0,0 0,0 1,-1 0,-33 22,8 4,2 1,1 1,-38 60,-15 20,58-90,18-19,1 0,0 0,0 1,0-1,0 0,-1 0,1 0,0 0,0 0,-1 1,1-1,0 0,0 0,-1 0,1 0,0 0,0 0,0 0,-1 0,1 0,0 0,0 0,-1 0,1 0,0 0,0 0,-1 0,1 0,0 0,0 0,-1-1,1 1,0 0,0 0,0 0,-1 0,1 0,0-1,-1-34,2 14,1-17,-1 0,-3 1,-1-1,-1 1,-2 0,-2 0,-16-47,22 78,-1 0,0 1,0-1,0 1,-1 0,1-1,-1 2,0-1,-1 0,1 1,-1 0,0 0,0 0,0 1,-1 0,1 0,-1 0,0 0,1 1,-1 0,0 0,0 1,-1 0,-11-1,-4 2,0 0,1 2,-1 1,1 1,-1 0,-20 8,-29 11,1 2,1 4,-111 64,62-20,-118 96,200-142,-1-3,-1 0,-1-3,-44 17,66-30,0 0,0 1,0 1,1 1,1 0,0 1,0 0,-15 19,25-25,0 0,0 0,1 1,0-1,0 1,0 0,1 0,0 0,1 0,0 1,0-1,0 1,1 0,0-1,1 1,-1 0,2 0,-1-1,1 1,0 0,0-1,1 1,3 8,20 36</inkml:trace>
+</inkml:ink>
+</file>
+
+<file path=ppt/ink/ink3.xml><?xml version="1.0" encoding="utf-8"?>
+<inkml:ink xmlns:inkml="http://www.w3.org/2003/InkML">
+  <inkml:definitions>
+    <inkml:context xml:id="ctx0">
+      <inkml:inkSource xml:id="inkSrc0">
+        <inkml:traceFormat>
+          <inkml:channel name="X" type="integer" min="-2.14748E9" max="2.14748E9" units="cm"/>
+          <inkml:channel name="Y" type="integer" min="-2.14748E9" max="2.14748E9" units="cm"/>
+        </inkml:traceFormat>
+        <inkml:channelProperties>
+          <inkml:channelProperty channel="X" name="resolution" value="1000" units="1/cm"/>
+          <inkml:channelProperty channel="Y" name="resolution" value="1000" units="1/cm"/>
+        </inkml:channelProperties>
+      </inkml:inkSource>
+      <inkml:timestamp xml:id="ts0" timeString="2026-04-06T21:17:08.107"/>
+    </inkml:context>
+    <inkml:brush xml:id="br0">
+      <inkml:brushProperty name="width" value="0.3" units="cm"/>
+      <inkml:brushProperty name="height" value="0.6" units="cm"/>
+      <inkml:brushProperty name="color" value="#FFFC00"/>
+      <inkml:brushProperty name="tip" value="rectangle"/>
+      <inkml:brushProperty name="rasterOp" value="maskPen"/>
+      <inkml:brushProperty name="ignorePressure" value="1"/>
+    </inkml:brush>
+  </inkml:definitions>
+  <inkml:trace contextRef="#ctx0" brushRef="#br0">3120 238,'3232'0,"-3159"-6,-71 6,-1 0,0 0,0 0,0-1,0 1,0 0,0-1,1 1,-1-1,0 1,0-1,0 1,0-1,-1 0,1 1,0-1,0 0,0 0,0 0,0-1,-1 1,-1-1,1 1,-1 0,1 0,-1-1,0 1,0 0,0 0,1 0,-1 0,0 0,0 0,0 0,-1 0,1 0,0 1,0-1,0 0,-1 1,1-1,0 1,-3-1,-40-18,-2 3,1 2,-2 2,-76-10,-174-19,-87 8,-1246-7,-2 78,982-18,202-8,-535 32,890-40</inkml:trace>
+</inkml:ink>
+</file>
+
+<file path=ppt/ink/ink4.xml><?xml version="1.0" encoding="utf-8"?>
+<inkml:ink xmlns:inkml="http://www.w3.org/2003/InkML">
+  <inkml:definitions>
+    <inkml:context xml:id="ctx0">
+      <inkml:inkSource xml:id="inkSrc0">
+        <inkml:traceFormat>
+          <inkml:channel name="X" type="integer" min="-2.14748E9" max="2.14748E9" units="cm"/>
+          <inkml:channel name="Y" type="integer" min="-2.14748E9" max="2.14748E9" units="cm"/>
+        </inkml:traceFormat>
+        <inkml:channelProperties>
+          <inkml:channelProperty channel="X" name="resolution" value="1000" units="1/cm"/>
+          <inkml:channelProperty channel="Y" name="resolution" value="1000" units="1/cm"/>
+        </inkml:channelProperties>
+      </inkml:inkSource>
+      <inkml:timestamp xml:id="ts0" timeString="2026-04-06T21:17:10.365"/>
+    </inkml:context>
+    <inkml:brush xml:id="br0">
+      <inkml:brushProperty name="width" value="0.3" units="cm"/>
+      <inkml:brushProperty name="height" value="0.6" units="cm"/>
+      <inkml:brushProperty name="color" value="#FFFC00"/>
+      <inkml:brushProperty name="tip" value="rectangle"/>
+      <inkml:brushProperty name="rasterOp" value="maskPen"/>
+      <inkml:brushProperty name="ignorePressure" value="1"/>
+    </inkml:brush>
+  </inkml:definitions>
+  <inkml:trace contextRef="#ctx0" brushRef="#br0">1426 288,'679'47,"597"53,2-87,-966-21,-1-14,-1-14,544-135,-445 48,-310 92,-84 26,6-1,0-1,-1 0,31-17,-51 24,0 0,-1 0,1 0,0-1,0 1,0 0,-1 0,1 0,0 0,0 0,0 0,0-1,0 1,-1 0,1 0,0 0,0 0,0-1,0 1,0 0,0 0,0 0,0-1,0 1,0 0,0 0,0 0,0-1,0 1,0 0,0 0,0-1,0 1,0 0,0 0,0 0,0-1,0 1,0 0,0 0,0 0,1-1,-23 6,0 1,0 0,1 2,-26 12,-5 2,-1139 373,-34-88,1177-296,-1412 284,-1-74,1449-220,-691 82,513-69,-318-17,440-6,66 9,0 0,1-1,-1 1,0 0,0-1,1 0,-1 1,1-1,-1 0,1 0,-1 0,1 0,-1 0,1 0,0 0,-2-1,3 0,0 1,0 0,1 0,-1 0,0 0,1 0,-1 0,0 0,1 0,-1 0,1 0,0 0,-1 0,1 1,0-1,-1 0,1 0,0 1,0-1,0 0,0 1,0-1,0 1,0-1,0 1,0-1,0 1,1-1,28-13,0 1,1 1,0 2,34-7,12-3,204-56,114-14,122 1,107 3,99 10,87 17,1636-29,-881 41,-1064 26,-138-1,35-24,-390 44,66-15,-70 15,1 1,-1-1,1 0,-1 0,0 0,0 0,0-1,0 0,0 1,-1-2,5-3,-8 7,1-1,-1 1,0-1,1 0,-1 1,0-1,1 1,-1-1,0 1,0-1,0 0,0 1,0-1,1 0,-1 1,0-1,0 0,-1 1,1-1,0 1,0-1,0 0,0 1,0-1,-1 1,1-1,0 0,-1 1,1-1,0 1,-1-1,1 1,0-1,-1 1,1-1,-1 1,1 0,-1-1,1 1,-1 0,0-1,1 1,-1 0,-1-1,-7-3,0 1,0 0,0 1,-1-1,1 2,-12-2,-356-16,255 17,-372-8,-184-2,-174-10,-527-28,-321-9,25 34,1076 37,183 15,175 3,181-16,59-14,0 0,0 1,0-1,0 0,0 0,1 1,-1-1,0 0,0 1,0-1,1 1,-1-1,0 1,0-1,1 1,-1-1,1 1,-1 0,0-1,1 1,-1 0,1 0,-1 1,1-1,1 0,0 0,0 0,0 0,0-1,0 1,0 0,0-1,0 1,0 0,0-1,0 1,1-1,-1 0,0 1,0-1,0 0,2 0,56 10,172 4,154-6,142-4,129-2,122-3,1169 21,255-1,-1527-33,-89-22,-94-15,-111-2,442-121,-810 170,42-9,-2-3,57-26,-107 41,-1 0,1 0,-1 0,0 0,1-1,-1 1,0-1,0 0,0 0,3-3,-5 5,0-1,0 0,0 1,0-1,0 1,-1-1,1 1,0-1,0 0,0 1,0-1,-1 1,1-1,0 1,0-1,-1 1,1-1,-1 1,1 0,0-1,-1 1,1-1,-1 1,1 0,-1-1,1 1,-1 0,1 0,-1-1,1 1,-1 0,1 0,-1 0,1 0,-1 0,0-1,1 1,-1 0,1 0,-2 1,-35-8</inkml:trace>
+</inkml:ink>
+</file>
+
+<file path=ppt/ink/ink5.xml><?xml version="1.0" encoding="utf-8"?>
+<inkml:ink xmlns:inkml="http://www.w3.org/2003/InkML">
+  <inkml:definitions>
+    <inkml:context xml:id="ctx0">
+      <inkml:inkSource xml:id="inkSrc0">
+        <inkml:traceFormat>
+          <inkml:channel name="X" type="integer" min="-2.14748E9" max="2.14748E9" units="cm"/>
+          <inkml:channel name="Y" type="integer" min="-2.14748E9" max="2.14748E9" units="cm"/>
+        </inkml:traceFormat>
+        <inkml:channelProperties>
+          <inkml:channelProperty channel="X" name="resolution" value="1000" units="1/cm"/>
+          <inkml:channelProperty channel="Y" name="resolution" value="1000" units="1/cm"/>
+        </inkml:channelProperties>
+      </inkml:inkSource>
+      <inkml:timestamp xml:id="ts0" timeString="2026-04-06T21:23:09.421"/>
+    </inkml:context>
+    <inkml:brush xml:id="br0">
+      <inkml:brushProperty name="width" value="0.3" units="cm"/>
+      <inkml:brushProperty name="height" value="0.6" units="cm"/>
+      <inkml:brushProperty name="color" value="#FFFC00"/>
+      <inkml:brushProperty name="tip" value="rectangle"/>
+      <inkml:brushProperty name="rasterOp" value="maskPen"/>
+      <inkml:brushProperty name="ignorePressure" value="1"/>
+    </inkml:brush>
+  </inkml:definitions>
+  <inkml:trace contextRef="#ctx0" brushRef="#br0">20662 2132,'1'0,"0"1,0-1,0 0,0 0,1 0,-1 0,0 0,0 0,0 0,0-1,0 1,0 0,0 0,0-1,-1 1,1-1,0 1,0-1,0 1,0-1,0 0,-1 1,1-1,0 0,0 0,-1 1,1-1,-1 0,1 0,-1 0,1 0,-1 0,1 0,-1-1,0 0,0 1,-1-1,1 1,-1-1,0 1,0-1,1 1,-1-1,0 1,0 0,0-1,0 1,-1 0,1 0,0 0,0 0,-1 0,1 0,0 0,-1 0,1 1,-1-1,1 1,-3-1,-1124-407,15 129,737 190,-650-127,869 185,-27-5,-191-10,-860 22,156 10,-1048-134,-214 0,1584 110,-1784-190,2302 198,-2010-218,1479 197,69 20,91 16,98 10,98 6,-99 8,380-5,50-1</inkml:trace>
+</inkml:ink>
+</file>
+
+<file path=ppt/ink/ink6.xml><?xml version="1.0" encoding="utf-8"?>
+<inkml:ink xmlns:inkml="http://www.w3.org/2003/InkML">
+  <inkml:definitions>
+    <inkml:context xml:id="ctx0">
+      <inkml:inkSource xml:id="inkSrc0">
+        <inkml:traceFormat>
+          <inkml:channel name="X" type="integer" min="-2.14748E9" max="2.14748E9" units="cm"/>
+          <inkml:channel name="Y" type="integer" min="-2.14748E9" max="2.14748E9" units="cm"/>
+        </inkml:traceFormat>
+        <inkml:channelProperties>
+          <inkml:channelProperty channel="X" name="resolution" value="1000" units="1/cm"/>
+          <inkml:channelProperty channel="Y" name="resolution" value="1000" units="1/cm"/>
+        </inkml:channelProperties>
+      </inkml:inkSource>
+      <inkml:timestamp xml:id="ts0" timeString="2026-04-06T21:23:12.737"/>
+    </inkml:context>
+    <inkml:brush xml:id="br0">
+      <inkml:brushProperty name="width" value="0.3" units="cm"/>
+      <inkml:brushProperty name="height" value="0.6" units="cm"/>
+      <inkml:brushProperty name="color" value="#FFFC00"/>
+      <inkml:brushProperty name="tip" value="rectangle"/>
+      <inkml:brushProperty name="rasterOp" value="maskPen"/>
+      <inkml:brushProperty name="ignorePressure" value="1"/>
+    </inkml:brush>
+  </inkml:definitions>
+  <inkml:trace contextRef="#ctx0" brushRef="#br0">15344 973,'-83'0,"0"4,1 3,0 4,-111 29,77-11,-1-5,-1-5,-1-5,-157-2,-1669-15,1001-36,165 2,-328 35,-598-22,-484-153,2165 175,-1911-170,1400 151,-519-31,-775-10,1800 59,29 3,0-1,0 1,0 0,0-1,0 1,0 0,0-1,0 1,0 0,1-1,-1 1,0 0,0-1,0 1,0 0,1-1,-1 1,0 0,0 0,0-1,1 1,-1 0,0 0,1 0,-1-1,0 1,0 0,1 0,-1 0,0 0,1 0,-1 0,0-1,1 1,-1 0,0 0,1 0,0 0,64-17,108-3,235 3,-281 14,286-1,76 16,941 106,-1 85,467 161,-1611-306,324 75,56 10,1-32,1120 25,-381-128,-1276-19,171-37,12-2,-148 25,-2-7,187-64,-273 74,17 4,-66 14,43-12,-52 6,-18 9,-1 0,1 1,0-1,0 0,0 0,-1 1,1-1,0 0,-1 1,1-1,0 0,-1 1,1-1,-1 1,1-1,-1 1,1-1,-1 1,0-1,1 1,-1-1,1 1,-1 0,0 0,1-1,-1 1,0 0,0 0,1-1,-2 1,-25-10,-1 0,1 2,-41-7,-2 0,-795-175,-14 46,871 143,-1417-155,-7 108,1310 52,-126 22,241-26,0 2,-1-1,1 1,0 0,-11 6,12 1,19 2,4-6,0 0,0-2,32 4,169 10,108-5,2462 3,-1919-18,-40-38,-197 5,-581 35,-6 1,1-3,80-13,-110 10,-18 2,-41-2,-1059-131,398 45,-140-9,-168-13,-1334-112,-7 87,2143 131,101 2</inkml:trace>
+</inkml:ink>
+</file>
+
+<file path=ppt/ink/ink7.xml><?xml version="1.0" encoding="utf-8"?>
+<inkml:ink xmlns:inkml="http://www.w3.org/2003/InkML">
+  <inkml:definitions>
+    <inkml:context xml:id="ctx0">
+      <inkml:inkSource xml:id="inkSrc0">
+        <inkml:traceFormat>
+          <inkml:channel name="X" type="integer" min="-2.14748E9" max="2.14748E9" units="cm"/>
+          <inkml:channel name="Y" type="integer" min="-2.14748E9" max="2.14748E9" units="cm"/>
+        </inkml:traceFormat>
+        <inkml:channelProperties>
+          <inkml:channelProperty channel="X" name="resolution" value="1000" units="1/cm"/>
+          <inkml:channelProperty channel="Y" name="resolution" value="1000" units="1/cm"/>
+        </inkml:channelProperties>
+      </inkml:inkSource>
+      <inkml:timestamp xml:id="ts0" timeString="2026-04-06T21:23:14.588"/>
+    </inkml:context>
+    <inkml:brush xml:id="br0">
+      <inkml:brushProperty name="width" value="0.3" units="cm"/>
+      <inkml:brushProperty name="height" value="0.6" units="cm"/>
+      <inkml:brushProperty name="color" value="#FFFC00"/>
+      <inkml:brushProperty name="tip" value="rectangle"/>
+      <inkml:brushProperty name="rasterOp" value="maskPen"/>
+      <inkml:brushProperty name="ignorePressure" value="1"/>
+    </inkml:brush>
+  </inkml:definitions>
+  <inkml:trace contextRef="#ctx0" brushRef="#br0">6106 1578,'0'-2,"0"-1,-1 0,0 1,1-1,-1 1,0 0,0-1,0 1,-1 0,1-1,-1 1,1 0,-1 0,1 0,-5-3,-38-30,18 15,-17-12,-1 2,-1 2,-2 2,-86-36,-220-58,281 98,-1208-357,-2015-332,2621 639,652 73,16 3,8-1,0-1,0 0,0 0,1 0,-1 0,1 0,-1 0,1-1,5 3,34 16,1-1,0-2,2-2,79 17,-57-16,381 88,210 23,1857 215,-1744-265,-86-26,-100-20,-99-17,-112-11,54-23,-344 5,-69 7,-15 7,0 1,1 0,-1-1,0 1,0 0,0-1,0 1,0 0,0-1,0 1,0 0,0-1,0 1,0 0,0-1,0 1,0 0,0-1,0 1,0 0,0-1,0 1,-1 0,1-1,0 1,0 0,0-1,-1 1,1 0,0 0,-1-1,-4-3,-1 0,1 0,-1 1,0-1,-1 2,1-1,-10-3,-271-68,226 61,-900-156,-9 48,894 112,-1412-116,1092 96,-113-36,391 38,80 19,94 24,184 50,1143 344,-1244-355,-136-54,1 0,-1 0,0 1,0-1,0 1,0 0,0 0,0 0,-1 0,1 1,-1-1,1 1,-1 0,0-1,4 7,-6-8,0 0,0 0,0-1,0 1,0 0,-1 0,1 0,0 0,0-1,-1 1,1 0,0 0,-1 0,1-1,-1 1,1 0,-1-1,1 1,-1 0,0-1,1 1,-2 0,-31 17,-55 12,-2-5,-175 26,26-6,168-24,62-10,22 0,12-2,49 9,412 84,639 50,-1022-146,-34-5</inkml:trace>
+</inkml:ink>
+</file>
+
+<file path=ppt/ink/ink8.xml><?xml version="1.0" encoding="utf-8"?>
+<inkml:ink xmlns:inkml="http://www.w3.org/2003/InkML">
+  <inkml:definitions>
+    <inkml:context xml:id="ctx0">
+      <inkml:inkSource xml:id="inkSrc0">
+        <inkml:traceFormat>
+          <inkml:channel name="X" type="integer" min="-2.14748E9" max="2.14748E9" units="cm"/>
+          <inkml:channel name="Y" type="integer" min="-2.14748E9" max="2.14748E9" units="cm"/>
+        </inkml:traceFormat>
+        <inkml:channelProperties>
+          <inkml:channelProperty channel="X" name="resolution" value="1000" units="1/cm"/>
+          <inkml:channelProperty channel="Y" name="resolution" value="1000" units="1/cm"/>
+        </inkml:channelProperties>
+      </inkml:inkSource>
+      <inkml:timestamp xml:id="ts0" timeString="2026-04-06T21:23:27.313"/>
+    </inkml:context>
+    <inkml:brush xml:id="br0">
+      <inkml:brushProperty name="width" value="0.3" units="cm"/>
+      <inkml:brushProperty name="height" value="0.6" units="cm"/>
+      <inkml:brushProperty name="color" value="#FFFC00"/>
+      <inkml:brushProperty name="tip" value="rectangle"/>
+      <inkml:brushProperty name="rasterOp" value="maskPen"/>
+      <inkml:brushProperty name="ignorePressure" value="1"/>
+    </inkml:brush>
+  </inkml:definitions>
+  <inkml:trace contextRef="#ctx0" brushRef="#br0">0 0,'0'0</inkml:trace>
+</inkml:ink>
+</file>
+
 <file path=ppt/slideLayouts/slideLayout1.xml><?xml version="1.0" encoding="utf-8"?>
 <p:sldLayout xmlns:a="http://schemas.openxmlformats.org/drawingml/2006/main" xmlns:r="http://schemas.openxmlformats.org/officeDocument/2006/relationships" xmlns:p="http://schemas.openxmlformats.org/presentationml/2006/main" type="title" preserve="1">
   <p:cSld name="Diapositiva de título">
@@ -281,7 +524,7 @@
           <a:p>
             <a:fld id="{A323B7C5-9ED9-4209-AD82-4E7D58CDB7A1}" type="datetimeFigureOut">
               <a:rPr lang="es-GT" smtClean="0"/>
-              <a:t>2/04/2026</a:t>
+              <a:t>6/04/2026</a:t>
             </a:fld>
             <a:endParaRPr lang="es-GT"/>
           </a:p>
@@ -481,7 +724,7 @@
           <a:p>
             <a:fld id="{A323B7C5-9ED9-4209-AD82-4E7D58CDB7A1}" type="datetimeFigureOut">
               <a:rPr lang="es-GT" smtClean="0"/>
-              <a:t>2/04/2026</a:t>
+              <a:t>6/04/2026</a:t>
             </a:fld>
             <a:endParaRPr lang="es-GT"/>
           </a:p>
@@ -691,7 +934,7 @@
           <a:p>
             <a:fld id="{A323B7C5-9ED9-4209-AD82-4E7D58CDB7A1}" type="datetimeFigureOut">
               <a:rPr lang="es-GT" smtClean="0"/>
-              <a:t>2/04/2026</a:t>
+              <a:t>6/04/2026</a:t>
             </a:fld>
             <a:endParaRPr lang="es-GT"/>
           </a:p>
@@ -891,7 +1134,7 @@
           <a:p>
             <a:fld id="{A323B7C5-9ED9-4209-AD82-4E7D58CDB7A1}" type="datetimeFigureOut">
               <a:rPr lang="es-GT" smtClean="0"/>
-              <a:t>2/04/2026</a:t>
+              <a:t>6/04/2026</a:t>
             </a:fld>
             <a:endParaRPr lang="es-GT"/>
           </a:p>
@@ -1167,7 +1410,7 @@
           <a:p>
             <a:fld id="{A323B7C5-9ED9-4209-AD82-4E7D58CDB7A1}" type="datetimeFigureOut">
               <a:rPr lang="es-GT" smtClean="0"/>
-              <a:t>2/04/2026</a:t>
+              <a:t>6/04/2026</a:t>
             </a:fld>
             <a:endParaRPr lang="es-GT"/>
           </a:p>
@@ -1435,7 +1678,7 @@
           <a:p>
             <a:fld id="{A323B7C5-9ED9-4209-AD82-4E7D58CDB7A1}" type="datetimeFigureOut">
               <a:rPr lang="es-GT" smtClean="0"/>
-              <a:t>2/04/2026</a:t>
+              <a:t>6/04/2026</a:t>
             </a:fld>
             <a:endParaRPr lang="es-GT"/>
           </a:p>
@@ -1850,7 +2093,7 @@
           <a:p>
             <a:fld id="{A323B7C5-9ED9-4209-AD82-4E7D58CDB7A1}" type="datetimeFigureOut">
               <a:rPr lang="es-GT" smtClean="0"/>
-              <a:t>2/04/2026</a:t>
+              <a:t>6/04/2026</a:t>
             </a:fld>
             <a:endParaRPr lang="es-GT"/>
           </a:p>
@@ -1992,7 +2235,7 @@
           <a:p>
             <a:fld id="{A323B7C5-9ED9-4209-AD82-4E7D58CDB7A1}" type="datetimeFigureOut">
               <a:rPr lang="es-GT" smtClean="0"/>
-              <a:t>2/04/2026</a:t>
+              <a:t>6/04/2026</a:t>
             </a:fld>
             <a:endParaRPr lang="es-GT"/>
           </a:p>
@@ -2105,7 +2348,7 @@
           <a:p>
             <a:fld id="{A323B7C5-9ED9-4209-AD82-4E7D58CDB7A1}" type="datetimeFigureOut">
               <a:rPr lang="es-GT" smtClean="0"/>
-              <a:t>2/04/2026</a:t>
+              <a:t>6/04/2026</a:t>
             </a:fld>
             <a:endParaRPr lang="es-GT"/>
           </a:p>
@@ -2418,7 +2661,7 @@
           <a:p>
             <a:fld id="{A323B7C5-9ED9-4209-AD82-4E7D58CDB7A1}" type="datetimeFigureOut">
               <a:rPr lang="es-GT" smtClean="0"/>
-              <a:t>2/04/2026</a:t>
+              <a:t>6/04/2026</a:t>
             </a:fld>
             <a:endParaRPr lang="es-GT"/>
           </a:p>
@@ -2707,7 +2950,7 @@
           <a:p>
             <a:fld id="{A323B7C5-9ED9-4209-AD82-4E7D58CDB7A1}" type="datetimeFigureOut">
               <a:rPr lang="es-GT" smtClean="0"/>
-              <a:t>2/04/2026</a:t>
+              <a:t>6/04/2026</a:t>
             </a:fld>
             <a:endParaRPr lang="es-GT"/>
           </a:p>
@@ -2950,7 +3193,7 @@
           <a:p>
             <a:fld id="{A323B7C5-9ED9-4209-AD82-4E7D58CDB7A1}" type="datetimeFigureOut">
               <a:rPr lang="es-GT" smtClean="0"/>
-              <a:t>2/04/2026</a:t>
+              <a:t>6/04/2026</a:t>
             </a:fld>
             <a:endParaRPr lang="es-GT"/>
           </a:p>
@@ -3455,7 +3698,7 @@
           <p:cNvPr id="2" name="Título 1">
             <a:extLst>
               <a:ext uri="{FF2B5EF4-FFF2-40B4-BE49-F238E27FC236}">
-                <a16:creationId xmlns:a16="http://schemas.microsoft.com/office/drawing/2014/main" id="{E011AC85-FF8B-915F-0571-6FE2926D95B4}"/>
+                <a16:creationId xmlns:a16="http://schemas.microsoft.com/office/drawing/2014/main" id="{982F4AD8-78F7-AABA-C33F-B663DF940135}"/>
               </a:ext>
             </a:extLst>
           </p:cNvPr>
@@ -3471,14 +3714,77 @@
           <a:bodyPr/>
           <a:lstStyle/>
           <a:p>
-            <a:endParaRPr lang="es-GT"/>
-          </a:p>
-        </p:txBody>
-      </p:sp>
+            <a:r>
+              <a:rPr lang="es-GT" dirty="0"/>
+              <a:t>CORTE INDIVIDAL SOBRE MULTIIINEA </a:t>
+            </a:r>
+          </a:p>
+        </p:txBody>
+      </p:sp>
+      <p:pic>
+        <p:nvPicPr>
+          <p:cNvPr id="4" name="Imagen 3">
+            <a:extLst>
+              <a:ext uri="{FF2B5EF4-FFF2-40B4-BE49-F238E27FC236}">
+                <a16:creationId xmlns:a16="http://schemas.microsoft.com/office/drawing/2014/main" id="{5FA8806C-0B73-0E82-8D96-CA74D63ED370}"/>
+              </a:ext>
+            </a:extLst>
+          </p:cNvPr>
+          <p:cNvPicPr>
+            <a:picLocks noChangeAspect="1"/>
+          </p:cNvPicPr>
+          <p:nvPr/>
+        </p:nvPicPr>
+        <p:blipFill>
+          <a:blip r:embed="rId2"/>
+          <a:stretch>
+            <a:fillRect/>
+          </a:stretch>
+        </p:blipFill>
+        <p:spPr>
+          <a:xfrm>
+            <a:off x="474073" y="2485987"/>
+            <a:ext cx="5982535" cy="3686689"/>
+          </a:xfrm>
+          <a:prstGeom prst="rect">
+            <a:avLst/>
+          </a:prstGeom>
+        </p:spPr>
+      </p:pic>
+      <p:pic>
+        <p:nvPicPr>
+          <p:cNvPr id="5" name="Imagen 4">
+            <a:extLst>
+              <a:ext uri="{FF2B5EF4-FFF2-40B4-BE49-F238E27FC236}">
+                <a16:creationId xmlns:a16="http://schemas.microsoft.com/office/drawing/2014/main" id="{D2254DDA-711C-9962-5049-16B2F319D1A2}"/>
+              </a:ext>
+            </a:extLst>
+          </p:cNvPr>
+          <p:cNvPicPr>
+            <a:picLocks noChangeAspect="1"/>
+          </p:cNvPicPr>
+          <p:nvPr/>
+        </p:nvPicPr>
+        <p:blipFill>
+          <a:blip r:embed="rId3"/>
+          <a:stretch>
+            <a:fillRect/>
+          </a:stretch>
+        </p:blipFill>
+        <p:spPr>
+          <a:xfrm>
+            <a:off x="6874412" y="1945508"/>
+            <a:ext cx="3198056" cy="3642234"/>
+          </a:xfrm>
+          <a:prstGeom prst="rect">
+            <a:avLst/>
+          </a:prstGeom>
+        </p:spPr>
+      </p:pic>
     </p:spTree>
     <p:extLst>
       <p:ext uri="{BB962C8B-B14F-4D97-AF65-F5344CB8AC3E}">
-        <p14:creationId xmlns:p14="http://schemas.microsoft.com/office/powerpoint/2010/main" val="447949853"/>
+        <p14:creationId xmlns:p14="http://schemas.microsoft.com/office/powerpoint/2010/main" val="1790544369"/>
       </p:ext>
     </p:extLst>
   </p:cSld>
@@ -3510,7 +3816,7 @@
           <p:cNvPr id="2" name="Título 1">
             <a:extLst>
               <a:ext uri="{FF2B5EF4-FFF2-40B4-BE49-F238E27FC236}">
-                <a16:creationId xmlns:a16="http://schemas.microsoft.com/office/drawing/2014/main" id="{428BB90D-8BEE-57A2-D162-32668A94233B}"/>
+                <a16:creationId xmlns:a16="http://schemas.microsoft.com/office/drawing/2014/main" id="{C11B96BD-E6E5-7EDC-7A8C-29D6C53055C0}"/>
               </a:ext>
             </a:extLst>
           </p:cNvPr>
@@ -3526,14 +3832,47 @@
           <a:bodyPr/>
           <a:lstStyle/>
           <a:p>
-            <a:endParaRPr lang="es-GT"/>
-          </a:p>
-        </p:txBody>
-      </p:sp>
+            <a:r>
+              <a:rPr lang="es-GT" dirty="0"/>
+              <a:t>Se corta  la fracción completa </a:t>
+            </a:r>
+          </a:p>
+        </p:txBody>
+      </p:sp>
+      <p:pic>
+        <p:nvPicPr>
+          <p:cNvPr id="4" name="Imagen 3">
+            <a:extLst>
+              <a:ext uri="{FF2B5EF4-FFF2-40B4-BE49-F238E27FC236}">
+                <a16:creationId xmlns:a16="http://schemas.microsoft.com/office/drawing/2014/main" id="{4681F99F-F34B-74E8-516A-0E27596FF2A2}"/>
+              </a:ext>
+            </a:extLst>
+          </p:cNvPr>
+          <p:cNvPicPr>
+            <a:picLocks noChangeAspect="1"/>
+          </p:cNvPicPr>
+          <p:nvPr/>
+        </p:nvPicPr>
+        <p:blipFill>
+          <a:blip r:embed="rId2"/>
+          <a:stretch>
+            <a:fillRect/>
+          </a:stretch>
+        </p:blipFill>
+        <p:spPr>
+          <a:xfrm>
+            <a:off x="2241501" y="1690688"/>
+            <a:ext cx="8621347" cy="4514765"/>
+          </a:xfrm>
+          <a:prstGeom prst="rect">
+            <a:avLst/>
+          </a:prstGeom>
+        </p:spPr>
+      </p:pic>
     </p:spTree>
     <p:extLst>
       <p:ext uri="{BB962C8B-B14F-4D97-AF65-F5344CB8AC3E}">
-        <p14:creationId xmlns:p14="http://schemas.microsoft.com/office/powerpoint/2010/main" val="1783860745"/>
+        <p14:creationId xmlns:p14="http://schemas.microsoft.com/office/powerpoint/2010/main" val="2323440398"/>
       </p:ext>
     </p:extLst>
   </p:cSld>
@@ -3565,7 +3904,7 @@
           <p:cNvPr id="2" name="Título 1">
             <a:extLst>
               <a:ext uri="{FF2B5EF4-FFF2-40B4-BE49-F238E27FC236}">
-                <a16:creationId xmlns:a16="http://schemas.microsoft.com/office/drawing/2014/main" id="{1C4F0CC0-5A13-6BD4-3123-DED15F9D3FDA}"/>
+                <a16:creationId xmlns:a16="http://schemas.microsoft.com/office/drawing/2014/main" id="{1BF07596-9990-4588-036A-660304CF252B}"/>
               </a:ext>
             </a:extLst>
           </p:cNvPr>
@@ -3581,14 +3920,47 @@
           <a:bodyPr/>
           <a:lstStyle/>
           <a:p>
-            <a:endParaRPr lang="es-GT"/>
-          </a:p>
-        </p:txBody>
-      </p:sp>
+            <a:r>
+              <a:rPr lang="es-GT" dirty="0"/>
+              <a:t>Luego se une </a:t>
+            </a:r>
+          </a:p>
+        </p:txBody>
+      </p:sp>
+      <p:pic>
+        <p:nvPicPr>
+          <p:cNvPr id="4" name="Imagen 3">
+            <a:extLst>
+              <a:ext uri="{FF2B5EF4-FFF2-40B4-BE49-F238E27FC236}">
+                <a16:creationId xmlns:a16="http://schemas.microsoft.com/office/drawing/2014/main" id="{D5083399-31A6-0CB7-AE0D-E5F119E5F572}"/>
+              </a:ext>
+            </a:extLst>
+          </p:cNvPr>
+          <p:cNvPicPr>
+            <a:picLocks noChangeAspect="1"/>
+          </p:cNvPicPr>
+          <p:nvPr/>
+        </p:nvPicPr>
+        <p:blipFill>
+          <a:blip r:embed="rId2"/>
+          <a:stretch>
+            <a:fillRect/>
+          </a:stretch>
+        </p:blipFill>
+        <p:spPr>
+          <a:xfrm>
+            <a:off x="3306778" y="1502690"/>
+            <a:ext cx="5578444" cy="5547192"/>
+          </a:xfrm>
+          <a:prstGeom prst="rect">
+            <a:avLst/>
+          </a:prstGeom>
+        </p:spPr>
+      </p:pic>
     </p:spTree>
     <p:extLst>
       <p:ext uri="{BB962C8B-B14F-4D97-AF65-F5344CB8AC3E}">
-        <p14:creationId xmlns:p14="http://schemas.microsoft.com/office/powerpoint/2010/main" val="2789228089"/>
+        <p14:creationId xmlns:p14="http://schemas.microsoft.com/office/powerpoint/2010/main" val="3585589357"/>
       </p:ext>
     </p:extLst>
   </p:cSld>
@@ -3620,7 +3992,7 @@
           <p:cNvPr id="2" name="Título 1">
             <a:extLst>
               <a:ext uri="{FF2B5EF4-FFF2-40B4-BE49-F238E27FC236}">
-                <a16:creationId xmlns:a16="http://schemas.microsoft.com/office/drawing/2014/main" id="{F9358F3B-3B81-A12E-A8B5-2243ABACF1E5}"/>
+                <a16:creationId xmlns:a16="http://schemas.microsoft.com/office/drawing/2014/main" id="{4123868D-6EAD-9EEA-C4CD-E3325BA9295E}"/>
               </a:ext>
             </a:extLst>
           </p:cNvPr>
@@ -3631,19 +4003,59 @@
             <p:ph type="title"/>
           </p:nvPr>
         </p:nvSpPr>
-        <p:spPr/>
-        <p:txBody>
-          <a:bodyPr/>
-          <a:lstStyle/>
-          <a:p>
-            <a:endParaRPr lang="es-GT"/>
-          </a:p>
-        </p:txBody>
-      </p:sp>
+        <p:spPr>
+          <a:xfrm>
+            <a:off x="838200" y="730885"/>
+            <a:ext cx="10515600" cy="1325563"/>
+          </a:xfrm>
+        </p:spPr>
+        <p:txBody>
+          <a:bodyPr>
+            <a:normAutofit fontScale="90000"/>
+          </a:bodyPr>
+          <a:lstStyle/>
+          <a:p>
+            <a:r>
+              <a:rPr lang="es-GT" dirty="0"/>
+              <a:t>Tomar en cuenta que la ventaja es que están todos unidos al seleccionar, ES DECIR QUE SE SELECCIONAN TODOS SIN SENTIR QUE ESTAN CORTADOS </a:t>
+            </a:r>
+          </a:p>
+        </p:txBody>
+      </p:sp>
+      <p:pic>
+        <p:nvPicPr>
+          <p:cNvPr id="4" name="Imagen 3">
+            <a:extLst>
+              <a:ext uri="{FF2B5EF4-FFF2-40B4-BE49-F238E27FC236}">
+                <a16:creationId xmlns:a16="http://schemas.microsoft.com/office/drawing/2014/main" id="{758EF889-EFB3-169A-20AE-84BB7F974744}"/>
+              </a:ext>
+            </a:extLst>
+          </p:cNvPr>
+          <p:cNvPicPr>
+            <a:picLocks noChangeAspect="1"/>
+          </p:cNvPicPr>
+          <p:nvPr/>
+        </p:nvPicPr>
+        <p:blipFill>
+          <a:blip r:embed="rId2"/>
+          <a:stretch>
+            <a:fillRect/>
+          </a:stretch>
+        </p:blipFill>
+        <p:spPr>
+          <a:xfrm>
+            <a:off x="1058685" y="2499390"/>
+            <a:ext cx="9202434" cy="3772426"/>
+          </a:xfrm>
+          <a:prstGeom prst="rect">
+            <a:avLst/>
+          </a:prstGeom>
+        </p:spPr>
+      </p:pic>
     </p:spTree>
     <p:extLst>
       <p:ext uri="{BB962C8B-B14F-4D97-AF65-F5344CB8AC3E}">
-        <p14:creationId xmlns:p14="http://schemas.microsoft.com/office/powerpoint/2010/main" val="1618545166"/>
+        <p14:creationId xmlns:p14="http://schemas.microsoft.com/office/powerpoint/2010/main" val="1688083437"/>
       </p:ext>
     </p:extLst>
   </p:cSld>
@@ -3675,7 +4087,7 @@
           <p:cNvPr id="2" name="Título 1">
             <a:extLst>
               <a:ext uri="{FF2B5EF4-FFF2-40B4-BE49-F238E27FC236}">
-                <a16:creationId xmlns:a16="http://schemas.microsoft.com/office/drawing/2014/main" id="{16F66EB3-CAAF-E6F1-6704-A3801D6A66F7}"/>
+                <a16:creationId xmlns:a16="http://schemas.microsoft.com/office/drawing/2014/main" id="{40EA5144-0F8D-E377-207C-5FEA5ADC86AD}"/>
               </a:ext>
             </a:extLst>
           </p:cNvPr>
@@ -3691,14 +4103,149 @@
           <a:bodyPr/>
           <a:lstStyle/>
           <a:p>
-            <a:endParaRPr lang="es-GT"/>
-          </a:p>
-        </p:txBody>
-      </p:sp>
+            <a:r>
+              <a:rPr lang="es-GT" dirty="0"/>
+              <a:t>Para pasar las líneas atrás y poder quitar una parte de la multilínea </a:t>
+            </a:r>
+          </a:p>
+        </p:txBody>
+      </p:sp>
+      <p:pic>
+        <p:nvPicPr>
+          <p:cNvPr id="4" name="Imagen 3">
+            <a:extLst>
+              <a:ext uri="{FF2B5EF4-FFF2-40B4-BE49-F238E27FC236}">
+                <a16:creationId xmlns:a16="http://schemas.microsoft.com/office/drawing/2014/main" id="{35A342CB-E179-7ED3-CB78-07A43D4F4C3D}"/>
+              </a:ext>
+            </a:extLst>
+          </p:cNvPr>
+          <p:cNvPicPr>
+            <a:picLocks noChangeAspect="1"/>
+          </p:cNvPicPr>
+          <p:nvPr/>
+        </p:nvPicPr>
+        <p:blipFill>
+          <a:blip r:embed="rId2"/>
+          <a:stretch>
+            <a:fillRect/>
+          </a:stretch>
+        </p:blipFill>
+        <p:spPr>
+          <a:xfrm>
+            <a:off x="2262224" y="1793094"/>
+            <a:ext cx="5615683" cy="4699781"/>
+          </a:xfrm>
+          <a:prstGeom prst="rect">
+            <a:avLst/>
+          </a:prstGeom>
+        </p:spPr>
+      </p:pic>
+      <mc:AlternateContent xmlns:mc="http://schemas.openxmlformats.org/markup-compatibility/2006">
+        <mc:Choice xmlns:p14="http://schemas.microsoft.com/office/powerpoint/2010/main" Requires="p14">
+          <p:contentPart p14:bwMode="auto" r:id="rId3">
+            <p14:nvContentPartPr>
+              <p14:cNvPr id="5" name="Entrada de lápiz 4">
+                <a:extLst>
+                  <a:ext uri="{FF2B5EF4-FFF2-40B4-BE49-F238E27FC236}">
+                    <a16:creationId xmlns:a16="http://schemas.microsoft.com/office/drawing/2014/main" id="{FC4A4F78-BFDD-2AA8-6633-B6A5D35CEDCD}"/>
+                  </a:ext>
+                </a:extLst>
+              </p14:cNvPr>
+              <p14:cNvContentPartPr/>
+              <p14:nvPr/>
+            </p14:nvContentPartPr>
+            <p14:xfrm>
+              <a:off x="2688674" y="4106548"/>
+              <a:ext cx="2321280" cy="85680"/>
+            </p14:xfrm>
+          </p:contentPart>
+        </mc:Choice>
+        <mc:Fallback>
+          <p:pic>
+            <p:nvPicPr>
+              <p:cNvPr id="5" name="Entrada de lápiz 4">
+                <a:extLst>
+                  <a:ext uri="{FF2B5EF4-FFF2-40B4-BE49-F238E27FC236}">
+                    <a16:creationId xmlns:a16="http://schemas.microsoft.com/office/drawing/2014/main" id="{FC4A4F78-BFDD-2AA8-6633-B6A5D35CEDCD}"/>
+                  </a:ext>
+                </a:extLst>
+              </p:cNvPr>
+              <p:cNvPicPr/>
+              <p:nvPr/>
+            </p:nvPicPr>
+            <p:blipFill>
+              <a:blip r:embed="rId4"/>
+              <a:stretch>
+                <a:fillRect/>
+              </a:stretch>
+            </p:blipFill>
+            <p:spPr>
+              <a:xfrm>
+                <a:off x="2635034" y="3998908"/>
+                <a:ext cx="2428920" cy="301320"/>
+              </a:xfrm>
+              <a:prstGeom prst="rect">
+                <a:avLst/>
+              </a:prstGeom>
+            </p:spPr>
+          </p:pic>
+        </mc:Fallback>
+      </mc:AlternateContent>
+      <mc:AlternateContent xmlns:mc="http://schemas.openxmlformats.org/markup-compatibility/2006">
+        <mc:Choice xmlns:p14="http://schemas.microsoft.com/office/powerpoint/2010/main" Requires="p14">
+          <p:contentPart p14:bwMode="auto" r:id="rId5">
+            <p14:nvContentPartPr>
+              <p14:cNvPr id="6" name="Entrada de lápiz 5">
+                <a:extLst>
+                  <a:ext uri="{FF2B5EF4-FFF2-40B4-BE49-F238E27FC236}">
+                    <a16:creationId xmlns:a16="http://schemas.microsoft.com/office/drawing/2014/main" id="{CE21DC04-8658-9AF9-F7E7-418A0B6D39A7}"/>
+                  </a:ext>
+                </a:extLst>
+              </p14:cNvPr>
+              <p14:cNvContentPartPr/>
+              <p14:nvPr/>
+            </p14:nvContentPartPr>
+            <p14:xfrm>
+              <a:off x="4691714" y="4102228"/>
+              <a:ext cx="3733200" cy="502200"/>
+            </p14:xfrm>
+          </p:contentPart>
+        </mc:Choice>
+        <mc:Fallback>
+          <p:pic>
+            <p:nvPicPr>
+              <p:cNvPr id="6" name="Entrada de lápiz 5">
+                <a:extLst>
+                  <a:ext uri="{FF2B5EF4-FFF2-40B4-BE49-F238E27FC236}">
+                    <a16:creationId xmlns:a16="http://schemas.microsoft.com/office/drawing/2014/main" id="{CE21DC04-8658-9AF9-F7E7-418A0B6D39A7}"/>
+                  </a:ext>
+                </a:extLst>
+              </p:cNvPr>
+              <p:cNvPicPr/>
+              <p:nvPr/>
+            </p:nvPicPr>
+            <p:blipFill>
+              <a:blip r:embed="rId6"/>
+              <a:stretch>
+                <a:fillRect/>
+              </a:stretch>
+            </p:blipFill>
+            <p:spPr>
+              <a:xfrm>
+                <a:off x="4637714" y="3994228"/>
+                <a:ext cx="3840840" cy="717840"/>
+              </a:xfrm>
+              <a:prstGeom prst="rect">
+                <a:avLst/>
+              </a:prstGeom>
+            </p:spPr>
+          </p:pic>
+        </mc:Fallback>
+      </mc:AlternateContent>
     </p:spTree>
     <p:extLst>
       <p:ext uri="{BB962C8B-B14F-4D97-AF65-F5344CB8AC3E}">
-        <p14:creationId xmlns:p14="http://schemas.microsoft.com/office/powerpoint/2010/main" val="2218078372"/>
+        <p14:creationId xmlns:p14="http://schemas.microsoft.com/office/powerpoint/2010/main" val="1971467422"/>
       </p:ext>
     </p:extLst>
   </p:cSld>
@@ -3730,7 +4277,7 @@
           <p:cNvPr id="2" name="Título 1">
             <a:extLst>
               <a:ext uri="{FF2B5EF4-FFF2-40B4-BE49-F238E27FC236}">
-                <a16:creationId xmlns:a16="http://schemas.microsoft.com/office/drawing/2014/main" id="{DD017552-A5F4-1986-01A7-107BE721E6D2}"/>
+                <a16:creationId xmlns:a16="http://schemas.microsoft.com/office/drawing/2014/main" id="{E2A762EB-A75B-DCE7-3A3F-5AF21E804617}"/>
               </a:ext>
             </a:extLst>
           </p:cNvPr>
@@ -3741,19 +4288,83 @@
             <p:ph type="title"/>
           </p:nvPr>
         </p:nvSpPr>
-        <p:spPr/>
-        <p:txBody>
-          <a:bodyPr/>
-          <a:lstStyle/>
-          <a:p>
-            <a:endParaRPr lang="es-GT"/>
-          </a:p>
-        </p:txBody>
-      </p:sp>
+        <p:spPr>
+          <a:xfrm>
+            <a:off x="838200" y="632411"/>
+            <a:ext cx="10515600" cy="1325563"/>
+          </a:xfrm>
+        </p:spPr>
+        <p:txBody>
+          <a:bodyPr>
+            <a:normAutofit fontScale="90000"/>
+          </a:bodyPr>
+          <a:lstStyle/>
+          <a:p>
+            <a:r>
+              <a:rPr lang="es-GT" dirty="0"/>
+              <a:t>Para los </a:t>
+            </a:r>
+            <a:r>
+              <a:rPr lang="es-GT" dirty="0" err="1"/>
+              <a:t>endpoints</a:t>
+            </a:r>
+            <a:r>
+              <a:rPr lang="es-GT" dirty="0"/>
+              <a:t> o las líneas </a:t>
+            </a:r>
+            <a:r>
+              <a:rPr lang="es-GT" dirty="0" err="1"/>
+              <a:t>guias</a:t>
+            </a:r>
+            <a:r>
+              <a:rPr lang="es-GT" dirty="0"/>
+              <a:t> para colocar o para cortar mejor, primero el ML, luego los </a:t>
+            </a:r>
+            <a:r>
+              <a:rPr lang="es-GT" dirty="0" err="1"/>
+              <a:t>endpoints</a:t>
+            </a:r>
+            <a:r>
+              <a:rPr lang="es-GT" dirty="0"/>
+              <a:t> SHFT Y CLICK DERECHO</a:t>
+            </a:r>
+          </a:p>
+        </p:txBody>
+      </p:sp>
+      <p:pic>
+        <p:nvPicPr>
+          <p:cNvPr id="4" name="Imagen 3">
+            <a:extLst>
+              <a:ext uri="{FF2B5EF4-FFF2-40B4-BE49-F238E27FC236}">
+                <a16:creationId xmlns:a16="http://schemas.microsoft.com/office/drawing/2014/main" id="{90703807-5166-D598-4277-FAE72D13589A}"/>
+              </a:ext>
+            </a:extLst>
+          </p:cNvPr>
+          <p:cNvPicPr>
+            <a:picLocks noChangeAspect="1"/>
+          </p:cNvPicPr>
+          <p:nvPr/>
+        </p:nvPicPr>
+        <p:blipFill>
+          <a:blip r:embed="rId2"/>
+          <a:stretch>
+            <a:fillRect/>
+          </a:stretch>
+        </p:blipFill>
+        <p:spPr>
+          <a:xfrm>
+            <a:off x="3266131" y="2122877"/>
+            <a:ext cx="5125165" cy="4553585"/>
+          </a:xfrm>
+          <a:prstGeom prst="rect">
+            <a:avLst/>
+          </a:prstGeom>
+        </p:spPr>
+      </p:pic>
     </p:spTree>
     <p:extLst>
       <p:ext uri="{BB962C8B-B14F-4D97-AF65-F5344CB8AC3E}">
-        <p14:creationId xmlns:p14="http://schemas.microsoft.com/office/powerpoint/2010/main" val="1602900583"/>
+        <p14:creationId xmlns:p14="http://schemas.microsoft.com/office/powerpoint/2010/main" val="1475121787"/>
       </p:ext>
     </p:extLst>
   </p:cSld>
@@ -3785,7 +4396,7 @@
           <p:cNvPr id="2" name="Título 1">
             <a:extLst>
               <a:ext uri="{FF2B5EF4-FFF2-40B4-BE49-F238E27FC236}">
-                <a16:creationId xmlns:a16="http://schemas.microsoft.com/office/drawing/2014/main" id="{8F039EE8-6D09-0DE4-BD0D-30CC3EFB7DE4}"/>
+                <a16:creationId xmlns:a16="http://schemas.microsoft.com/office/drawing/2014/main" id="{59864BA7-37AD-50ED-E3F4-CFEADCF88CF6}"/>
               </a:ext>
             </a:extLst>
           </p:cNvPr>
@@ -3801,14 +4412,47 @@
           <a:bodyPr/>
           <a:lstStyle/>
           <a:p>
-            <a:endParaRPr lang="es-GT"/>
-          </a:p>
-        </p:txBody>
-      </p:sp>
+            <a:r>
+              <a:rPr lang="es-GT" dirty="0"/>
+              <a:t>ASI QUEDARIA </a:t>
+            </a:r>
+          </a:p>
+        </p:txBody>
+      </p:sp>
+      <p:pic>
+        <p:nvPicPr>
+          <p:cNvPr id="4" name="Imagen 3">
+            <a:extLst>
+              <a:ext uri="{FF2B5EF4-FFF2-40B4-BE49-F238E27FC236}">
+                <a16:creationId xmlns:a16="http://schemas.microsoft.com/office/drawing/2014/main" id="{D862CE9A-BBD1-289C-DCB4-F90A1051026B}"/>
+              </a:ext>
+            </a:extLst>
+          </p:cNvPr>
+          <p:cNvPicPr>
+            <a:picLocks noChangeAspect="1"/>
+          </p:cNvPicPr>
+          <p:nvPr/>
+        </p:nvPicPr>
+        <p:blipFill>
+          <a:blip r:embed="rId2"/>
+          <a:stretch>
+            <a:fillRect/>
+          </a:stretch>
+        </p:blipFill>
+        <p:spPr>
+          <a:xfrm>
+            <a:off x="3390765" y="2134535"/>
+            <a:ext cx="5134255" cy="4358340"/>
+          </a:xfrm>
+          <a:prstGeom prst="rect">
+            <a:avLst/>
+          </a:prstGeom>
+        </p:spPr>
+      </p:pic>
     </p:spTree>
     <p:extLst>
       <p:ext uri="{BB962C8B-B14F-4D97-AF65-F5344CB8AC3E}">
-        <p14:creationId xmlns:p14="http://schemas.microsoft.com/office/powerpoint/2010/main" val="3933018001"/>
+        <p14:creationId xmlns:p14="http://schemas.microsoft.com/office/powerpoint/2010/main" val="3925081533"/>
       </p:ext>
     </p:extLst>
   </p:cSld>
@@ -3840,7 +4484,7 @@
           <p:cNvPr id="2" name="Título 1">
             <a:extLst>
               <a:ext uri="{FF2B5EF4-FFF2-40B4-BE49-F238E27FC236}">
-                <a16:creationId xmlns:a16="http://schemas.microsoft.com/office/drawing/2014/main" id="{FE05C869-EFBC-4B6B-E424-6C94167DB29B}"/>
+                <a16:creationId xmlns:a16="http://schemas.microsoft.com/office/drawing/2014/main" id="{F3A08688-E545-BAC7-5CCB-5A562131BDAF}"/>
               </a:ext>
             </a:extLst>
           </p:cNvPr>
@@ -3856,14 +4500,235 @@
           <a:bodyPr/>
           <a:lstStyle/>
           <a:p>
-            <a:endParaRPr lang="es-GT"/>
-          </a:p>
-        </p:txBody>
-      </p:sp>
+            <a:r>
+              <a:rPr lang="es-GT" dirty="0"/>
+              <a:t>SE HACE 2 VECES EL ENDOINT PARA EL OTRO LADO DE ABAJO </a:t>
+            </a:r>
+          </a:p>
+        </p:txBody>
+      </p:sp>
+      <p:pic>
+        <p:nvPicPr>
+          <p:cNvPr id="4" name="Imagen 3">
+            <a:extLst>
+              <a:ext uri="{FF2B5EF4-FFF2-40B4-BE49-F238E27FC236}">
+                <a16:creationId xmlns:a16="http://schemas.microsoft.com/office/drawing/2014/main" id="{2BDAFF23-E0E8-6CEC-5380-64AC86578E0F}"/>
+              </a:ext>
+            </a:extLst>
+          </p:cNvPr>
+          <p:cNvPicPr>
+            <a:picLocks noChangeAspect="1"/>
+          </p:cNvPicPr>
+          <p:nvPr/>
+        </p:nvPicPr>
+        <p:blipFill>
+          <a:blip r:embed="rId2"/>
+          <a:stretch>
+            <a:fillRect/>
+          </a:stretch>
+        </p:blipFill>
+        <p:spPr>
+          <a:xfrm>
+            <a:off x="2053648" y="1624921"/>
+            <a:ext cx="5468113" cy="4867954"/>
+          </a:xfrm>
+          <a:prstGeom prst="rect">
+            <a:avLst/>
+          </a:prstGeom>
+        </p:spPr>
+      </p:pic>
+      <p:sp>
+        <p:nvSpPr>
+          <p:cNvPr id="5" name="CuadroTexto 4">
+            <a:extLst>
+              <a:ext uri="{FF2B5EF4-FFF2-40B4-BE49-F238E27FC236}">
+                <a16:creationId xmlns:a16="http://schemas.microsoft.com/office/drawing/2014/main" id="{7172C180-0447-066B-DE8D-8B8571FF0034}"/>
+              </a:ext>
+            </a:extLst>
+          </p:cNvPr>
+          <p:cNvSpPr txBox="1"/>
+          <p:nvPr/>
+        </p:nvSpPr>
+        <p:spPr>
+          <a:xfrm>
+            <a:off x="7934178" y="2769549"/>
+            <a:ext cx="2743200" cy="646331"/>
+          </a:xfrm>
+          <a:prstGeom prst="rect">
+            <a:avLst/>
+          </a:prstGeom>
+          <a:noFill/>
+        </p:spPr>
+        <p:txBody>
+          <a:bodyPr wrap="square" rtlCol="0">
+            <a:spAutoFit/>
+          </a:bodyPr>
+          <a:lstStyle/>
+          <a:p>
+            <a:r>
+              <a:rPr lang="es-GT" sz="3600" b="1" dirty="0"/>
+              <a:t>ASI QUEDA </a:t>
+            </a:r>
+          </a:p>
+        </p:txBody>
+      </p:sp>
+      <mc:AlternateContent xmlns:mc="http://schemas.openxmlformats.org/markup-compatibility/2006">
+        <mc:Choice xmlns:p14="http://schemas.microsoft.com/office/powerpoint/2010/main" Requires="p14">
+          <p:contentPart p14:bwMode="auto" r:id="rId3">
+            <p14:nvContentPartPr>
+              <p14:cNvPr id="6" name="Entrada de lápiz 5">
+                <a:extLst>
+                  <a:ext uri="{FF2B5EF4-FFF2-40B4-BE49-F238E27FC236}">
+                    <a16:creationId xmlns:a16="http://schemas.microsoft.com/office/drawing/2014/main" id="{6F40BDED-FB11-AB40-3115-BC2D1E084477}"/>
+                  </a:ext>
+                </a:extLst>
+              </p14:cNvPr>
+              <p14:cNvContentPartPr/>
+              <p14:nvPr/>
+            </p14:nvContentPartPr>
+            <p14:xfrm>
+              <a:off x="-2444566" y="2734948"/>
+              <a:ext cx="7449120" cy="767880"/>
+            </p14:xfrm>
+          </p:contentPart>
+        </mc:Choice>
+        <mc:Fallback>
+          <p:pic>
+            <p:nvPicPr>
+              <p:cNvPr id="6" name="Entrada de lápiz 5">
+                <a:extLst>
+                  <a:ext uri="{FF2B5EF4-FFF2-40B4-BE49-F238E27FC236}">
+                    <a16:creationId xmlns:a16="http://schemas.microsoft.com/office/drawing/2014/main" id="{6F40BDED-FB11-AB40-3115-BC2D1E084477}"/>
+                  </a:ext>
+                </a:extLst>
+              </p:cNvPr>
+              <p:cNvPicPr/>
+              <p:nvPr/>
+            </p:nvPicPr>
+            <p:blipFill>
+              <a:blip r:embed="rId4"/>
+              <a:stretch>
+                <a:fillRect/>
+              </a:stretch>
+            </p:blipFill>
+            <p:spPr>
+              <a:xfrm>
+                <a:off x="-2498566" y="2627308"/>
+                <a:ext cx="7556760" cy="983520"/>
+              </a:xfrm>
+              <a:prstGeom prst="rect">
+                <a:avLst/>
+              </a:prstGeom>
+            </p:spPr>
+          </p:pic>
+        </mc:Fallback>
+      </mc:AlternateContent>
+      <mc:AlternateContent xmlns:mc="http://schemas.openxmlformats.org/markup-compatibility/2006">
+        <mc:Choice xmlns:p14="http://schemas.microsoft.com/office/powerpoint/2010/main" Requires="p14">
+          <p:contentPart p14:bwMode="auto" r:id="rId5">
+            <p14:nvContentPartPr>
+              <p14:cNvPr id="7" name="Entrada de lápiz 6">
+                <a:extLst>
+                  <a:ext uri="{FF2B5EF4-FFF2-40B4-BE49-F238E27FC236}">
+                    <a16:creationId xmlns:a16="http://schemas.microsoft.com/office/drawing/2014/main" id="{53D57018-60D4-0E88-0DBD-2A79D0C96F53}"/>
+                  </a:ext>
+                </a:extLst>
+              </p14:cNvPr>
+              <p14:cNvContentPartPr/>
+              <p14:nvPr/>
+            </p14:nvContentPartPr>
+            <p14:xfrm>
+              <a:off x="131511" y="4840228"/>
+              <a:ext cx="5524200" cy="631800"/>
+            </p14:xfrm>
+          </p:contentPart>
+        </mc:Choice>
+        <mc:Fallback>
+          <p:pic>
+            <p:nvPicPr>
+              <p:cNvPr id="7" name="Entrada de lápiz 6">
+                <a:extLst>
+                  <a:ext uri="{FF2B5EF4-FFF2-40B4-BE49-F238E27FC236}">
+                    <a16:creationId xmlns:a16="http://schemas.microsoft.com/office/drawing/2014/main" id="{53D57018-60D4-0E88-0DBD-2A79D0C96F53}"/>
+                  </a:ext>
+                </a:extLst>
+              </p:cNvPr>
+              <p:cNvPicPr/>
+              <p:nvPr/>
+            </p:nvPicPr>
+            <p:blipFill>
+              <a:blip r:embed="rId6"/>
+              <a:stretch>
+                <a:fillRect/>
+              </a:stretch>
+            </p:blipFill>
+            <p:spPr>
+              <a:xfrm>
+                <a:off x="77511" y="4732228"/>
+                <a:ext cx="5631840" cy="847440"/>
+              </a:xfrm>
+              <a:prstGeom prst="rect">
+                <a:avLst/>
+              </a:prstGeom>
+            </p:spPr>
+          </p:pic>
+        </mc:Fallback>
+      </mc:AlternateContent>
+      <mc:AlternateContent xmlns:mc="http://schemas.openxmlformats.org/markup-compatibility/2006">
+        <mc:Choice xmlns:p14="http://schemas.microsoft.com/office/powerpoint/2010/main" Requires="p14">
+          <p:contentPart p14:bwMode="auto" r:id="rId7">
+            <p14:nvContentPartPr>
+              <p14:cNvPr id="8" name="Entrada de lápiz 7">
+                <a:extLst>
+                  <a:ext uri="{FF2B5EF4-FFF2-40B4-BE49-F238E27FC236}">
+                    <a16:creationId xmlns:a16="http://schemas.microsoft.com/office/drawing/2014/main" id="{B1D869E4-C02F-613D-64EB-08000E68B58D}"/>
+                  </a:ext>
+                </a:extLst>
+              </p14:cNvPr>
+              <p14:cNvContentPartPr/>
+              <p14:nvPr/>
+            </p14:nvContentPartPr>
+            <p14:xfrm>
+              <a:off x="2682831" y="3201868"/>
+              <a:ext cx="2680200" cy="568440"/>
+            </p14:xfrm>
+          </p:contentPart>
+        </mc:Choice>
+        <mc:Fallback>
+          <p:pic>
+            <p:nvPicPr>
+              <p:cNvPr id="8" name="Entrada de lápiz 7">
+                <a:extLst>
+                  <a:ext uri="{FF2B5EF4-FFF2-40B4-BE49-F238E27FC236}">
+                    <a16:creationId xmlns:a16="http://schemas.microsoft.com/office/drawing/2014/main" id="{B1D869E4-C02F-613D-64EB-08000E68B58D}"/>
+                  </a:ext>
+                </a:extLst>
+              </p:cNvPr>
+              <p:cNvPicPr/>
+              <p:nvPr/>
+            </p:nvPicPr>
+            <p:blipFill>
+              <a:blip r:embed="rId8"/>
+              <a:stretch>
+                <a:fillRect/>
+              </a:stretch>
+            </p:blipFill>
+            <p:spPr>
+              <a:xfrm>
+                <a:off x="2629191" y="3094228"/>
+                <a:ext cx="2787840" cy="784080"/>
+              </a:xfrm>
+              <a:prstGeom prst="rect">
+                <a:avLst/>
+              </a:prstGeom>
+            </p:spPr>
+          </p:pic>
+        </mc:Fallback>
+      </mc:AlternateContent>
     </p:spTree>
     <p:extLst>
       <p:ext uri="{BB962C8B-B14F-4D97-AF65-F5344CB8AC3E}">
-        <p14:creationId xmlns:p14="http://schemas.microsoft.com/office/powerpoint/2010/main" val="2453231629"/>
+        <p14:creationId xmlns:p14="http://schemas.microsoft.com/office/powerpoint/2010/main" val="1707359220"/>
       </p:ext>
     </p:extLst>
   </p:cSld>
@@ -3895,7 +4760,7 @@
           <p:cNvPr id="2" name="Título 1">
             <a:extLst>
               <a:ext uri="{FF2B5EF4-FFF2-40B4-BE49-F238E27FC236}">
-                <a16:creationId xmlns:a16="http://schemas.microsoft.com/office/drawing/2014/main" id="{ED5FD0AF-698A-C227-AF0A-4849CE0AC326}"/>
+                <a16:creationId xmlns:a16="http://schemas.microsoft.com/office/drawing/2014/main" id="{9DCAC877-FB9D-902A-3BB6-E579E346E1D9}"/>
               </a:ext>
             </a:extLst>
           </p:cNvPr>
@@ -3915,10 +4780,91 @@
           </a:p>
         </p:txBody>
       </p:sp>
+      <mc:AlternateContent xmlns:mc="http://schemas.openxmlformats.org/markup-compatibility/2006">
+        <mc:Choice xmlns:p14="http://schemas.microsoft.com/office/powerpoint/2010/main" Requires="p14">
+          <p:contentPart p14:bwMode="auto" r:id="rId2">
+            <p14:nvContentPartPr>
+              <p14:cNvPr id="3" name="Entrada de lápiz 2">
+                <a:extLst>
+                  <a:ext uri="{FF2B5EF4-FFF2-40B4-BE49-F238E27FC236}">
+                    <a16:creationId xmlns:a16="http://schemas.microsoft.com/office/drawing/2014/main" id="{2938B7CC-F1D2-D002-03A8-451F86033F11}"/>
+                  </a:ext>
+                </a:extLst>
+              </p14:cNvPr>
+              <p14:cNvContentPartPr/>
+              <p14:nvPr/>
+            </p14:nvContentPartPr>
+            <p14:xfrm>
+              <a:off x="3896474" y="3234988"/>
+              <a:ext cx="360" cy="360"/>
+            </p14:xfrm>
+          </p:contentPart>
+        </mc:Choice>
+        <mc:Fallback>
+          <p:pic>
+            <p:nvPicPr>
+              <p:cNvPr id="3" name="Entrada de lápiz 2">
+                <a:extLst>
+                  <a:ext uri="{FF2B5EF4-FFF2-40B4-BE49-F238E27FC236}">
+                    <a16:creationId xmlns:a16="http://schemas.microsoft.com/office/drawing/2014/main" id="{2938B7CC-F1D2-D002-03A8-451F86033F11}"/>
+                  </a:ext>
+                </a:extLst>
+              </p:cNvPr>
+              <p:cNvPicPr/>
+              <p:nvPr/>
+            </p:nvPicPr>
+            <p:blipFill>
+              <a:blip r:embed="rId3"/>
+              <a:stretch>
+                <a:fillRect/>
+              </a:stretch>
+            </p:blipFill>
+            <p:spPr>
+              <a:xfrm>
+                <a:off x="3842474" y="3126988"/>
+                <a:ext cx="108000" cy="216000"/>
+              </a:xfrm>
+              <a:prstGeom prst="rect">
+                <a:avLst/>
+              </a:prstGeom>
+            </p:spPr>
+          </p:pic>
+        </mc:Fallback>
+      </mc:AlternateContent>
+      <p:pic>
+        <p:nvPicPr>
+          <p:cNvPr id="5" name="Imagen 4">
+            <a:extLst>
+              <a:ext uri="{FF2B5EF4-FFF2-40B4-BE49-F238E27FC236}">
+                <a16:creationId xmlns:a16="http://schemas.microsoft.com/office/drawing/2014/main" id="{3FBD5C35-E6C7-1A9B-FA14-B6613A92C2FE}"/>
+              </a:ext>
+            </a:extLst>
+          </p:cNvPr>
+          <p:cNvPicPr>
+            <a:picLocks noChangeAspect="1"/>
+          </p:cNvPicPr>
+          <p:nvPr/>
+        </p:nvPicPr>
+        <p:blipFill>
+          <a:blip r:embed="rId4"/>
+          <a:stretch>
+            <a:fillRect/>
+          </a:stretch>
+        </p:blipFill>
+        <p:spPr>
+          <a:xfrm>
+            <a:off x="3569788" y="976847"/>
+            <a:ext cx="5052423" cy="4904305"/>
+          </a:xfrm>
+          <a:prstGeom prst="rect">
+            <a:avLst/>
+          </a:prstGeom>
+        </p:spPr>
+      </p:pic>
     </p:spTree>
     <p:extLst>
       <p:ext uri="{BB962C8B-B14F-4D97-AF65-F5344CB8AC3E}">
-        <p14:creationId xmlns:p14="http://schemas.microsoft.com/office/powerpoint/2010/main" val="3074593621"/>
+        <p14:creationId xmlns:p14="http://schemas.microsoft.com/office/powerpoint/2010/main" val="3594032975"/>
       </p:ext>
     </p:extLst>
   </p:cSld>
@@ -3950,7 +4896,7 @@
           <p:cNvPr id="2" name="Título 1">
             <a:extLst>
               <a:ext uri="{FF2B5EF4-FFF2-40B4-BE49-F238E27FC236}">
-                <a16:creationId xmlns:a16="http://schemas.microsoft.com/office/drawing/2014/main" id="{A49ED982-9D41-CA06-6D36-B1BB6C3E8A9F}"/>
+                <a16:creationId xmlns:a16="http://schemas.microsoft.com/office/drawing/2014/main" id="{076B724B-0919-DC56-77F2-F914CD24A14A}"/>
               </a:ext>
             </a:extLst>
           </p:cNvPr>
@@ -3973,7 +4919,7 @@
     </p:spTree>
     <p:extLst>
       <p:ext uri="{BB962C8B-B14F-4D97-AF65-F5344CB8AC3E}">
-        <p14:creationId xmlns:p14="http://schemas.microsoft.com/office/powerpoint/2010/main" val="1067448227"/>
+        <p14:creationId xmlns:p14="http://schemas.microsoft.com/office/powerpoint/2010/main" val="1201015452"/>
       </p:ext>
     </p:extLst>
   </p:cSld>
@@ -4021,10 +4967,145 @@
           <a:bodyPr/>
           <a:lstStyle/>
           <a:p>
-            <a:endParaRPr lang="es-GT"/>
-          </a:p>
-        </p:txBody>
-      </p:sp>
+            <a:r>
+              <a:rPr lang="es-GT" dirty="0"/>
+              <a:t>Importante la escala ML LUEGO VER SCALE  0.30</a:t>
+            </a:r>
+          </a:p>
+        </p:txBody>
+      </p:sp>
+      <p:pic>
+        <p:nvPicPr>
+          <p:cNvPr id="3" name="Imagen 2">
+            <a:extLst>
+              <a:ext uri="{FF2B5EF4-FFF2-40B4-BE49-F238E27FC236}">
+                <a16:creationId xmlns:a16="http://schemas.microsoft.com/office/drawing/2014/main" id="{6AA2FE66-B0AD-58F7-A321-50E30B3D4D25}"/>
+              </a:ext>
+            </a:extLst>
+          </p:cNvPr>
+          <p:cNvPicPr>
+            <a:picLocks noChangeAspect="1"/>
+          </p:cNvPicPr>
+          <p:nvPr/>
+        </p:nvPicPr>
+        <p:blipFill>
+          <a:blip r:embed="rId2"/>
+          <a:stretch>
+            <a:fillRect/>
+          </a:stretch>
+        </p:blipFill>
+        <p:spPr>
+          <a:xfrm>
+            <a:off x="2087854" y="1331328"/>
+            <a:ext cx="7706801" cy="3829584"/>
+          </a:xfrm>
+          <a:prstGeom prst="rect">
+            <a:avLst/>
+          </a:prstGeom>
+        </p:spPr>
+      </p:pic>
+      <mc:AlternateContent xmlns:mc="http://schemas.openxmlformats.org/markup-compatibility/2006">
+        <mc:Choice xmlns:p14="http://schemas.microsoft.com/office/powerpoint/2010/main" Requires="p14">
+          <p:contentPart p14:bwMode="auto" r:id="rId3">
+            <p14:nvContentPartPr>
+              <p14:cNvPr id="5" name="Entrada de lápiz 4">
+                <a:extLst>
+                  <a:ext uri="{FF2B5EF4-FFF2-40B4-BE49-F238E27FC236}">
+                    <a16:creationId xmlns:a16="http://schemas.microsoft.com/office/drawing/2014/main" id="{A3AEE59B-4FE3-5A3F-2D1A-984EADC28E77}"/>
+                  </a:ext>
+                </a:extLst>
+              </p14:cNvPr>
+              <p14:cNvContentPartPr/>
+              <p14:nvPr/>
+            </p14:nvContentPartPr>
+            <p14:xfrm>
+              <a:off x="5526554" y="2304388"/>
+              <a:ext cx="714600" cy="383040"/>
+            </p14:xfrm>
+          </p:contentPart>
+        </mc:Choice>
+        <mc:Fallback>
+          <p:pic>
+            <p:nvPicPr>
+              <p:cNvPr id="5" name="Entrada de lápiz 4">
+                <a:extLst>
+                  <a:ext uri="{FF2B5EF4-FFF2-40B4-BE49-F238E27FC236}">
+                    <a16:creationId xmlns:a16="http://schemas.microsoft.com/office/drawing/2014/main" id="{A3AEE59B-4FE3-5A3F-2D1A-984EADC28E77}"/>
+                  </a:ext>
+                </a:extLst>
+              </p:cNvPr>
+              <p:cNvPicPr/>
+              <p:nvPr/>
+            </p:nvPicPr>
+            <p:blipFill>
+              <a:blip r:embed="rId4"/>
+              <a:stretch>
+                <a:fillRect/>
+              </a:stretch>
+            </p:blipFill>
+            <p:spPr>
+              <a:xfrm>
+                <a:off x="5472554" y="2196388"/>
+                <a:ext cx="822240" cy="598680"/>
+              </a:xfrm>
+              <a:prstGeom prst="rect">
+                <a:avLst/>
+              </a:prstGeom>
+            </p:spPr>
+          </p:pic>
+        </mc:Fallback>
+      </mc:AlternateContent>
+      <mc:AlternateContent xmlns:mc="http://schemas.openxmlformats.org/markup-compatibility/2006">
+        <mc:Choice xmlns:p14="http://schemas.microsoft.com/office/powerpoint/2010/main" Requires="p14">
+          <p:contentPart p14:bwMode="auto" r:id="rId5">
+            <p14:nvContentPartPr>
+              <p14:cNvPr id="6" name="Entrada de lápiz 5">
+                <a:extLst>
+                  <a:ext uri="{FF2B5EF4-FFF2-40B4-BE49-F238E27FC236}">
+                    <a16:creationId xmlns:a16="http://schemas.microsoft.com/office/drawing/2014/main" id="{E9C286BC-A00C-DC2D-9E9A-5858AD913C4D}"/>
+                  </a:ext>
+                </a:extLst>
+              </p14:cNvPr>
+              <p14:cNvContentPartPr/>
+              <p14:nvPr/>
+            </p14:nvContentPartPr>
+            <p14:xfrm>
+              <a:off x="5922554" y="4355308"/>
+              <a:ext cx="839880" cy="565560"/>
+            </p14:xfrm>
+          </p:contentPart>
+        </mc:Choice>
+        <mc:Fallback>
+          <p:pic>
+            <p:nvPicPr>
+              <p:cNvPr id="6" name="Entrada de lápiz 5">
+                <a:extLst>
+                  <a:ext uri="{FF2B5EF4-FFF2-40B4-BE49-F238E27FC236}">
+                    <a16:creationId xmlns:a16="http://schemas.microsoft.com/office/drawing/2014/main" id="{E9C286BC-A00C-DC2D-9E9A-5858AD913C4D}"/>
+                  </a:ext>
+                </a:extLst>
+              </p:cNvPr>
+              <p:cNvPicPr/>
+              <p:nvPr/>
+            </p:nvPicPr>
+            <p:blipFill>
+              <a:blip r:embed="rId6"/>
+              <a:stretch>
+                <a:fillRect/>
+              </a:stretch>
+            </p:blipFill>
+            <p:spPr>
+              <a:xfrm>
+                <a:off x="5868554" y="4247308"/>
+                <a:ext cx="947520" cy="781200"/>
+              </a:xfrm>
+              <a:prstGeom prst="rect">
+                <a:avLst/>
+              </a:prstGeom>
+            </p:spPr>
+          </p:pic>
+        </mc:Fallback>
+      </mc:AlternateContent>
     </p:spTree>
     <p:extLst>
       <p:ext uri="{BB962C8B-B14F-4D97-AF65-F5344CB8AC3E}">
@@ -4060,7 +5141,7 @@
           <p:cNvPr id="2" name="Título 1">
             <a:extLst>
               <a:ext uri="{FF2B5EF4-FFF2-40B4-BE49-F238E27FC236}">
-                <a16:creationId xmlns:a16="http://schemas.microsoft.com/office/drawing/2014/main" id="{21FC1112-8B66-344D-FA57-7448C97B6873}"/>
+                <a16:creationId xmlns:a16="http://schemas.microsoft.com/office/drawing/2014/main" id="{8D210F3E-DB87-BC82-69D6-614F605973B0}"/>
               </a:ext>
             </a:extLst>
           </p:cNvPr>
@@ -4083,7 +5164,7 @@
     </p:spTree>
     <p:extLst>
       <p:ext uri="{BB962C8B-B14F-4D97-AF65-F5344CB8AC3E}">
-        <p14:creationId xmlns:p14="http://schemas.microsoft.com/office/powerpoint/2010/main" val="3714445294"/>
+        <p14:creationId xmlns:p14="http://schemas.microsoft.com/office/powerpoint/2010/main" val="3356459591"/>
       </p:ext>
     </p:extLst>
   </p:cSld>
@@ -4115,7 +5196,7 @@
           <p:cNvPr id="2" name="Título 1">
             <a:extLst>
               <a:ext uri="{FF2B5EF4-FFF2-40B4-BE49-F238E27FC236}">
-                <a16:creationId xmlns:a16="http://schemas.microsoft.com/office/drawing/2014/main" id="{7711941E-1596-45D7-8A0A-8F50773E451E}"/>
+                <a16:creationId xmlns:a16="http://schemas.microsoft.com/office/drawing/2014/main" id="{E011AC85-FF8B-915F-0571-6FE2926D95B4}"/>
               </a:ext>
             </a:extLst>
           </p:cNvPr>
@@ -4138,7 +5219,447 @@
     </p:spTree>
     <p:extLst>
       <p:ext uri="{BB962C8B-B14F-4D97-AF65-F5344CB8AC3E}">
-        <p14:creationId xmlns:p14="http://schemas.microsoft.com/office/powerpoint/2010/main" val="2199684720"/>
+        <p14:creationId xmlns:p14="http://schemas.microsoft.com/office/powerpoint/2010/main" val="447949853"/>
+      </p:ext>
+    </p:extLst>
+  </p:cSld>
+  <p:clrMapOvr>
+    <a:masterClrMapping/>
+  </p:clrMapOvr>
+</p:sld>
+</file>
+
+<file path=ppt/slides/slide22.xml><?xml version="1.0" encoding="utf-8"?>
+<p:sld xmlns:a="http://schemas.openxmlformats.org/drawingml/2006/main" xmlns:r="http://schemas.openxmlformats.org/officeDocument/2006/relationships" xmlns:p="http://schemas.openxmlformats.org/presentationml/2006/main">
+  <p:cSld>
+    <p:spTree>
+      <p:nvGrpSpPr>
+        <p:cNvPr id="1" name=""/>
+        <p:cNvGrpSpPr/>
+        <p:nvPr/>
+      </p:nvGrpSpPr>
+      <p:grpSpPr>
+        <a:xfrm>
+          <a:off x="0" y="0"/>
+          <a:ext cx="0" cy="0"/>
+          <a:chOff x="0" y="0"/>
+          <a:chExt cx="0" cy="0"/>
+        </a:xfrm>
+      </p:grpSpPr>
+      <p:sp>
+        <p:nvSpPr>
+          <p:cNvPr id="2" name="Título 1">
+            <a:extLst>
+              <a:ext uri="{FF2B5EF4-FFF2-40B4-BE49-F238E27FC236}">
+                <a16:creationId xmlns:a16="http://schemas.microsoft.com/office/drawing/2014/main" id="{428BB90D-8BEE-57A2-D162-32668A94233B}"/>
+              </a:ext>
+            </a:extLst>
+          </p:cNvPr>
+          <p:cNvSpPr>
+            <a:spLocks noGrp="1"/>
+          </p:cNvSpPr>
+          <p:nvPr>
+            <p:ph type="title"/>
+          </p:nvPr>
+        </p:nvSpPr>
+        <p:spPr/>
+        <p:txBody>
+          <a:bodyPr/>
+          <a:lstStyle/>
+          <a:p>
+            <a:endParaRPr lang="es-GT"/>
+          </a:p>
+        </p:txBody>
+      </p:sp>
+    </p:spTree>
+    <p:extLst>
+      <p:ext uri="{BB962C8B-B14F-4D97-AF65-F5344CB8AC3E}">
+        <p14:creationId xmlns:p14="http://schemas.microsoft.com/office/powerpoint/2010/main" val="1783860745"/>
+      </p:ext>
+    </p:extLst>
+  </p:cSld>
+  <p:clrMapOvr>
+    <a:masterClrMapping/>
+  </p:clrMapOvr>
+</p:sld>
+</file>
+
+<file path=ppt/slides/slide23.xml><?xml version="1.0" encoding="utf-8"?>
+<p:sld xmlns:a="http://schemas.openxmlformats.org/drawingml/2006/main" xmlns:r="http://schemas.openxmlformats.org/officeDocument/2006/relationships" xmlns:p="http://schemas.openxmlformats.org/presentationml/2006/main">
+  <p:cSld>
+    <p:spTree>
+      <p:nvGrpSpPr>
+        <p:cNvPr id="1" name=""/>
+        <p:cNvGrpSpPr/>
+        <p:nvPr/>
+      </p:nvGrpSpPr>
+      <p:grpSpPr>
+        <a:xfrm>
+          <a:off x="0" y="0"/>
+          <a:ext cx="0" cy="0"/>
+          <a:chOff x="0" y="0"/>
+          <a:chExt cx="0" cy="0"/>
+        </a:xfrm>
+      </p:grpSpPr>
+      <p:sp>
+        <p:nvSpPr>
+          <p:cNvPr id="2" name="Título 1">
+            <a:extLst>
+              <a:ext uri="{FF2B5EF4-FFF2-40B4-BE49-F238E27FC236}">
+                <a16:creationId xmlns:a16="http://schemas.microsoft.com/office/drawing/2014/main" id="{1C4F0CC0-5A13-6BD4-3123-DED15F9D3FDA}"/>
+              </a:ext>
+            </a:extLst>
+          </p:cNvPr>
+          <p:cNvSpPr>
+            <a:spLocks noGrp="1"/>
+          </p:cNvSpPr>
+          <p:nvPr>
+            <p:ph type="title"/>
+          </p:nvPr>
+        </p:nvSpPr>
+        <p:spPr/>
+        <p:txBody>
+          <a:bodyPr/>
+          <a:lstStyle/>
+          <a:p>
+            <a:endParaRPr lang="es-GT"/>
+          </a:p>
+        </p:txBody>
+      </p:sp>
+    </p:spTree>
+    <p:extLst>
+      <p:ext uri="{BB962C8B-B14F-4D97-AF65-F5344CB8AC3E}">
+        <p14:creationId xmlns:p14="http://schemas.microsoft.com/office/powerpoint/2010/main" val="2789228089"/>
+      </p:ext>
+    </p:extLst>
+  </p:cSld>
+  <p:clrMapOvr>
+    <a:masterClrMapping/>
+  </p:clrMapOvr>
+</p:sld>
+</file>
+
+<file path=ppt/slides/slide24.xml><?xml version="1.0" encoding="utf-8"?>
+<p:sld xmlns:a="http://schemas.openxmlformats.org/drawingml/2006/main" xmlns:r="http://schemas.openxmlformats.org/officeDocument/2006/relationships" xmlns:p="http://schemas.openxmlformats.org/presentationml/2006/main">
+  <p:cSld>
+    <p:spTree>
+      <p:nvGrpSpPr>
+        <p:cNvPr id="1" name=""/>
+        <p:cNvGrpSpPr/>
+        <p:nvPr/>
+      </p:nvGrpSpPr>
+      <p:grpSpPr>
+        <a:xfrm>
+          <a:off x="0" y="0"/>
+          <a:ext cx="0" cy="0"/>
+          <a:chOff x="0" y="0"/>
+          <a:chExt cx="0" cy="0"/>
+        </a:xfrm>
+      </p:grpSpPr>
+      <p:sp>
+        <p:nvSpPr>
+          <p:cNvPr id="2" name="Título 1">
+            <a:extLst>
+              <a:ext uri="{FF2B5EF4-FFF2-40B4-BE49-F238E27FC236}">
+                <a16:creationId xmlns:a16="http://schemas.microsoft.com/office/drawing/2014/main" id="{F9358F3B-3B81-A12E-A8B5-2243ABACF1E5}"/>
+              </a:ext>
+            </a:extLst>
+          </p:cNvPr>
+          <p:cNvSpPr>
+            <a:spLocks noGrp="1"/>
+          </p:cNvSpPr>
+          <p:nvPr>
+            <p:ph type="title"/>
+          </p:nvPr>
+        </p:nvSpPr>
+        <p:spPr/>
+        <p:txBody>
+          <a:bodyPr/>
+          <a:lstStyle/>
+          <a:p>
+            <a:endParaRPr lang="es-GT"/>
+          </a:p>
+        </p:txBody>
+      </p:sp>
+    </p:spTree>
+    <p:extLst>
+      <p:ext uri="{BB962C8B-B14F-4D97-AF65-F5344CB8AC3E}">
+        <p14:creationId xmlns:p14="http://schemas.microsoft.com/office/powerpoint/2010/main" val="1618545166"/>
+      </p:ext>
+    </p:extLst>
+  </p:cSld>
+  <p:clrMapOvr>
+    <a:masterClrMapping/>
+  </p:clrMapOvr>
+</p:sld>
+</file>
+
+<file path=ppt/slides/slide25.xml><?xml version="1.0" encoding="utf-8"?>
+<p:sld xmlns:a="http://schemas.openxmlformats.org/drawingml/2006/main" xmlns:r="http://schemas.openxmlformats.org/officeDocument/2006/relationships" xmlns:p="http://schemas.openxmlformats.org/presentationml/2006/main">
+  <p:cSld>
+    <p:spTree>
+      <p:nvGrpSpPr>
+        <p:cNvPr id="1" name=""/>
+        <p:cNvGrpSpPr/>
+        <p:nvPr/>
+      </p:nvGrpSpPr>
+      <p:grpSpPr>
+        <a:xfrm>
+          <a:off x="0" y="0"/>
+          <a:ext cx="0" cy="0"/>
+          <a:chOff x="0" y="0"/>
+          <a:chExt cx="0" cy="0"/>
+        </a:xfrm>
+      </p:grpSpPr>
+      <p:sp>
+        <p:nvSpPr>
+          <p:cNvPr id="2" name="Título 1">
+            <a:extLst>
+              <a:ext uri="{FF2B5EF4-FFF2-40B4-BE49-F238E27FC236}">
+                <a16:creationId xmlns:a16="http://schemas.microsoft.com/office/drawing/2014/main" id="{16F66EB3-CAAF-E6F1-6704-A3801D6A66F7}"/>
+              </a:ext>
+            </a:extLst>
+          </p:cNvPr>
+          <p:cNvSpPr>
+            <a:spLocks noGrp="1"/>
+          </p:cNvSpPr>
+          <p:nvPr>
+            <p:ph type="title"/>
+          </p:nvPr>
+        </p:nvSpPr>
+        <p:spPr/>
+        <p:txBody>
+          <a:bodyPr/>
+          <a:lstStyle/>
+          <a:p>
+            <a:endParaRPr lang="es-GT"/>
+          </a:p>
+        </p:txBody>
+      </p:sp>
+    </p:spTree>
+    <p:extLst>
+      <p:ext uri="{BB962C8B-B14F-4D97-AF65-F5344CB8AC3E}">
+        <p14:creationId xmlns:p14="http://schemas.microsoft.com/office/powerpoint/2010/main" val="2218078372"/>
+      </p:ext>
+    </p:extLst>
+  </p:cSld>
+  <p:clrMapOvr>
+    <a:masterClrMapping/>
+  </p:clrMapOvr>
+</p:sld>
+</file>
+
+<file path=ppt/slides/slide26.xml><?xml version="1.0" encoding="utf-8"?>
+<p:sld xmlns:a="http://schemas.openxmlformats.org/drawingml/2006/main" xmlns:r="http://schemas.openxmlformats.org/officeDocument/2006/relationships" xmlns:p="http://schemas.openxmlformats.org/presentationml/2006/main">
+  <p:cSld>
+    <p:spTree>
+      <p:nvGrpSpPr>
+        <p:cNvPr id="1" name=""/>
+        <p:cNvGrpSpPr/>
+        <p:nvPr/>
+      </p:nvGrpSpPr>
+      <p:grpSpPr>
+        <a:xfrm>
+          <a:off x="0" y="0"/>
+          <a:ext cx="0" cy="0"/>
+          <a:chOff x="0" y="0"/>
+          <a:chExt cx="0" cy="0"/>
+        </a:xfrm>
+      </p:grpSpPr>
+      <p:sp>
+        <p:nvSpPr>
+          <p:cNvPr id="2" name="Título 1">
+            <a:extLst>
+              <a:ext uri="{FF2B5EF4-FFF2-40B4-BE49-F238E27FC236}">
+                <a16:creationId xmlns:a16="http://schemas.microsoft.com/office/drawing/2014/main" id="{DD017552-A5F4-1986-01A7-107BE721E6D2}"/>
+              </a:ext>
+            </a:extLst>
+          </p:cNvPr>
+          <p:cNvSpPr>
+            <a:spLocks noGrp="1"/>
+          </p:cNvSpPr>
+          <p:nvPr>
+            <p:ph type="title"/>
+          </p:nvPr>
+        </p:nvSpPr>
+        <p:spPr/>
+        <p:txBody>
+          <a:bodyPr/>
+          <a:lstStyle/>
+          <a:p>
+            <a:endParaRPr lang="es-GT"/>
+          </a:p>
+        </p:txBody>
+      </p:sp>
+    </p:spTree>
+    <p:extLst>
+      <p:ext uri="{BB962C8B-B14F-4D97-AF65-F5344CB8AC3E}">
+        <p14:creationId xmlns:p14="http://schemas.microsoft.com/office/powerpoint/2010/main" val="1602900583"/>
+      </p:ext>
+    </p:extLst>
+  </p:cSld>
+  <p:clrMapOvr>
+    <a:masterClrMapping/>
+  </p:clrMapOvr>
+</p:sld>
+</file>
+
+<file path=ppt/slides/slide27.xml><?xml version="1.0" encoding="utf-8"?>
+<p:sld xmlns:a="http://schemas.openxmlformats.org/drawingml/2006/main" xmlns:r="http://schemas.openxmlformats.org/officeDocument/2006/relationships" xmlns:p="http://schemas.openxmlformats.org/presentationml/2006/main">
+  <p:cSld>
+    <p:spTree>
+      <p:nvGrpSpPr>
+        <p:cNvPr id="1" name=""/>
+        <p:cNvGrpSpPr/>
+        <p:nvPr/>
+      </p:nvGrpSpPr>
+      <p:grpSpPr>
+        <a:xfrm>
+          <a:off x="0" y="0"/>
+          <a:ext cx="0" cy="0"/>
+          <a:chOff x="0" y="0"/>
+          <a:chExt cx="0" cy="0"/>
+        </a:xfrm>
+      </p:grpSpPr>
+      <p:sp>
+        <p:nvSpPr>
+          <p:cNvPr id="2" name="Título 1">
+            <a:extLst>
+              <a:ext uri="{FF2B5EF4-FFF2-40B4-BE49-F238E27FC236}">
+                <a16:creationId xmlns:a16="http://schemas.microsoft.com/office/drawing/2014/main" id="{8F039EE8-6D09-0DE4-BD0D-30CC3EFB7DE4}"/>
+              </a:ext>
+            </a:extLst>
+          </p:cNvPr>
+          <p:cNvSpPr>
+            <a:spLocks noGrp="1"/>
+          </p:cNvSpPr>
+          <p:nvPr>
+            <p:ph type="title"/>
+          </p:nvPr>
+        </p:nvSpPr>
+        <p:spPr/>
+        <p:txBody>
+          <a:bodyPr/>
+          <a:lstStyle/>
+          <a:p>
+            <a:endParaRPr lang="es-GT"/>
+          </a:p>
+        </p:txBody>
+      </p:sp>
+    </p:spTree>
+    <p:extLst>
+      <p:ext uri="{BB962C8B-B14F-4D97-AF65-F5344CB8AC3E}">
+        <p14:creationId xmlns:p14="http://schemas.microsoft.com/office/powerpoint/2010/main" val="3933018001"/>
+      </p:ext>
+    </p:extLst>
+  </p:cSld>
+  <p:clrMapOvr>
+    <a:masterClrMapping/>
+  </p:clrMapOvr>
+</p:sld>
+</file>
+
+<file path=ppt/slides/slide28.xml><?xml version="1.0" encoding="utf-8"?>
+<p:sld xmlns:a="http://schemas.openxmlformats.org/drawingml/2006/main" xmlns:r="http://schemas.openxmlformats.org/officeDocument/2006/relationships" xmlns:p="http://schemas.openxmlformats.org/presentationml/2006/main">
+  <p:cSld>
+    <p:spTree>
+      <p:nvGrpSpPr>
+        <p:cNvPr id="1" name=""/>
+        <p:cNvGrpSpPr/>
+        <p:nvPr/>
+      </p:nvGrpSpPr>
+      <p:grpSpPr>
+        <a:xfrm>
+          <a:off x="0" y="0"/>
+          <a:ext cx="0" cy="0"/>
+          <a:chOff x="0" y="0"/>
+          <a:chExt cx="0" cy="0"/>
+        </a:xfrm>
+      </p:grpSpPr>
+      <p:sp>
+        <p:nvSpPr>
+          <p:cNvPr id="2" name="Título 1">
+            <a:extLst>
+              <a:ext uri="{FF2B5EF4-FFF2-40B4-BE49-F238E27FC236}">
+                <a16:creationId xmlns:a16="http://schemas.microsoft.com/office/drawing/2014/main" id="{FE05C869-EFBC-4B6B-E424-6C94167DB29B}"/>
+              </a:ext>
+            </a:extLst>
+          </p:cNvPr>
+          <p:cNvSpPr>
+            <a:spLocks noGrp="1"/>
+          </p:cNvSpPr>
+          <p:nvPr>
+            <p:ph type="title"/>
+          </p:nvPr>
+        </p:nvSpPr>
+        <p:spPr/>
+        <p:txBody>
+          <a:bodyPr/>
+          <a:lstStyle/>
+          <a:p>
+            <a:endParaRPr lang="es-GT"/>
+          </a:p>
+        </p:txBody>
+      </p:sp>
+    </p:spTree>
+    <p:extLst>
+      <p:ext uri="{BB962C8B-B14F-4D97-AF65-F5344CB8AC3E}">
+        <p14:creationId xmlns:p14="http://schemas.microsoft.com/office/powerpoint/2010/main" val="2453231629"/>
+      </p:ext>
+    </p:extLst>
+  </p:cSld>
+  <p:clrMapOvr>
+    <a:masterClrMapping/>
+  </p:clrMapOvr>
+</p:sld>
+</file>
+
+<file path=ppt/slides/slide29.xml><?xml version="1.0" encoding="utf-8"?>
+<p:sld xmlns:a="http://schemas.openxmlformats.org/drawingml/2006/main" xmlns:r="http://schemas.openxmlformats.org/officeDocument/2006/relationships" xmlns:p="http://schemas.openxmlformats.org/presentationml/2006/main">
+  <p:cSld>
+    <p:spTree>
+      <p:nvGrpSpPr>
+        <p:cNvPr id="1" name=""/>
+        <p:cNvGrpSpPr/>
+        <p:nvPr/>
+      </p:nvGrpSpPr>
+      <p:grpSpPr>
+        <a:xfrm>
+          <a:off x="0" y="0"/>
+          <a:ext cx="0" cy="0"/>
+          <a:chOff x="0" y="0"/>
+          <a:chExt cx="0" cy="0"/>
+        </a:xfrm>
+      </p:grpSpPr>
+      <p:sp>
+        <p:nvSpPr>
+          <p:cNvPr id="2" name="Título 1">
+            <a:extLst>
+              <a:ext uri="{FF2B5EF4-FFF2-40B4-BE49-F238E27FC236}">
+                <a16:creationId xmlns:a16="http://schemas.microsoft.com/office/drawing/2014/main" id="{ED5FD0AF-698A-C227-AF0A-4849CE0AC326}"/>
+              </a:ext>
+            </a:extLst>
+          </p:cNvPr>
+          <p:cNvSpPr>
+            <a:spLocks noGrp="1"/>
+          </p:cNvSpPr>
+          <p:nvPr>
+            <p:ph type="title"/>
+          </p:nvPr>
+        </p:nvSpPr>
+        <p:spPr/>
+        <p:txBody>
+          <a:bodyPr/>
+          <a:lstStyle/>
+          <a:p>
+            <a:endParaRPr lang="es-GT"/>
+          </a:p>
+        </p:txBody>
+      </p:sp>
+    </p:spTree>
+    <p:extLst>
+      <p:ext uri="{BB962C8B-B14F-4D97-AF65-F5344CB8AC3E}">
+        <p14:creationId xmlns:p14="http://schemas.microsoft.com/office/powerpoint/2010/main" val="3074593621"/>
       </p:ext>
     </p:extLst>
   </p:cSld>
@@ -4186,14 +5707,212 @@
           <a:bodyPr/>
           <a:lstStyle/>
           <a:p>
-            <a:endParaRPr lang="es-GT"/>
-          </a:p>
-        </p:txBody>
-      </p:sp>
+            <a:r>
+              <a:rPr lang="es-GT" dirty="0"/>
+              <a:t>AHORA USAR MLEDIT</a:t>
+            </a:r>
+          </a:p>
+        </p:txBody>
+      </p:sp>
+      <p:pic>
+        <p:nvPicPr>
+          <p:cNvPr id="4" name="Imagen 3">
+            <a:extLst>
+              <a:ext uri="{FF2B5EF4-FFF2-40B4-BE49-F238E27FC236}">
+                <a16:creationId xmlns:a16="http://schemas.microsoft.com/office/drawing/2014/main" id="{672AEBD9-21C9-FCD9-26CD-55557F29D8FA}"/>
+              </a:ext>
+            </a:extLst>
+          </p:cNvPr>
+          <p:cNvPicPr>
+            <a:picLocks noChangeAspect="1"/>
+          </p:cNvPicPr>
+          <p:nvPr/>
+        </p:nvPicPr>
+        <p:blipFill>
+          <a:blip r:embed="rId2"/>
+          <a:stretch>
+            <a:fillRect/>
+          </a:stretch>
+        </p:blipFill>
+        <p:spPr>
+          <a:xfrm>
+            <a:off x="3394630" y="1372749"/>
+            <a:ext cx="4539547" cy="4812527"/>
+          </a:xfrm>
+          <a:prstGeom prst="rect">
+            <a:avLst/>
+          </a:prstGeom>
+        </p:spPr>
+      </p:pic>
     </p:spTree>
     <p:extLst>
       <p:ext uri="{BB962C8B-B14F-4D97-AF65-F5344CB8AC3E}">
         <p14:creationId xmlns:p14="http://schemas.microsoft.com/office/powerpoint/2010/main" val="498923787"/>
+      </p:ext>
+    </p:extLst>
+  </p:cSld>
+  <p:clrMapOvr>
+    <a:masterClrMapping/>
+  </p:clrMapOvr>
+</p:sld>
+</file>
+
+<file path=ppt/slides/slide30.xml><?xml version="1.0" encoding="utf-8"?>
+<p:sld xmlns:a="http://schemas.openxmlformats.org/drawingml/2006/main" xmlns:r="http://schemas.openxmlformats.org/officeDocument/2006/relationships" xmlns:p="http://schemas.openxmlformats.org/presentationml/2006/main">
+  <p:cSld>
+    <p:spTree>
+      <p:nvGrpSpPr>
+        <p:cNvPr id="1" name=""/>
+        <p:cNvGrpSpPr/>
+        <p:nvPr/>
+      </p:nvGrpSpPr>
+      <p:grpSpPr>
+        <a:xfrm>
+          <a:off x="0" y="0"/>
+          <a:ext cx="0" cy="0"/>
+          <a:chOff x="0" y="0"/>
+          <a:chExt cx="0" cy="0"/>
+        </a:xfrm>
+      </p:grpSpPr>
+      <p:sp>
+        <p:nvSpPr>
+          <p:cNvPr id="2" name="Título 1">
+            <a:extLst>
+              <a:ext uri="{FF2B5EF4-FFF2-40B4-BE49-F238E27FC236}">
+                <a16:creationId xmlns:a16="http://schemas.microsoft.com/office/drawing/2014/main" id="{A49ED982-9D41-CA06-6D36-B1BB6C3E8A9F}"/>
+              </a:ext>
+            </a:extLst>
+          </p:cNvPr>
+          <p:cNvSpPr>
+            <a:spLocks noGrp="1"/>
+          </p:cNvSpPr>
+          <p:nvPr>
+            <p:ph type="title"/>
+          </p:nvPr>
+        </p:nvSpPr>
+        <p:spPr/>
+        <p:txBody>
+          <a:bodyPr/>
+          <a:lstStyle/>
+          <a:p>
+            <a:endParaRPr lang="es-GT"/>
+          </a:p>
+        </p:txBody>
+      </p:sp>
+    </p:spTree>
+    <p:extLst>
+      <p:ext uri="{BB962C8B-B14F-4D97-AF65-F5344CB8AC3E}">
+        <p14:creationId xmlns:p14="http://schemas.microsoft.com/office/powerpoint/2010/main" val="1067448227"/>
+      </p:ext>
+    </p:extLst>
+  </p:cSld>
+  <p:clrMapOvr>
+    <a:masterClrMapping/>
+  </p:clrMapOvr>
+</p:sld>
+</file>
+
+<file path=ppt/slides/slide31.xml><?xml version="1.0" encoding="utf-8"?>
+<p:sld xmlns:a="http://schemas.openxmlformats.org/drawingml/2006/main" xmlns:r="http://schemas.openxmlformats.org/officeDocument/2006/relationships" xmlns:p="http://schemas.openxmlformats.org/presentationml/2006/main">
+  <p:cSld>
+    <p:spTree>
+      <p:nvGrpSpPr>
+        <p:cNvPr id="1" name=""/>
+        <p:cNvGrpSpPr/>
+        <p:nvPr/>
+      </p:nvGrpSpPr>
+      <p:grpSpPr>
+        <a:xfrm>
+          <a:off x="0" y="0"/>
+          <a:ext cx="0" cy="0"/>
+          <a:chOff x="0" y="0"/>
+          <a:chExt cx="0" cy="0"/>
+        </a:xfrm>
+      </p:grpSpPr>
+      <p:sp>
+        <p:nvSpPr>
+          <p:cNvPr id="2" name="Título 1">
+            <a:extLst>
+              <a:ext uri="{FF2B5EF4-FFF2-40B4-BE49-F238E27FC236}">
+                <a16:creationId xmlns:a16="http://schemas.microsoft.com/office/drawing/2014/main" id="{21FC1112-8B66-344D-FA57-7448C97B6873}"/>
+              </a:ext>
+            </a:extLst>
+          </p:cNvPr>
+          <p:cNvSpPr>
+            <a:spLocks noGrp="1"/>
+          </p:cNvSpPr>
+          <p:nvPr>
+            <p:ph type="title"/>
+          </p:nvPr>
+        </p:nvSpPr>
+        <p:spPr/>
+        <p:txBody>
+          <a:bodyPr/>
+          <a:lstStyle/>
+          <a:p>
+            <a:endParaRPr lang="es-GT"/>
+          </a:p>
+        </p:txBody>
+      </p:sp>
+    </p:spTree>
+    <p:extLst>
+      <p:ext uri="{BB962C8B-B14F-4D97-AF65-F5344CB8AC3E}">
+        <p14:creationId xmlns:p14="http://schemas.microsoft.com/office/powerpoint/2010/main" val="3714445294"/>
+      </p:ext>
+    </p:extLst>
+  </p:cSld>
+  <p:clrMapOvr>
+    <a:masterClrMapping/>
+  </p:clrMapOvr>
+</p:sld>
+</file>
+
+<file path=ppt/slides/slide32.xml><?xml version="1.0" encoding="utf-8"?>
+<p:sld xmlns:a="http://schemas.openxmlformats.org/drawingml/2006/main" xmlns:r="http://schemas.openxmlformats.org/officeDocument/2006/relationships" xmlns:p="http://schemas.openxmlformats.org/presentationml/2006/main">
+  <p:cSld>
+    <p:spTree>
+      <p:nvGrpSpPr>
+        <p:cNvPr id="1" name=""/>
+        <p:cNvGrpSpPr/>
+        <p:nvPr/>
+      </p:nvGrpSpPr>
+      <p:grpSpPr>
+        <a:xfrm>
+          <a:off x="0" y="0"/>
+          <a:ext cx="0" cy="0"/>
+          <a:chOff x="0" y="0"/>
+          <a:chExt cx="0" cy="0"/>
+        </a:xfrm>
+      </p:grpSpPr>
+      <p:sp>
+        <p:nvSpPr>
+          <p:cNvPr id="2" name="Título 1">
+            <a:extLst>
+              <a:ext uri="{FF2B5EF4-FFF2-40B4-BE49-F238E27FC236}">
+                <a16:creationId xmlns:a16="http://schemas.microsoft.com/office/drawing/2014/main" id="{7711941E-1596-45D7-8A0A-8F50773E451E}"/>
+              </a:ext>
+            </a:extLst>
+          </p:cNvPr>
+          <p:cNvSpPr>
+            <a:spLocks noGrp="1"/>
+          </p:cNvSpPr>
+          <p:nvPr>
+            <p:ph type="title"/>
+          </p:nvPr>
+        </p:nvSpPr>
+        <p:spPr/>
+        <p:txBody>
+          <a:bodyPr/>
+          <a:lstStyle/>
+          <a:p>
+            <a:endParaRPr lang="es-GT"/>
+          </a:p>
+        </p:txBody>
+      </p:sp>
+    </p:spTree>
+    <p:extLst>
+      <p:ext uri="{BB962C8B-B14F-4D97-AF65-F5344CB8AC3E}">
+        <p14:creationId xmlns:p14="http://schemas.microsoft.com/office/powerpoint/2010/main" val="2199684720"/>
       </p:ext>
     </p:extLst>
   </p:cSld>
@@ -4242,6 +5961,76 @@
           <a:lstStyle/>
           <a:p>
             <a:endParaRPr lang="es-GT"/>
+          </a:p>
+        </p:txBody>
+      </p:sp>
+      <p:pic>
+        <p:nvPicPr>
+          <p:cNvPr id="4" name="Imagen 3">
+            <a:extLst>
+              <a:ext uri="{FF2B5EF4-FFF2-40B4-BE49-F238E27FC236}">
+                <a16:creationId xmlns:a16="http://schemas.microsoft.com/office/drawing/2014/main" id="{BB23992B-99F4-8C33-EBA0-81A457651348}"/>
+              </a:ext>
+            </a:extLst>
+          </p:cNvPr>
+          <p:cNvPicPr>
+            <a:picLocks noChangeAspect="1"/>
+          </p:cNvPicPr>
+          <p:nvPr/>
+        </p:nvPicPr>
+        <p:blipFill>
+          <a:blip r:embed="rId2"/>
+          <a:stretch>
+            <a:fillRect/>
+          </a:stretch>
+        </p:blipFill>
+        <p:spPr>
+          <a:xfrm>
+            <a:off x="579445" y="1319046"/>
+            <a:ext cx="5666610" cy="5061634"/>
+          </a:xfrm>
+          <a:prstGeom prst="rect">
+            <a:avLst/>
+          </a:prstGeom>
+        </p:spPr>
+      </p:pic>
+      <p:sp>
+        <p:nvSpPr>
+          <p:cNvPr id="5" name="CuadroTexto 4">
+            <a:extLst>
+              <a:ext uri="{FF2B5EF4-FFF2-40B4-BE49-F238E27FC236}">
+                <a16:creationId xmlns:a16="http://schemas.microsoft.com/office/drawing/2014/main" id="{6C879693-0552-9A75-C4D7-699CCED7111B}"/>
+              </a:ext>
+            </a:extLst>
+          </p:cNvPr>
+          <p:cNvSpPr txBox="1"/>
+          <p:nvPr/>
+        </p:nvSpPr>
+        <p:spPr>
+          <a:xfrm>
+            <a:off x="7146388" y="2475914"/>
+            <a:ext cx="3108960" cy="3416320"/>
+          </a:xfrm>
+          <a:prstGeom prst="rect">
+            <a:avLst/>
+          </a:prstGeom>
+          <a:noFill/>
+        </p:spPr>
+        <p:txBody>
+          <a:bodyPr wrap="square" rtlCol="0">
+            <a:spAutoFit/>
+          </a:bodyPr>
+          <a:lstStyle/>
+          <a:p>
+            <a:r>
+              <a:rPr lang="es-GT" sz="5400" dirty="0"/>
+              <a:t>Se  corta el del primer </a:t>
+            </a:r>
+            <a:r>
+              <a:rPr lang="es-GT" sz="5400" dirty="0" err="1"/>
+              <a:t>click</a:t>
+            </a:r>
+            <a:endParaRPr lang="es-GT" sz="5400" dirty="0"/>
           </a:p>
         </p:txBody>
       </p:sp>
@@ -4296,10 +6085,78 @@
           <a:bodyPr/>
           <a:lstStyle/>
           <a:p>
-            <a:endParaRPr lang="es-GT"/>
-          </a:p>
-        </p:txBody>
-      </p:sp>
+            <a:r>
+              <a:rPr lang="es-GT" dirty="0"/>
+              <a:t>Open </a:t>
+            </a:r>
+            <a:r>
+              <a:rPr lang="es-GT" dirty="0" err="1"/>
+              <a:t>cross</a:t>
+            </a:r>
+            <a:endParaRPr lang="es-GT" dirty="0"/>
+          </a:p>
+        </p:txBody>
+      </p:sp>
+      <p:pic>
+        <p:nvPicPr>
+          <p:cNvPr id="4" name="Imagen 3">
+            <a:extLst>
+              <a:ext uri="{FF2B5EF4-FFF2-40B4-BE49-F238E27FC236}">
+                <a16:creationId xmlns:a16="http://schemas.microsoft.com/office/drawing/2014/main" id="{56225F01-9262-A172-BC89-823F2C842289}"/>
+              </a:ext>
+            </a:extLst>
+          </p:cNvPr>
+          <p:cNvPicPr>
+            <a:picLocks noChangeAspect="1"/>
+          </p:cNvPicPr>
+          <p:nvPr/>
+        </p:nvPicPr>
+        <p:blipFill>
+          <a:blip r:embed="rId2"/>
+          <a:stretch>
+            <a:fillRect/>
+          </a:stretch>
+        </p:blipFill>
+        <p:spPr>
+          <a:xfrm>
+            <a:off x="1166285" y="1977893"/>
+            <a:ext cx="5544003" cy="4152002"/>
+          </a:xfrm>
+          <a:prstGeom prst="rect">
+            <a:avLst/>
+          </a:prstGeom>
+        </p:spPr>
+      </p:pic>
+      <p:pic>
+        <p:nvPicPr>
+          <p:cNvPr id="6" name="Imagen 5">
+            <a:extLst>
+              <a:ext uri="{FF2B5EF4-FFF2-40B4-BE49-F238E27FC236}">
+                <a16:creationId xmlns:a16="http://schemas.microsoft.com/office/drawing/2014/main" id="{B8CCD184-2E61-9E88-74E1-53D9EFB34578}"/>
+              </a:ext>
+            </a:extLst>
+          </p:cNvPr>
+          <p:cNvPicPr>
+            <a:picLocks noChangeAspect="1"/>
+          </p:cNvPicPr>
+          <p:nvPr/>
+        </p:nvPicPr>
+        <p:blipFill>
+          <a:blip r:embed="rId3"/>
+          <a:stretch>
+            <a:fillRect/>
+          </a:stretch>
+        </p:blipFill>
+        <p:spPr>
+          <a:xfrm>
+            <a:off x="6867039" y="2531066"/>
+            <a:ext cx="2931448" cy="3045656"/>
+          </a:xfrm>
+          <a:prstGeom prst="rect">
+            <a:avLst/>
+          </a:prstGeom>
+        </p:spPr>
+      </p:pic>
     </p:spTree>
     <p:extLst>
       <p:ext uri="{BB962C8B-B14F-4D97-AF65-F5344CB8AC3E}">
@@ -4355,6 +6212,66 @@
           </a:p>
         </p:txBody>
       </p:sp>
+      <p:pic>
+        <p:nvPicPr>
+          <p:cNvPr id="4" name="Imagen 3">
+            <a:extLst>
+              <a:ext uri="{FF2B5EF4-FFF2-40B4-BE49-F238E27FC236}">
+                <a16:creationId xmlns:a16="http://schemas.microsoft.com/office/drawing/2014/main" id="{F5BEFE2B-43CC-FE3B-5BE5-C3CA6DAF990A}"/>
+              </a:ext>
+            </a:extLst>
+          </p:cNvPr>
+          <p:cNvPicPr>
+            <a:picLocks noChangeAspect="1"/>
+          </p:cNvPicPr>
+          <p:nvPr/>
+        </p:nvPicPr>
+        <p:blipFill>
+          <a:blip r:embed="rId2"/>
+          <a:stretch>
+            <a:fillRect/>
+          </a:stretch>
+        </p:blipFill>
+        <p:spPr>
+          <a:xfrm>
+            <a:off x="3499992" y="1510852"/>
+            <a:ext cx="3660464" cy="3836295"/>
+          </a:xfrm>
+          <a:prstGeom prst="rect">
+            <a:avLst/>
+          </a:prstGeom>
+        </p:spPr>
+      </p:pic>
+      <p:pic>
+        <p:nvPicPr>
+          <p:cNvPr id="6" name="Imagen 5">
+            <a:extLst>
+              <a:ext uri="{FF2B5EF4-FFF2-40B4-BE49-F238E27FC236}">
+                <a16:creationId xmlns:a16="http://schemas.microsoft.com/office/drawing/2014/main" id="{24A0AF7C-FE1B-499A-2991-70063497E4B2}"/>
+              </a:ext>
+            </a:extLst>
+          </p:cNvPr>
+          <p:cNvPicPr>
+            <a:picLocks noChangeAspect="1"/>
+          </p:cNvPicPr>
+          <p:nvPr/>
+        </p:nvPicPr>
+        <p:blipFill>
+          <a:blip r:embed="rId3"/>
+          <a:stretch>
+            <a:fillRect/>
+          </a:stretch>
+        </p:blipFill>
+        <p:spPr>
+          <a:xfrm>
+            <a:off x="7425555" y="1690688"/>
+            <a:ext cx="1732513" cy="1769770"/>
+          </a:xfrm>
+          <a:prstGeom prst="rect">
+            <a:avLst/>
+          </a:prstGeom>
+        </p:spPr>
+      </p:pic>
     </p:spTree>
     <p:extLst>
       <p:ext uri="{BB962C8B-B14F-4D97-AF65-F5344CB8AC3E}">
@@ -4410,6 +6327,131 @@
           </a:p>
         </p:txBody>
       </p:sp>
+      <p:pic>
+        <p:nvPicPr>
+          <p:cNvPr id="4" name="Imagen 3">
+            <a:extLst>
+              <a:ext uri="{FF2B5EF4-FFF2-40B4-BE49-F238E27FC236}">
+                <a16:creationId xmlns:a16="http://schemas.microsoft.com/office/drawing/2014/main" id="{465915B6-7A05-6186-18DE-7ECD14C4A925}"/>
+              </a:ext>
+            </a:extLst>
+          </p:cNvPr>
+          <p:cNvPicPr>
+            <a:picLocks noChangeAspect="1"/>
+          </p:cNvPicPr>
+          <p:nvPr/>
+        </p:nvPicPr>
+        <p:blipFill>
+          <a:blip r:embed="rId2"/>
+          <a:stretch>
+            <a:fillRect/>
+          </a:stretch>
+        </p:blipFill>
+        <p:spPr>
+          <a:xfrm>
+            <a:off x="2144026" y="1342418"/>
+            <a:ext cx="3100840" cy="2764788"/>
+          </a:xfrm>
+          <a:prstGeom prst="rect">
+            <a:avLst/>
+          </a:prstGeom>
+        </p:spPr>
+      </p:pic>
+      <p:pic>
+        <p:nvPicPr>
+          <p:cNvPr id="6" name="Imagen 5">
+            <a:extLst>
+              <a:ext uri="{FF2B5EF4-FFF2-40B4-BE49-F238E27FC236}">
+                <a16:creationId xmlns:a16="http://schemas.microsoft.com/office/drawing/2014/main" id="{CA263837-AFC6-7B5E-32F0-03705381933E}"/>
+              </a:ext>
+            </a:extLst>
+          </p:cNvPr>
+          <p:cNvPicPr>
+            <a:picLocks noChangeAspect="1"/>
+          </p:cNvPicPr>
+          <p:nvPr/>
+        </p:nvPicPr>
+        <p:blipFill>
+          <a:blip r:embed="rId3"/>
+          <a:stretch>
+            <a:fillRect/>
+          </a:stretch>
+        </p:blipFill>
+        <p:spPr>
+          <a:xfrm>
+            <a:off x="1979013" y="3998497"/>
+            <a:ext cx="3000794" cy="2172003"/>
+          </a:xfrm>
+          <a:prstGeom prst="rect">
+            <a:avLst/>
+          </a:prstGeom>
+        </p:spPr>
+      </p:pic>
+      <p:pic>
+        <p:nvPicPr>
+          <p:cNvPr id="8" name="Imagen 7">
+            <a:extLst>
+              <a:ext uri="{FF2B5EF4-FFF2-40B4-BE49-F238E27FC236}">
+                <a16:creationId xmlns:a16="http://schemas.microsoft.com/office/drawing/2014/main" id="{EE4F648A-299C-40EA-9969-5612F6E2E3B5}"/>
+              </a:ext>
+            </a:extLst>
+          </p:cNvPr>
+          <p:cNvPicPr>
+            <a:picLocks noChangeAspect="1"/>
+          </p:cNvPicPr>
+          <p:nvPr/>
+        </p:nvPicPr>
+        <p:blipFill>
+          <a:blip r:embed="rId4"/>
+          <a:stretch>
+            <a:fillRect/>
+          </a:stretch>
+        </p:blipFill>
+        <p:spPr>
+          <a:xfrm>
+            <a:off x="6292337" y="1342418"/>
+            <a:ext cx="2514037" cy="2514037"/>
+          </a:xfrm>
+          <a:prstGeom prst="rect">
+            <a:avLst/>
+          </a:prstGeom>
+        </p:spPr>
+      </p:pic>
+      <p:sp>
+        <p:nvSpPr>
+          <p:cNvPr id="9" name="CuadroTexto 8">
+            <a:extLst>
+              <a:ext uri="{FF2B5EF4-FFF2-40B4-BE49-F238E27FC236}">
+                <a16:creationId xmlns:a16="http://schemas.microsoft.com/office/drawing/2014/main" id="{BA4D76BA-0833-545F-1538-41DC947CCA52}"/>
+              </a:ext>
+            </a:extLst>
+          </p:cNvPr>
+          <p:cNvSpPr txBox="1"/>
+          <p:nvPr/>
+        </p:nvSpPr>
+        <p:spPr>
+          <a:xfrm>
+            <a:off x="6780628" y="4783015"/>
+            <a:ext cx="2616590" cy="369332"/>
+          </a:xfrm>
+          <a:prstGeom prst="rect">
+            <a:avLst/>
+          </a:prstGeom>
+          <a:noFill/>
+        </p:spPr>
+        <p:txBody>
+          <a:bodyPr wrap="square" rtlCol="0">
+            <a:spAutoFit/>
+          </a:bodyPr>
+          <a:lstStyle/>
+          <a:p>
+            <a:r>
+              <a:rPr lang="es-GT" dirty="0"/>
+              <a:t>UNE LAS LINEAS</a:t>
+            </a:r>
+          </a:p>
+        </p:txBody>
+      </p:sp>
     </p:spTree>
     <p:extLst>
       <p:ext uri="{BB962C8B-B14F-4D97-AF65-F5344CB8AC3E}">
@@ -4461,10 +6503,73 @@
           <a:bodyPr/>
           <a:lstStyle/>
           <a:p>
-            <a:endParaRPr lang="es-GT"/>
-          </a:p>
-        </p:txBody>
-      </p:sp>
+            <a:r>
+              <a:rPr lang="es-GT" dirty="0"/>
+              <a:t>VERTEX, SOLO EXTENDEMOS LAS LINEAS</a:t>
+            </a:r>
+          </a:p>
+        </p:txBody>
+      </p:sp>
+      <p:pic>
+        <p:nvPicPr>
+          <p:cNvPr id="4" name="Imagen 3">
+            <a:extLst>
+              <a:ext uri="{FF2B5EF4-FFF2-40B4-BE49-F238E27FC236}">
+                <a16:creationId xmlns:a16="http://schemas.microsoft.com/office/drawing/2014/main" id="{E24B70CC-8A8D-37D2-31DF-38715C5A8F5B}"/>
+              </a:ext>
+            </a:extLst>
+          </p:cNvPr>
+          <p:cNvPicPr>
+            <a:picLocks noChangeAspect="1"/>
+          </p:cNvPicPr>
+          <p:nvPr/>
+        </p:nvPicPr>
+        <p:blipFill>
+          <a:blip r:embed="rId2"/>
+          <a:stretch>
+            <a:fillRect/>
+          </a:stretch>
+        </p:blipFill>
+        <p:spPr>
+          <a:xfrm>
+            <a:off x="652994" y="1690688"/>
+            <a:ext cx="3426637" cy="3346948"/>
+          </a:xfrm>
+          <a:prstGeom prst="rect">
+            <a:avLst/>
+          </a:prstGeom>
+        </p:spPr>
+      </p:pic>
+      <p:pic>
+        <p:nvPicPr>
+          <p:cNvPr id="6" name="Imagen 5">
+            <a:extLst>
+              <a:ext uri="{FF2B5EF4-FFF2-40B4-BE49-F238E27FC236}">
+                <a16:creationId xmlns:a16="http://schemas.microsoft.com/office/drawing/2014/main" id="{75A57DF1-F56C-812E-1738-D07AD236EB8F}"/>
+              </a:ext>
+            </a:extLst>
+          </p:cNvPr>
+          <p:cNvPicPr>
+            <a:picLocks noChangeAspect="1"/>
+          </p:cNvPicPr>
+          <p:nvPr/>
+        </p:nvPicPr>
+        <p:blipFill>
+          <a:blip r:embed="rId3"/>
+          <a:stretch>
+            <a:fillRect/>
+          </a:stretch>
+        </p:blipFill>
+        <p:spPr>
+          <a:xfrm>
+            <a:off x="5630016" y="1418944"/>
+            <a:ext cx="5334744" cy="4020111"/>
+          </a:xfrm>
+          <a:prstGeom prst="rect">
+            <a:avLst/>
+          </a:prstGeom>
+        </p:spPr>
+      </p:pic>
     </p:spTree>
     <p:extLst>
       <p:ext uri="{BB962C8B-B14F-4D97-AF65-F5344CB8AC3E}">
@@ -4516,10 +6621,43 @@
           <a:bodyPr/>
           <a:lstStyle/>
           <a:p>
-            <a:endParaRPr lang="es-GT"/>
-          </a:p>
-        </p:txBody>
-      </p:sp>
+            <a:r>
+              <a:rPr lang="es-GT" dirty="0"/>
+              <a:t>BORRAR VERTICE, CUALQUIER ESQUINA QUE SELECCIONEMOSO SE QUITA  </a:t>
+            </a:r>
+          </a:p>
+        </p:txBody>
+      </p:sp>
+      <p:pic>
+        <p:nvPicPr>
+          <p:cNvPr id="4" name="Imagen 3">
+            <a:extLst>
+              <a:ext uri="{FF2B5EF4-FFF2-40B4-BE49-F238E27FC236}">
+                <a16:creationId xmlns:a16="http://schemas.microsoft.com/office/drawing/2014/main" id="{6A55D358-D8B0-0106-BE35-0F01952A7E82}"/>
+              </a:ext>
+            </a:extLst>
+          </p:cNvPr>
+          <p:cNvPicPr>
+            <a:picLocks noChangeAspect="1"/>
+          </p:cNvPicPr>
+          <p:nvPr/>
+        </p:nvPicPr>
+        <p:blipFill>
+          <a:blip r:embed="rId2"/>
+          <a:stretch>
+            <a:fillRect/>
+          </a:stretch>
+        </p:blipFill>
+        <p:spPr>
+          <a:xfrm>
+            <a:off x="2439032" y="2477161"/>
+            <a:ext cx="6198531" cy="4015714"/>
+          </a:xfrm>
+          <a:prstGeom prst="rect">
+            <a:avLst/>
+          </a:prstGeom>
+        </p:spPr>
+      </p:pic>
     </p:spTree>
     <p:extLst>
       <p:ext uri="{BB962C8B-B14F-4D97-AF65-F5344CB8AC3E}">

--- a/AUTOCAD INTECAP/apuntes powerpoint/CLASE 10, Miercoles 18 Marzo.pptx
+++ b/AUTOCAD INTECAP/apuntes powerpoint/CLASE 10, Miercoles 18 Marzo.pptx
@@ -37,6 +37,16 @@
     <p:sldId id="259" r:id="rId31"/>
     <p:sldId id="260" r:id="rId32"/>
     <p:sldId id="261" r:id="rId33"/>
+    <p:sldId id="289" r:id="rId34"/>
+    <p:sldId id="290" r:id="rId35"/>
+    <p:sldId id="291" r:id="rId36"/>
+    <p:sldId id="292" r:id="rId37"/>
+    <p:sldId id="293" r:id="rId38"/>
+    <p:sldId id="294" r:id="rId39"/>
+    <p:sldId id="295" r:id="rId40"/>
+    <p:sldId id="296" r:id="rId41"/>
+    <p:sldId id="297" r:id="rId42"/>
+    <p:sldId id="298" r:id="rId43"/>
   </p:sldIdLst>
   <p:sldSz cx="12192000" cy="6858000"/>
   <p:notesSz cx="6858000" cy="9144000"/>
@@ -172,6 +182,296 @@
 </inkml:ink>
 </file>
 
+<file path=ppt/ink/ink10.xml><?xml version="1.0" encoding="utf-8"?>
+<inkml:ink xmlns:inkml="http://www.w3.org/2003/InkML">
+  <inkml:definitions>
+    <inkml:context xml:id="ctx0">
+      <inkml:inkSource xml:id="inkSrc0">
+        <inkml:traceFormat>
+          <inkml:channel name="X" type="integer" min="-2.14748E9" max="2.14748E9" units="cm"/>
+          <inkml:channel name="Y" type="integer" min="-2.14748E9" max="2.14748E9" units="cm"/>
+        </inkml:traceFormat>
+        <inkml:channelProperties>
+          <inkml:channelProperty channel="X" name="resolution" value="1000" units="1/cm"/>
+          <inkml:channelProperty channel="Y" name="resolution" value="1000" units="1/cm"/>
+        </inkml:channelProperties>
+      </inkml:inkSource>
+      <inkml:timestamp xml:id="ts0" timeString="2026-04-07T04:47:18.522"/>
+    </inkml:context>
+    <inkml:brush xml:id="br0">
+      <inkml:brushProperty name="width" value="0.3" units="cm"/>
+      <inkml:brushProperty name="height" value="0.6" units="cm"/>
+      <inkml:brushProperty name="color" value="#FFFC00"/>
+      <inkml:brushProperty name="tip" value="rectangle"/>
+      <inkml:brushProperty name="rasterOp" value="maskPen"/>
+      <inkml:brushProperty name="ignorePressure" value="1"/>
+    </inkml:brush>
+  </inkml:definitions>
+  <inkml:trace contextRef="#ctx0" brushRef="#br0">385 47,'16'0,"0"1,0 1,-1 0,23 7,16 4,128 24,88 18,886 138,19-103,-1160-90,171-1,-177-1,-19 0,-258-39,-12-4,-86-18,-898-118,-20 100,1225 79,57 1,14 0,101-4,552 1,-602 0,-42-1,-27 1,-29-2,-17 5,52 1,0 0,0 0,1 0,-1 0,0 0,0 1,0-1,0 0,0 0,0 0,1 0,-1 0,0 0,0 0,0 0,0 1,0-1,0 0,0 0,0 0,0 0,0 0,0 0,0 1,0-1,1 0,-1 0,0 0,0 0,0 0,0 1,0-1,0 0,-1 0,1 0,0 0,0 0,0 1,0-1,0 0,0 0,0 0,0 0,0 0,0 1,0-1,0 0,-1 0,1 0,0 0,0 0,0 0,0 0,0 0,0 0,-1 1,44 13,308 64,-248-58,328 65,106 22,1806 331,-2294-430,178 20,-180-29</inkml:trace>
+</inkml:ink>
+</file>
+
+<file path=ppt/ink/ink11.xml><?xml version="1.0" encoding="utf-8"?>
+<inkml:ink xmlns:inkml="http://www.w3.org/2003/InkML">
+  <inkml:definitions>
+    <inkml:context xml:id="ctx0">
+      <inkml:inkSource xml:id="inkSrc0">
+        <inkml:traceFormat>
+          <inkml:channel name="X" type="integer" min="-2.14748E9" max="2.14748E9" units="cm"/>
+          <inkml:channel name="Y" type="integer" min="-2.14748E9" max="2.14748E9" units="cm"/>
+        </inkml:traceFormat>
+        <inkml:channelProperties>
+          <inkml:channelProperty channel="X" name="resolution" value="1000" units="1/cm"/>
+          <inkml:channelProperty channel="Y" name="resolution" value="1000" units="1/cm"/>
+        </inkml:channelProperties>
+      </inkml:inkSource>
+      <inkml:timestamp xml:id="ts0" timeString="2026-04-07T04:47:20.548"/>
+    </inkml:context>
+    <inkml:brush xml:id="br0">
+      <inkml:brushProperty name="width" value="0.3" units="cm"/>
+      <inkml:brushProperty name="height" value="0.6" units="cm"/>
+      <inkml:brushProperty name="color" value="#FFFC00"/>
+      <inkml:brushProperty name="tip" value="rectangle"/>
+      <inkml:brushProperty name="rasterOp" value="maskPen"/>
+      <inkml:brushProperty name="ignorePressure" value="1"/>
+    </inkml:brush>
+  </inkml:definitions>
+  <inkml:trace contextRef="#ctx0" brushRef="#br0">1 534,'21'30,"1"-1,2-1,1-1,1-2,1 0,1-2,1-1,49 28,-9-13,2-3,137 47,-166-67,1-1,-1-2,2-2,84 7,-123-15,-1-1,1 0,0 0,-1-1,1 1,0-1,-1 0,1 0,-1-1,8-2,-12 3,0 1,0 0,0-1,0 1,-1 0,1-1,0 1,0 0,0-1,-1 1,1 0,0-1,0 1,-1 0,1 0,0-1,-1 1,1 0,0 0,-1 0,1-1,0 1,-1 0,1 0,-1 0,1 0,0 0,-1 0,1 0,0 0,-1 0,1 0,-1 0,1 0,0 0,-1 0,0 0,-16-2,-1 1,1 1,-1 0,1 1,-23 5,-2 2,-44 15,71-19,1 1,0 0,1 1,-1 1,-19 12,32-18,0 0,0-1,0 1,0-1,0 1,0 0,1 0,-1 0,0-1,0 1,1 0,-1 0,1 0,-1 0,1 0,-1 0,1 0,0 0,-1 0,1 0,0 0,0 2,0-2,0 0,1 0,-1-1,1 1,-1 0,1 0,0-1,-1 1,1 0,0-1,-1 1,1-1,0 1,0-1,-1 1,1-1,0 1,0-1,0 0,1 1,5 0,0 1,0-1,-1 0,1-1,0 1,7-2,5-2,0-1,0 0,-1-2,0 0,0-1,0-1,-1 0,0-1,-1-1,21-17,-8 4,-2 0,0-2,-2-2,36-46,-38 39,-1 0,-2-1,-2-2,-1 0,-1 0,-3-2,-1 0,-2 0,-1-1,-2 0,-2 0,-2-1,-2-41,-1 71,-1-1,-1 1,0 0,-5-17,7 26,-1-1,0 1,0 0,0 0,0 0,0 0,-1 0,1 1,-1-1,1 0,-1 0,-2-1,3 2,0 1,0-1,0 1,-1-1,1 1,0 0,0 0,0-1,-1 1,1 0,0 0,0 0,0 0,-1 0,1 1,0-1,0 0,0 1,0-1,-1 0,1 1,0-1,0 1,-2 1,-1 1,0 0,0 1,0 0,0-1,1 1,0 0,-1 1,1-1,1 1,-1-1,1 1,0 0,0 0,0 0,-2 8,1 5,-1-1,2 0,0 27,2-41,0 1,0 0,1-1,-1 1,1 0,0-1,0 1,1-1,-1 1,1-1,-1 0,1 0,0 0,0 0,1 0,-1 0,0 0,1 0,0-1,0 0,0 1,0-1,0 0,0-1,0 1,1 0,-1-1,5 2,6 1,-1-1,1 0,0 0,0-2,-1 0,21-1,-2-2,-1-1,1-2,-1-1,-1-1,1-2,-2-1,51-24,-45 16,-1-1,-2-2,0-1,-1-2,54-52,-78 69,0 0,0-1,0 0,-1 0,0-1,-1 0,0 0,0 0,-1 0,0-1,0 0,-1 0,2-13,-5 21,1 0,-1 0,0 0,0 0,0 0,0 0,0 0,-1 0,1 0,0 1,-1-1,0 0,1 0,-1 0,0 0,0 1,0-1,0 0,0 1,0-1,0 1,-1-1,1 1,-1 0,1-1,-1 1,1 0,-1 0,0 0,1 0,-1 0,0 1,0-1,0 0,0 1,0-1,1 1,-1 0,0 0,0 0,0 0,0 0,-4 1,-4-1,0 2,0-1,0 1,0 1,0 0,1 0,-16 9,-3 3,1 2,1 2,0 0,-28 29,-86 100,80-79,-81 127,113-150,2 0,2 2,2 0,-19 65,37-99,0 0,1 0,1 1,1-1,0 0,1 16,0-27,0 0,1 0,-1 0,1 0,0-1,0 1,0 0,0 0,0 0,0-1,1 1,0-1,-1 1,5 3,-4-4,0-1,0 0,0 1,1-1,-1 0,0 0,1-1,-1 1,1 0,-1-1,0 0,1 1,-1-1,1 0,0 0,-1 0,1-1,-1 1,0-1,5 0,2-2,0 0,0-1,-1 0,1 0,-1-1,0 0,0-1,-1 1,1-1,-1-1,-1 1,1-1,-1-1,0 1,-1-1,0 0,7-13,-1-1,-1-1,-1-1,-1 0,-1 0,6-35,-12 51,0 1,0-1,0 1,-1-1,0 1,0-1,-1 1,-2-10,2 14,0 0,0 1,0-1,-1 1,1 0,0-1,-1 1,0 0,0 0,0 0,1 0,-2 0,1 0,0 1,0-1,-1 1,1 0,0-1,-1 1,0 0,1 0,-1 1,1-1,-1 0,0 1,-2-1,-10 0,0 1,0 0,0 1,1 0,-1 1,0 1,1 0,-19 8,-114 50,126-52,2-1,1 1,0 1,-28 20,45-30,0 1,0-1,1 1,-1-1,0 1,1 0,-1-1,0 1,1-1,-1 1,1 0,-1 0,1-1,-1 1,1 0,0 0,0 0,-1-1,1 1,0 0,0 0,0 1,0-1,0-1,1 1,-1-1,1 0,-1 1,1-1,-1 1,1-1,-1 0,1 1,0-1,-1 0,1 1,-1-1,1 0,0 0,-1 0,1 0,0 0,-1 1,2-1,44-2,-45 2,65-9,5-1</inkml:trace>
+</inkml:ink>
+</file>
+
+<file path=ppt/ink/ink12.xml><?xml version="1.0" encoding="utf-8"?>
+<inkml:ink xmlns:inkml="http://www.w3.org/2003/InkML">
+  <inkml:definitions>
+    <inkml:context xml:id="ctx0">
+      <inkml:inkSource xml:id="inkSrc0">
+        <inkml:traceFormat>
+          <inkml:channel name="X" type="integer" min="-2.14748E9" max="2.14748E9" units="cm"/>
+          <inkml:channel name="Y" type="integer" min="-2.14748E9" max="2.14748E9" units="cm"/>
+        </inkml:traceFormat>
+        <inkml:channelProperties>
+          <inkml:channelProperty channel="X" name="resolution" value="1000" units="1/cm"/>
+          <inkml:channelProperty channel="Y" name="resolution" value="1000" units="1/cm"/>
+        </inkml:channelProperties>
+      </inkml:inkSource>
+      <inkml:timestamp xml:id="ts0" timeString="2026-04-07T04:47:22.622"/>
+    </inkml:context>
+    <inkml:brush xml:id="br0">
+      <inkml:brushProperty name="width" value="0.3" units="cm"/>
+      <inkml:brushProperty name="height" value="0.6" units="cm"/>
+      <inkml:brushProperty name="color" value="#FFFC00"/>
+      <inkml:brushProperty name="tip" value="rectangle"/>
+      <inkml:brushProperty name="rasterOp" value="maskPen"/>
+      <inkml:brushProperty name="ignorePressure" value="1"/>
+    </inkml:brush>
+  </inkml:definitions>
+  <inkml:trace contextRef="#ctx0" brushRef="#br0">4509 703,'-30'1,"0"1,1 1,-1 2,1 1,1 1,-1 1,1 2,0 1,-26 14,35-15,1 1,1 0,0 1,0 1,1 1,1 0,0 1,1 0,1 2,0-1,1 1,1 1,-13 28,21-40,0 0,0 1,1-1,0 1,1 0,-1-1,1 1,1 0,-1 0,1 0,0 0,2 10,-1-12,1 0,0-1,1 1,-1 0,1-1,0 1,0-1,0 0,0 0,1 0,0 0,0-1,0 1,0-1,0 0,1 0,-1-1,8 4,17 7,1 0,47 11,165 29,132-4,126-20,-129-27,0-17,656-112,-564 17,-358 79,131-60,-199 75,-2-2,0-2,-1-1,42-35,-65 47,-1 0,0-1,0-1,-1 1,0-2,-1 1,-1-1,0 0,10-22,-14 25,-1 1,0-1,0 0,-1 0,0 1,0-1,-1 0,0 0,-1 0,0 0,0 1,-1-1,0 0,-1 1,-5-15,0 7,-1 0,0 1,-1 0,-1 1,0 0,-1 0,-1 1,-20-17,0 4,-2 1,-1 1,-76-36,38 27,-2 3,-84-20,33 19,-151-17,-217 16,271 37,1 10,0 9,-279 67,252-27,4 11,-377 168,159-1,92 12,95-12,215-178,-62 84,97-112,2 2,-32 61,50-86,1 2,0-1,1 1,1 0,0 0,-3 29,6-36,1-1,1 1,-1-1,1 1,1-1,-1 1,1-1,1 0,-1 1,1-1,0 0,1-1,0 1,0-1,8 11,-1-5,1-1,1 1,0-2,0 0,1-1,0 0,0-1,18 7,10 3,1-2,1-2,59 10,-2-6,135 5,193-25,-219-13,0-9,296-73,-373 62,-2-6,-2-6,-2-6,221-126,-291 144,-1-3,-2-2,-2-2,-2-3,-2-2,76-96,-101 111,-2 0,-1-2,-2 0,-1-1,16-52,-24 57,-2 0,0-1,-2 0,-2 0,-1 0,-1 0,-4-42,0 45,-2 1,0-1,-2 1,-1 0,-1 1,-1 0,-2 0,0 2,-2-1,-32-44,22 41,0 1,-2 1,0 2,-2 0,-1 2,0 1,-2 1,-41-20,12 13,0 2,-2 3,-82-19,30 17,-222-17,148 34,-206 19,-299 81,353-19,-451 161,-288 219,477-128,130-16,136-40,119-55,191-185,2 0,1 2,-21 36,40-61,0 0,1 0,0 0,0 0,0 0,1 1,0-1,1 1,-1 0,2-1,-1 1,1 0,1 12,1-14,0 0,0 0,1 0,-1 0,1 0,1-1,-1 0,1 0,0 0,0 0,1 0,-1-1,1 0,0 0,0 0,1 0,6 3,16 8,0-1,2-2,-1 0,54 12,267 42,176-10,169-14,153-30,491-78,-17-113,-662 27,-175-15,-407 132,-1-2,86-58,-133 75,0-2,-2-1,0-1,36-42,-54 54,0-1,-1 1,0-1,-1-1,-1 0,0 0,-1 0,-1-1,0 0,-1 0,3-18,-6 24,0-1,-1 1,-1-1,1 1,-1 0,-1-1,0 1,0 0,-1 0,0 0,0 0,-1 0,0 1,-1-1,0 1,0 0,-1 1,-11-13,6 9,-1 0,-1 1,1 1,-2-1,1 2,-1 0,-27-11,10 8,-1 1,0 1,-34-4,-6 3,0 4,0 2,-1 4,-76 9,21 7,-183 48,132-12,3 8,2 7,4 8,2 7,5 7,-215 156,337-215,-43 40,78-65,1 1,-1-1,1 1,0 0,0 0,1 1,0-1,0 1,0 0,-3 9,7-13,-1-1,1 1,0-1,0 1,0 0,0-1,0 1,0-1,1 1,-1-1,1 1,0-1,0 0,1 4,1-1,0-1,0 0,0 0,1 0,-1 0,1 0,0-1,0 1,6 3,15 7,2 0,-1-2,1-1,1-1,43 9,363 61,287-7,290-14,239-27,695-71,-20-136,-1000 19,-264-14,-549 133,196-94,-274 114,-2-1,-1-2,0-1,-1-1,38-38,-60 51,0 1,0-1,-1 0,-1-1,1 0,-2 0,1 0,-1 0,-1-1,0 0,5-21,-8 23,-1 1,1-1,-2 1,1 0,-1-1,0 1,-1 0,0-1,0 1,-1 0,0 1,0-1,-1 0,0 1,-10-14,2 5,-1 1,0 1,-2 0,1 1,-2 0,0 1,-20-11,-6-1,-1 2,-1 1,-50-14,1 5,-135-23,-206-1,-110 40,-745 116,18 144,788-117,124-13,121-21,216-86,0 2,1 0,0 2,-19 15,39-27,-1 0,1 0,-1 1,1-1,0 1,-1-1,1 1,0-1,0 1,0 0,0 0,1-1,-1 1,-1 4,2-5,0 0,1 0,-1 0,0 0,0 0,1 0,-1 0,1 0,-1 0,1 0,-1 0,1 0,-1-1,1 1,0 0,-1 0,1 0,0-1,0 1,0-1,-1 1,1 0,0-1,2 1,15 6,1-1,-1-2,1 0,0 0,0-2,20 0,311 12,227-17,199-28,1864-261,-1965 156,-182-3,-420 114,-1-3,101-57,-155 76,-2-2,1 0,-1-1,-1 0,0-1,-1-1,0-1,21-28,-31 37,0-1,0 0,-1 0,0-1,0 1,-1-1,0 1,0-1,-1 0,1 0,-2 1,1-1,-1 0,-1 0,1 0,-1 0,-1 0,-2-9,-1 3,-1 1,0-1,-1 2,0-1,-1 1,0 0,-1 0,-1 1,-14-13,-6-3,-1 1,-1 2,-2 1,-43-23,-9 2,-148-54,-219-35,-147 18,-125 30,80 45,-2 28,-1134 126,1275-37,148-4,129-12,208-54,0 0,1 2,0 0,-20 13,37-21,1 0,0 1,0 0,-1-1,1 1,1 0,-1 0,0 0,0 0,1 0,-1 1,1-1,0 1,-3 4,4-6,0 1,0-1,0 1,0-1,0 1,0-1,1 1,-1-1,0 0,1 1,-1-1,1 1,-1-1,1 0,0 0,0 1,-1-1,1 0,0 0,2 2,7 5,0 0,1-1,-1-1,1 0,1 0,14 5,238 76,237 38,276 44,263 43,3390 544,-3821-672,-237-42,-336-39,1 0,54-5,-81-2,-11-2,-3 3,-1 0,1 0,-1 1,1 0,-11-4,-201-53,-196-20,-190-6,-156 5,-2437-45,2669 145,158 8,133 4,207-27,-1 2,-40 14,67-20,-1 0,1 0,0 0,0 0,0 0,0 0,0 1,0-1,0 1,0-1,0 1,1 0,-4 4,5-6,0 1,-1 0,1 0,0 0,0 0,0-1,0 1,0 0,0 0,0 0,0 0,0-1,1 1,-1 0,0 0,0 0,1-1,-1 1,0 0,1 0,-1-1,1 1,-1 0,1-1,-1 1,2 0,6 6,1-1,-1 0,1-1,0 0,17 6,163 55,127 19,109 15,1212 218,-1434-287,-174-27,-1-1,32-1,-58-2,0 0,-1 0,1-1,0 1,0 0,0-1,0 1,0-1,0 0,-1 0,3-1,-3 2,-1-1,0 1,1-1,-1 1,0 0,1-1,-1 1,0-1,0 1,0-1,1 1,-1-1,0 1,0-1,0 1,0-1,0 1,0-1,0 1,0-1,0 1,0-1,0 1,0-1,0 1,0-1,-1 1,1-1,0 1,-1-2,-4-5,-1 0,0 1,0 0,-1 0,1 0,-1 0,-16-8,-145-82,-126-39,-160-38,-174-35,-152-20,-903-205,-24 89,1066 249,122 39,117 25</inkml:trace>
+</inkml:ink>
+</file>
+
+<file path=ppt/ink/ink13.xml><?xml version="1.0" encoding="utf-8"?>
+<inkml:ink xmlns:inkml="http://www.w3.org/2003/InkML">
+  <inkml:definitions>
+    <inkml:context xml:id="ctx0">
+      <inkml:inkSource xml:id="inkSrc0">
+        <inkml:traceFormat>
+          <inkml:channel name="X" type="integer" min="-2.14748E9" max="2.14748E9" units="cm"/>
+          <inkml:channel name="Y" type="integer" min="-2.14748E9" max="2.14748E9" units="cm"/>
+        </inkml:traceFormat>
+        <inkml:channelProperties>
+          <inkml:channelProperty channel="X" name="resolution" value="1000" units="1/cm"/>
+          <inkml:channelProperty channel="Y" name="resolution" value="1000" units="1/cm"/>
+        </inkml:channelProperties>
+      </inkml:inkSource>
+      <inkml:timestamp xml:id="ts0" timeString="2026-04-07T04:49:00.821"/>
+    </inkml:context>
+    <inkml:brush xml:id="br0">
+      <inkml:brushProperty name="width" value="0.3" units="cm"/>
+      <inkml:brushProperty name="height" value="0.6" units="cm"/>
+      <inkml:brushProperty name="color" value="#FFFC00"/>
+      <inkml:brushProperty name="tip" value="rectangle"/>
+      <inkml:brushProperty name="rasterOp" value="maskPen"/>
+      <inkml:brushProperty name="ignorePressure" value="1"/>
+    </inkml:brush>
+  </inkml:definitions>
+  <inkml:trace contextRef="#ctx0" brushRef="#br0">1 1,'0'4,"0"2</inkml:trace>
+</inkml:ink>
+</file>
+
+<file path=ppt/ink/ink14.xml><?xml version="1.0" encoding="utf-8"?>
+<inkml:ink xmlns:inkml="http://www.w3.org/2003/InkML">
+  <inkml:definitions>
+    <inkml:context xml:id="ctx0">
+      <inkml:inkSource xml:id="inkSrc0">
+        <inkml:traceFormat>
+          <inkml:channel name="X" type="integer" min="-2.14748E9" max="2.14748E9" units="cm"/>
+          <inkml:channel name="Y" type="integer" min="-2.14748E9" max="2.14748E9" units="cm"/>
+        </inkml:traceFormat>
+        <inkml:channelProperties>
+          <inkml:channelProperty channel="X" name="resolution" value="1000" units="1/cm"/>
+          <inkml:channelProperty channel="Y" name="resolution" value="1000" units="1/cm"/>
+        </inkml:channelProperties>
+      </inkml:inkSource>
+      <inkml:timestamp xml:id="ts0" timeString="2026-04-07T04:49:45.198"/>
+    </inkml:context>
+    <inkml:brush xml:id="br0">
+      <inkml:brushProperty name="width" value="0.4" units="cm"/>
+      <inkml:brushProperty name="height" value="0.8" units="cm"/>
+      <inkml:brushProperty name="color" value="#FFFC00"/>
+      <inkml:brushProperty name="tip" value="rectangle"/>
+      <inkml:brushProperty name="rasterOp" value="maskPen"/>
+      <inkml:brushProperty name="ignorePressure" value="1"/>
+    </inkml:brush>
+  </inkml:definitions>
+  <inkml:trace contextRef="#ctx0" brushRef="#br0">9724 1005,'-398'-71,"143"22,-1000-81,-10 116,83 20,1130-3,0 2,0 3,-69 19,-8 1,123-27,-10 3,40-1,270-2,15-2,120 1,109-1,94 1,4309-1,-5199 1,-13 0,-123 0,-145 0,-156 0,-140 0,-107 0,-445-1,-1652 3,2470 2,122 8,113 7,27 14,211-18,-97 29,179-41,29-11,23-7,2 2,-1 2,43-6,139-19,89 4,90 7,1084-9,8 39,-1465-5,233 3,-475-4,-36-13,-92-17,-87-17,-95-19,-88-21,-337-63,-1156-158,1773 273,-20 9,287 27,56 2,16 2,51 12,28 6</inkml:trace>
+</inkml:ink>
+</file>
+
+<file path=ppt/ink/ink15.xml><?xml version="1.0" encoding="utf-8"?>
+<inkml:ink xmlns:inkml="http://www.w3.org/2003/InkML">
+  <inkml:definitions>
+    <inkml:context xml:id="ctx0">
+      <inkml:inkSource xml:id="inkSrc0">
+        <inkml:traceFormat>
+          <inkml:channel name="X" type="integer" min="-2.14748E9" max="2.14748E9" units="cm"/>
+          <inkml:channel name="Y" type="integer" min="-2.14748E9" max="2.14748E9" units="cm"/>
+        </inkml:traceFormat>
+        <inkml:channelProperties>
+          <inkml:channelProperty channel="X" name="resolution" value="1000" units="1/cm"/>
+          <inkml:channelProperty channel="Y" name="resolution" value="1000" units="1/cm"/>
+        </inkml:channelProperties>
+      </inkml:inkSource>
+      <inkml:timestamp xml:id="ts0" timeString="2026-04-07T04:49:47.200"/>
+    </inkml:context>
+    <inkml:brush xml:id="br0">
+      <inkml:brushProperty name="width" value="0.4" units="cm"/>
+      <inkml:brushProperty name="height" value="0.8" units="cm"/>
+      <inkml:brushProperty name="color" value="#FFFC00"/>
+      <inkml:brushProperty name="tip" value="rectangle"/>
+      <inkml:brushProperty name="rasterOp" value="maskPen"/>
+      <inkml:brushProperty name="ignorePressure" value="1"/>
+    </inkml:brush>
+  </inkml:definitions>
+  <inkml:trace contextRef="#ctx0" brushRef="#br0">1 0,'3'1,"1"-1,0 1,0 0,-1 0,1 0,-1 1,1-1,-1 1,1 0,-1 0,6 5,2 0,59 43,-2 3,76 75,-107-93,155 145,46 50,48 45,48 47,48 52,46 41,763 721,299 288,290 300,25-24,-1767-1666,409 373,13-22,-405-344,-2 3,-2 2,63 74,-5 14,-88-115,-21-19,1 0,-1 0,0 0,0 0,0 0,0 0,0 0,0 0,1 0,-1 0,0 0,0 0,0 0,0 0,0 0,1 0,-1 0,0 0,0 0,0 0,0-1,0 1,0 0,0 0,1 0,-1 0,0 0,0 0,0 0,0 0,0 0,0-1,0 1,0 0,0 0,0 0,0 0,1 0,-1 0,0-1,0 1,0 0,0 0,0 0,0 0,0 0,0 0,0-1,0 1,0 0,0 0,0 0,-1 0,-5-21,-3 3,0 0,-2 0,-24-32,-58-56,90 103,-189-186,-85-38,-100-32,-87-9,93 83,-7 17,-7 16,-798-198,650 246,63 56,340 44,-142 14,202-4,1 4,-1 3,2 2,-94 35,121-33,1 1,0 2,2 1,0 3,1 0,2 3,-64 61,68-54,1 2,1 1,2 1,2 1,-32 67,32-51,3 2,3 0,-23 111,29-79,3-1,4 2,4-1,4 0,27 174,-12-171,5-1,3-1,5-2,3-1,4-1,70 118,-44-103,5-4,4-2,4-4,156 146,-84-109,177 119,291 127,121-29,-322-187,6-19,6-19,823 122,-476-179,-99-78,-523-1,253-58,-316 50,-1-4,162-75,-198 76,-2-2,0-2,-2-2,53-49,-68 51,-2-1,-1-2,-1 0,-2-2,-2-1,-1-1,-2-2,-2 0,29-79,-37 79,-2 1,-1-1,-3-1,-1 0,-1 1,-3-1,-1 0,-2 0,-2 0,-18-79,8 70,-3 0,-1 1,-3 1,-49-85,31 72,-3 3,-2 1,-55-54,9 25,-3 4,-4 4,-205-125,132 106,-4 8,-4 8,-359-111,335 138,-3 9,-1 9,-321-15,361 47,1 7,-1 7,2 7,-290 69,347-56,2 5,1 5,-105 56,136-56,2 3,2 3,1 3,-101 96,123-99,3 2,1 1,3 3,-42 71,64-93,1 0,1 2,2 0,1 0,1 2,2-1,2 1,1 0,-3 49,9-71,0 0,1 0,0 0,1 0,0-1,1 1,0 0,1-1,0 0,1 0,0 0,12 17,-7-15,0-1,1 0,0-1,1-1,1 1,-1-2,1 0,1 0,22 9,7 2,2-2,54 14,175 27,96-21,-83-27,1-14,0-12,311-57,-132-30,-72-28,-300 91,113-65,-162 77,-2-2,57-47,-79 56,-1 0,-1-1,-1-1,-1-1,22-36,-31 46,-2-1,1-1,-2 0,0 0,-1 0,0 0,-2-1,1 0,-2 0,0 0,-1 0,-1 0,0 0,-1 0,-1 0,0 0,-1 0,-1 1,-1-1,0 1,-1 0,0 0,-1 1,-1-1,-15-20,4 10,-1 1,-1 0,-1 2,-1 1,-1 0,-1 2,0 1,-38-20,13 12,-1 3,-2 1,-108-28,78 32,-159-16,92 27,0 6,0 7,-284 48,238-13,2 9,-270 106,67 24,71 12,82-15,78-33,142-121,2 1,-28 37,47-57,0 0,0 0,1 0,-1 0,1 1,0-1,1 1,-1 0,1-1,0 1,-1 8,2-12,0 0,0 0,0 0,0 0,1-1,-1 1,0 0,1 0,-1 0,0-1,1 1,-1 0,1-1,-1 1,1 0,-1-1,1 1,0 0,-1-1,1 1,0-1,0 1,-1-1,2 1,1 0,0-1,0 1,0 0,0-1,1 0,-1 0,0 0,0 0,0-1,5 0,12-4,-1-1,1-1,-1-1,21-12,139-87,-60 19,-3-5,-4-4,-5-6,-5-4,-4-4,-5-5,-5-3,86-157,-142 219,-2-1,-3-2,35-115,-58 161,0 0,-1-1,-1 1,-1-1,0 1,0-1,-2 0,-2-20,1 29,1 1,-1-1,0 1,0-1,-1 1,0 0,0 0,0 0,0 0,-1 0,0 1,0 0,0 0,0 0,-1 0,1 0,-1 1,0 0,0 0,-1 0,1 1,0 0,-11-3,-5 0,-1 0,0 2,0 0,-41 1,1 4,-101 16,13 11,2 6,-220 84,-265 161,350-132,-92 75,354-209,1 1,-25 23,43-37,1 1,-1 0,0 0,1 0,-1 0,1 0,0 1,0-1,-1 0,0 4,2-5,0-1,0 1,0 0,0-1,0 1,0-1,0 1,0-1,0 1,0-1,1 1,-1-1,0 1,0-1,0 1,1-1,-1 1,0-1,1 1,-1-1,0 1,1-1,-1 0,0 1,1-1,-1 0,1 1,-1-1,2 1,2 0,0 0,0 0,1-1,-1 1,0-1,1 0,-1 0,0 0,0-1,8-1,10-3,-1-1,0-1,0-1,30-16,80-52,21-27</inkml:trace>
+</inkml:ink>
+</file>
+
+<file path=ppt/ink/ink16.xml><?xml version="1.0" encoding="utf-8"?>
+<inkml:ink xmlns:inkml="http://www.w3.org/2003/InkML">
+  <inkml:definitions>
+    <inkml:context xml:id="ctx0">
+      <inkml:inkSource xml:id="inkSrc0">
+        <inkml:traceFormat>
+          <inkml:channel name="X" type="integer" min="-2.14748E9" max="2.14748E9" units="cm"/>
+          <inkml:channel name="Y" type="integer" min="-2.14748E9" max="2.14748E9" units="cm"/>
+        </inkml:traceFormat>
+        <inkml:channelProperties>
+          <inkml:channelProperty channel="X" name="resolution" value="1000" units="1/cm"/>
+          <inkml:channelProperty channel="Y" name="resolution" value="1000" units="1/cm"/>
+        </inkml:channelProperties>
+      </inkml:inkSource>
+      <inkml:timestamp xml:id="ts0" timeString="2026-04-07T05:08:29.559"/>
+    </inkml:context>
+    <inkml:brush xml:id="br0">
+      <inkml:brushProperty name="width" value="0.3" units="cm"/>
+      <inkml:brushProperty name="height" value="0.6" units="cm"/>
+      <inkml:brushProperty name="color" value="#FFFC00"/>
+      <inkml:brushProperty name="tip" value="rectangle"/>
+      <inkml:brushProperty name="rasterOp" value="maskPen"/>
+      <inkml:brushProperty name="ignorePressure" value="1"/>
+    </inkml:brush>
+  </inkml:definitions>
+  <inkml:trace contextRef="#ctx0" brushRef="#br0">1857 693,'392'27,"-195"-8,96 1,70-4,67-4,2821 1,-2152-16,-1089 3,34-2,-44 2,0 0,-1 0,1 0,0 0,0 0,0-1,0 1,0 0,0 0,0 0,0 0,0 0,0 0,0 0,0 0,0 0,0-1,-1 1,1 0,0 0,0 0,0 0,0 0,0 0,0 0,0-1,0 1,0 0,0 0,0 0,1 0,-1 0,0 0,0 0,0 0,0-1,0 1,0 0,0 0,0 0,0 0,0 0,0 0,0 0,0 0,1 0,-1 0,0 0,0-1,0 1,0 0,0 0,0 0,0 0,0 0,1 0,-1 0,0 0,0 0,0 0,0 0,0 0,0 0,1 0,-27-9,-242-46,196 42,-246-44,-96-18,-89-19,-1178-198,-25 116,793 157,9 31,488-5,391-6,0 2,0 0,0 1,1 2,0 1,-26 10,-127 68,116-54,40-20,-14 5,2 2,0 1,0 2,-42 36,25-5</inkml:trace>
+</inkml:ink>
+</file>
+
+<file path=ppt/ink/ink17.xml><?xml version="1.0" encoding="utf-8"?>
+<inkml:ink xmlns:inkml="http://www.w3.org/2003/InkML">
+  <inkml:definitions>
+    <inkml:context xml:id="ctx0">
+      <inkml:inkSource xml:id="inkSrc0">
+        <inkml:traceFormat>
+          <inkml:channel name="X" type="integer" min="-2.14748E9" max="2.14748E9" units="cm"/>
+          <inkml:channel name="Y" type="integer" min="-2.14748E9" max="2.14748E9" units="cm"/>
+        </inkml:traceFormat>
+        <inkml:channelProperties>
+          <inkml:channelProperty channel="X" name="resolution" value="1000" units="1/cm"/>
+          <inkml:channelProperty channel="Y" name="resolution" value="1000" units="1/cm"/>
+        </inkml:channelProperties>
+      </inkml:inkSource>
+      <inkml:timestamp xml:id="ts0" timeString="2026-04-07T05:08:31.777"/>
+    </inkml:context>
+    <inkml:brush xml:id="br0">
+      <inkml:brushProperty name="width" value="0.3" units="cm"/>
+      <inkml:brushProperty name="height" value="0.6" units="cm"/>
+      <inkml:brushProperty name="color" value="#FFFC00"/>
+      <inkml:brushProperty name="tip" value="rectangle"/>
+      <inkml:brushProperty name="rasterOp" value="maskPen"/>
+      <inkml:brushProperty name="ignorePressure" value="1"/>
+    </inkml:brush>
+  </inkml:definitions>
+  <inkml:trace contextRef="#ctx0" brushRef="#br0">3254 509,'-37'63,"2"3,4 1,-27 82,-45 214,63-183,9 1,-10 198,36-251,5 1,6-1,40 228,-39-314,3-1,1 0,30 72,-38-106,1 1,0-1,1 0,-1-1,1 1,0-1,1 0,-1 0,1 0,1-1,10 8,-10-10,-1 0,1 0,0-1,-1 0,1 0,0 0,0-1,0 0,1-1,-1 1,0-1,0-1,11-1,4-2,0-1,0-1,0-1,-1-1,0-1,0 0,26-18,1-5,78-66,-78 55,-2-2,-3-1,74-103,-89 108,-2-2,-3-1,-1 0,-2-2,24-80,-38 105,-1 0,-1-1,1-23,-5 41,1 0,-1 0,0-1,0 1,-1 0,1-1,-1 1,0 0,0 0,-1 0,1 0,-1 0,0 0,0 0,0 1,0-1,-1 0,1 1,-1 0,0 0,0 0,-4-3,-3 1,1 1,-1 0,-1 1,1 0,0 0,-1 1,0 1,1 0,-1 0,-11 2,-24-1,1 2,-1 3,1 1,0 2,0 2,-77 29,39-5,1 3,-115 72,105-52,-120 99,175-125,2 2,0 1,3 2,1 1,-44 69,72-103,1 1,0 0,0 0,1 0,-1 0,1 0,-2 8,3-12,0 1,0 0,0-1,0 1,0 0,0-1,0 1,0 0,0-1,1 1,-1 0,0-1,0 1,0 0,1-1,-1 1,0-1,1 1,-1 0,1-1,-1 1,1-1,-1 1,1-1,-1 0,1 1,-1-1,1 1,0-1,3 0,-1 0,1 0,-1 0,1 0,-1-1,1 0,-1 0,0 0,1 0,-1 0,0-1,0 0,0 1,0-1,0 0,0 0,4-5,15-12,0 0,-2-2,0 0,-2-1,27-41,64-136,-67 109,-4-2,50-186,-73 216,-3-1,-3 0,-3-1,-2 0,-8-106,1 138,-2 1,-1 0,-2 1,-1 0,-13-32,13 43,0 0,-1 1,-1 0,-1 1,-1 0,0 1,-1 0,-26-22,18 20,-2 1,0 2,-1 0,-1 2,0 1,-1 0,0 2,-32-7,6 5,-1 2,-1 3,-81-1,56 10,0 3,1 4,-1 4,2 2,0 4,-125 49,87-20,2 6,3 4,-163 113,171-96,4 4,3 4,-145 165,181-177,4 2,3 3,3 2,4 3,-66 158,94-189,1 0,3 1,2 1,2 0,-3 59,12-78,1 0,1 0,2 0,2 0,0-1,2 0,2 0,1 0,19 41,-9-34,2-1,2 0,1-2,2-1,2-1,0-1,3-2,68 53,-18-25,3-5,175 84,169 32,-213-103,4-11,1-8,2-11,2-9,239-2,-333-26,0-6,0-5,-1-6,-1-6,128-41,-180 39,0-5,-1-2,108-65,-127 61,-2-3,-1-2,-2-2,85-92,-83 69,-2-3,-3-1,-4-3,-3-1,-3-3,-3-1,49-160,-52 116,-6-2,-5 0,-5-1,0-223,-19 221,-6 1,-5 1,-6 0,-5 1,-6 2,-58-155,56 200,-2 1,-5 2,-2 2,-62-82,63 103,-2 1,-2 3,-2 1,-2 3,-2 2,-56-35,59 46,-2 3,-1 2,-1 2,-1 2,0 2,-2 3,0 2,-77-9,81 18,-1 1,1 3,-1 3,1 1,-1 3,2 2,-1 2,1 2,-67 26,59-13,1 3,2 2,1 2,1 3,2 1,2 3,1 2,2 2,-56 69,38-31,4 2,3 3,4 2,-79 187,88-163,5 2,5 1,5 2,5 0,5 2,6 0,5 1,9 137,7-129,7-1,5 0,5-1,6-2,5-1,6-2,91 183,-53-155,190 263,-124-226,208 204,292 184,-277-298,12-15,11-18,10-16,558 224,-59-132,-24-108,-51-114,-610-91,313-29,-373 4,0-6,175-53,-222 44,-1-5,202-104,-240 103,-1-4,-2-3,-2-2,-3-4,-1-2,75-89,-90 86,-2-2,-3-2,-3-1,-3-2,-2-2,-4-1,26-84,-32 65,-3-2,-4-1,-5 0,-3-1,-4 0,-4-1,-4 1,-4 0,-4 1,-44-170,26 157,-6 2,-3 1,-5 1,-4 3,-4 2,-4 2,-5 3,-3 2,-78-82,41 67,-4 4,-4 5,-4 4,-4 6,-3 5,-3 5,-4 5,-172-65,170 86,-2 5,-1 6,-188-26,199 48,1 5,-1 5,0 5,-128 19,153-6,1 4,-100 33,129-29,1 2,1 3,-108 65,135-69,2 1,1 2,0 1,2 2,2 1,0 1,-26 39,36-42,2 1,1 0,1 1,2 1,0 0,3 1,0 0,2 0,-6 64,11-54,2 0,2 0,1 0,3 0,1 0,2-1,2 0,2 0,1-1,37 74,-13-47,3-1,2-2,4-2,2-2,80 77,264 202,187 61,208 63,206 44,162 9,685 176,28-146,-881-332,-261-114,-640-93,1-4,0-4,124-17,-187 14,0-1,0 0,0-2,-1-1,0-1,-1 0,0-2,0-1,34-25,-45 28,0-1,-1 0,0-1,-1 0,0 0,-1-1,0 0,-1-1,0 1,-1-1,0-1,-1 1,6-28,-7 13,0 0,-2-1,-1 1,-2-1,0 1,-6-29,-6-16,-3 0,-3 1,-3 0,-52-113,19 73,-6 1,-77-107,50 99,-4 3,-6 4,-150-133,106 124,-5 6,-202-120,137 114,-287-121,-243-25,-74 74,614 164,-1 8,-219 7,307 16,1 6,0 5,1 5,-179 51,219-45,2 3,1 3,1 3,2 3,2 2,1 4,-110 95,102-68,4 2,3 4,3 3,3 2,-49 91,27-22,6 4,-60 178,80-173,8 2,6 3,8 1,6 1,-7 292,33-379,5 0,2-1,30 135,-27-176,1-1,2 0,2-1,1 0,1-1,2-1,1-1,2 0,1-2,27 28,-20-29,1-1,2-2,0-2,2 0,0-3,1 0,1-3,76 26,-51-24,1-3,0-3,2-3,122 4,-128-14,0-2,-1-3,1-3,-1-2,65-20,-78 15,-1-1,0-2,-1-2,-1-1,-1-3,-1-1,37-31,-40 24,0-2,-3-1,0-2,-3 0,36-59,-33 41,-3-3,-2 0,31-97,-30 53,-4-1,-5-1,-5-1,4-192,-19 152,-7 1,-7 1,-33-153,24 196,-3 1,-6 1,-3 1,-5 2,-58-101,64 140,-2 1,-2 2,-3 2,-1 1,-3 3,-2 2,-2 1,-58-39,60 52,0 2,-2 2,-2 2,0 2,-1 3,-1 2,0 2,-2 3,-94-12,78 20,0 3,0 4,0 2,1 4,-1 2,-125 37,112-20,1 4,2 3,1 4,1 4,-80 57,49-11,33-24,21-17,41-33,0-1,0 0,-1-2,-1 1,0-2,0 0,-1-1,-22 7,2-7</inkml:trace>
+</inkml:ink>
+</file>
+
+<file path=ppt/ink/ink18.xml><?xml version="1.0" encoding="utf-8"?>
+<inkml:ink xmlns:inkml="http://www.w3.org/2003/InkML">
+  <inkml:definitions>
+    <inkml:context xml:id="ctx0">
+      <inkml:inkSource xml:id="inkSrc0">
+        <inkml:traceFormat>
+          <inkml:channel name="X" type="integer" min="-2.14748E9" max="2.14748E9" units="cm"/>
+          <inkml:channel name="Y" type="integer" min="-2.14748E9" max="2.14748E9" units="cm"/>
+        </inkml:traceFormat>
+        <inkml:channelProperties>
+          <inkml:channelProperty channel="X" name="resolution" value="1000" units="1/cm"/>
+          <inkml:channelProperty channel="Y" name="resolution" value="1000" units="1/cm"/>
+        </inkml:channelProperties>
+      </inkml:inkSource>
+      <inkml:timestamp xml:id="ts0" timeString="2026-04-07T05:08:34.292"/>
+    </inkml:context>
+    <inkml:brush xml:id="br0">
+      <inkml:brushProperty name="width" value="0.3" units="cm"/>
+      <inkml:brushProperty name="height" value="0.6" units="cm"/>
+      <inkml:brushProperty name="color" value="#FFFC00"/>
+      <inkml:brushProperty name="tip" value="rectangle"/>
+      <inkml:brushProperty name="rasterOp" value="maskPen"/>
+      <inkml:brushProperty name="ignorePressure" value="1"/>
+    </inkml:brush>
+  </inkml:definitions>
+  <inkml:trace contextRef="#ctx0" brushRef="#br0">1672 2062,'-271'479,"206"-340,-74 225,133-344,3-14,0 0,1 0,0 0,1 0,-1 1,1-1,0 1,1-1,-1 0,1 1,1-1,0 9,0-15,-1 1,0 0,0-1,1 1,-1-1,0 1,1-1,-1 0,0 1,1-1,-1 1,1-1,-1 0,1 1,-1-1,1 0,-1 1,1-1,-1 0,1 0,-1 0,1 0,0 1,-1-1,1 0,-1 0,1 0,-1 0,1 0,0 0,-1 0,1 0,-1-1,1 1,-1 0,1 0,0 0,-1-1,1 1,-1 0,1 0,-1-1,0 1,1-1,-1 1,1 0,-1-1,0 1,1-1,-1 1,1-1,25-31,-11 4,-2-1,0 0,-2 0,-2-2,13-60,-1-29,-6 0,-4-2,-6 1,-13-168,-8 130,-7 0,-79-289,46 274,-103-223,101 276,-5 3,-119-165,159 250,-1 2,-2 1,-1 1,-1 1,-43-33,64 56,-1-1,0 1,0 1,-1-1,1 2,-1-1,0 1,0 0,-18-3,21 6,0 0,0 0,0 1,0-1,0 1,0 0,0 1,0 0,1 0,-1 0,0 0,1 1,0 0,0 0,0 1,-6 4,-7 8,1 1,0 1,1 0,1 1,1 1,1 0,1 1,-15 32,1 8,-33 119,42-118,3 0,3 1,2 1,4 0,3 104,4-130,3 0,1 0,2 0,1-1,2 0,2-1,1 0,1-1,3 0,35 53,-23-49,2-1,2-2,1-1,2-1,1-2,1-2,2-2,79 42,-47-35,1-2,1-4,2-3,129 26,-150-42,0-2,1-2,1-3,77-6,-108 1,0-2,0 0,-1-2,0 0,0-2,0-1,-1-1,0-2,-1 0,-1-1,28-21,-38 23,-1 0,-1 0,1-1,-2-1,0 0,-1 0,0-1,-1 0,0 0,-1-1,-1 0,0-1,4-17,-5 9,-1 0,-1 0,-1 0,-1 0,-1-1,-1 1,-1 0,-6-26,6 39,-1-1,0 1,-1 0,0 0,0 0,-7-11,8 18,1 0,-1 0,0 1,0-1,0 1,-1 0,1 0,-1 0,1 0,-1 1,0-1,0 1,0 0,-1 0,1 0,0 1,-9-2,2 1,0 2,0-1,0 1,0 1,0 0,0 1,0 0,1 0,-1 1,1 1,-1 0,1 0,-11 7,15-8,0 0,0 1,1-1,-1 1,1 0,0 1,0-1,1 1,-1 0,1 0,0 1,0-1,1 1,0 0,0 0,0 0,0 0,1 1,0-1,1 1,-1-1,0 13,2-16,1 0,-1-1,1 1,0 0,0-1,0 1,0-1,0 1,0-1,1 1,-1-1,1 0,0 1,0-1,-1 0,1 0,1 0,-1-1,0 1,0-1,1 1,-1-1,1 1,2 0,-3-1,1 0,-1 0,0 0,1-1,-1 1,1 0,-1-1,1 0,-1 0,1 1,-1-2,1 1,-1 0,1 0,-1-1,1 1,-1-1,0 0,1 0,-1 0,0 0,1 0,-1 0,0-1,4-2,-6 4,0-1,1 1,-1 0,0 0,0-1,1 1,-1 0,0-1,0 1,1 0,-1-1,0 1,0 0,0-1,1 1,-1 0,0-1,0 1,0-1,0 1,0 0,0-1,0 1,0-1,0 1,0 0,0-1,0 1,0-1,0 1,0 0,-1-1,1 1,0 0,0-1,0 1,-1-1,1 1,0 0,0 0,-1-1,1 1,0 0,-1-1,1 1,0 0,-1 0,1 0,0-1,-1 1,1 0,0 0,-1 0,1 0,-1 0,1 0,0 0,-1 0,1 0,-1 0,1 0,0 0,-1 0,-29 0,18 4,1 0,0 0,1 1,-1 0,1 1,0 0,0 1,1 0,0 0,0 1,-10 13,4-5,2 0,0 1,1 1,1 0,-14 30,23-43,-4 8,1 1,-6 20,10-31,1 0,-1-1,1 1,-1 0,1 0,0 0,0-1,0 1,1 0,-1 0,1 0,-1-1,1 1,0 0,0-1,0 1,0 0,1-1,1 3,-3-4,1 0,-1-1,1 1,0 0,-1-1,1 1,-1 0,1-1,0 1,-1-1,1 1,0-1,0 0,0 1,-1-1,1 0,0 1,0-1,0 0,-1 0,1 0,0 0,0 0,0 0,0 0,1 0,-1-1,1 0,-1 1,0-1,0 0,0 0,0 0,0 0,0 0,0 0,0 0,0 0,-1 0,1-1,1-1,1-5,0 0,0 0,-1 0,2-11,2-12,-2-1,-2 0,0 0,-3 0,-7-59,6 76,-1 0,-1 0,0 1,-1-1,-1 1,0 0,-1 1,-1-1,0 1,0 1,-2 0,1 0,-1 1,-18-16,-4 4,-2 1,0 2,-1 1,-48-18,-3 1</inkml:trace>
+</inkml:ink>
+</file>
+
+<file path=ppt/ink/ink19.xml><?xml version="1.0" encoding="utf-8"?>
+<inkml:ink xmlns:inkml="http://www.w3.org/2003/InkML">
+  <inkml:definitions>
+    <inkml:context xml:id="ctx0">
+      <inkml:inkSource xml:id="inkSrc0">
+        <inkml:traceFormat>
+          <inkml:channel name="X" type="integer" min="-2.14748E9" max="2.14748E9" units="cm"/>
+          <inkml:channel name="Y" type="integer" min="-2.14748E9" max="2.14748E9" units="cm"/>
+        </inkml:traceFormat>
+        <inkml:channelProperties>
+          <inkml:channelProperty channel="X" name="resolution" value="1000" units="1/cm"/>
+          <inkml:channelProperty channel="Y" name="resolution" value="1000" units="1/cm"/>
+        </inkml:channelProperties>
+      </inkml:inkSource>
+      <inkml:timestamp xml:id="ts0" timeString="2026-04-07T05:10:37.372"/>
+    </inkml:context>
+    <inkml:brush xml:id="br0">
+      <inkml:brushProperty name="width" value="0.4" units="cm"/>
+      <inkml:brushProperty name="height" value="0.8" units="cm"/>
+      <inkml:brushProperty name="color" value="#FFFC00"/>
+      <inkml:brushProperty name="tip" value="rectangle"/>
+      <inkml:brushProperty name="rasterOp" value="maskPen"/>
+      <inkml:brushProperty name="ignorePressure" value="1"/>
+    </inkml:brush>
+  </inkml:definitions>
+  <inkml:trace contextRef="#ctx0" brushRef="#br0">13628 879,'0'-2,"0"1,0 0,0 0,-1-1,1 1,-1 0,1 0,-1-1,1 1,-1 0,0 0,1 0,-1 0,0 0,0 0,0 0,0 0,0 0,0 1,-1-2,-26-13,22 13,-46-19,-1 2,-88-19,113 32,-892-161,571 113,-246-41,-122-13,-98 3,-870-39,-10 78,-5 51,2 27,424-2,894-8,-847-2,1080-4,43-2</inkml:trace>
+</inkml:ink>
+</file>
+
 <file path=ppt/ink/ink2.xml><?xml version="1.0" encoding="utf-8"?>
 <inkml:ink xmlns:inkml="http://www.w3.org/2003/InkML">
   <inkml:definitions>
@@ -198,6 +498,93 @@
     </inkml:brush>
   </inkml:definitions>
   <inkml:trace contextRef="#ctx0" brushRef="#br0">39 796,'-7'20,"0"1,1 0,1 0,2 0,0 0,1 1,1 34,-1-10,0-21,1-1,1 1,2 0,0-1,11 46,-12-64,1-1,0 0,0 1,0-1,1 0,0 0,0 0,0 0,0-1,1 1,0-1,0 0,0 0,0 0,1-1,0 1,-1-1,1 0,0 0,1-1,-1 0,0 0,1 0,-1 0,1-1,0 0,-1 0,1-1,0 1,11-2,2-1,0-1,-1 0,1-2,-1 0,0-1,0-1,-1 0,0-2,0 0,20-14,9-10,-2-2,50-48,-48 37,81-100,-113 126,0-1,0 0,-2 0,-1-1,-1-1,0 0,-2 0,7-33,-14 55,-1 0,1 0,-1-1,0 1,1-1,-1 1,0 0,0-1,0 1,0-1,0 1,0 0,0-1,-1 1,1-1,0 1,-1 0,1-1,-1 1,0 0,1 0,-1-1,0 1,0 0,1 0,-1 0,-2-2,1 3,1 0,0 1,-1-1,1 0,-1 0,1 1,0-1,-1 1,1 0,0-1,0 1,-1 0,1-1,0 1,0 0,0 0,0 0,0 0,0 0,0 0,0 1,1-1,-1 0,0 0,0 3,-5 6,1-1,0 1,1 1,0-1,1 1,0-1,-3 18,6-26,-1 1,1-1,0 1,0-1,-1 0,1 1,1-1,-1 1,0-1,1 0,-1 1,1-1,0 0,-1 0,1 1,0-1,1 0,-1 0,0 0,0 0,1 0,0 0,-1-1,1 1,0 0,0-1,-1 1,1-1,0 0,1 1,-1-1,0 0,0-1,0 1,1 0,-1 0,0-1,1 0,-1 1,1-1,3 0,5-1,0 1,-1-2,1 1,0-2,-1 1,0-1,17-8,1-2,44-28,-9-4,-2-2,-2-4,-2-1,-3-3,-2-3,-3-2,66-102,-102 142,-1-1,16-39,-26 53,1-1,-1 0,0 1,0-1,-1 0,0 0,-1 0,0 0,0 0,0 0,-3-12,-9-4,3 22,0 16,5 7,0-1,1 1,1 1,2 33,-1-31,-1 39,-1-13,3 0,1 0,3 0,15 78,-17-119,1 0,0 0,0 0,1-1,0 1,1-1,0 0,7 8,-10-13,1 0,0-1,0 1,0-1,0 1,0-1,0 0,1-1,-1 1,1 0,-1-1,1 0,-1 0,1 0,0 0,0 0,0-1,-1 0,1 0,0 0,0 0,6-2,2-1,0 0,-1-1,1-1,-1 0,0-1,0 0,-1 0,1-1,-1-1,-1 0,10-10,-7 7,-1 0,-1-1,0-1,-1 1,0-2,0 1,-2-1,9-20,-15 31,0 1,-1-1,1 0,0 1,-1-1,0 0,1 1,-1-1,0 0,-1 0,1 1,0-1,-1 0,1 1,-1-1,0 0,0 1,0-1,0 1,-1-1,1 1,-2-3,1 4,1 0,-1 0,1 0,-1 0,1 0,-1 0,0 1,1-1,-1 1,0-1,0 1,1-1,-1 1,0 0,0 0,0 0,1 0,-1 0,0 1,0-1,1 0,-1 1,0-1,0 1,1 0,-1 0,1-1,-1 1,1 0,-1 0,1 0,-1 1,1-1,-2 3,-10 9,1 0,0 2,1-1,1 1,0 1,1 0,-13 33,-1-2,12-25,1-7,2 0,0 1,1 0,0 1,1 0,1 0,1 0,1 0,-3 29,6-45,-1 0,1 0,0 1,0-1,0 0,0 1,0-1,0 0,1 1,-1-1,0 0,1 0,-1 1,1-1,-1 0,1 0,-1 0,1 0,0 0,0 1,-1-1,1-1,0 1,0 0,0 0,0 0,0 0,0-1,0 1,1 0,-1-1,0 1,0-1,3 1,-3 0,0-1,0 1,0-1,0 1,0 0,0 0,0-1,0 1,0 0,0 0,-1 0,1 0,0 0,-1 0,1 0,0 0,-1 0,0 1,1-1,-1 0,1 0,-1 0,0 0,0 1,0-1,0 0,0 0,0 1,0 1,-7 47,4-33,-33 165,-11 79,46-255,0 1,1 0,0-1,0 1,0 0,1-1,3 13,-4-17,1-1,0 1,0-1,0 1,0-1,0 0,0 1,0-1,0 0,1 0,-1 0,1 0,-1 0,0 0,1 0,-1 0,1-1,0 1,-1-1,1 1,0-1,-1 1,1-1,0 0,-1 0,1 0,0 0,-1 0,1 0,0-1,-1 1,1 0,0-1,-1 0,1 1,-1-1,3-1,26-10,0-2,-1-2,0 0,48-38,-69 49,221-176,-197 152,-1-1,-2-2,-2-1,42-65,-37 32,-30 62,-1 0,0 0,1 0,-2 0,1 0,0 0,-1 0,0 0,0 0,0 0,-1 0,1 0,-2-7,1 11,1-1,0 0,0 0,-1 0,1 1,-1-1,1 0,-1 0,1 1,-1-1,1 0,-1 1,0-1,1 1,-1-1,0 1,1-1,-1 1,0-1,0 1,1 0,-1-1,0 1,0 0,0 0,0 0,0-1,1 1,-1 0,0 0,0 0,0 1,0-1,0 0,1 0,-1 0,0 0,0 1,-1 0,-33 22,8 4,2 1,1 1,-38 60,-15 20,58-90,18-19,1 0,0 0,0 1,0-1,0 0,-1 0,1 0,0 0,0 0,-1 1,1-1,0 0,0 0,-1 0,1 0,0 0,0 0,0 0,-1 0,1 0,0 0,0 0,-1 0,1 0,0 0,0 0,-1 0,1 0,0 0,0 0,-1-1,1 1,0 0,0 0,0 0,-1 0,1 0,0-1,-1-34,2 14,1-17,-1 0,-3 1,-1-1,-1 1,-2 0,-2 0,-16-47,22 78,-1 0,0 1,0-1,0 1,-1 0,1-1,-1 2,0-1,-1 0,1 1,-1 0,0 0,0 0,0 1,-1 0,1 0,-1 0,0 0,1 1,-1 0,0 0,0 1,-1 0,-11-1,-4 2,0 0,1 2,-1 1,1 1,-1 0,-20 8,-29 11,1 2,1 4,-111 64,62-20,-118 96,200-142,-1-3,-1 0,-1-3,-44 17,66-30,0 0,0 1,0 1,1 1,1 0,0 1,0 0,-15 19,25-25,0 0,0 0,1 1,0-1,0 1,0 0,1 0,0 0,1 0,0 1,0-1,0 1,1 0,0-1,1 1,-1 0,2 0,-1-1,1 1,0 0,0-1,1 1,3 8,20 36</inkml:trace>
+</inkml:ink>
+</file>
+
+<file path=ppt/ink/ink20.xml><?xml version="1.0" encoding="utf-8"?>
+<inkml:ink xmlns:inkml="http://www.w3.org/2003/InkML">
+  <inkml:definitions>
+    <inkml:context xml:id="ctx0">
+      <inkml:inkSource xml:id="inkSrc0">
+        <inkml:traceFormat>
+          <inkml:channel name="X" type="integer" min="-2.14748E9" max="2.14748E9" units="cm"/>
+          <inkml:channel name="Y" type="integer" min="-2.14748E9" max="2.14748E9" units="cm"/>
+        </inkml:traceFormat>
+        <inkml:channelProperties>
+          <inkml:channelProperty channel="X" name="resolution" value="1000" units="1/cm"/>
+          <inkml:channelProperty channel="Y" name="resolution" value="1000" units="1/cm"/>
+        </inkml:channelProperties>
+      </inkml:inkSource>
+      <inkml:timestamp xml:id="ts0" timeString="2026-04-07T05:10:38.098"/>
+    </inkml:context>
+    <inkml:brush xml:id="br0">
+      <inkml:brushProperty name="width" value="0.4" units="cm"/>
+      <inkml:brushProperty name="height" value="0.8" units="cm"/>
+      <inkml:brushProperty name="color" value="#FFFC00"/>
+      <inkml:brushProperty name="tip" value="rectangle"/>
+      <inkml:brushProperty name="rasterOp" value="maskPen"/>
+      <inkml:brushProperty name="ignorePressure" value="1"/>
+    </inkml:brush>
+  </inkml:definitions>
+  <inkml:trace contextRef="#ctx0" brushRef="#br0">1 0,'0'0</inkml:trace>
+</inkml:ink>
+</file>
+
+<file path=ppt/ink/ink21.xml><?xml version="1.0" encoding="utf-8"?>
+<inkml:ink xmlns:inkml="http://www.w3.org/2003/InkML">
+  <inkml:definitions>
+    <inkml:context xml:id="ctx0">
+      <inkml:inkSource xml:id="inkSrc0">
+        <inkml:traceFormat>
+          <inkml:channel name="X" type="integer" min="-2.14748E9" max="2.14748E9" units="cm"/>
+          <inkml:channel name="Y" type="integer" min="-2.14748E9" max="2.14748E9" units="cm"/>
+        </inkml:traceFormat>
+        <inkml:channelProperties>
+          <inkml:channelProperty channel="X" name="resolution" value="1000" units="1/cm"/>
+          <inkml:channelProperty channel="Y" name="resolution" value="1000" units="1/cm"/>
+        </inkml:channelProperties>
+      </inkml:inkSource>
+      <inkml:timestamp xml:id="ts0" timeString="2026-04-07T05:16:09.822"/>
+    </inkml:context>
+    <inkml:brush xml:id="br0">
+      <inkml:brushProperty name="width" value="0.3" units="cm"/>
+      <inkml:brushProperty name="height" value="0.6" units="cm"/>
+      <inkml:brushProperty name="color" value="#FFFC00"/>
+      <inkml:brushProperty name="tip" value="rectangle"/>
+      <inkml:brushProperty name="rasterOp" value="maskPen"/>
+      <inkml:brushProperty name="ignorePressure" value="1"/>
+    </inkml:brush>
+  </inkml:definitions>
+  <inkml:trace contextRef="#ctx0" brushRef="#br0">7325 546,'-9'-8,"-1"1,0-1,0 2,-1 0,0 0,0 1,-1 0,1 1,-16-4,13 4,-656-159,631 155,-548-102,-993-56,317 146,748 18,-1337-7,1851 9,-35 1,76 10,367 64,8-13,155 0,133-10,109-13,1903 5,-1914-57,-125-17,-131-11,-129-2,-115-2,-100 3,-174 36,47-18,-73 24,0-1,0 1,0 0,0-1,0 1,0-1,-1 1,1-1,0 0,0 1,-1-1,1 0,0 1,-1-1,1 0,0-1,-1 1,0 1,0-1,-1 1,1-1,0 1,0 0,-1-1,1 1,0-1,-1 1,1 0,-1-1,1 1,-1 0,1-1,0 1,-1 0,1 0,-1-1,1 1,-1 0,1 0,-1 0,1 0,-1 0,1 0,-2-1,-22-3,0 1,-32 0,-157-1,-113 4,-136 1,-162 2,-166-1,-147 0,-3792 1,4194-3,177 0,237-1,-31 2,402-2,37 1,82 0,69 1,1508 52,-788-13,-3-27,-1083-14,-47 0,-53 0,-1164-1,662 3,-268 10,721-6,69-3,16 0,129 3,151-3,152-1,152-1,136 0,4159-1,-4538 0,-164 0,203-27,-314 16,-71 11,0 0,-1 1,1-1,0 0,-1 0,1 0,-1 0,1-1,2-1,-5 3,0-1,0 1,1 0,-1 0,0-1,0 1,0 0,0-1,1 1,-1-1,0 1,0 0,0-1,0 1,0 0,0-1,0 1,0 0,0-1,0 1,0-1,0 1,0 0,0-1,0 1,-1 0,1-1</inkml:trace>
+</inkml:ink>
+</file>
+
+<file path=ppt/ink/ink22.xml><?xml version="1.0" encoding="utf-8"?>
+<inkml:ink xmlns:inkml="http://www.w3.org/2003/InkML">
+  <inkml:definitions>
+    <inkml:context xml:id="ctx0">
+      <inkml:inkSource xml:id="inkSrc0">
+        <inkml:traceFormat>
+          <inkml:channel name="X" type="integer" min="-2.14748E9" max="2.14748E9" units="cm"/>
+          <inkml:channel name="Y" type="integer" min="-2.14748E9" max="2.14748E9" units="cm"/>
+        </inkml:traceFormat>
+        <inkml:channelProperties>
+          <inkml:channelProperty channel="X" name="resolution" value="1000" units="1/cm"/>
+          <inkml:channelProperty channel="Y" name="resolution" value="1000" units="1/cm"/>
+        </inkml:channelProperties>
+      </inkml:inkSource>
+      <inkml:timestamp xml:id="ts0" timeString="2026-04-07T05:23:14.498"/>
+    </inkml:context>
+    <inkml:brush xml:id="br0">
+      <inkml:brushProperty name="width" value="0.4" units="cm"/>
+      <inkml:brushProperty name="height" value="0.8" units="cm"/>
+      <inkml:brushProperty name="color" value="#FFFC00"/>
+      <inkml:brushProperty name="tip" value="rectangle"/>
+      <inkml:brushProperty name="rasterOp" value="maskPen"/>
+      <inkml:brushProperty name="ignorePressure" value="1"/>
+    </inkml:brush>
+  </inkml:definitions>
+  <inkml:trace contextRef="#ctx0" brushRef="#br0">433 7269,'75'3,"126"19,-111-9,165 23,116 23,137 28,142 26,133 28,107 28,1260 226,1-76,-1631-263,-149-26,2-17,-328-17,-45 4,0 0,0 0,0 0,0 0,0 0,-1 0,1 0,0 0,0 0,0 0,0 0,0 0,0 0,0 0,-1 0,1 0,0 0,0 0,0 0,0-1,0 1,0 0,0 0,0 0,0 0,-1 0,1 0,0 0,0 0,0 0,0-1,0 1,0 0,0 0,0 0,0 0,0 0,0 0,0 0,0-1,0 1,0 0,0 0,0 0,0 0,0 0,0 0,0 0,0-1,0 1,0 0,0 0,0 0,0 0,0 0,1 0,-1 0,0 0,0-1,0 1,0 0,0 0,0 0,0 0,0 0,0 0,0 0,1 0,-27-8,-178-33,99 22,-214-41,-154-28,-173-34,-162-34,-118-24,-1277-197,-10 128,1640 216,125 19,117 12,-37 13,341-10,8 0,0 1,-32 6,47-6,9 0,88 5,-22-3,704 99,-753-100,-15-2,1 0,-1 0,1 0,-1 1,0 1,1-1,-1 1,-1 0,1 0,11 8,-18-11,1 1,-1-1,0 0,0 0,1 1,-1-1,0 0,0 0,1 1,-1-1,0 0,0 1,0-1,0 0,0 1,1-1,-1 1,0-1,0 0,0 1,0-1,0 0,0 1,0-1,0 0,0 1,0-1,-1 1,1-1,0 0,0 1,0-1,0 0,0 1,-1-1,1 0,0 1,0-1,-1 0,1 0,0 1,0-1,-1 0,1 0,0 0,-1 1,1-1,0 0,-1 0,-8 4,1-1,-1 0,0-1,0 1,-1-2,1 0,0 0,0 0,-11-2,-6 3,-435 7,-34 3,480-11,1 0,-25 6,39-7,0 0,0 0,0 0,-1 0,1 0,0 0,0 0,0 0,0 0,0 0,-1 0,1 0,0 0,0 0,0 0,0 0,0 0,0 0,-1 0,1 0,0 0,0 0,0 0,0 1,0-1,0 0,0 0,0 0,-1 0,1 0,0 0,0 0,0 1,0-1,0 0,0 0,0 0,0 0,0 0,0 1,0-1,0 0,0 0,0 0,0 0,0 0,0 1,0-1,0 0,0 0,0 0,0 0,0 0,0 0,0 1,0-1,1 0,-1 0,0 0,0 0,0 0,0 0,0 0,0 1,21 6,187 25,-65-13,222 38,144 27,129 23,1076 146,20-98,-470-127,-8-40,-356 2,-587 10,613-20,-789 10,0-7,-1-5,-2-6,-1-6,153-60,-200 57,-35 14,72-22,-99 40,1 0,1 2,-1 1,0 0,31 4,128 18,-179-20,1008 186,-380-61,3-32,376-41,-783-58,-1-11,324-64,-299 23,-2-10,-3-11,302-142,-383 140,-4-7,-4-6,-4-8,-5-6,192-181,-236 182,-4-5,-6-4,-5-4,-5-4,102-199,-103 149,-7-3,-8-3,83-341,-124 391,-6-1,-5-2,1-190,-21 247,-2 1,-4 0,-4 0,-2 1,-4 0,-3 2,-46-109,23 93,-3 3,-4 2,-3 2,-4 2,-3 4,-79-76,18 34,-6 6,-239-160,-433-189,-37 74,-943-260,1534 579,-4 11,-354-33,438 78,0 6,0 8,1 7,-283 53,244-15,2 8,4 9,2 9,3 8,-349 207,441-224,2 4,4 5,2 3,5 5,3 3,3 4,5 3,4 4,-114 196,117-157,6 3,7 3,5 2,7 2,-40 227,61-211,7 1,7 1,8 0,6 0,27 164,2-123,10-3,8-1,122 307,-59-244,10-5,167 255,69 10,90 20,92 14,90 2,-191-217,16-20,906 480,-935-593,9-19,550 159,-611-244,4-17,3-16,427 23,-187-82,-78-65,-403 27,185-60,-231 53,-2-4,-1-4,155-92,-180 87,-2-2,-3-3,-1-3,-3-3,58-68,-56 48,-4-2,-3-2,-3-3,60-137,-64 107,-5-3,-5-1,25-142,-33 80,-8 0,-8-1,-8 0,-8-1,-28-191,8 206,-7 0,-8 2,-7 2,-87-211,69 231,-6 3,-6 3,-5 3,-191-235,-100-23,-100-10,-96 1,150 142,-715-324,714 405,-826-227,735 294,68 50,320 50,-1 5,1 6,-141 19,202-12,-1 4,2 2,0 2,1 3,0 3,2 2,1 2,-57 38,58-26,2 2,1 3,3 2,1 1,3 3,-56 78,37-32,3 2,-87 195,104-185,5 1,5 2,4 1,5 1,5 1,6 1,4 1,11 214,9-204,5 0,6-1,5-1,6-1,4-1,6-3,116 223,111 81,92 23,81 7,-177-216,9-12,10-12,10-12,7-14,521 236,-297-219,-375-156,157 27,-227-60,1-3,138 0,-180-12,-1-2,1-2,-1-1,0-2,-1-1,0-2,0-2,-1-2,40-21,-45 17,-2-1,0-1,-2-1,0-2,-2-1,0-1,-2-1,-1-1,-1-1,18-33,-6 1,-2-1,-3-1,-3-2,-3-1,28-132,-29 67,-5 0,-1-174,-39-207,-65-87,-71-82,-90-80,-88-60,-99-40,144 371,-21 12,-20 15,-20 15,-20 16,-506-456,219 324,65 133,81 127,383 239,-164-58,221 97,-2 4,-128-20,160 36,0 2,0 3,0 1,0 2,0 2,0 2,-59 15,63-9,1 2,1 2,0 1,1 2,1 1,1 2,-61 49,43-24,3 3,1 1,3 3,-66 99,41-37,-87 189,71-102,9 4,-88 367,116-331,11 1,-10 302,44-393,7 1,7-1,6-1,40 168,-32-223,5-1,4-1,4-2,4-2,4-1,4-3,82 114,-54-105,4-5,4-2,3-5,5-3,199 134,-80-84,438 196,-367-208,5-14,5-12,594 108,-339-150,-400-49,194-23,-244 9,0-5,128-40,-164 37,-1-3,-1-2,-1-3,-2-2,98-71,-115 71,-2-2,-2-1,0-2,-3-1,-1-2,-2-1,-1-1,26-52,-31 44,-1-2,-2 0,-3-1,-2-1,-2-1,9-87,-17 77,-3 0,-2-1,-4 1,-2 0,-18-80,5 68,-2 1,-4 1,-3 1,-4 2,-2 0,-3 3,-3 1,-3 2,-3 2,-59-62,44 63,-3 2,-3 3,-2 3,-2 3,-2 3,-3 4,-1 3,-2 3,-97-31,58 31,-1 5,-2 5,0 5,-2 6,-233 0,247 19,0 5,1 4,0 5,1 5,2 5,0 4,-132 59,166-58,3 4,0 2,3 3,1 3,3 3,1 2,3 3,2 2,2 3,3 2,-47 72,50-53,3 1,4 2,4 2,3 2,3 0,5 2,-27 171,38-147,6 1,4 0,5 0,5 0,42 219,-28-241,4-1,5-1,2-2,5-1,4-2,3-1,3-3,4-1,3-3,4-2,2-3,4-2,90 75,-88-90,1-3,3-3,140 72,-151-92,0-4,2-1,0-3,1-3,112 14,-109-24,0-3,0-3,1-3,-1-2,-1-4,1-2,-2-2,0-4,0-2,91-43,-105 39,-2-2,-1-3,-1-1,-2-2,0-2,-3-1,0-3,-3-1,-1-1,-2-2,-2-1,-1-2,32-66,-39 62,-3 0,-2-2,-2 0,17-96,-24 74,-2 0,-4 0,-3 0,-12-93,-13-3,-63-225,-83-173</inkml:trace>
 </inkml:ink>
 </file>
 
@@ -372,6 +759,35 @@
     </inkml:brush>
   </inkml:definitions>
   <inkml:trace contextRef="#ctx0" brushRef="#br0">0 0,'0'0</inkml:trace>
+</inkml:ink>
+</file>
+
+<file path=ppt/ink/ink9.xml><?xml version="1.0" encoding="utf-8"?>
+<inkml:ink xmlns:inkml="http://www.w3.org/2003/InkML">
+  <inkml:definitions>
+    <inkml:context xml:id="ctx0">
+      <inkml:inkSource xml:id="inkSrc0">
+        <inkml:traceFormat>
+          <inkml:channel name="X" type="integer" min="-2.14748E9" max="2.14748E9" units="cm"/>
+          <inkml:channel name="Y" type="integer" min="-2.14748E9" max="2.14748E9" units="cm"/>
+        </inkml:traceFormat>
+        <inkml:channelProperties>
+          <inkml:channelProperty channel="X" name="resolution" value="1000" units="1/cm"/>
+          <inkml:channelProperty channel="Y" name="resolution" value="1000" units="1/cm"/>
+        </inkml:channelProperties>
+      </inkml:inkSource>
+      <inkml:timestamp xml:id="ts0" timeString="2026-04-07T02:47:23.748"/>
+    </inkml:context>
+    <inkml:brush xml:id="br0">
+      <inkml:brushProperty name="width" value="0.4" units="cm"/>
+      <inkml:brushProperty name="height" value="0.8" units="cm"/>
+      <inkml:brushProperty name="color" value="#FFFC00"/>
+      <inkml:brushProperty name="tip" value="rectangle"/>
+      <inkml:brushProperty name="rasterOp" value="maskPen"/>
+      <inkml:brushProperty name="ignorePressure" value="1"/>
+    </inkml:brush>
+  </inkml:definitions>
+  <inkml:trace contextRef="#ctx0" brushRef="#br0">3312 1398,'-4'0,"1"1,-1-1,1 1,-1 0,1 0,0 1,-1-1,1 1,0-1,0 1,0 0,-4 4,-34 32,30-27,-8 6,0-2,-1 0,0-1,-1-1,-1-1,0-1,0-1,-1-1,-38 10,-22 1,-123 11,200-30,-707 51,-9-44,574-7,-750-5,861 1,78-3,-13 2,157-23,118-24,97-25,-26 3,1190-245,-1174 227,-90 10,-209 56,161-69,-244 91,-1-1,1 1,-1-1,0-1,-1 1,1-1,-1-1,0 1,0-1,6-8,-11 13,0-1,0 1,-1-1,1 1,0-1,-1 0,0 1,1-1,-1 0,0 1,0-1,0 0,0 0,0 1,0-1,-1 0,1 1,0-1,-1 0,0-1,-2-1,1 0,-1 0,0 0,0 0,0 0,0 1,-1 0,1-1,-1 1,-5-3,-22-14,-65-30,-128-43,-104-17,-171-26,-5 22,-528-48,636 128,356 32,26 0,0 2,0-1,0 2,0 0,-14 3,26-2,11 0,70 5,16 2,-85-7,-1 0,1 1,0 0,-1 0,1 1,-1 0,9 6,-13-6,0 0,-1 0,1 1,-1 0,0-1,-1 2,1-1,-1 0,0 0,0 1,-1 0,1 0,-1 0,-1 0,1 0,-1 0,1 9,1 14,-2 0,-2 41,1-48,-6 68,2-44,2 71,3-102,1-1,0 1,1-1,1 0,0 0,0 0,2-1,0 1,9 14,-2-7,2-2,1 1,0-2,29 26,94 64,94 40,493 231,24-60,-609-263,-129-51,-1 0,1 1,13 8,-25-14,-1 0,1 0,0 0,-1 0,1 0,0 0,0 0,-1 0,1 0,0 0,-1 0,1 0,0 0,0 0,-1 1,1-1,0 0,0 0,-1 0,1 0,0 0,0 1,-1-1,1 0,0 0,0 0,0 1,-1-1,1 0,0 0,0 0,0 1,0-1,0 0,-1 1,1-1,0 0,0 0,0 1,0-1,0 0,0 1,0-1,0 0,0 0,0 1,0-1,0 0,0 1,0-1,1 0,-1 0,0 1,0-1,0 0,0 0,0 1,1-1,-1 0,0 0,0 0,0 1,1-1,-1 0,0 0,1 1,-27 1,0 0,-1-1,-27-4,-20 1,53 2,-11 0,0 1,0 1,-1 1,-46 13,74-15,1 1,0 0,0 0,0 0,1 1,-8 5,7-5,0 1,0-2,0 1,0 0,-1-1,1 0,-1 0,-9 3,-11-1,0-1,0-1,0-1,0-1,-44-6,17 1,-208-16,-95-10,-574-33,-7 46,901 18,24-1,1 1,-1 0,0 1,0 0,0 1,-20 6,31-8,-1 0,1 0,0 0,-1 0,1 0,0 0,0 0,-1 0,1 0,0 0,0 0,-1 1,1-1,0 0,0 0,-1 0,1 0,0 1,0-1,0 0,-1 0,1 1,0-1,0 0,0 0,0 1,0-1,-1 0,1 0,0 1,0-1,0 0,0 0,0 1,0-1,0 0,0 1,0-1,0 0,0 0,0 1,0-1,0 0,0 1,1-1,-1 0,0 0,0 1,0-1,0 0,0 0,1 1,-1-1,0 0,0 0,0 0,1 1,-1-1,0 0,1 0,5 4,0-1,1 0,-1 0,13 3,433 100,-378-91,1464 200,-1503-212,-22-1,0-1,0 0,0-1,0 0,0-1,22-5,-28 0,-15-4,-10 0,-1 1,0 0,0 1,-1 1,-37-7,5 0,-250-65,-576-73,864 150,-20-3,75-2,245-32,-1-12,475-151,-747 198,32-10,0-1,-1-3,62-34,-102 50,0 0,0 0,0-1,-1 1,0-1,1 0,-1 0,0-1,0 1,0 0,-1-1,1 0,-1 0,0 0,0 0,0 0,-1 0,2-6,-3 7,0-1,0 0,-1 0,0 0,0 1,0-1,0 0,0 1,-1-1,1 1,-1-1,0 1,0 0,0 0,-1 0,1 0,-1 0,1 0,-1 1,-4-3,-14-13,-1 1,-1 0,0 2,-1 1,-1 1,0 2,-1 0,0 1,-47-10,71 19,-1 1,0-1,1 1,-1 0,0 0,0 0,1 0,-1 0,0 1,0-1,1 1,-1 0,1 0,-1 0,0 0,-2 2,4-2,0-1,1 1,-1-1,1 1,0 0,-1-1,1 1,-1 0,1-1,0 1,-1 0,1 0,0-1,0 1,0 0,0 0,-1 0,1-1,0 1,0 0,1 0,-1 0,0 0,1 2,0-1,0 1,0 0,0-1,0 0,1 1,0-1,-1 0,1 1,2 1,7 7,1 0,0-1,1 0,0-1,19 11,87 37,-8-12,147 40,129 9,223 2,-346-72</inkml:trace>
 </inkml:ink>
 </file>
 
@@ -4140,8 +4556,8 @@
           </a:prstGeom>
         </p:spPr>
       </p:pic>
-      <mc:AlternateContent xmlns:mc="http://schemas.openxmlformats.org/markup-compatibility/2006">
-        <mc:Choice xmlns:p14="http://schemas.microsoft.com/office/powerpoint/2010/main" Requires="p14">
+      <mc:AlternateContent xmlns:mc="http://schemas.openxmlformats.org/markup-compatibility/2006" xmlns:p14="http://schemas.microsoft.com/office/powerpoint/2010/main">
+        <mc:Choice Requires="p14">
           <p:contentPart p14:bwMode="auto" r:id="rId3">
             <p14:nvContentPartPr>
               <p14:cNvPr id="5" name="Entrada de lápiz 4">
@@ -4160,7 +4576,7 @@
             </p14:xfrm>
           </p:contentPart>
         </mc:Choice>
-        <mc:Fallback>
+        <mc:Fallback xmlns="">
           <p:pic>
             <p:nvPicPr>
               <p:cNvPr id="5" name="Entrada de lápiz 4">
@@ -4191,8 +4607,8 @@
           </p:pic>
         </mc:Fallback>
       </mc:AlternateContent>
-      <mc:AlternateContent xmlns:mc="http://schemas.openxmlformats.org/markup-compatibility/2006">
-        <mc:Choice xmlns:p14="http://schemas.microsoft.com/office/powerpoint/2010/main" Requires="p14">
+      <mc:AlternateContent xmlns:mc="http://schemas.openxmlformats.org/markup-compatibility/2006" xmlns:p14="http://schemas.microsoft.com/office/powerpoint/2010/main">
+        <mc:Choice Requires="p14">
           <p:contentPart p14:bwMode="auto" r:id="rId5">
             <p14:nvContentPartPr>
               <p14:cNvPr id="6" name="Entrada de lápiz 5">
@@ -4211,7 +4627,7 @@
             </p14:xfrm>
           </p:contentPart>
         </mc:Choice>
-        <mc:Fallback>
+        <mc:Fallback xmlns="">
           <p:pic>
             <p:nvPicPr>
               <p:cNvPr id="6" name="Entrada de lápiz 5">
@@ -4572,8 +4988,8 @@
           </a:p>
         </p:txBody>
       </p:sp>
-      <mc:AlternateContent xmlns:mc="http://schemas.openxmlformats.org/markup-compatibility/2006">
-        <mc:Choice xmlns:p14="http://schemas.microsoft.com/office/powerpoint/2010/main" Requires="p14">
+      <mc:AlternateContent xmlns:mc="http://schemas.openxmlformats.org/markup-compatibility/2006" xmlns:p14="http://schemas.microsoft.com/office/powerpoint/2010/main">
+        <mc:Choice Requires="p14">
           <p:contentPart p14:bwMode="auto" r:id="rId3">
             <p14:nvContentPartPr>
               <p14:cNvPr id="6" name="Entrada de lápiz 5">
@@ -4592,7 +5008,7 @@
             </p14:xfrm>
           </p:contentPart>
         </mc:Choice>
-        <mc:Fallback>
+        <mc:Fallback xmlns="">
           <p:pic>
             <p:nvPicPr>
               <p:cNvPr id="6" name="Entrada de lápiz 5">
@@ -4623,8 +5039,8 @@
           </p:pic>
         </mc:Fallback>
       </mc:AlternateContent>
-      <mc:AlternateContent xmlns:mc="http://schemas.openxmlformats.org/markup-compatibility/2006">
-        <mc:Choice xmlns:p14="http://schemas.microsoft.com/office/powerpoint/2010/main" Requires="p14">
+      <mc:AlternateContent xmlns:mc="http://schemas.openxmlformats.org/markup-compatibility/2006" xmlns:p14="http://schemas.microsoft.com/office/powerpoint/2010/main">
+        <mc:Choice Requires="p14">
           <p:contentPart p14:bwMode="auto" r:id="rId5">
             <p14:nvContentPartPr>
               <p14:cNvPr id="7" name="Entrada de lápiz 6">
@@ -4643,7 +5059,7 @@
             </p14:xfrm>
           </p:contentPart>
         </mc:Choice>
-        <mc:Fallback>
+        <mc:Fallback xmlns="">
           <p:pic>
             <p:nvPicPr>
               <p:cNvPr id="7" name="Entrada de lápiz 6">
@@ -4674,8 +5090,8 @@
           </p:pic>
         </mc:Fallback>
       </mc:AlternateContent>
-      <mc:AlternateContent xmlns:mc="http://schemas.openxmlformats.org/markup-compatibility/2006">
-        <mc:Choice xmlns:p14="http://schemas.microsoft.com/office/powerpoint/2010/main" Requires="p14">
+      <mc:AlternateContent xmlns:mc="http://schemas.openxmlformats.org/markup-compatibility/2006" xmlns:p14="http://schemas.microsoft.com/office/powerpoint/2010/main">
+        <mc:Choice Requires="p14">
           <p:contentPart p14:bwMode="auto" r:id="rId7">
             <p14:nvContentPartPr>
               <p14:cNvPr id="8" name="Entrada de lápiz 7">
@@ -4694,7 +5110,7 @@
             </p14:xfrm>
           </p:contentPart>
         </mc:Choice>
-        <mc:Fallback>
+        <mc:Fallback xmlns="">
           <p:pic>
             <p:nvPicPr>
               <p:cNvPr id="8" name="Entrada de lápiz 7">
@@ -4780,8 +5196,8 @@
           </a:p>
         </p:txBody>
       </p:sp>
-      <mc:AlternateContent xmlns:mc="http://schemas.openxmlformats.org/markup-compatibility/2006">
-        <mc:Choice xmlns:p14="http://schemas.microsoft.com/office/powerpoint/2010/main" Requires="p14">
+      <mc:AlternateContent xmlns:mc="http://schemas.openxmlformats.org/markup-compatibility/2006" xmlns:p14="http://schemas.microsoft.com/office/powerpoint/2010/main">
+        <mc:Choice Requires="p14">
           <p:contentPart p14:bwMode="auto" r:id="rId2">
             <p14:nvContentPartPr>
               <p14:cNvPr id="3" name="Entrada de lápiz 2">
@@ -4800,7 +5216,7 @@
             </p14:xfrm>
           </p:contentPart>
         </mc:Choice>
-        <mc:Fallback>
+        <mc:Fallback xmlns="">
           <p:pic>
             <p:nvPicPr>
               <p:cNvPr id="3" name="Entrada de lápiz 2">
@@ -4907,12 +5323,50 @@
             <p:ph type="title"/>
           </p:nvPr>
         </p:nvSpPr>
-        <p:spPr/>
-        <p:txBody>
-          <a:bodyPr/>
-          <a:lstStyle/>
-          <a:p>
-            <a:endParaRPr lang="es-GT"/>
+        <p:spPr>
+          <a:xfrm>
+            <a:off x="1118118" y="2016643"/>
+            <a:ext cx="10515600" cy="1325563"/>
+          </a:xfrm>
+        </p:spPr>
+        <p:txBody>
+          <a:bodyPr>
+            <a:normAutofit fontScale="90000"/>
+          </a:bodyPr>
+          <a:lstStyle/>
+          <a:p>
+            <a:r>
+              <a:rPr lang="es-MX" dirty="0"/>
+              <a:t>Tema HATCH</a:t>
+            </a:r>
+            <a:br>
+              <a:rPr lang="es-MX" dirty="0"/>
+            </a:br>
+            <a:br>
+              <a:rPr lang="es-MX" dirty="0"/>
+            </a:br>
+            <a:r>
+              <a:rPr lang="es-MX" dirty="0"/>
+              <a:t>COMANDO ES H</a:t>
+            </a:r>
+            <a:br>
+              <a:rPr lang="es-MX" dirty="0"/>
+            </a:br>
+            <a:br>
+              <a:rPr lang="es-MX" dirty="0"/>
+            </a:br>
+            <a:r>
+              <a:rPr lang="es-MX" dirty="0" err="1"/>
+              <a:t>H</a:t>
+            </a:r>
+            <a:r>
+              <a:rPr lang="es-MX" dirty="0"/>
+              <a:t>- HACH</a:t>
+            </a:r>
+            <a:br>
+              <a:rPr lang="es-MX" dirty="0"/>
+            </a:br>
+            <a:endParaRPr lang="es-GT" dirty="0"/>
           </a:p>
         </p:txBody>
       </p:sp>
@@ -5004,8 +5458,8 @@
           </a:prstGeom>
         </p:spPr>
       </p:pic>
-      <mc:AlternateContent xmlns:mc="http://schemas.openxmlformats.org/markup-compatibility/2006">
-        <mc:Choice xmlns:p14="http://schemas.microsoft.com/office/powerpoint/2010/main" Requires="p14">
+      <mc:AlternateContent xmlns:mc="http://schemas.openxmlformats.org/markup-compatibility/2006" xmlns:p14="http://schemas.microsoft.com/office/powerpoint/2010/main">
+        <mc:Choice Requires="p14">
           <p:contentPart p14:bwMode="auto" r:id="rId3">
             <p14:nvContentPartPr>
               <p14:cNvPr id="5" name="Entrada de lápiz 4">
@@ -5024,7 +5478,7 @@
             </p14:xfrm>
           </p:contentPart>
         </mc:Choice>
-        <mc:Fallback>
+        <mc:Fallback xmlns="">
           <p:pic>
             <p:nvPicPr>
               <p:cNvPr id="5" name="Entrada de lápiz 4">
@@ -5055,8 +5509,8 @@
           </p:pic>
         </mc:Fallback>
       </mc:AlternateContent>
-      <mc:AlternateContent xmlns:mc="http://schemas.openxmlformats.org/markup-compatibility/2006">
-        <mc:Choice xmlns:p14="http://schemas.microsoft.com/office/powerpoint/2010/main" Requires="p14">
+      <mc:AlternateContent xmlns:mc="http://schemas.openxmlformats.org/markup-compatibility/2006" xmlns:p14="http://schemas.microsoft.com/office/powerpoint/2010/main">
+        <mc:Choice Requires="p14">
           <p:contentPart p14:bwMode="auto" r:id="rId5">
             <p14:nvContentPartPr>
               <p14:cNvPr id="6" name="Entrada de lápiz 5">
@@ -5075,7 +5529,7 @@
             </p14:xfrm>
           </p:contentPart>
         </mc:Choice>
-        <mc:Fallback>
+        <mc:Fallback xmlns="">
           <p:pic>
             <p:nvPicPr>
               <p:cNvPr id="6" name="Entrada de lápiz 5">
@@ -5161,6 +5615,36 @@
           </a:p>
         </p:txBody>
       </p:sp>
+      <p:pic>
+        <p:nvPicPr>
+          <p:cNvPr id="4" name="Imagen 3">
+            <a:extLst>
+              <a:ext uri="{FF2B5EF4-FFF2-40B4-BE49-F238E27FC236}">
+                <a16:creationId xmlns:a16="http://schemas.microsoft.com/office/drawing/2014/main" id="{204EC6E1-8E6E-AF36-5D29-01B017AFD2AC}"/>
+              </a:ext>
+            </a:extLst>
+          </p:cNvPr>
+          <p:cNvPicPr>
+            <a:picLocks noChangeAspect="1"/>
+          </p:cNvPicPr>
+          <p:nvPr/>
+        </p:nvPicPr>
+        <p:blipFill>
+          <a:blip r:embed="rId2"/>
+          <a:stretch>
+            <a:fillRect/>
+          </a:stretch>
+        </p:blipFill>
+        <p:spPr>
+          <a:xfrm>
+            <a:off x="1514418" y="1279701"/>
+            <a:ext cx="8376031" cy="4588065"/>
+          </a:xfrm>
+          <a:prstGeom prst="rect">
+            <a:avLst/>
+          </a:prstGeom>
+        </p:spPr>
+      </p:pic>
     </p:spTree>
     <p:extLst>
       <p:ext uri="{BB962C8B-B14F-4D97-AF65-F5344CB8AC3E}">
@@ -5216,6 +5700,36 @@
           </a:p>
         </p:txBody>
       </p:sp>
+      <p:pic>
+        <p:nvPicPr>
+          <p:cNvPr id="4" name="Imagen 3">
+            <a:extLst>
+              <a:ext uri="{FF2B5EF4-FFF2-40B4-BE49-F238E27FC236}">
+                <a16:creationId xmlns:a16="http://schemas.microsoft.com/office/drawing/2014/main" id="{A89003DC-71BA-DE7E-03EE-949B39F82A2D}"/>
+              </a:ext>
+            </a:extLst>
+          </p:cNvPr>
+          <p:cNvPicPr>
+            <a:picLocks noChangeAspect="1"/>
+          </p:cNvPicPr>
+          <p:nvPr/>
+        </p:nvPicPr>
+        <p:blipFill>
+          <a:blip r:embed="rId2"/>
+          <a:stretch>
+            <a:fillRect/>
+          </a:stretch>
+        </p:blipFill>
+        <p:spPr>
+          <a:xfrm>
+            <a:off x="1461440" y="256732"/>
+            <a:ext cx="9269119" cy="6344535"/>
+          </a:xfrm>
+          <a:prstGeom prst="rect">
+            <a:avLst/>
+          </a:prstGeom>
+        </p:spPr>
+      </p:pic>
     </p:spTree>
     <p:extLst>
       <p:ext uri="{BB962C8B-B14F-4D97-AF65-F5344CB8AC3E}">
@@ -5271,6 +5785,123 @@
           </a:p>
         </p:txBody>
       </p:sp>
+      <p:pic>
+        <p:nvPicPr>
+          <p:cNvPr id="4" name="Imagen 3">
+            <a:extLst>
+              <a:ext uri="{FF2B5EF4-FFF2-40B4-BE49-F238E27FC236}">
+                <a16:creationId xmlns:a16="http://schemas.microsoft.com/office/drawing/2014/main" id="{725AFEC1-EF09-C99E-0096-ED390F916E28}"/>
+              </a:ext>
+            </a:extLst>
+          </p:cNvPr>
+          <p:cNvPicPr>
+            <a:picLocks noChangeAspect="1"/>
+          </p:cNvPicPr>
+          <p:nvPr/>
+        </p:nvPicPr>
+        <p:blipFill>
+          <a:blip r:embed="rId2"/>
+          <a:stretch>
+            <a:fillRect/>
+          </a:stretch>
+        </p:blipFill>
+        <p:spPr>
+          <a:xfrm>
+            <a:off x="3376233" y="1028365"/>
+            <a:ext cx="5439534" cy="4801270"/>
+          </a:xfrm>
+          <a:prstGeom prst="rect">
+            <a:avLst/>
+          </a:prstGeom>
+        </p:spPr>
+      </p:pic>
+      <mc:AlternateContent xmlns:mc="http://schemas.openxmlformats.org/markup-compatibility/2006">
+        <mc:Choice xmlns:p14="http://schemas.microsoft.com/office/powerpoint/2010/main" Requires="p14">
+          <p:contentPart p14:bwMode="auto" r:id="rId3">
+            <p14:nvContentPartPr>
+              <p14:cNvPr id="5" name="Entrada de lápiz 4">
+                <a:extLst>
+                  <a:ext uri="{FF2B5EF4-FFF2-40B4-BE49-F238E27FC236}">
+                    <a16:creationId xmlns:a16="http://schemas.microsoft.com/office/drawing/2014/main" id="{F79D2BD1-E0BC-F8EE-5CD5-8270093BE02F}"/>
+                  </a:ext>
+                </a:extLst>
+              </p14:cNvPr>
+              <p14:cNvContentPartPr/>
+              <p14:nvPr/>
+            </p14:nvContentPartPr>
+            <p14:xfrm>
+              <a:off x="4452568" y="3126233"/>
+              <a:ext cx="1499760" cy="796320"/>
+            </p14:xfrm>
+          </p:contentPart>
+        </mc:Choice>
+        <mc:Fallback>
+          <p:pic>
+            <p:nvPicPr>
+              <p:cNvPr id="5" name="Entrada de lápiz 4">
+                <a:extLst>
+                  <a:ext uri="{FF2B5EF4-FFF2-40B4-BE49-F238E27FC236}">
+                    <a16:creationId xmlns:a16="http://schemas.microsoft.com/office/drawing/2014/main" id="{F79D2BD1-E0BC-F8EE-5CD5-8270093BE02F}"/>
+                  </a:ext>
+                </a:extLst>
+              </p:cNvPr>
+              <p:cNvPicPr/>
+              <p:nvPr/>
+            </p:nvPicPr>
+            <p:blipFill>
+              <a:blip r:embed="rId4"/>
+              <a:stretch>
+                <a:fillRect/>
+              </a:stretch>
+            </p:blipFill>
+            <p:spPr>
+              <a:xfrm>
+                <a:off x="4380568" y="2982233"/>
+                <a:ext cx="1643400" cy="1083960"/>
+              </a:xfrm>
+              <a:prstGeom prst="rect">
+                <a:avLst/>
+              </a:prstGeom>
+            </p:spPr>
+          </p:pic>
+        </mc:Fallback>
+      </mc:AlternateContent>
+      <p:sp>
+        <p:nvSpPr>
+          <p:cNvPr id="6" name="CuadroTexto 5">
+            <a:extLst>
+              <a:ext uri="{FF2B5EF4-FFF2-40B4-BE49-F238E27FC236}">
+                <a16:creationId xmlns:a16="http://schemas.microsoft.com/office/drawing/2014/main" id="{29884ACA-5BB9-819C-C073-5386B2684D80}"/>
+              </a:ext>
+            </a:extLst>
+          </p:cNvPr>
+          <p:cNvSpPr txBox="1"/>
+          <p:nvPr/>
+        </p:nvSpPr>
+        <p:spPr>
+          <a:xfrm>
+            <a:off x="9022702" y="2827176"/>
+            <a:ext cx="2761861" cy="923330"/>
+          </a:xfrm>
+          <a:prstGeom prst="rect">
+            <a:avLst/>
+          </a:prstGeom>
+          <a:noFill/>
+        </p:spPr>
+        <p:txBody>
+          <a:bodyPr wrap="square" rtlCol="0">
+            <a:spAutoFit/>
+          </a:bodyPr>
+          <a:lstStyle/>
+          <a:p>
+            <a:r>
+              <a:rPr lang="es-MX" dirty="0"/>
+              <a:t>PATRON USER PERSONALZADO POR NOSOTROS </a:t>
+            </a:r>
+            <a:endParaRPr lang="es-GT" dirty="0"/>
+          </a:p>
+        </p:txBody>
+      </p:sp>
     </p:spTree>
     <p:extLst>
       <p:ext uri="{BB962C8B-B14F-4D97-AF65-F5344CB8AC3E}">
@@ -5326,6 +5957,36 @@
           </a:p>
         </p:txBody>
       </p:sp>
+      <p:pic>
+        <p:nvPicPr>
+          <p:cNvPr id="4" name="Imagen 3">
+            <a:extLst>
+              <a:ext uri="{FF2B5EF4-FFF2-40B4-BE49-F238E27FC236}">
+                <a16:creationId xmlns:a16="http://schemas.microsoft.com/office/drawing/2014/main" id="{A43B8204-16D5-C5DE-EB37-2E6F764CA885}"/>
+              </a:ext>
+            </a:extLst>
+          </p:cNvPr>
+          <p:cNvPicPr>
+            <a:picLocks noChangeAspect="1"/>
+          </p:cNvPicPr>
+          <p:nvPr/>
+        </p:nvPicPr>
+        <p:blipFill>
+          <a:blip r:embed="rId2"/>
+          <a:stretch>
+            <a:fillRect/>
+          </a:stretch>
+        </p:blipFill>
+        <p:spPr>
+          <a:xfrm>
+            <a:off x="4544582" y="930749"/>
+            <a:ext cx="4823353" cy="4226482"/>
+          </a:xfrm>
+          <a:prstGeom prst="rect">
+            <a:avLst/>
+          </a:prstGeom>
+        </p:spPr>
+      </p:pic>
     </p:spTree>
     <p:extLst>
       <p:ext uri="{BB962C8B-B14F-4D97-AF65-F5344CB8AC3E}">
@@ -5381,6 +6042,36 @@
           </a:p>
         </p:txBody>
       </p:sp>
+      <p:pic>
+        <p:nvPicPr>
+          <p:cNvPr id="4" name="Imagen 3">
+            <a:extLst>
+              <a:ext uri="{FF2B5EF4-FFF2-40B4-BE49-F238E27FC236}">
+                <a16:creationId xmlns:a16="http://schemas.microsoft.com/office/drawing/2014/main" id="{C0946428-DC32-01F5-DE8C-0534B00F4FDF}"/>
+              </a:ext>
+            </a:extLst>
+          </p:cNvPr>
+          <p:cNvPicPr>
+            <a:picLocks noChangeAspect="1"/>
+          </p:cNvPicPr>
+          <p:nvPr/>
+        </p:nvPicPr>
+        <p:blipFill>
+          <a:blip r:embed="rId2"/>
+          <a:stretch>
+            <a:fillRect/>
+          </a:stretch>
+        </p:blipFill>
+        <p:spPr>
+          <a:xfrm>
+            <a:off x="418307" y="594917"/>
+            <a:ext cx="11355385" cy="5668166"/>
+          </a:xfrm>
+          <a:prstGeom prst="rect">
+            <a:avLst/>
+          </a:prstGeom>
+        </p:spPr>
+      </p:pic>
     </p:spTree>
     <p:extLst>
       <p:ext uri="{BB962C8B-B14F-4D97-AF65-F5344CB8AC3E}">
@@ -5432,10 +6123,201 @@
           <a:bodyPr/>
           <a:lstStyle/>
           <a:p>
-            <a:endParaRPr lang="es-GT"/>
-          </a:p>
-        </p:txBody>
-      </p:sp>
+            <a:r>
+              <a:rPr lang="es-MX" dirty="0" err="1"/>
+              <a:t>Modifcar</a:t>
+            </a:r>
+            <a:r>
+              <a:rPr lang="es-MX" dirty="0"/>
+              <a:t> factor de escala </a:t>
+            </a:r>
+            <a:endParaRPr lang="es-GT" dirty="0"/>
+          </a:p>
+        </p:txBody>
+      </p:sp>
+      <p:pic>
+        <p:nvPicPr>
+          <p:cNvPr id="4" name="Imagen 3">
+            <a:extLst>
+              <a:ext uri="{FF2B5EF4-FFF2-40B4-BE49-F238E27FC236}">
+                <a16:creationId xmlns:a16="http://schemas.microsoft.com/office/drawing/2014/main" id="{8F7B5F76-88AE-6B30-FE69-F227A509A746}"/>
+              </a:ext>
+            </a:extLst>
+          </p:cNvPr>
+          <p:cNvPicPr>
+            <a:picLocks noChangeAspect="1"/>
+          </p:cNvPicPr>
+          <p:nvPr/>
+        </p:nvPicPr>
+        <p:blipFill>
+          <a:blip r:embed="rId2"/>
+          <a:stretch>
+            <a:fillRect/>
+          </a:stretch>
+        </p:blipFill>
+        <p:spPr>
+          <a:xfrm>
+            <a:off x="578498" y="1690688"/>
+            <a:ext cx="9987830" cy="4801110"/>
+          </a:xfrm>
+          <a:prstGeom prst="rect">
+            <a:avLst/>
+          </a:prstGeom>
+        </p:spPr>
+      </p:pic>
+      <mc:AlternateContent xmlns:mc="http://schemas.openxmlformats.org/markup-compatibility/2006">
+        <mc:Choice xmlns:p14="http://schemas.microsoft.com/office/powerpoint/2010/main" Requires="p14">
+          <p:contentPart p14:bwMode="auto" r:id="rId3">
+            <p14:nvContentPartPr>
+              <p14:cNvPr id="5" name="Entrada de lápiz 4">
+                <a:extLst>
+                  <a:ext uri="{FF2B5EF4-FFF2-40B4-BE49-F238E27FC236}">
+                    <a16:creationId xmlns:a16="http://schemas.microsoft.com/office/drawing/2014/main" id="{6DE3265A-32B8-3A39-74C5-F0107E31CE08}"/>
+                  </a:ext>
+                </a:extLst>
+              </p14:cNvPr>
+              <p14:cNvContentPartPr/>
+              <p14:nvPr/>
+            </p14:nvContentPartPr>
+            <p14:xfrm>
+              <a:off x="5067478" y="2399393"/>
+              <a:ext cx="1768680" cy="282960"/>
+            </p14:xfrm>
+          </p:contentPart>
+        </mc:Choice>
+        <mc:Fallback>
+          <p:pic>
+            <p:nvPicPr>
+              <p:cNvPr id="5" name="Entrada de lápiz 4">
+                <a:extLst>
+                  <a:ext uri="{FF2B5EF4-FFF2-40B4-BE49-F238E27FC236}">
+                    <a16:creationId xmlns:a16="http://schemas.microsoft.com/office/drawing/2014/main" id="{6DE3265A-32B8-3A39-74C5-F0107E31CE08}"/>
+                  </a:ext>
+                </a:extLst>
+              </p:cNvPr>
+              <p:cNvPicPr/>
+              <p:nvPr/>
+            </p:nvPicPr>
+            <p:blipFill>
+              <a:blip r:embed="rId4"/>
+              <a:stretch>
+                <a:fillRect/>
+              </a:stretch>
+            </p:blipFill>
+            <p:spPr>
+              <a:xfrm>
+                <a:off x="5013478" y="2291393"/>
+                <a:ext cx="1876320" cy="498600"/>
+              </a:xfrm>
+              <a:prstGeom prst="rect">
+                <a:avLst/>
+              </a:prstGeom>
+            </p:spPr>
+          </p:pic>
+        </mc:Fallback>
+      </mc:AlternateContent>
+      <mc:AlternateContent xmlns:mc="http://schemas.openxmlformats.org/markup-compatibility/2006">
+        <mc:Choice xmlns:p14="http://schemas.microsoft.com/office/powerpoint/2010/main" Requires="p14">
+          <p:contentPart p14:bwMode="auto" r:id="rId5">
+            <p14:nvContentPartPr>
+              <p14:cNvPr id="6" name="Entrada de lápiz 5">
+                <a:extLst>
+                  <a:ext uri="{FF2B5EF4-FFF2-40B4-BE49-F238E27FC236}">
+                    <a16:creationId xmlns:a16="http://schemas.microsoft.com/office/drawing/2014/main" id="{784DBDCB-3A44-1843-CE08-214C6D504A05}"/>
+                  </a:ext>
+                </a:extLst>
+              </p14:cNvPr>
+              <p14:cNvContentPartPr/>
+              <p14:nvPr/>
+            </p14:nvContentPartPr>
+            <p14:xfrm>
+              <a:off x="1436518" y="2055953"/>
+              <a:ext cx="687600" cy="401040"/>
+            </p14:xfrm>
+          </p:contentPart>
+        </mc:Choice>
+        <mc:Fallback>
+          <p:pic>
+            <p:nvPicPr>
+              <p:cNvPr id="6" name="Entrada de lápiz 5">
+                <a:extLst>
+                  <a:ext uri="{FF2B5EF4-FFF2-40B4-BE49-F238E27FC236}">
+                    <a16:creationId xmlns:a16="http://schemas.microsoft.com/office/drawing/2014/main" id="{784DBDCB-3A44-1843-CE08-214C6D504A05}"/>
+                  </a:ext>
+                </a:extLst>
+              </p:cNvPr>
+              <p:cNvPicPr/>
+              <p:nvPr/>
+            </p:nvPicPr>
+            <p:blipFill>
+              <a:blip r:embed="rId6"/>
+              <a:stretch>
+                <a:fillRect/>
+              </a:stretch>
+            </p:blipFill>
+            <p:spPr>
+              <a:xfrm>
+                <a:off x="1382878" y="1948313"/>
+                <a:ext cx="795240" cy="616680"/>
+              </a:xfrm>
+              <a:prstGeom prst="rect">
+                <a:avLst/>
+              </a:prstGeom>
+            </p:spPr>
+          </p:pic>
+        </mc:Fallback>
+      </mc:AlternateContent>
+      <mc:AlternateContent xmlns:mc="http://schemas.openxmlformats.org/markup-compatibility/2006">
+        <mc:Choice xmlns:p14="http://schemas.microsoft.com/office/powerpoint/2010/main" Requires="p14">
+          <p:contentPart p14:bwMode="auto" r:id="rId7">
+            <p14:nvContentPartPr>
+              <p14:cNvPr id="7" name="Entrada de lápiz 6">
+                <a:extLst>
+                  <a:ext uri="{FF2B5EF4-FFF2-40B4-BE49-F238E27FC236}">
+                    <a16:creationId xmlns:a16="http://schemas.microsoft.com/office/drawing/2014/main" id="{BD8E5E90-3943-2566-2139-404FE6B6170B}"/>
+                  </a:ext>
+                </a:extLst>
+              </p14:cNvPr>
+              <p14:cNvContentPartPr/>
+              <p14:nvPr/>
+            </p14:nvContentPartPr>
+            <p14:xfrm>
+              <a:off x="6466438" y="5298113"/>
+              <a:ext cx="5893560" cy="939960"/>
+            </p14:xfrm>
+          </p:contentPart>
+        </mc:Choice>
+        <mc:Fallback>
+          <p:pic>
+            <p:nvPicPr>
+              <p:cNvPr id="7" name="Entrada de lápiz 6">
+                <a:extLst>
+                  <a:ext uri="{FF2B5EF4-FFF2-40B4-BE49-F238E27FC236}">
+                    <a16:creationId xmlns:a16="http://schemas.microsoft.com/office/drawing/2014/main" id="{BD8E5E90-3943-2566-2139-404FE6B6170B}"/>
+                  </a:ext>
+                </a:extLst>
+              </p:cNvPr>
+              <p:cNvPicPr/>
+              <p:nvPr/>
+            </p:nvPicPr>
+            <p:blipFill>
+              <a:blip r:embed="rId8"/>
+              <a:stretch>
+                <a:fillRect/>
+              </a:stretch>
+            </p:blipFill>
+            <p:spPr>
+              <a:xfrm>
+                <a:off x="6412798" y="5190113"/>
+                <a:ext cx="6001200" cy="1155600"/>
+              </a:xfrm>
+              <a:prstGeom prst="rect">
+                <a:avLst/>
+              </a:prstGeom>
+            </p:spPr>
+          </p:pic>
+        </mc:Fallback>
+      </mc:AlternateContent>
     </p:spTree>
     <p:extLst>
       <p:ext uri="{BB962C8B-B14F-4D97-AF65-F5344CB8AC3E}">
@@ -5487,10 +6369,95 @@
           <a:bodyPr/>
           <a:lstStyle/>
           <a:p>
-            <a:endParaRPr lang="es-GT"/>
-          </a:p>
-        </p:txBody>
-      </p:sp>
+            <a:r>
+              <a:rPr lang="es-MX" dirty="0"/>
+              <a:t>Color, fondo y transparencia </a:t>
+            </a:r>
+            <a:endParaRPr lang="es-GT" dirty="0"/>
+          </a:p>
+        </p:txBody>
+      </p:sp>
+      <mc:AlternateContent xmlns:mc="http://schemas.openxmlformats.org/markup-compatibility/2006">
+        <mc:Choice xmlns:p14="http://schemas.microsoft.com/office/powerpoint/2010/main" Requires="p14">
+          <p:contentPart p14:bwMode="auto" r:id="rId2">
+            <p14:nvContentPartPr>
+              <p14:cNvPr id="3" name="Entrada de lápiz 2">
+                <a:extLst>
+                  <a:ext uri="{FF2B5EF4-FFF2-40B4-BE49-F238E27FC236}">
+                    <a16:creationId xmlns:a16="http://schemas.microsoft.com/office/drawing/2014/main" id="{87F6A16A-5B11-2F94-7B4C-85B98CE1238E}"/>
+                  </a:ext>
+                </a:extLst>
+              </p14:cNvPr>
+              <p14:cNvContentPartPr/>
+              <p14:nvPr/>
+            </p14:nvContentPartPr>
+            <p14:xfrm>
+              <a:off x="4291678" y="3731753"/>
+              <a:ext cx="360" cy="3960"/>
+            </p14:xfrm>
+          </p:contentPart>
+        </mc:Choice>
+        <mc:Fallback>
+          <p:pic>
+            <p:nvPicPr>
+              <p:cNvPr id="3" name="Entrada de lápiz 2">
+                <a:extLst>
+                  <a:ext uri="{FF2B5EF4-FFF2-40B4-BE49-F238E27FC236}">
+                    <a16:creationId xmlns:a16="http://schemas.microsoft.com/office/drawing/2014/main" id="{87F6A16A-5B11-2F94-7B4C-85B98CE1238E}"/>
+                  </a:ext>
+                </a:extLst>
+              </p:cNvPr>
+              <p:cNvPicPr/>
+              <p:nvPr/>
+            </p:nvPicPr>
+            <p:blipFill>
+              <a:blip r:embed="rId3"/>
+              <a:stretch>
+                <a:fillRect/>
+              </a:stretch>
+            </p:blipFill>
+            <p:spPr>
+              <a:xfrm>
+                <a:off x="4238038" y="3624113"/>
+                <a:ext cx="108000" cy="219600"/>
+              </a:xfrm>
+              <a:prstGeom prst="rect">
+                <a:avLst/>
+              </a:prstGeom>
+            </p:spPr>
+          </p:pic>
+        </mc:Fallback>
+      </mc:AlternateContent>
+      <p:pic>
+        <p:nvPicPr>
+          <p:cNvPr id="5" name="Imagen 4">
+            <a:extLst>
+              <a:ext uri="{FF2B5EF4-FFF2-40B4-BE49-F238E27FC236}">
+                <a16:creationId xmlns:a16="http://schemas.microsoft.com/office/drawing/2014/main" id="{8169CA31-9AA5-7C72-C9E6-57123D7CAF36}"/>
+              </a:ext>
+            </a:extLst>
+          </p:cNvPr>
+          <p:cNvPicPr>
+            <a:picLocks noChangeAspect="1"/>
+          </p:cNvPicPr>
+          <p:nvPr/>
+        </p:nvPicPr>
+        <p:blipFill>
+          <a:blip r:embed="rId4"/>
+          <a:stretch>
+            <a:fillRect/>
+          </a:stretch>
+        </p:blipFill>
+        <p:spPr>
+          <a:xfrm>
+            <a:off x="2097354" y="1809669"/>
+            <a:ext cx="6916017" cy="4510036"/>
+          </a:xfrm>
+          <a:prstGeom prst="rect">
+            <a:avLst/>
+          </a:prstGeom>
+        </p:spPr>
+      </p:pic>
     </p:spTree>
     <p:extLst>
       <p:ext uri="{BB962C8B-B14F-4D97-AF65-F5344CB8AC3E}">
@@ -5542,10 +6509,146 @@
           <a:bodyPr/>
           <a:lstStyle/>
           <a:p>
-            <a:endParaRPr lang="es-GT"/>
-          </a:p>
-        </p:txBody>
-      </p:sp>
+            <a:r>
+              <a:rPr lang="es-MX" dirty="0"/>
+              <a:t>Modificando el ángulo </a:t>
+            </a:r>
+            <a:endParaRPr lang="es-GT" dirty="0"/>
+          </a:p>
+        </p:txBody>
+      </p:sp>
+      <p:pic>
+        <p:nvPicPr>
+          <p:cNvPr id="4" name="Imagen 3">
+            <a:extLst>
+              <a:ext uri="{FF2B5EF4-FFF2-40B4-BE49-F238E27FC236}">
+                <a16:creationId xmlns:a16="http://schemas.microsoft.com/office/drawing/2014/main" id="{01F11D52-EC1D-2B14-BD9C-66BBAD746182}"/>
+              </a:ext>
+            </a:extLst>
+          </p:cNvPr>
+          <p:cNvPicPr>
+            <a:picLocks noChangeAspect="1"/>
+          </p:cNvPicPr>
+          <p:nvPr/>
+        </p:nvPicPr>
+        <p:blipFill>
+          <a:blip r:embed="rId2"/>
+          <a:stretch>
+            <a:fillRect/>
+          </a:stretch>
+        </p:blipFill>
+        <p:spPr>
+          <a:xfrm>
+            <a:off x="2021303" y="1491667"/>
+            <a:ext cx="4990348" cy="5001208"/>
+          </a:xfrm>
+          <a:prstGeom prst="rect">
+            <a:avLst/>
+          </a:prstGeom>
+        </p:spPr>
+      </p:pic>
+      <mc:AlternateContent xmlns:mc="http://schemas.openxmlformats.org/markup-compatibility/2006">
+        <mc:Choice xmlns:p14="http://schemas.microsoft.com/office/powerpoint/2010/main" Requires="p14">
+          <p:contentPart p14:bwMode="auto" r:id="rId3">
+            <p14:nvContentPartPr>
+              <p14:cNvPr id="5" name="Entrada de lápiz 4">
+                <a:extLst>
+                  <a:ext uri="{FF2B5EF4-FFF2-40B4-BE49-F238E27FC236}">
+                    <a16:creationId xmlns:a16="http://schemas.microsoft.com/office/drawing/2014/main" id="{78B85006-947A-FD69-E37B-C114F87A0CA6}"/>
+                  </a:ext>
+                </a:extLst>
+              </p14:cNvPr>
+              <p14:cNvContentPartPr/>
+              <p14:nvPr/>
+            </p14:nvContentPartPr>
+            <p14:xfrm>
+              <a:off x="72838" y="1774433"/>
+              <a:ext cx="4358880" cy="362160"/>
+            </p14:xfrm>
+          </p:contentPart>
+        </mc:Choice>
+        <mc:Fallback>
+          <p:pic>
+            <p:nvPicPr>
+              <p:cNvPr id="5" name="Entrada de lápiz 4">
+                <a:extLst>
+                  <a:ext uri="{FF2B5EF4-FFF2-40B4-BE49-F238E27FC236}">
+                    <a16:creationId xmlns:a16="http://schemas.microsoft.com/office/drawing/2014/main" id="{78B85006-947A-FD69-E37B-C114F87A0CA6}"/>
+                  </a:ext>
+                </a:extLst>
+              </p:cNvPr>
+              <p:cNvPicPr/>
+              <p:nvPr/>
+            </p:nvPicPr>
+            <p:blipFill>
+              <a:blip r:embed="rId4"/>
+              <a:stretch>
+                <a:fillRect/>
+              </a:stretch>
+            </p:blipFill>
+            <p:spPr>
+              <a:xfrm>
+                <a:off x="1198" y="1630433"/>
+                <a:ext cx="4502520" cy="649800"/>
+              </a:xfrm>
+              <a:prstGeom prst="rect">
+                <a:avLst/>
+              </a:prstGeom>
+            </p:spPr>
+          </p:pic>
+        </mc:Fallback>
+      </mc:AlternateContent>
+      <mc:AlternateContent xmlns:mc="http://schemas.openxmlformats.org/markup-compatibility/2006">
+        <mc:Choice xmlns:p14="http://schemas.microsoft.com/office/powerpoint/2010/main" Requires="p14">
+          <p:contentPart p14:bwMode="auto" r:id="rId5">
+            <p14:nvContentPartPr>
+              <p14:cNvPr id="6" name="Entrada de lápiz 5">
+                <a:extLst>
+                  <a:ext uri="{FF2B5EF4-FFF2-40B4-BE49-F238E27FC236}">
+                    <a16:creationId xmlns:a16="http://schemas.microsoft.com/office/drawing/2014/main" id="{2B2BEBBF-6942-BFA2-8ABF-A6BBCCBE1D71}"/>
+                  </a:ext>
+                </a:extLst>
+              </p14:cNvPr>
+              <p14:cNvContentPartPr/>
+              <p14:nvPr/>
+            </p14:nvContentPartPr>
+            <p14:xfrm>
+              <a:off x="2789398" y="1996553"/>
+              <a:ext cx="4225320" cy="4307760"/>
+            </p14:xfrm>
+          </p:contentPart>
+        </mc:Choice>
+        <mc:Fallback>
+          <p:pic>
+            <p:nvPicPr>
+              <p:cNvPr id="6" name="Entrada de lápiz 5">
+                <a:extLst>
+                  <a:ext uri="{FF2B5EF4-FFF2-40B4-BE49-F238E27FC236}">
+                    <a16:creationId xmlns:a16="http://schemas.microsoft.com/office/drawing/2014/main" id="{2B2BEBBF-6942-BFA2-8ABF-A6BBCCBE1D71}"/>
+                  </a:ext>
+                </a:extLst>
+              </p:cNvPr>
+              <p:cNvPicPr/>
+              <p:nvPr/>
+            </p:nvPicPr>
+            <p:blipFill>
+              <a:blip r:embed="rId6"/>
+              <a:stretch>
+                <a:fillRect/>
+              </a:stretch>
+            </p:blipFill>
+            <p:spPr>
+              <a:xfrm>
+                <a:off x="2717758" y="1852553"/>
+                <a:ext cx="4368960" cy="4595400"/>
+              </a:xfrm>
+              <a:prstGeom prst="rect">
+                <a:avLst/>
+              </a:prstGeom>
+            </p:spPr>
+          </p:pic>
+        </mc:Fallback>
+      </mc:AlternateContent>
     </p:spTree>
     <p:extLst>
       <p:ext uri="{BB962C8B-B14F-4D97-AF65-F5344CB8AC3E}">
@@ -5597,10 +6700,44 @@
           <a:bodyPr/>
           <a:lstStyle/>
           <a:p>
-            <a:endParaRPr lang="es-GT"/>
-          </a:p>
-        </p:txBody>
-      </p:sp>
+            <a:r>
+              <a:rPr lang="es-MX" dirty="0"/>
+              <a:t>Propiedad de gradientes </a:t>
+            </a:r>
+            <a:endParaRPr lang="es-GT" dirty="0"/>
+          </a:p>
+        </p:txBody>
+      </p:sp>
+      <p:pic>
+        <p:nvPicPr>
+          <p:cNvPr id="4" name="Imagen 3">
+            <a:extLst>
+              <a:ext uri="{FF2B5EF4-FFF2-40B4-BE49-F238E27FC236}">
+                <a16:creationId xmlns:a16="http://schemas.microsoft.com/office/drawing/2014/main" id="{51ED8A24-D54E-77E4-D59C-38F680AC8E4E}"/>
+              </a:ext>
+            </a:extLst>
+          </p:cNvPr>
+          <p:cNvPicPr>
+            <a:picLocks noChangeAspect="1"/>
+          </p:cNvPicPr>
+          <p:nvPr/>
+        </p:nvPicPr>
+        <p:blipFill>
+          <a:blip r:embed="rId2"/>
+          <a:stretch>
+            <a:fillRect/>
+          </a:stretch>
+        </p:blipFill>
+        <p:spPr>
+          <a:xfrm>
+            <a:off x="2816657" y="2055840"/>
+            <a:ext cx="5868219" cy="4239217"/>
+          </a:xfrm>
+          <a:prstGeom prst="rect">
+            <a:avLst/>
+          </a:prstGeom>
+        </p:spPr>
+      </p:pic>
     </p:spTree>
     <p:extLst>
       <p:ext uri="{BB962C8B-B14F-4D97-AF65-F5344CB8AC3E}">
@@ -5656,6 +6793,36 @@
           </a:p>
         </p:txBody>
       </p:sp>
+      <p:pic>
+        <p:nvPicPr>
+          <p:cNvPr id="4" name="Imagen 3">
+            <a:extLst>
+              <a:ext uri="{FF2B5EF4-FFF2-40B4-BE49-F238E27FC236}">
+                <a16:creationId xmlns:a16="http://schemas.microsoft.com/office/drawing/2014/main" id="{E8F044A7-D276-2942-5894-A210384B9C3F}"/>
+              </a:ext>
+            </a:extLst>
+          </p:cNvPr>
+          <p:cNvPicPr>
+            <a:picLocks noChangeAspect="1"/>
+          </p:cNvPicPr>
+          <p:nvPr/>
+        </p:nvPicPr>
+        <p:blipFill>
+          <a:blip r:embed="rId2"/>
+          <a:stretch>
+            <a:fillRect/>
+          </a:stretch>
+        </p:blipFill>
+        <p:spPr>
+          <a:xfrm>
+            <a:off x="2078427" y="1690688"/>
+            <a:ext cx="6519014" cy="4701397"/>
+          </a:xfrm>
+          <a:prstGeom prst="rect">
+            <a:avLst/>
+          </a:prstGeom>
+        </p:spPr>
+      </p:pic>
     </p:spTree>
     <p:extLst>
       <p:ext uri="{BB962C8B-B14F-4D97-AF65-F5344CB8AC3E}">
@@ -5795,10 +6962,44 @@
           <a:bodyPr/>
           <a:lstStyle/>
           <a:p>
-            <a:endParaRPr lang="es-GT"/>
-          </a:p>
-        </p:txBody>
-      </p:sp>
+            <a:r>
+              <a:rPr lang="es-MX" dirty="0"/>
+              <a:t>Ultimo efecto definido por el usuario </a:t>
+            </a:r>
+            <a:endParaRPr lang="es-GT" dirty="0"/>
+          </a:p>
+        </p:txBody>
+      </p:sp>
+      <p:pic>
+        <p:nvPicPr>
+          <p:cNvPr id="4" name="Imagen 3">
+            <a:extLst>
+              <a:ext uri="{FF2B5EF4-FFF2-40B4-BE49-F238E27FC236}">
+                <a16:creationId xmlns:a16="http://schemas.microsoft.com/office/drawing/2014/main" id="{EC613CB1-1AF0-61E9-3113-58B8B2376E7E}"/>
+              </a:ext>
+            </a:extLst>
+          </p:cNvPr>
+          <p:cNvPicPr>
+            <a:picLocks noChangeAspect="1"/>
+          </p:cNvPicPr>
+          <p:nvPr/>
+        </p:nvPicPr>
+        <p:blipFill>
+          <a:blip r:embed="rId2"/>
+          <a:stretch>
+            <a:fillRect/>
+          </a:stretch>
+        </p:blipFill>
+        <p:spPr>
+          <a:xfrm>
+            <a:off x="1242630" y="1690688"/>
+            <a:ext cx="4853370" cy="3254480"/>
+          </a:xfrm>
+          <a:prstGeom prst="rect">
+            <a:avLst/>
+          </a:prstGeom>
+        </p:spPr>
+      </p:pic>
     </p:spTree>
     <p:extLst>
       <p:ext uri="{BB962C8B-B14F-4D97-AF65-F5344CB8AC3E}">
@@ -5854,6 +7055,189 @@
           </a:p>
         </p:txBody>
       </p:sp>
+      <p:pic>
+        <p:nvPicPr>
+          <p:cNvPr id="4" name="Imagen 3">
+            <a:extLst>
+              <a:ext uri="{FF2B5EF4-FFF2-40B4-BE49-F238E27FC236}">
+                <a16:creationId xmlns:a16="http://schemas.microsoft.com/office/drawing/2014/main" id="{5B5F5E37-C098-D5C1-26D4-A5CE9EF73169}"/>
+              </a:ext>
+            </a:extLst>
+          </p:cNvPr>
+          <p:cNvPicPr>
+            <a:picLocks noChangeAspect="1"/>
+          </p:cNvPicPr>
+          <p:nvPr/>
+        </p:nvPicPr>
+        <p:blipFill>
+          <a:blip r:embed="rId2"/>
+          <a:stretch>
+            <a:fillRect/>
+          </a:stretch>
+        </p:blipFill>
+        <p:spPr>
+          <a:xfrm>
+            <a:off x="1306285" y="1690688"/>
+            <a:ext cx="9293291" cy="4366236"/>
+          </a:xfrm>
+          <a:prstGeom prst="rect">
+            <a:avLst/>
+          </a:prstGeom>
+        </p:spPr>
+      </p:pic>
+      <mc:AlternateContent xmlns:mc="http://schemas.openxmlformats.org/markup-compatibility/2006">
+        <mc:Choice xmlns:p14="http://schemas.microsoft.com/office/powerpoint/2010/main" Requires="p14">
+          <p:contentPart p14:bwMode="auto" r:id="rId3">
+            <p14:nvContentPartPr>
+              <p14:cNvPr id="5" name="Entrada de lápiz 4">
+                <a:extLst>
+                  <a:ext uri="{FF2B5EF4-FFF2-40B4-BE49-F238E27FC236}">
+                    <a16:creationId xmlns:a16="http://schemas.microsoft.com/office/drawing/2014/main" id="{7E3A1850-1CBD-AC6B-4B4B-DD1E68BC0686}"/>
+                  </a:ext>
+                </a:extLst>
+              </p14:cNvPr>
+              <p14:cNvContentPartPr/>
+              <p14:nvPr/>
+            </p14:nvContentPartPr>
+            <p14:xfrm>
+              <a:off x="3847438" y="1915193"/>
+              <a:ext cx="2857680" cy="288360"/>
+            </p14:xfrm>
+          </p:contentPart>
+        </mc:Choice>
+        <mc:Fallback>
+          <p:pic>
+            <p:nvPicPr>
+              <p:cNvPr id="5" name="Entrada de lápiz 4">
+                <a:extLst>
+                  <a:ext uri="{FF2B5EF4-FFF2-40B4-BE49-F238E27FC236}">
+                    <a16:creationId xmlns:a16="http://schemas.microsoft.com/office/drawing/2014/main" id="{7E3A1850-1CBD-AC6B-4B4B-DD1E68BC0686}"/>
+                  </a:ext>
+                </a:extLst>
+              </p:cNvPr>
+              <p:cNvPicPr/>
+              <p:nvPr/>
+            </p:nvPicPr>
+            <p:blipFill>
+              <a:blip r:embed="rId4"/>
+              <a:stretch>
+                <a:fillRect/>
+              </a:stretch>
+            </p:blipFill>
+            <p:spPr>
+              <a:xfrm>
+                <a:off x="3793798" y="1807193"/>
+                <a:ext cx="2965320" cy="504000"/>
+              </a:xfrm>
+              <a:prstGeom prst="rect">
+                <a:avLst/>
+              </a:prstGeom>
+            </p:spPr>
+          </p:pic>
+        </mc:Fallback>
+      </mc:AlternateContent>
+      <mc:AlternateContent xmlns:mc="http://schemas.openxmlformats.org/markup-compatibility/2006">
+        <mc:Choice xmlns:p14="http://schemas.microsoft.com/office/powerpoint/2010/main" Requires="p14">
+          <p:contentPart p14:bwMode="auto" r:id="rId5">
+            <p14:nvContentPartPr>
+              <p14:cNvPr id="6" name="Entrada de lápiz 5">
+                <a:extLst>
+                  <a:ext uri="{FF2B5EF4-FFF2-40B4-BE49-F238E27FC236}">
+                    <a16:creationId xmlns:a16="http://schemas.microsoft.com/office/drawing/2014/main" id="{E66721FE-9685-E923-2EB0-F1403FE4E1FE}"/>
+                  </a:ext>
+                </a:extLst>
+              </p14:cNvPr>
+              <p14:cNvContentPartPr/>
+              <p14:nvPr/>
+            </p14:nvContentPartPr>
+            <p14:xfrm>
+              <a:off x="7393798" y="3940913"/>
+              <a:ext cx="6468480" cy="3234960"/>
+            </p14:xfrm>
+          </p:contentPart>
+        </mc:Choice>
+        <mc:Fallback>
+          <p:pic>
+            <p:nvPicPr>
+              <p:cNvPr id="6" name="Entrada de lápiz 5">
+                <a:extLst>
+                  <a:ext uri="{FF2B5EF4-FFF2-40B4-BE49-F238E27FC236}">
+                    <a16:creationId xmlns:a16="http://schemas.microsoft.com/office/drawing/2014/main" id="{E66721FE-9685-E923-2EB0-F1403FE4E1FE}"/>
+                  </a:ext>
+                </a:extLst>
+              </p:cNvPr>
+              <p:cNvPicPr/>
+              <p:nvPr/>
+            </p:nvPicPr>
+            <p:blipFill>
+              <a:blip r:embed="rId6"/>
+              <a:stretch>
+                <a:fillRect/>
+              </a:stretch>
+            </p:blipFill>
+            <p:spPr>
+              <a:xfrm>
+                <a:off x="7340158" y="3832913"/>
+                <a:ext cx="6576120" cy="3450600"/>
+              </a:xfrm>
+              <a:prstGeom prst="rect">
+                <a:avLst/>
+              </a:prstGeom>
+            </p:spPr>
+          </p:pic>
+        </mc:Fallback>
+      </mc:AlternateContent>
+      <mc:AlternateContent xmlns:mc="http://schemas.openxmlformats.org/markup-compatibility/2006">
+        <mc:Choice xmlns:p14="http://schemas.microsoft.com/office/powerpoint/2010/main" Requires="p14">
+          <p:contentPart p14:bwMode="auto" r:id="rId7">
+            <p14:nvContentPartPr>
+              <p14:cNvPr id="7" name="Entrada de lápiz 6">
+                <a:extLst>
+                  <a:ext uri="{FF2B5EF4-FFF2-40B4-BE49-F238E27FC236}">
+                    <a16:creationId xmlns:a16="http://schemas.microsoft.com/office/drawing/2014/main" id="{DFE10ADE-6987-93AC-D404-6217844D7F72}"/>
+                  </a:ext>
+                </a:extLst>
+              </p14:cNvPr>
+              <p14:cNvContentPartPr/>
+              <p14:nvPr/>
+            </p14:nvContentPartPr>
+            <p14:xfrm>
+              <a:off x="1991880" y="1954014"/>
+              <a:ext cx="686520" cy="1139040"/>
+            </p14:xfrm>
+          </p:contentPart>
+        </mc:Choice>
+        <mc:Fallback>
+          <p:pic>
+            <p:nvPicPr>
+              <p:cNvPr id="7" name="Entrada de lápiz 6">
+                <a:extLst>
+                  <a:ext uri="{FF2B5EF4-FFF2-40B4-BE49-F238E27FC236}">
+                    <a16:creationId xmlns:a16="http://schemas.microsoft.com/office/drawing/2014/main" id="{DFE10ADE-6987-93AC-D404-6217844D7F72}"/>
+                  </a:ext>
+                </a:extLst>
+              </p:cNvPr>
+              <p:cNvPicPr/>
+              <p:nvPr/>
+            </p:nvPicPr>
+            <p:blipFill>
+              <a:blip r:embed="rId8"/>
+              <a:stretch>
+                <a:fillRect/>
+              </a:stretch>
+            </p:blipFill>
+            <p:spPr>
+              <a:xfrm>
+                <a:off x="1938240" y="1846014"/>
+                <a:ext cx="794160" cy="1354680"/>
+              </a:xfrm>
+              <a:prstGeom prst="rect">
+                <a:avLst/>
+              </a:prstGeom>
+            </p:spPr>
+          </p:pic>
+        </mc:Fallback>
+      </mc:AlternateContent>
     </p:spTree>
     <p:extLst>
       <p:ext uri="{BB962C8B-B14F-4D97-AF65-F5344CB8AC3E}">
@@ -5905,14 +7289,959 @@
           <a:bodyPr/>
           <a:lstStyle/>
           <a:p>
-            <a:endParaRPr lang="es-GT"/>
-          </a:p>
-        </p:txBody>
-      </p:sp>
+            <a:r>
+              <a:rPr lang="es-MX" dirty="0"/>
+              <a:t>Esta es la opción de </a:t>
+            </a:r>
+            <a:r>
+              <a:rPr lang="es-MX" dirty="0" err="1"/>
+              <a:t>double</a:t>
+            </a:r>
+            <a:r>
+              <a:rPr lang="es-MX" dirty="0"/>
+              <a:t> para hacerlo doble sentido </a:t>
+            </a:r>
+            <a:endParaRPr lang="es-GT" dirty="0"/>
+          </a:p>
+        </p:txBody>
+      </p:sp>
+      <p:pic>
+        <p:nvPicPr>
+          <p:cNvPr id="4" name="Imagen 3">
+            <a:extLst>
+              <a:ext uri="{FF2B5EF4-FFF2-40B4-BE49-F238E27FC236}">
+                <a16:creationId xmlns:a16="http://schemas.microsoft.com/office/drawing/2014/main" id="{515026AC-B8C5-3B50-A1E5-C16DE9E971E9}"/>
+              </a:ext>
+            </a:extLst>
+          </p:cNvPr>
+          <p:cNvPicPr>
+            <a:picLocks noChangeAspect="1"/>
+          </p:cNvPicPr>
+          <p:nvPr/>
+        </p:nvPicPr>
+        <p:blipFill>
+          <a:blip r:embed="rId2"/>
+          <a:stretch>
+            <a:fillRect/>
+          </a:stretch>
+        </p:blipFill>
+        <p:spPr>
+          <a:xfrm>
+            <a:off x="2188199" y="1843657"/>
+            <a:ext cx="9165601" cy="4818401"/>
+          </a:xfrm>
+          <a:prstGeom prst="rect">
+            <a:avLst/>
+          </a:prstGeom>
+        </p:spPr>
+      </p:pic>
+      <mc:AlternateContent xmlns:mc="http://schemas.openxmlformats.org/markup-compatibility/2006">
+        <mc:Choice xmlns:p14="http://schemas.microsoft.com/office/powerpoint/2010/main" Requires="p14">
+          <p:contentPart p14:bwMode="auto" r:id="rId3">
+            <p14:nvContentPartPr>
+              <p14:cNvPr id="5" name="Entrada de lápiz 4">
+                <a:extLst>
+                  <a:ext uri="{FF2B5EF4-FFF2-40B4-BE49-F238E27FC236}">
+                    <a16:creationId xmlns:a16="http://schemas.microsoft.com/office/drawing/2014/main" id="{9E361276-C673-7BED-E7D0-7D247AA2F579}"/>
+                  </a:ext>
+                </a:extLst>
+              </p14:cNvPr>
+              <p14:cNvContentPartPr/>
+              <p14:nvPr/>
+            </p14:nvContentPartPr>
+            <p14:xfrm>
+              <a:off x="-940922" y="3536993"/>
+              <a:ext cx="4906440" cy="316800"/>
+            </p14:xfrm>
+          </p:contentPart>
+        </mc:Choice>
+        <mc:Fallback>
+          <p:pic>
+            <p:nvPicPr>
+              <p:cNvPr id="5" name="Entrada de lápiz 4">
+                <a:extLst>
+                  <a:ext uri="{FF2B5EF4-FFF2-40B4-BE49-F238E27FC236}">
+                    <a16:creationId xmlns:a16="http://schemas.microsoft.com/office/drawing/2014/main" id="{9E361276-C673-7BED-E7D0-7D247AA2F579}"/>
+                  </a:ext>
+                </a:extLst>
+              </p:cNvPr>
+              <p:cNvPicPr/>
+              <p:nvPr/>
+            </p:nvPicPr>
+            <p:blipFill>
+              <a:blip r:embed="rId4"/>
+              <a:stretch>
+                <a:fillRect/>
+              </a:stretch>
+            </p:blipFill>
+            <p:spPr>
+              <a:xfrm>
+                <a:off x="-1012922" y="3392993"/>
+                <a:ext cx="5050080" cy="604440"/>
+              </a:xfrm>
+              <a:prstGeom prst="rect">
+                <a:avLst/>
+              </a:prstGeom>
+            </p:spPr>
+          </p:pic>
+        </mc:Fallback>
+      </mc:AlternateContent>
+      <mc:AlternateContent xmlns:mc="http://schemas.openxmlformats.org/markup-compatibility/2006">
+        <mc:Choice xmlns:p14="http://schemas.microsoft.com/office/powerpoint/2010/main" Requires="p14">
+          <p:contentPart p14:bwMode="auto" r:id="rId5">
+            <p14:nvContentPartPr>
+              <p14:cNvPr id="6" name="Entrada de lápiz 5">
+                <a:extLst>
+                  <a:ext uri="{FF2B5EF4-FFF2-40B4-BE49-F238E27FC236}">
+                    <a16:creationId xmlns:a16="http://schemas.microsoft.com/office/drawing/2014/main" id="{7170C4DA-946B-A993-3276-4A66441ACDE1}"/>
+                  </a:ext>
+                </a:extLst>
+              </p14:cNvPr>
+              <p14:cNvContentPartPr/>
+              <p14:nvPr/>
+            </p14:nvContentPartPr>
+            <p14:xfrm>
+              <a:off x="3993238" y="1343153"/>
+              <a:ext cx="360" cy="360"/>
+            </p14:xfrm>
+          </p:contentPart>
+        </mc:Choice>
+        <mc:Fallback>
+          <p:pic>
+            <p:nvPicPr>
+              <p:cNvPr id="6" name="Entrada de lápiz 5">
+                <a:extLst>
+                  <a:ext uri="{FF2B5EF4-FFF2-40B4-BE49-F238E27FC236}">
+                    <a16:creationId xmlns:a16="http://schemas.microsoft.com/office/drawing/2014/main" id="{7170C4DA-946B-A993-3276-4A66441ACDE1}"/>
+                  </a:ext>
+                </a:extLst>
+              </p:cNvPr>
+              <p:cNvPicPr/>
+              <p:nvPr/>
+            </p:nvPicPr>
+            <p:blipFill>
+              <a:blip r:embed="rId6"/>
+              <a:stretch>
+                <a:fillRect/>
+              </a:stretch>
+            </p:blipFill>
+            <p:spPr>
+              <a:xfrm>
+                <a:off x="3921598" y="1199153"/>
+                <a:ext cx="144000" cy="288000"/>
+              </a:xfrm>
+              <a:prstGeom prst="rect">
+                <a:avLst/>
+              </a:prstGeom>
+            </p:spPr>
+          </p:pic>
+        </mc:Fallback>
+      </mc:AlternateContent>
     </p:spTree>
     <p:extLst>
       <p:ext uri="{BB962C8B-B14F-4D97-AF65-F5344CB8AC3E}">
         <p14:creationId xmlns:p14="http://schemas.microsoft.com/office/powerpoint/2010/main" val="2199684720"/>
+      </p:ext>
+    </p:extLst>
+  </p:cSld>
+  <p:clrMapOvr>
+    <a:masterClrMapping/>
+  </p:clrMapOvr>
+</p:sld>
+</file>
+
+<file path=ppt/slides/slide33.xml><?xml version="1.0" encoding="utf-8"?>
+<p:sld xmlns:a="http://schemas.openxmlformats.org/drawingml/2006/main" xmlns:r="http://schemas.openxmlformats.org/officeDocument/2006/relationships" xmlns:p="http://schemas.openxmlformats.org/presentationml/2006/main">
+  <p:cSld>
+    <p:spTree>
+      <p:nvGrpSpPr>
+        <p:cNvPr id="1" name=""/>
+        <p:cNvGrpSpPr/>
+        <p:nvPr/>
+      </p:nvGrpSpPr>
+      <p:grpSpPr>
+        <a:xfrm>
+          <a:off x="0" y="0"/>
+          <a:ext cx="0" cy="0"/>
+          <a:chOff x="0" y="0"/>
+          <a:chExt cx="0" cy="0"/>
+        </a:xfrm>
+      </p:grpSpPr>
+      <p:sp>
+        <p:nvSpPr>
+          <p:cNvPr id="2" name="Título 1">
+            <a:extLst>
+              <a:ext uri="{FF2B5EF4-FFF2-40B4-BE49-F238E27FC236}">
+                <a16:creationId xmlns:a16="http://schemas.microsoft.com/office/drawing/2014/main" id="{58235F7E-89DD-9364-DD78-4EC49F97A737}"/>
+              </a:ext>
+            </a:extLst>
+          </p:cNvPr>
+          <p:cNvSpPr>
+            <a:spLocks noGrp="1"/>
+          </p:cNvSpPr>
+          <p:nvPr>
+            <p:ph type="title"/>
+          </p:nvPr>
+        </p:nvSpPr>
+        <p:spPr/>
+        <p:txBody>
+          <a:bodyPr/>
+          <a:lstStyle/>
+          <a:p>
+            <a:endParaRPr lang="es-GT"/>
+          </a:p>
+        </p:txBody>
+      </p:sp>
+      <p:pic>
+        <p:nvPicPr>
+          <p:cNvPr id="4" name="Imagen 3">
+            <a:extLst>
+              <a:ext uri="{FF2B5EF4-FFF2-40B4-BE49-F238E27FC236}">
+                <a16:creationId xmlns:a16="http://schemas.microsoft.com/office/drawing/2014/main" id="{4A91982D-84D7-6248-5D96-53524212AB23}"/>
+              </a:ext>
+            </a:extLst>
+          </p:cNvPr>
+          <p:cNvPicPr>
+            <a:picLocks noChangeAspect="1"/>
+          </p:cNvPicPr>
+          <p:nvPr/>
+        </p:nvPicPr>
+        <p:blipFill>
+          <a:blip r:embed="rId2"/>
+          <a:stretch>
+            <a:fillRect/>
+          </a:stretch>
+        </p:blipFill>
+        <p:spPr>
+          <a:xfrm>
+            <a:off x="585540" y="1138334"/>
+            <a:ext cx="6841628" cy="4683968"/>
+          </a:xfrm>
+          <a:prstGeom prst="rect">
+            <a:avLst/>
+          </a:prstGeom>
+        </p:spPr>
+      </p:pic>
+      <mc:AlternateContent xmlns:mc="http://schemas.openxmlformats.org/markup-compatibility/2006">
+        <mc:Choice xmlns:p14="http://schemas.microsoft.com/office/powerpoint/2010/main" Requires="p14">
+          <p:contentPart p14:bwMode="auto" r:id="rId3">
+            <p14:nvContentPartPr>
+              <p14:cNvPr id="5" name="Entrada de lápiz 4">
+                <a:extLst>
+                  <a:ext uri="{FF2B5EF4-FFF2-40B4-BE49-F238E27FC236}">
+                    <a16:creationId xmlns:a16="http://schemas.microsoft.com/office/drawing/2014/main" id="{33EC4CC9-DEA6-784D-5587-A9380DC6D219}"/>
+                  </a:ext>
+                </a:extLst>
+              </p14:cNvPr>
+              <p14:cNvContentPartPr/>
+              <p14:nvPr/>
+            </p14:nvContentPartPr>
+            <p14:xfrm>
+              <a:off x="-24722" y="2294633"/>
+              <a:ext cx="4023000" cy="196560"/>
+            </p14:xfrm>
+          </p:contentPart>
+        </mc:Choice>
+        <mc:Fallback>
+          <p:pic>
+            <p:nvPicPr>
+              <p:cNvPr id="5" name="Entrada de lápiz 4">
+                <a:extLst>
+                  <a:ext uri="{FF2B5EF4-FFF2-40B4-BE49-F238E27FC236}">
+                    <a16:creationId xmlns:a16="http://schemas.microsoft.com/office/drawing/2014/main" id="{33EC4CC9-DEA6-784D-5587-A9380DC6D219}"/>
+                  </a:ext>
+                </a:extLst>
+              </p:cNvPr>
+              <p:cNvPicPr/>
+              <p:nvPr/>
+            </p:nvPicPr>
+            <p:blipFill>
+              <a:blip r:embed="rId4"/>
+              <a:stretch>
+                <a:fillRect/>
+              </a:stretch>
+            </p:blipFill>
+            <p:spPr>
+              <a:xfrm>
+                <a:off x="-78722" y="2186993"/>
+                <a:ext cx="4130640" cy="412200"/>
+              </a:xfrm>
+              <a:prstGeom prst="rect">
+                <a:avLst/>
+              </a:prstGeom>
+            </p:spPr>
+          </p:pic>
+        </mc:Fallback>
+      </mc:AlternateContent>
+      <p:sp>
+        <p:nvSpPr>
+          <p:cNvPr id="6" name="CuadroTexto 5">
+            <a:extLst>
+              <a:ext uri="{FF2B5EF4-FFF2-40B4-BE49-F238E27FC236}">
+                <a16:creationId xmlns:a16="http://schemas.microsoft.com/office/drawing/2014/main" id="{EE22ECDC-F06C-4256-4B51-9BAD4CD0652F}"/>
+              </a:ext>
+            </a:extLst>
+          </p:cNvPr>
+          <p:cNvSpPr txBox="1"/>
+          <p:nvPr/>
+        </p:nvSpPr>
+        <p:spPr>
+          <a:xfrm>
+            <a:off x="8070980" y="2659224"/>
+            <a:ext cx="3051110" cy="1569660"/>
+          </a:xfrm>
+          <a:prstGeom prst="rect">
+            <a:avLst/>
+          </a:prstGeom>
+          <a:noFill/>
+        </p:spPr>
+        <p:txBody>
+          <a:bodyPr wrap="square" rtlCol="0">
+            <a:spAutoFit/>
+          </a:bodyPr>
+          <a:lstStyle/>
+          <a:p>
+            <a:r>
+              <a:rPr lang="es-MX" sz="2400" dirty="0"/>
+              <a:t>Tiene su </a:t>
+            </a:r>
+            <a:r>
+              <a:rPr lang="es-MX" sz="2400" dirty="0" err="1"/>
+              <a:t>propiedade</a:t>
+            </a:r>
+            <a:r>
+              <a:rPr lang="es-MX" sz="2400" dirty="0"/>
+              <a:t> capa, CAPA DE HATCH,  ESO SI CONSUME MUCHA RAM</a:t>
+            </a:r>
+            <a:endParaRPr lang="es-GT" sz="2400" dirty="0"/>
+          </a:p>
+        </p:txBody>
+      </p:sp>
+    </p:spTree>
+    <p:extLst>
+      <p:ext uri="{BB962C8B-B14F-4D97-AF65-F5344CB8AC3E}">
+        <p14:creationId xmlns:p14="http://schemas.microsoft.com/office/powerpoint/2010/main" val="2352397262"/>
+      </p:ext>
+    </p:extLst>
+  </p:cSld>
+  <p:clrMapOvr>
+    <a:masterClrMapping/>
+  </p:clrMapOvr>
+</p:sld>
+</file>
+
+<file path=ppt/slides/slide34.xml><?xml version="1.0" encoding="utf-8"?>
+<p:sld xmlns:a="http://schemas.openxmlformats.org/drawingml/2006/main" xmlns:r="http://schemas.openxmlformats.org/officeDocument/2006/relationships" xmlns:p="http://schemas.openxmlformats.org/presentationml/2006/main">
+  <p:cSld>
+    <p:spTree>
+      <p:nvGrpSpPr>
+        <p:cNvPr id="1" name=""/>
+        <p:cNvGrpSpPr/>
+        <p:nvPr/>
+      </p:nvGrpSpPr>
+      <p:grpSpPr>
+        <a:xfrm>
+          <a:off x="0" y="0"/>
+          <a:ext cx="0" cy="0"/>
+          <a:chOff x="0" y="0"/>
+          <a:chExt cx="0" cy="0"/>
+        </a:xfrm>
+      </p:grpSpPr>
+      <p:sp>
+        <p:nvSpPr>
+          <p:cNvPr id="2" name="Título 1">
+            <a:extLst>
+              <a:ext uri="{FF2B5EF4-FFF2-40B4-BE49-F238E27FC236}">
+                <a16:creationId xmlns:a16="http://schemas.microsoft.com/office/drawing/2014/main" id="{1A3A444C-E776-A8BF-410B-4EE8C1CFD995}"/>
+              </a:ext>
+            </a:extLst>
+          </p:cNvPr>
+          <p:cNvSpPr>
+            <a:spLocks noGrp="1"/>
+          </p:cNvSpPr>
+          <p:nvPr>
+            <p:ph type="title"/>
+          </p:nvPr>
+        </p:nvSpPr>
+        <p:spPr/>
+        <p:txBody>
+          <a:bodyPr/>
+          <a:lstStyle/>
+          <a:p>
+            <a:r>
+              <a:rPr lang="es-MX" dirty="0"/>
+              <a:t>CREAR Hatch separados </a:t>
+            </a:r>
+            <a:endParaRPr lang="es-GT" dirty="0"/>
+          </a:p>
+        </p:txBody>
+      </p:sp>
+      <p:pic>
+        <p:nvPicPr>
+          <p:cNvPr id="4" name="Imagen 3">
+            <a:extLst>
+              <a:ext uri="{FF2B5EF4-FFF2-40B4-BE49-F238E27FC236}">
+                <a16:creationId xmlns:a16="http://schemas.microsoft.com/office/drawing/2014/main" id="{B182C176-706D-3F37-6002-B15D59B13E94}"/>
+              </a:ext>
+            </a:extLst>
+          </p:cNvPr>
+          <p:cNvPicPr>
+            <a:picLocks noChangeAspect="1"/>
+          </p:cNvPicPr>
+          <p:nvPr/>
+        </p:nvPicPr>
+        <p:blipFill>
+          <a:blip r:embed="rId2"/>
+          <a:stretch>
+            <a:fillRect/>
+          </a:stretch>
+        </p:blipFill>
+        <p:spPr>
+          <a:xfrm>
+            <a:off x="2199731" y="2631793"/>
+            <a:ext cx="7792537" cy="4486901"/>
+          </a:xfrm>
+          <a:prstGeom prst="rect">
+            <a:avLst/>
+          </a:prstGeom>
+        </p:spPr>
+      </p:pic>
+    </p:spTree>
+    <p:extLst>
+      <p:ext uri="{BB962C8B-B14F-4D97-AF65-F5344CB8AC3E}">
+        <p14:creationId xmlns:p14="http://schemas.microsoft.com/office/powerpoint/2010/main" val="1912873045"/>
+      </p:ext>
+    </p:extLst>
+  </p:cSld>
+  <p:clrMapOvr>
+    <a:masterClrMapping/>
+  </p:clrMapOvr>
+</p:sld>
+</file>
+
+<file path=ppt/slides/slide35.xml><?xml version="1.0" encoding="utf-8"?>
+<p:sld xmlns:a="http://schemas.openxmlformats.org/drawingml/2006/main" xmlns:r="http://schemas.openxmlformats.org/officeDocument/2006/relationships" xmlns:p="http://schemas.openxmlformats.org/presentationml/2006/main">
+  <p:cSld>
+    <p:spTree>
+      <p:nvGrpSpPr>
+        <p:cNvPr id="1" name=""/>
+        <p:cNvGrpSpPr/>
+        <p:nvPr/>
+      </p:nvGrpSpPr>
+      <p:grpSpPr>
+        <a:xfrm>
+          <a:off x="0" y="0"/>
+          <a:ext cx="0" cy="0"/>
+          <a:chOff x="0" y="0"/>
+          <a:chExt cx="0" cy="0"/>
+        </a:xfrm>
+      </p:grpSpPr>
+      <p:sp>
+        <p:nvSpPr>
+          <p:cNvPr id="2" name="Título 1">
+            <a:extLst>
+              <a:ext uri="{FF2B5EF4-FFF2-40B4-BE49-F238E27FC236}">
+                <a16:creationId xmlns:a16="http://schemas.microsoft.com/office/drawing/2014/main" id="{CE1AF244-C681-A7AB-7457-55A3772A9CAC}"/>
+              </a:ext>
+            </a:extLst>
+          </p:cNvPr>
+          <p:cNvSpPr>
+            <a:spLocks noGrp="1"/>
+          </p:cNvSpPr>
+          <p:nvPr>
+            <p:ph type="title"/>
+          </p:nvPr>
+        </p:nvSpPr>
+        <p:spPr/>
+        <p:txBody>
+          <a:bodyPr/>
+          <a:lstStyle/>
+          <a:p>
+            <a:r>
+              <a:rPr lang="es-MX" dirty="0"/>
+              <a:t>Aca se nota que estan juntos, y enlazados, si cambio uno cambian </a:t>
+            </a:r>
+            <a:r>
+              <a:rPr lang="es-MX" dirty="0" err="1"/>
+              <a:t>todoos</a:t>
+            </a:r>
+            <a:endParaRPr lang="es-GT" dirty="0"/>
+          </a:p>
+        </p:txBody>
+      </p:sp>
+      <p:pic>
+        <p:nvPicPr>
+          <p:cNvPr id="4" name="Imagen 3">
+            <a:extLst>
+              <a:ext uri="{FF2B5EF4-FFF2-40B4-BE49-F238E27FC236}">
+                <a16:creationId xmlns:a16="http://schemas.microsoft.com/office/drawing/2014/main" id="{D66535A6-6EFE-C6E1-CAA4-AD85F5A3A5D3}"/>
+              </a:ext>
+            </a:extLst>
+          </p:cNvPr>
+          <p:cNvPicPr>
+            <a:picLocks noChangeAspect="1"/>
+          </p:cNvPicPr>
+          <p:nvPr/>
+        </p:nvPicPr>
+        <p:blipFill>
+          <a:blip r:embed="rId2"/>
+          <a:stretch>
+            <a:fillRect/>
+          </a:stretch>
+        </p:blipFill>
+        <p:spPr>
+          <a:xfrm>
+            <a:off x="2206258" y="1741614"/>
+            <a:ext cx="6993262" cy="4751261"/>
+          </a:xfrm>
+          <a:prstGeom prst="rect">
+            <a:avLst/>
+          </a:prstGeom>
+        </p:spPr>
+      </p:pic>
+    </p:spTree>
+    <p:extLst>
+      <p:ext uri="{BB962C8B-B14F-4D97-AF65-F5344CB8AC3E}">
+        <p14:creationId xmlns:p14="http://schemas.microsoft.com/office/powerpoint/2010/main" val="4091106873"/>
+      </p:ext>
+    </p:extLst>
+  </p:cSld>
+  <p:clrMapOvr>
+    <a:masterClrMapping/>
+  </p:clrMapOvr>
+</p:sld>
+</file>
+
+<file path=ppt/slides/slide36.xml><?xml version="1.0" encoding="utf-8"?>
+<p:sld xmlns:a="http://schemas.openxmlformats.org/drawingml/2006/main" xmlns:r="http://schemas.openxmlformats.org/officeDocument/2006/relationships" xmlns:p="http://schemas.openxmlformats.org/presentationml/2006/main">
+  <p:cSld>
+    <p:spTree>
+      <p:nvGrpSpPr>
+        <p:cNvPr id="1" name=""/>
+        <p:cNvGrpSpPr/>
+        <p:nvPr/>
+      </p:nvGrpSpPr>
+      <p:grpSpPr>
+        <a:xfrm>
+          <a:off x="0" y="0"/>
+          <a:ext cx="0" cy="0"/>
+          <a:chOff x="0" y="0"/>
+          <a:chExt cx="0" cy="0"/>
+        </a:xfrm>
+      </p:grpSpPr>
+      <p:sp>
+        <p:nvSpPr>
+          <p:cNvPr id="2" name="Título 1">
+            <a:extLst>
+              <a:ext uri="{FF2B5EF4-FFF2-40B4-BE49-F238E27FC236}">
+                <a16:creationId xmlns:a16="http://schemas.microsoft.com/office/drawing/2014/main" id="{FE16116E-6AFB-08F1-DFF2-A2BD9279199A}"/>
+              </a:ext>
+            </a:extLst>
+          </p:cNvPr>
+          <p:cNvSpPr>
+            <a:spLocks noGrp="1"/>
+          </p:cNvSpPr>
+          <p:nvPr>
+            <p:ph type="title"/>
+          </p:nvPr>
+        </p:nvSpPr>
+        <p:spPr/>
+        <p:txBody>
+          <a:bodyPr/>
+          <a:lstStyle/>
+          <a:p>
+            <a:r>
+              <a:rPr lang="es-MX" dirty="0"/>
+              <a:t>Ahora este es para separarlos, no hay opción para volverlos a unir </a:t>
+            </a:r>
+            <a:endParaRPr lang="es-GT" dirty="0"/>
+          </a:p>
+        </p:txBody>
+      </p:sp>
+      <p:pic>
+        <p:nvPicPr>
+          <p:cNvPr id="4" name="Imagen 3">
+            <a:extLst>
+              <a:ext uri="{FF2B5EF4-FFF2-40B4-BE49-F238E27FC236}">
+                <a16:creationId xmlns:a16="http://schemas.microsoft.com/office/drawing/2014/main" id="{1B0D3F57-4AD3-2F95-98AC-07A21DBBC042}"/>
+              </a:ext>
+            </a:extLst>
+          </p:cNvPr>
+          <p:cNvPicPr>
+            <a:picLocks noChangeAspect="1"/>
+          </p:cNvPicPr>
+          <p:nvPr/>
+        </p:nvPicPr>
+        <p:blipFill>
+          <a:blip r:embed="rId2"/>
+          <a:stretch>
+            <a:fillRect/>
+          </a:stretch>
+        </p:blipFill>
+        <p:spPr>
+          <a:xfrm>
+            <a:off x="770782" y="1983741"/>
+            <a:ext cx="5325218" cy="3991532"/>
+          </a:xfrm>
+          <a:prstGeom prst="rect">
+            <a:avLst/>
+          </a:prstGeom>
+        </p:spPr>
+      </p:pic>
+      <p:pic>
+        <p:nvPicPr>
+          <p:cNvPr id="6" name="Imagen 5">
+            <a:extLst>
+              <a:ext uri="{FF2B5EF4-FFF2-40B4-BE49-F238E27FC236}">
+                <a16:creationId xmlns:a16="http://schemas.microsoft.com/office/drawing/2014/main" id="{97FB27B7-B71D-1731-818E-000D017FF312}"/>
+              </a:ext>
+            </a:extLst>
+          </p:cNvPr>
+          <p:cNvPicPr>
+            <a:picLocks noChangeAspect="1"/>
+          </p:cNvPicPr>
+          <p:nvPr/>
+        </p:nvPicPr>
+        <p:blipFill>
+          <a:blip r:embed="rId3"/>
+          <a:stretch>
+            <a:fillRect/>
+          </a:stretch>
+        </p:blipFill>
+        <p:spPr>
+          <a:xfrm>
+            <a:off x="6667655" y="1912776"/>
+            <a:ext cx="4825484" cy="4419602"/>
+          </a:xfrm>
+          <a:prstGeom prst="rect">
+            <a:avLst/>
+          </a:prstGeom>
+        </p:spPr>
+      </p:pic>
+    </p:spTree>
+    <p:extLst>
+      <p:ext uri="{BB962C8B-B14F-4D97-AF65-F5344CB8AC3E}">
+        <p14:creationId xmlns:p14="http://schemas.microsoft.com/office/powerpoint/2010/main" val="701216039"/>
+      </p:ext>
+    </p:extLst>
+  </p:cSld>
+  <p:clrMapOvr>
+    <a:masterClrMapping/>
+  </p:clrMapOvr>
+</p:sld>
+</file>
+
+<file path=ppt/slides/slide37.xml><?xml version="1.0" encoding="utf-8"?>
+<p:sld xmlns:a="http://schemas.openxmlformats.org/drawingml/2006/main" xmlns:r="http://schemas.openxmlformats.org/officeDocument/2006/relationships" xmlns:p="http://schemas.openxmlformats.org/presentationml/2006/main">
+  <p:cSld>
+    <p:spTree>
+      <p:nvGrpSpPr>
+        <p:cNvPr id="1" name=""/>
+        <p:cNvGrpSpPr/>
+        <p:nvPr/>
+      </p:nvGrpSpPr>
+      <p:grpSpPr>
+        <a:xfrm>
+          <a:off x="0" y="0"/>
+          <a:ext cx="0" cy="0"/>
+          <a:chOff x="0" y="0"/>
+          <a:chExt cx="0" cy="0"/>
+        </a:xfrm>
+      </p:grpSpPr>
+      <p:sp>
+        <p:nvSpPr>
+          <p:cNvPr id="2" name="Título 1">
+            <a:extLst>
+              <a:ext uri="{FF2B5EF4-FFF2-40B4-BE49-F238E27FC236}">
+                <a16:creationId xmlns:a16="http://schemas.microsoft.com/office/drawing/2014/main" id="{53665EC4-C3E5-9453-0CC5-FC52268ED218}"/>
+              </a:ext>
+            </a:extLst>
+          </p:cNvPr>
+          <p:cNvSpPr>
+            <a:spLocks noGrp="1"/>
+          </p:cNvSpPr>
+          <p:nvPr>
+            <p:ph type="title"/>
+          </p:nvPr>
+        </p:nvSpPr>
+        <p:spPr/>
+        <p:txBody>
+          <a:bodyPr/>
+          <a:lstStyle/>
+          <a:p>
+            <a:endParaRPr lang="es-GT"/>
+          </a:p>
+        </p:txBody>
+      </p:sp>
+      <p:pic>
+        <p:nvPicPr>
+          <p:cNvPr id="4" name="Imagen 3">
+            <a:extLst>
+              <a:ext uri="{FF2B5EF4-FFF2-40B4-BE49-F238E27FC236}">
+                <a16:creationId xmlns:a16="http://schemas.microsoft.com/office/drawing/2014/main" id="{95BF323A-71B7-D4A6-1925-0AB32F0B955E}"/>
+              </a:ext>
+            </a:extLst>
+          </p:cNvPr>
+          <p:cNvPicPr>
+            <a:picLocks noChangeAspect="1"/>
+          </p:cNvPicPr>
+          <p:nvPr/>
+        </p:nvPicPr>
+        <p:blipFill>
+          <a:blip r:embed="rId2"/>
+          <a:stretch>
+            <a:fillRect/>
+          </a:stretch>
+        </p:blipFill>
+        <p:spPr>
+          <a:xfrm>
+            <a:off x="838200" y="525752"/>
+            <a:ext cx="6258798" cy="5134692"/>
+          </a:xfrm>
+          <a:prstGeom prst="rect">
+            <a:avLst/>
+          </a:prstGeom>
+        </p:spPr>
+      </p:pic>
+      <p:sp>
+        <p:nvSpPr>
+          <p:cNvPr id="5" name="CuadroTexto 4">
+            <a:extLst>
+              <a:ext uri="{FF2B5EF4-FFF2-40B4-BE49-F238E27FC236}">
+                <a16:creationId xmlns:a16="http://schemas.microsoft.com/office/drawing/2014/main" id="{F139343F-DEE3-12E8-6252-D0AC0E455C99}"/>
+              </a:ext>
+            </a:extLst>
+          </p:cNvPr>
+          <p:cNvSpPr txBox="1"/>
+          <p:nvPr/>
+        </p:nvSpPr>
+        <p:spPr>
+          <a:xfrm>
+            <a:off x="7641771" y="2090057"/>
+            <a:ext cx="1950098" cy="923330"/>
+          </a:xfrm>
+          <a:prstGeom prst="rect">
+            <a:avLst/>
+          </a:prstGeom>
+          <a:noFill/>
+        </p:spPr>
+        <p:txBody>
+          <a:bodyPr wrap="square" rtlCol="0">
+            <a:spAutoFit/>
+          </a:bodyPr>
+          <a:lstStyle/>
+          <a:p>
+            <a:r>
+              <a:rPr lang="es-MX" dirty="0" err="1"/>
+              <a:t>Deteccino</a:t>
+            </a:r>
+            <a:r>
+              <a:rPr lang="es-MX" dirty="0"/>
+              <a:t> de islas, las áreas las llaman islas </a:t>
+            </a:r>
+            <a:endParaRPr lang="es-GT" dirty="0"/>
+          </a:p>
+        </p:txBody>
+      </p:sp>
+      <mc:AlternateContent xmlns:mc="http://schemas.openxmlformats.org/markup-compatibility/2006">
+        <mc:Choice xmlns:p14="http://schemas.microsoft.com/office/powerpoint/2010/main" Requires="p14">
+          <p:contentPart p14:bwMode="auto" r:id="rId3">
+            <p14:nvContentPartPr>
+              <p14:cNvPr id="6" name="Entrada de lápiz 5">
+                <a:extLst>
+                  <a:ext uri="{FF2B5EF4-FFF2-40B4-BE49-F238E27FC236}">
+                    <a16:creationId xmlns:a16="http://schemas.microsoft.com/office/drawing/2014/main" id="{102DABF0-EAE3-FF91-BEBA-9B704A329104}"/>
+                  </a:ext>
+                </a:extLst>
+              </p14:cNvPr>
+              <p14:cNvContentPartPr/>
+              <p14:nvPr/>
+            </p14:nvContentPartPr>
+            <p14:xfrm>
+              <a:off x="3016558" y="424793"/>
+              <a:ext cx="7843320" cy="4239720"/>
+            </p14:xfrm>
+          </p:contentPart>
+        </mc:Choice>
+        <mc:Fallback>
+          <p:pic>
+            <p:nvPicPr>
+              <p:cNvPr id="6" name="Entrada de lápiz 5">
+                <a:extLst>
+                  <a:ext uri="{FF2B5EF4-FFF2-40B4-BE49-F238E27FC236}">
+                    <a16:creationId xmlns:a16="http://schemas.microsoft.com/office/drawing/2014/main" id="{102DABF0-EAE3-FF91-BEBA-9B704A329104}"/>
+                  </a:ext>
+                </a:extLst>
+              </p:cNvPr>
+              <p:cNvPicPr/>
+              <p:nvPr/>
+            </p:nvPicPr>
+            <p:blipFill>
+              <a:blip r:embed="rId4"/>
+              <a:stretch>
+                <a:fillRect/>
+              </a:stretch>
+            </p:blipFill>
+            <p:spPr>
+              <a:xfrm>
+                <a:off x="2944918" y="281153"/>
+                <a:ext cx="7986960" cy="4527360"/>
+              </a:xfrm>
+              <a:prstGeom prst="rect">
+                <a:avLst/>
+              </a:prstGeom>
+            </p:spPr>
+          </p:pic>
+        </mc:Fallback>
+      </mc:AlternateContent>
+    </p:spTree>
+    <p:extLst>
+      <p:ext uri="{BB962C8B-B14F-4D97-AF65-F5344CB8AC3E}">
+        <p14:creationId xmlns:p14="http://schemas.microsoft.com/office/powerpoint/2010/main" val="2380450544"/>
+      </p:ext>
+    </p:extLst>
+  </p:cSld>
+  <p:clrMapOvr>
+    <a:masterClrMapping/>
+  </p:clrMapOvr>
+</p:sld>
+</file>
+
+<file path=ppt/slides/slide38.xml><?xml version="1.0" encoding="utf-8"?>
+<p:sld xmlns:a="http://schemas.openxmlformats.org/drawingml/2006/main" xmlns:r="http://schemas.openxmlformats.org/officeDocument/2006/relationships" xmlns:p="http://schemas.openxmlformats.org/presentationml/2006/main">
+  <p:cSld>
+    <p:spTree>
+      <p:nvGrpSpPr>
+        <p:cNvPr id="1" name=""/>
+        <p:cNvGrpSpPr/>
+        <p:nvPr/>
+      </p:nvGrpSpPr>
+      <p:grpSpPr>
+        <a:xfrm>
+          <a:off x="0" y="0"/>
+          <a:ext cx="0" cy="0"/>
+          <a:chOff x="0" y="0"/>
+          <a:chExt cx="0" cy="0"/>
+        </a:xfrm>
+      </p:grpSpPr>
+      <p:sp>
+        <p:nvSpPr>
+          <p:cNvPr id="2" name="Título 1">
+            <a:extLst>
+              <a:ext uri="{FF2B5EF4-FFF2-40B4-BE49-F238E27FC236}">
+                <a16:creationId xmlns:a16="http://schemas.microsoft.com/office/drawing/2014/main" id="{072A9A76-3CAD-2691-AF6F-D8740399833B}"/>
+              </a:ext>
+            </a:extLst>
+          </p:cNvPr>
+          <p:cNvSpPr>
+            <a:spLocks noGrp="1"/>
+          </p:cNvSpPr>
+          <p:nvPr>
+            <p:ph type="title"/>
+          </p:nvPr>
+        </p:nvSpPr>
+        <p:spPr/>
+        <p:txBody>
+          <a:bodyPr/>
+          <a:lstStyle/>
+          <a:p>
+            <a:r>
+              <a:rPr lang="es-MX" dirty="0"/>
+              <a:t>CON POINT</a:t>
+            </a:r>
+            <a:endParaRPr lang="es-GT" dirty="0"/>
+          </a:p>
+        </p:txBody>
+      </p:sp>
+      <p:pic>
+        <p:nvPicPr>
+          <p:cNvPr id="4" name="Imagen 3">
+            <a:extLst>
+              <a:ext uri="{FF2B5EF4-FFF2-40B4-BE49-F238E27FC236}">
+                <a16:creationId xmlns:a16="http://schemas.microsoft.com/office/drawing/2014/main" id="{2D92230B-FF68-08FA-A5BB-AEF21C90555F}"/>
+              </a:ext>
+            </a:extLst>
+          </p:cNvPr>
+          <p:cNvPicPr>
+            <a:picLocks noChangeAspect="1"/>
+          </p:cNvPicPr>
+          <p:nvPr/>
+        </p:nvPicPr>
+        <p:blipFill>
+          <a:blip r:embed="rId2"/>
+          <a:stretch>
+            <a:fillRect/>
+          </a:stretch>
+        </p:blipFill>
+        <p:spPr>
+          <a:xfrm>
+            <a:off x="1348435" y="2518592"/>
+            <a:ext cx="6899827" cy="4227440"/>
+          </a:xfrm>
+          <a:prstGeom prst="rect">
+            <a:avLst/>
+          </a:prstGeom>
+        </p:spPr>
+      </p:pic>
+    </p:spTree>
+    <p:extLst>
+      <p:ext uri="{BB962C8B-B14F-4D97-AF65-F5344CB8AC3E}">
+        <p14:creationId xmlns:p14="http://schemas.microsoft.com/office/powerpoint/2010/main" val="3137914434"/>
+      </p:ext>
+    </p:extLst>
+  </p:cSld>
+  <p:clrMapOvr>
+    <a:masterClrMapping/>
+  </p:clrMapOvr>
+</p:sld>
+</file>
+
+<file path=ppt/slides/slide39.xml><?xml version="1.0" encoding="utf-8"?>
+<p:sld xmlns:a="http://schemas.openxmlformats.org/drawingml/2006/main" xmlns:r="http://schemas.openxmlformats.org/officeDocument/2006/relationships" xmlns:p="http://schemas.openxmlformats.org/presentationml/2006/main">
+  <p:cSld>
+    <p:spTree>
+      <p:nvGrpSpPr>
+        <p:cNvPr id="1" name=""/>
+        <p:cNvGrpSpPr/>
+        <p:nvPr/>
+      </p:nvGrpSpPr>
+      <p:grpSpPr>
+        <a:xfrm>
+          <a:off x="0" y="0"/>
+          <a:ext cx="0" cy="0"/>
+          <a:chOff x="0" y="0"/>
+          <a:chExt cx="0" cy="0"/>
+        </a:xfrm>
+      </p:grpSpPr>
+      <p:sp>
+        <p:nvSpPr>
+          <p:cNvPr id="2" name="Título 1">
+            <a:extLst>
+              <a:ext uri="{FF2B5EF4-FFF2-40B4-BE49-F238E27FC236}">
+                <a16:creationId xmlns:a16="http://schemas.microsoft.com/office/drawing/2014/main" id="{2AD60399-B376-DBFA-E75A-55339D4744F3}"/>
+              </a:ext>
+            </a:extLst>
+          </p:cNvPr>
+          <p:cNvSpPr>
+            <a:spLocks noGrp="1"/>
+          </p:cNvSpPr>
+          <p:nvPr>
+            <p:ph type="title"/>
+          </p:nvPr>
+        </p:nvSpPr>
+        <p:spPr/>
+        <p:txBody>
+          <a:bodyPr/>
+          <a:lstStyle/>
+          <a:p>
+            <a:endParaRPr lang="es-GT"/>
+          </a:p>
+        </p:txBody>
+      </p:sp>
+    </p:spTree>
+    <p:extLst>
+      <p:ext uri="{BB962C8B-B14F-4D97-AF65-F5344CB8AC3E}">
+        <p14:creationId xmlns:p14="http://schemas.microsoft.com/office/powerpoint/2010/main" val="2356672354"/>
       </p:ext>
     </p:extLst>
   </p:cSld>
@@ -6038,6 +8367,171 @@
     <p:extLst>
       <p:ext uri="{BB962C8B-B14F-4D97-AF65-F5344CB8AC3E}">
         <p14:creationId xmlns:p14="http://schemas.microsoft.com/office/powerpoint/2010/main" val="4271729642"/>
+      </p:ext>
+    </p:extLst>
+  </p:cSld>
+  <p:clrMapOvr>
+    <a:masterClrMapping/>
+  </p:clrMapOvr>
+</p:sld>
+</file>
+
+<file path=ppt/slides/slide40.xml><?xml version="1.0" encoding="utf-8"?>
+<p:sld xmlns:a="http://schemas.openxmlformats.org/drawingml/2006/main" xmlns:r="http://schemas.openxmlformats.org/officeDocument/2006/relationships" xmlns:p="http://schemas.openxmlformats.org/presentationml/2006/main">
+  <p:cSld>
+    <p:spTree>
+      <p:nvGrpSpPr>
+        <p:cNvPr id="1" name=""/>
+        <p:cNvGrpSpPr/>
+        <p:nvPr/>
+      </p:nvGrpSpPr>
+      <p:grpSpPr>
+        <a:xfrm>
+          <a:off x="0" y="0"/>
+          <a:ext cx="0" cy="0"/>
+          <a:chOff x="0" y="0"/>
+          <a:chExt cx="0" cy="0"/>
+        </a:xfrm>
+      </p:grpSpPr>
+      <p:sp>
+        <p:nvSpPr>
+          <p:cNvPr id="2" name="Título 1">
+            <a:extLst>
+              <a:ext uri="{FF2B5EF4-FFF2-40B4-BE49-F238E27FC236}">
+                <a16:creationId xmlns:a16="http://schemas.microsoft.com/office/drawing/2014/main" id="{8243F6AF-857E-46FA-07E7-4B0A1DDF8B91}"/>
+              </a:ext>
+            </a:extLst>
+          </p:cNvPr>
+          <p:cNvSpPr>
+            <a:spLocks noGrp="1"/>
+          </p:cNvSpPr>
+          <p:nvPr>
+            <p:ph type="title"/>
+          </p:nvPr>
+        </p:nvSpPr>
+        <p:spPr/>
+        <p:txBody>
+          <a:bodyPr/>
+          <a:lstStyle/>
+          <a:p>
+            <a:endParaRPr lang="es-GT"/>
+          </a:p>
+        </p:txBody>
+      </p:sp>
+    </p:spTree>
+    <p:extLst>
+      <p:ext uri="{BB962C8B-B14F-4D97-AF65-F5344CB8AC3E}">
+        <p14:creationId xmlns:p14="http://schemas.microsoft.com/office/powerpoint/2010/main" val="3708654507"/>
+      </p:ext>
+    </p:extLst>
+  </p:cSld>
+  <p:clrMapOvr>
+    <a:masterClrMapping/>
+  </p:clrMapOvr>
+</p:sld>
+</file>
+
+<file path=ppt/slides/slide41.xml><?xml version="1.0" encoding="utf-8"?>
+<p:sld xmlns:a="http://schemas.openxmlformats.org/drawingml/2006/main" xmlns:r="http://schemas.openxmlformats.org/officeDocument/2006/relationships" xmlns:p="http://schemas.openxmlformats.org/presentationml/2006/main">
+  <p:cSld>
+    <p:spTree>
+      <p:nvGrpSpPr>
+        <p:cNvPr id="1" name=""/>
+        <p:cNvGrpSpPr/>
+        <p:nvPr/>
+      </p:nvGrpSpPr>
+      <p:grpSpPr>
+        <a:xfrm>
+          <a:off x="0" y="0"/>
+          <a:ext cx="0" cy="0"/>
+          <a:chOff x="0" y="0"/>
+          <a:chExt cx="0" cy="0"/>
+        </a:xfrm>
+      </p:grpSpPr>
+      <p:sp>
+        <p:nvSpPr>
+          <p:cNvPr id="2" name="Título 1">
+            <a:extLst>
+              <a:ext uri="{FF2B5EF4-FFF2-40B4-BE49-F238E27FC236}">
+                <a16:creationId xmlns:a16="http://schemas.microsoft.com/office/drawing/2014/main" id="{82E95889-F16C-32A0-3ED5-3743146E6AEA}"/>
+              </a:ext>
+            </a:extLst>
+          </p:cNvPr>
+          <p:cNvSpPr>
+            <a:spLocks noGrp="1"/>
+          </p:cNvSpPr>
+          <p:nvPr>
+            <p:ph type="title"/>
+          </p:nvPr>
+        </p:nvSpPr>
+        <p:spPr/>
+        <p:txBody>
+          <a:bodyPr/>
+          <a:lstStyle/>
+          <a:p>
+            <a:endParaRPr lang="es-GT"/>
+          </a:p>
+        </p:txBody>
+      </p:sp>
+    </p:spTree>
+    <p:extLst>
+      <p:ext uri="{BB962C8B-B14F-4D97-AF65-F5344CB8AC3E}">
+        <p14:creationId xmlns:p14="http://schemas.microsoft.com/office/powerpoint/2010/main" val="1028162872"/>
+      </p:ext>
+    </p:extLst>
+  </p:cSld>
+  <p:clrMapOvr>
+    <a:masterClrMapping/>
+  </p:clrMapOvr>
+</p:sld>
+</file>
+
+<file path=ppt/slides/slide42.xml><?xml version="1.0" encoding="utf-8"?>
+<p:sld xmlns:a="http://schemas.openxmlformats.org/drawingml/2006/main" xmlns:r="http://schemas.openxmlformats.org/officeDocument/2006/relationships" xmlns:p="http://schemas.openxmlformats.org/presentationml/2006/main">
+  <p:cSld>
+    <p:spTree>
+      <p:nvGrpSpPr>
+        <p:cNvPr id="1" name=""/>
+        <p:cNvGrpSpPr/>
+        <p:nvPr/>
+      </p:nvGrpSpPr>
+      <p:grpSpPr>
+        <a:xfrm>
+          <a:off x="0" y="0"/>
+          <a:ext cx="0" cy="0"/>
+          <a:chOff x="0" y="0"/>
+          <a:chExt cx="0" cy="0"/>
+        </a:xfrm>
+      </p:grpSpPr>
+      <p:sp>
+        <p:nvSpPr>
+          <p:cNvPr id="2" name="Título 1">
+            <a:extLst>
+              <a:ext uri="{FF2B5EF4-FFF2-40B4-BE49-F238E27FC236}">
+                <a16:creationId xmlns:a16="http://schemas.microsoft.com/office/drawing/2014/main" id="{7E70E31A-5B05-49C6-3DE5-7CF7CA5BB4E2}"/>
+              </a:ext>
+            </a:extLst>
+          </p:cNvPr>
+          <p:cNvSpPr>
+            <a:spLocks noGrp="1"/>
+          </p:cNvSpPr>
+          <p:nvPr>
+            <p:ph type="title"/>
+          </p:nvPr>
+        </p:nvSpPr>
+        <p:spPr/>
+        <p:txBody>
+          <a:bodyPr/>
+          <a:lstStyle/>
+          <a:p>
+            <a:endParaRPr lang="es-GT"/>
+          </a:p>
+        </p:txBody>
+      </p:sp>
+    </p:spTree>
+    <p:extLst>
+      <p:ext uri="{BB962C8B-B14F-4D97-AF65-F5344CB8AC3E}">
+        <p14:creationId xmlns:p14="http://schemas.microsoft.com/office/powerpoint/2010/main" val="844889059"/>
       </p:ext>
     </p:extLst>
   </p:cSld>

--- a/AUTOCAD INTECAP/apuntes powerpoint/CLASE 10, Miercoles 18 Marzo.pptx
+++ b/AUTOCAD INTECAP/apuntes powerpoint/CLASE 10, Miercoles 18 Marzo.pptx
@@ -45,8 +45,20 @@
     <p:sldId id="294" r:id="rId39"/>
     <p:sldId id="295" r:id="rId40"/>
     <p:sldId id="296" r:id="rId41"/>
-    <p:sldId id="297" r:id="rId42"/>
-    <p:sldId id="298" r:id="rId43"/>
+    <p:sldId id="300" r:id="rId42"/>
+    <p:sldId id="299" r:id="rId43"/>
+    <p:sldId id="297" r:id="rId44"/>
+    <p:sldId id="298" r:id="rId45"/>
+    <p:sldId id="301" r:id="rId46"/>
+    <p:sldId id="302" r:id="rId47"/>
+    <p:sldId id="303" r:id="rId48"/>
+    <p:sldId id="304" r:id="rId49"/>
+    <p:sldId id="305" r:id="rId50"/>
+    <p:sldId id="306" r:id="rId51"/>
+    <p:sldId id="307" r:id="rId52"/>
+    <p:sldId id="308" r:id="rId53"/>
+    <p:sldId id="309" r:id="rId54"/>
+    <p:sldId id="310" r:id="rId55"/>
   </p:sldIdLst>
   <p:sldSz cx="12192000" cy="6858000"/>
   <p:notesSz cx="6858000" cy="9144000"/>
@@ -588,6 +600,180 @@
 </inkml:ink>
 </file>
 
+<file path=ppt/ink/ink23.xml><?xml version="1.0" encoding="utf-8"?>
+<inkml:ink xmlns:inkml="http://www.w3.org/2003/InkML">
+  <inkml:definitions>
+    <inkml:context xml:id="ctx0">
+      <inkml:inkSource xml:id="inkSrc0">
+        <inkml:traceFormat>
+          <inkml:channel name="X" type="integer" min="-2.14748E9" max="2.14748E9" units="cm"/>
+          <inkml:channel name="Y" type="integer" min="-2.14748E9" max="2.14748E9" units="cm"/>
+        </inkml:traceFormat>
+        <inkml:channelProperties>
+          <inkml:channelProperty channel="X" name="resolution" value="1000" units="1/cm"/>
+          <inkml:channelProperty channel="Y" name="resolution" value="1000" units="1/cm"/>
+        </inkml:channelProperties>
+      </inkml:inkSource>
+      <inkml:timestamp xml:id="ts0" timeString="2026-04-07T21:25:34.280"/>
+    </inkml:context>
+    <inkml:brush xml:id="br0">
+      <inkml:brushProperty name="width" value="0.3" units="cm"/>
+      <inkml:brushProperty name="height" value="0.6" units="cm"/>
+      <inkml:brushProperty name="color" value="#FFFC00"/>
+      <inkml:brushProperty name="tip" value="rectangle"/>
+      <inkml:brushProperty name="rasterOp" value="maskPen"/>
+      <inkml:brushProperty name="ignorePressure" value="1"/>
+    </inkml:brush>
+  </inkml:definitions>
+  <inkml:trace contextRef="#ctx0" brushRef="#br0">11198 1829,'-101'-4,"0"-3,0-6,-147-37,118 22,-298-58,-160-20,-195-25,-183-23,-629-75,-184-28,700 88,120 17,163 24,176 25,177 26,152 21,132 14,130 27,29 14,-1 1,1 0,0-1,0 1,0-1,0 1,0 0,0-1,0 1,0 0,0-1,0 1,0 0,0-1,0 1,0-1,0 1,1 0,-1-1,0 1,0 0,0-1,0 1,1 0,-1 0,0-1,0 1,1 0,-1 0,0-1,0 1,1 0,-1 0,0 0,1-1,-1 1,0 0,1 0,-1 0,0 0,1 0,-1 0,1 0,-1 0,0 0,1 0,-1 0,0 0,1 0,28-5,0 2,-1 1,40 3,306 16,282 43,305 51,271 38,179 15,4382 227,-4790-362,-291-13,-300-9,-309-6,-89-2,-20 1,-140 0,-207 9,-157 8,-121 24,-102 25,-693 93,-130 12,1070-126,149-12,256-26,7-1,-95 21,143-18,25-9,1 0,0 0,0 0,-1 0,1 0,0 0,0 0,0 1,-1-1,1 0,0 0,0 0,0 0,-1 1,1-1,0 0,0 0,0 0,0 1,-1-1,1 0,0 0,0 0,0 1,0-1,0 0,0 0,0 1,0-1,0 0,0 0,0 1,0-1,0 0,0 0,0 1,0-1,0 0,0 0,0 1,3 1,1 0,-1 0,1 0,-1 0,1-1,-1 1,1-1,5 1,199 52,-87-26,273 66,188 30,2211 388,-2373-441,-210-28,-209-43,0 0,0 0,0 0,0 0,0 0,-1 0,1 0,0 1,0-1,0 0,0 1,0-1,0 1,0-1,-1 1,1-1,0 1,0 0,-1-1,1 1,0 0,-1 0,2 1,-35 2,-175-16,-162-12,-119-4,-3379-33,3862 60,0 1,0 0,0 0,0 0,0 1,0 0,0 0,0 1,1 0,-1 0,0 0,1 0,-1 1,1 0,0 0,0 1,0-1,0 1,1 0,-5 6,-14 24</inkml:trace>
+</inkml:ink>
+</file>
+
+<file path=ppt/ink/ink24.xml><?xml version="1.0" encoding="utf-8"?>
+<inkml:ink xmlns:inkml="http://www.w3.org/2003/InkML">
+  <inkml:definitions>
+    <inkml:context xml:id="ctx0">
+      <inkml:inkSource xml:id="inkSrc0">
+        <inkml:traceFormat>
+          <inkml:channel name="X" type="integer" min="-2.14748E9" max="2.14748E9" units="cm"/>
+          <inkml:channel name="Y" type="integer" min="-2.14748E9" max="2.14748E9" units="cm"/>
+        </inkml:traceFormat>
+        <inkml:channelProperties>
+          <inkml:channelProperty channel="X" name="resolution" value="1000" units="1/cm"/>
+          <inkml:channelProperty channel="Y" name="resolution" value="1000" units="1/cm"/>
+        </inkml:channelProperties>
+      </inkml:inkSource>
+      <inkml:timestamp xml:id="ts0" timeString="2026-04-07T21:25:35.195"/>
+    </inkml:context>
+    <inkml:brush xml:id="br0">
+      <inkml:brushProperty name="width" value="0.3" units="cm"/>
+      <inkml:brushProperty name="height" value="0.6" units="cm"/>
+      <inkml:brushProperty name="color" value="#FFFC00"/>
+      <inkml:brushProperty name="tip" value="rectangle"/>
+      <inkml:brushProperty name="rasterOp" value="maskPen"/>
+      <inkml:brushProperty name="ignorePressure" value="1"/>
+    </inkml:brush>
+  </inkml:definitions>
+  <inkml:trace contextRef="#ctx0" brushRef="#br0">13359 341,'-200'6,"-52"-1,-290-24,-291-30,-252-27,-198 0,-157 14,-1293-8,7 100,1867 16,239 13,210-1,168-9,221-44,0 0,1 2,-33 16,35-7,18-16,0 1,0-1,0 1,-1-1,1 1,0-1,0 1,0-1,0 1,0-1,1 1,-1-1,0 1,0-1,0 1,0-1,0 1,1-1,-1 0,0 1,0-1,1 1,-1-1,0 0,1 1,-1-1,0 0,1 1,-1-1,1 1,7 2,0 1,1-1,-1 0,0-1,1 0,0 0,12 0,461 29,-66-22,144-3,127-3,108-2,744-20,-7-80,-1051 44</inkml:trace>
+</inkml:ink>
+</file>
+
+<file path=ppt/ink/ink25.xml><?xml version="1.0" encoding="utf-8"?>
+<inkml:ink xmlns:inkml="http://www.w3.org/2003/InkML">
+  <inkml:definitions>
+    <inkml:context xml:id="ctx0">
+      <inkml:inkSource xml:id="inkSrc0">
+        <inkml:traceFormat>
+          <inkml:channel name="X" type="integer" min="-2.14748E9" max="2.14748E9" units="cm"/>
+          <inkml:channel name="Y" type="integer" min="-2.14748E9" max="2.14748E9" units="cm"/>
+        </inkml:traceFormat>
+        <inkml:channelProperties>
+          <inkml:channelProperty channel="X" name="resolution" value="1000" units="1/cm"/>
+          <inkml:channelProperty channel="Y" name="resolution" value="1000" units="1/cm"/>
+        </inkml:channelProperties>
+      </inkml:inkSource>
+      <inkml:timestamp xml:id="ts0" timeString="2026-04-07T21:25:38.159"/>
+    </inkml:context>
+    <inkml:brush xml:id="br0">
+      <inkml:brushProperty name="width" value="0.3" units="cm"/>
+      <inkml:brushProperty name="height" value="0.6" units="cm"/>
+      <inkml:brushProperty name="color" value="#FFFC00"/>
+      <inkml:brushProperty name="tip" value="rectangle"/>
+      <inkml:brushProperty name="rasterOp" value="maskPen"/>
+      <inkml:brushProperty name="ignorePressure" value="1"/>
+    </inkml:brush>
+  </inkml:definitions>
+  <inkml:trace contextRef="#ctx0" brushRef="#br0">2964 276,'1'75,"-4"106,0-157,0 1,-2-2,-1 1,0 0,-16 33,-28 41,-5-3,-102 135,78-126,45-63,2 1,2 2,1 1,3 1,-21 51,43-86,0 0,1 0,0 1,0-1,2 1,-1 0,2-1,-1 1,2 0,1 17,1-20,-1 1,1-1,1 0,0 0,0 0,1-1,0 1,0-1,1 0,0-1,0 1,1-1,10 8,7 5,1-1,1-2,0 0,2-2,-1-1,2-1,35 11,25 2,106 18,-71-22,1-5,169 0,-212-17,1-5,0-3,-1-3,128-36,-178 38,0-2,-1-1,0-1,51-31,-73 38,0 0,0-1,0 0,-1 0,0-1,-1 0,1 0,-2-1,1 0,-1 0,0-1,-1 1,0-1,-1 0,0-1,-1 1,4-19,-5 16,-2 0,0 0,0 0,-1 1,-1-1,0 0,-1 1,0-1,-1 1,-9-21,-6-6,-2 1,-26-37,-45-55,-6 4,-6 4,-4 5,-6 5,-4 5,-147-102,163 140,-2 5,-3 4,-3 6,-2 4,-2 5,-2 5,-1 5,-2 5,-181-21,214 41,1 4,-1 3,0 5,-167 24,196-15,1 2,0 3,1 2,1 3,1 2,1 2,2 3,-64 44,49-21,2 3,2 2,3 3,3 2,-67 96,46-42,4 2,-80 183,112-211,5 0,3 3,5 0,-26 155,46-195,3-1,2 1,2 0,2 0,2 0,3 0,2-1,3 0,1-1,24 58,-10-51,2-1,2-2,3 0,2-3,3-1,1-1,3-3,1-1,3-3,92 66,-44-45,3-3,2-6,3-3,1-6,125 37,-75-37,2-6,2-8,0-6,2-7,283-5,-315-19,1-5,-1-6,-2-5,0-6,-1-5,-2-6,195-90,-244 91,-1-3,-3-3,-1-4,-3-2,-1-3,-3-3,102-119,-127 128,-3 0,-1-3,-3 0,-1-2,-3-1,-3-1,-2-1,-2-1,-3-1,-2-1,12-110,-24 111,-2 0,-3 0,-2 0,-2 1,-3-1,-3 2,-2 0,-44-106,31 99,-3 1,-3 1,-2 2,-3 2,-2 1,-2 3,-58-55,84 90,-1 0,0 1,-2 1,0 1,0 1,-1 1,-1 0,0 2,-44-15,57 23,-1 0,1 1,-1 0,1 0,-1 1,0 1,1-1,-1 2,1-1,-1 1,1 1,0 0,0 0,0 0,0 1,1 1,-1-1,-12 11,-3 5,0 1,2 1,0 1,-28 41,-6 12,4 2,4 3,-38 87,-92 274,-22 251,169-535,7 1,-6 236,29-321,11 82,-8-138,0-1,2 0,0 1,1-1,1-1,0 1,10 17,-10-25,-1-1,1 1,1-1,0-1,0 1,0-1,1 0,0-1,1 0,-1 0,1-1,0 0,11 4,0-2,0 0,1-1,0-1,0-1,0-1,0-1,43-1,-17-4,1-2,79-20,-35 0,-1-4,-1-4,-1-4,-3-4,-1-4,-2-3,-3-4,83-68,-111 73,-1-2,-3-2,-2-2,-3-3,-2-1,-2-1,-3-3,-3-1,-2-1,-3-1,-3-2,18-76,-24 63,-4-1,-2 0,-5-1,-3-1,-3 1,-4-1,-4 1,-3 0,-4 1,-25-91,32 147,-1 0,-1 0,0 1,-2 0,-1 1,-1 0,0 1,-17-22,26 40,1 0,-1 0,0 1,0-1,0 1,0-1,0 1,0 0,-1 0,1 0,-1 1,1-1,-1 1,0 0,1 0,-1 0,0 0,0 1,0-1,0 1,0 0,0 0,0 1,1-1,-1 1,0 0,0 0,0 0,1 0,-1 1,1 0,-1-1,1 1,-1 1,1-1,-5 5,-13 10,1 1,0 1,-26 34,-219 310,22 27,240-386,-83 139,-78 178,144-275,2 0,2 1,3 0,1 1,3 1,1 0,3 0,1 78,6-97,2 0,1 0,1-1,1 0,2 0,1-1,1 0,1-1,31 51,-18-44,0 0,2-2,2-1,1-1,1-2,63 45,-28-30,2-3,1-3,2-3,127 42,-60-35,2-6,222 26,-160-43,1-8,0-9,277-34,-250 1,-2-10,374-119,-445 106,231-114,-307 126,-1-5,-3-2,87-74,-119 85,-2-2,-2-2,-2-1,-2-2,-2-2,-2-1,38-77,-50 82,-2-1,-3 0,-1-1,-3-1,-1 0,-3-1,-1 0,-3 0,-2-60,-7 47,-2 0,-3 1,-3 0,-2 1,-3 1,-2 0,-2 2,-4 0,-1 2,-3 1,-2 1,-41-50,51 73,-1 2,-2 1,0 1,-2 1,0 1,-1 2,-2 0,0 2,-1 2,-60-26,65 34,-1 1,0 1,-1 1,0 1,1 2,-1 1,0 1,-1 1,1 2,0 0,1 2,-1 1,1 2,-28 9,18-1,1 1,1 1,0 2,1 2,2 1,-52 44,23-9,2 2,-57 76,51-50,5 3,3 2,5 3,4 2,-43 118,77-178,1 1,2 1,2 0,1 0,-5 65,12-93,1 1,1 0,-1 0,1 0,1 0,0 0,1-1,-1 1,2-1,-1 0,1 0,1 0,0 0,0-1,1 1,0-2,0 1,1 0,-1-1,2-1,-1 1,1-1,0 0,0-1,1 0,13 6,0-2,2-1,-1-1,1-2,0 0,0-1,0-1,0-2,1 0,-1-2,0 0,1-2,-1-1,0 0,35-13,-13 2,0-2,-2-3,0-1,-1-2,-1-2,54-42,-33 15,-3-3,-2-2,99-128,-95 100,-5-3,77-156,-115 203,-1 0,-2-1,-2 0,-2-1,9-62,-19 93,-1 1,-1-1,0 0,0 1,-1-1,-1 1,0-1,0 1,-1 0,-9-22,7 25,1 1,-1-1,0 1,-1 0,0 0,0 1,0 0,-1 0,0 0,0 1,-1 0,1 0,-1 1,-14-6,-1 1,0 1,0 2,0 0,-1 2,1 0,-1 2,0 0,0 2,-46 5,17 3,0 3,0 1,-71 29,26-2,2 4,2 4,-136 91,91-39,-179 166,233-186,-89 75,173-152,-1 0,-1 0,1 0,0 0,0-1,-1 1,1-1,-1 1,1-1,-1 0,1 0,-1 0,0 0,0-1,1 1,-1-1,-3 1,5-2,1 1,0-1,-1 1,1-1,-1 0,1 1,0-1,-1 1,1-1,0 0,0 1,0-1,-1 0,1 1,0-1,0 1,0-1,0 0,0 1,0-1,0 0,0 1,1-2,7-33,184-418,-55 147,-130 290,0 0,0 0,-1-1,0 0,-2 0,0 0,0 0,0-21,-4 37,0 0,0 0,0-1,0 1,0 0,0 0,-1 0,1 0,0 0,-1 0,1-1,-1 1,1 0,-1 0,1 0,-1 0,0 1,1-1,-1 0,0 0,0 0,0 0,0 1,1-1,-1 0,0 1,0-1,0 1,-1-1,1 1,0-1,0 1,0 0,0 0,0-1,0 1,-1 0,1 0,0 0,0 0,0 1,0-1,0 0,-1 0,1 1,-1 0,-10 2,1 1,-1 1,-19 10,30-14,-61 34,3 3,-78 62,-103 109,194-168,-184 181,7-7,215-208,1 0,-2-1,1 1,0-1,-18 8,25-14,1 1,-1-1,1 0,-1 0,0 0,1 1,-1-1,0 0,1 0,-1 0,0 0,0 0,1 0,-1 0,0 0,1 0,-1-1,0 1,1 0,-1 0,1-1,-1 1,0 0,1-1,-1 1,1 0,-1-1,1 1,-1-1,1 1,-1-1,1 1,-1-1,1 1,0-1,-1 0,1 1,0-1,0 0,-1 1,1-1,0 0,0 1,0-1,0 0,0 1,0-1,0 0,0 1,0-1,0 0,1-21,1 1,2-1,0 1,1 0,1 0,11-28,-7 21,149-379,-158 404,4-9,0 0,0 1,1-1,1 1,0 1,1-1,0 1,17-18,-24 28,0-1,0 0,0 1,0-1,0 1,-1-1,1 1,0-1,0 1,1 0,-1-1,0 1,0 0,0 0,0 0,0-1,0 1,0 1,0-1,0 0,0 0,0 0,0 0,0 1,0-1,0 1,0-1,0 0,0 1,0 0,0-1,0 1,0 0,1 0,-2 0,1 0,0-1,0 1,0 0,0-1,0 1,0-1,0 1,0-1,0 1,1-1,-1 0,0 1,0-1,0 0,0 0,1 0,-1 0,0 0,0 0,0 0,0-1,2 1,4-5,0 1,0-1,0 0,-1-1,0 0,0 0,-1 0,1 0,-1-1,6-11,-2 5,33-49,-2-1,47-104,-81 148,-6 18,0 1,0 0,0 0,0 0,0 0,-1 0,1-1,0 1,0 0,0 0,0 0,0 0,0 0,0 0,0 0,-1-1,1 1,0 0,0 0,0 0,0 0,0 0,-1 0,1 0,0 0,0 0,0 0,0 0,-1 0,1 0,0 0,0 0,0 0,0 0,-1 0,1 0,0 0,0 0,0 0,0 0,0 0,-1 0,1 0,0 1,0-1,0 0,0 0,0 0,0 0,0 0,-1 0,1 0,0 1,0-1,0 0,0 0,0 0,0 0,0 0,0 1,0-1,0 0,-24 23,1 0,2 1,-32 45,11-12,-302 420,332-459,1 1,2 0,-9 21,17-38,1-1,-1 0,1 1,0-1,-1 1,1-1,0 0,0 1,0-1,0 1,0-1,1 1,-1-1,1 3,-1-4,0 1,1-1,-1 0,1 1,-1-1,0 0,1 1,-1-1,1 0,-1 1,1-1,-1 0,1 0,-1 0,1 0,-1 1,1-1,-1 0,1 0,-1 0,1 0,0 0,-1 0,1 0,-1 0,1-1,-1 1,1 0,-1 0,1 0,0-1,9-4,0-1,0 0,0-1,-1 0,0-1,11-12,53-53,-3-4,68-98,97-193,-228 356,15-24,-2-1,-1 0,-2-2,18-59,-34 94,0 0,0 0,0-1,-1 1,0-1,0 1,0 0,0-1,-1 1,0 0,1-1,-3-5,2 8,-1 0,1 0,0 0,0 0,-1 0,1 1,-1-1,1 0,-1 1,0 0,1-1,-1 1,0 0,0 0,0 0,0 0,0 0,-3-1,-3 1,0 0,0 0,0 1,-1 0,1 0,0 1,0 0,0 1,0-1,0 1,-13 6,-21 9,2 1,0 2,1 2,-47 35,11 0,-69 68,67-46,23-12</inkml:trace>
+</inkml:ink>
+</file>
+
+<file path=ppt/ink/ink26.xml><?xml version="1.0" encoding="utf-8"?>
+<inkml:ink xmlns:inkml="http://www.w3.org/2003/InkML">
+  <inkml:definitions>
+    <inkml:context xml:id="ctx0">
+      <inkml:inkSource xml:id="inkSrc0">
+        <inkml:traceFormat>
+          <inkml:channel name="X" type="integer" min="-2.14748E9" max="2.14748E9" units="cm"/>
+          <inkml:channel name="Y" type="integer" min="-2.14748E9" max="2.14748E9" units="cm"/>
+        </inkml:traceFormat>
+        <inkml:channelProperties>
+          <inkml:channelProperty channel="X" name="resolution" value="1000" units="1/cm"/>
+          <inkml:channelProperty channel="Y" name="resolution" value="1000" units="1/cm"/>
+        </inkml:channelProperties>
+      </inkml:inkSource>
+      <inkml:timestamp xml:id="ts0" timeString="2026-04-07T21:28:21.083"/>
+    </inkml:context>
+    <inkml:brush xml:id="br0">
+      <inkml:brushProperty name="width" value="0.3" units="cm"/>
+      <inkml:brushProperty name="height" value="0.6" units="cm"/>
+      <inkml:brushProperty name="color" value="#FFFC00"/>
+      <inkml:brushProperty name="tip" value="rectangle"/>
+      <inkml:brushProperty name="rasterOp" value="maskPen"/>
+      <inkml:brushProperty name="ignorePressure" value="1"/>
+    </inkml:brush>
+  </inkml:definitions>
+  <inkml:trace contextRef="#ctx0" brushRef="#br0">2252 265,'-3'-2,"0"-1,0 1,-1 0,1 0,0 0,-1 0,1 0,-1 1,0 0,0 0,1 0,-1 0,0 0,0 1,0 0,0-1,0 1,-4 1,-8 1,0 2,0-1,-19 8,23-7,-128 35,-2-7,-279 27,-292-29,708-30,-227 0,-49 1,268 1,20 3,97 17,179 27,222 43,215 54,-129-23,1317 266,2-58,-1737-311,-164-23,-13-3,-45-16,-208-55,-188-37,-162-47,-2964-822,3143 869,403 108,-422-101,431 103,-1 1,0 1,0 0,0 1,1 1,-29 3,35-1,0 1,-1 1,1 0,0 1,1-1,-1 2,1 0,0 0,0 0,1 1,-12 12,-98 107,-8 23</inkml:trace>
+</inkml:ink>
+</file>
+
+<file path=ppt/ink/ink27.xml><?xml version="1.0" encoding="utf-8"?>
+<inkml:ink xmlns:inkml="http://www.w3.org/2003/InkML">
+  <inkml:definitions>
+    <inkml:context xml:id="ctx0">
+      <inkml:inkSource xml:id="inkSrc0">
+        <inkml:traceFormat>
+          <inkml:channel name="X" type="integer" min="-2.14748E9" max="2.14748E9" units="cm"/>
+          <inkml:channel name="Y" type="integer" min="-2.14748E9" max="2.14748E9" units="cm"/>
+        </inkml:traceFormat>
+        <inkml:channelProperties>
+          <inkml:channelProperty channel="X" name="resolution" value="1000" units="1/cm"/>
+          <inkml:channelProperty channel="Y" name="resolution" value="1000" units="1/cm"/>
+        </inkml:channelProperties>
+      </inkml:inkSource>
+      <inkml:timestamp xml:id="ts0" timeString="2026-04-07T21:28:22.490"/>
+    </inkml:context>
+    <inkml:brush xml:id="br0">
+      <inkml:brushProperty name="width" value="0.3" units="cm"/>
+      <inkml:brushProperty name="height" value="0.6" units="cm"/>
+      <inkml:brushProperty name="color" value="#FFFC00"/>
+      <inkml:brushProperty name="tip" value="rectangle"/>
+      <inkml:brushProperty name="rasterOp" value="maskPen"/>
+      <inkml:brushProperty name="ignorePressure" value="1"/>
+    </inkml:brush>
+  </inkml:definitions>
+  <inkml:trace contextRef="#ctx0" brushRef="#br0">2477 0,'-16'1,"0"0,0 2,1-1,-1 2,1 0,0 1,0 1,0 0,1 1,0 0,1 1,-1 1,-15 13,-2 5,1 1,2 1,1 1,-25 35,7 1,3 1,3 3,3 0,-52 146,42-69,-43 242,79-338,3 0,2 0,3 1,1 0,3 0,2-1,3 1,1-1,3-1,2 0,30 75,-2-33,4-2,4-1,4-3,4-3,3-1,4-4,114 110,-73-92,3-4,5-5,3-5,235 122,-216-139,4-6,2-6,2-6,2-7,276 40,-299-66,0-6,1-5,0-5,-1-6,0-5,0-6,185-53,-233 49,-2-4,-1-3,-2-3,-1-3,-1-3,-3-2,-1-4,85-78,-107 83,-1-2,-2-1,-2-2,-3-1,-1-2,-2-1,-3-2,-2 0,-2-2,-2-1,-3 0,12-61,-20 56,-2 0,-4 0,-2-1,-2 1,-3-1,-3 1,-2 0,-3 0,-2 1,-3 1,-2 0,-3 2,-2 0,-3 1,-2 2,-2 0,-55-70,24 48,-3 1,-3 4,-3 3,-3 3,-2 3,-4 3,-148-81,118 82,-3 5,-2 5,-1 5,-3 5,-197-34,255 61,0 3,0 2,-1 3,-86 9,100-2,0 3,0 2,1 2,0 2,-83 40,55-16,2 4,2 3,2 3,3 3,1 2,3 4,3 2,2 2,-70 103,81-97,2 2,4 2,3 1,3 2,3 1,4 2,3 0,3 2,-15 141,32-167,2-1,2 1,3-1,2 0,3 0,1 0,3-1,3-1,1 0,3-2,2 0,2-1,2-1,2-1,2-2,2-1,2-1,1-2,50 42,-53-55,1-2,2-1,0-2,2-2,0-1,1-1,1-3,0-1,1-1,0-3,1-1,1-2,67 2,-73-8,-1-1,1-2,-1-2,0-1,0-1,0-2,-1-2,0-1,-1-1,0-2,-1-2,-1 0,0-2,-2-2,0 0,34-33,-35 25,-2-1,0-2,-2-1,-2 0,-1-2,-1-1,-2 0,-2-1,-1-1,-1-1,12-57,-16 38,-1-1,-3 1,-3-1,-2 0,-3 0,-2 0,-15-73,-2 28,-5 1,-44-116,45 155,-3 1,-2 2,-3 1,-67-90,46 84,-2 4,-4 1,-1 4,-4 2,-1 3,-3 3,-103-55,56 44,-2 5,-2 5,-3 6,-136-30,143 48,-2 5,-1 5,0 5,-1 5,1 6,-1 5,-158 28,183-16,0 4,2 5,1 3,1 5,2 3,2 4,1 4,3 4,-113 88,106-60,3 3,4 4,4 3,4 4,4 2,4 4,5 3,-90 196,124-231,4 2,2 0,-13 75,26-94,3 1,1 0,3 0,2 0,8 60,2-46,3-1,3-1,2 0,3-1,2-2,3 0,3-1,2-2,44 60,-30-56,1-2,4-2,1-2,3-3,2-2,3-3,120 74,-80-67,201 78,-79-57,2-10,4-9,1-10,2-11,331 9,-391-44,211-27,-255 10,221-62,-276 58,-1-3,-1-3,-2-3,-1-3,79-55,-104 60,-1-3,-2-1,-1-1,-1-3,-3-1,-1-1,-1-1,36-67,-37 47,-3 0,-2-1,-3-2,-3 0,-3-2,-2 1,-3-2,3-126,-13 105,-5 0,-3 1,-4-1,-4 1,-4 1,-40-114,9 72,-101-183,-97-103,148 263,-145-169,191 258,-3 3,-2 2,-2 4,-3 1,-73-43,66 53,-3 3,-1 4,-2 3,-121-33,99 40,-1 5,-1 3,-127-2,156 17,0 3,0 3,1 3,-124 30,142-22,1 1,0 3,2 2,0 2,1 2,-76 56,79-46,3 1,1 2,1 2,3 2,1 1,3 2,1 1,-35 69,46-71,1 1,3 1,2 1,2 0,1 1,3 0,3 1,1 0,2 89,7-81,3 0,3 0,2-1,2 0,3-1,45 103,-30-94,4-1,2-2,3-2,2-1,55 57,-17-34,3-4,4-4,2-3,4-5,3-3,2-5,123 53,-49-39,2-7,3-8,336 62,-260-81,2-12,309-6,-556-20,208-7,-179 4,0-2,-1-1,48-15,-78 19,0 1,1-1,-1-1,0 1,-1-1,1 0,0-1,-1 1,0-1,1 0,-2 0,1-1,0 0,-1 0,0 0,0 0,0 0,-1-1,0 0,0 1,0-1,-1 0,3-11,-3-1,0-1,-2 1,0-1,-1 0,-1 1,0-1,-6-17,-8-43,-4 1,-4 1,-2 1,-4 1,-3 1,-78-125,-105-118,-19 6</inkml:trace>
+</inkml:ink>
+</file>
+
+<file path=ppt/ink/ink28.xml><?xml version="1.0" encoding="utf-8"?>
+<inkml:ink xmlns:inkml="http://www.w3.org/2003/InkML">
+  <inkml:definitions>
+    <inkml:context xml:id="ctx0">
+      <inkml:inkSource xml:id="inkSrc0">
+        <inkml:traceFormat>
+          <inkml:channel name="X" type="integer" min="-2.14748E9" max="2.14748E9" units="cm"/>
+          <inkml:channel name="Y" type="integer" min="-2.14748E9" max="2.14748E9" units="cm"/>
+        </inkml:traceFormat>
+        <inkml:channelProperties>
+          <inkml:channelProperty channel="X" name="resolution" value="1000" units="1/cm"/>
+          <inkml:channelProperty channel="Y" name="resolution" value="1000" units="1/cm"/>
+        </inkml:channelProperties>
+      </inkml:inkSource>
+      <inkml:timestamp xml:id="ts0" timeString="2026-04-07T21:28:23.753"/>
+    </inkml:context>
+    <inkml:brush xml:id="br0">
+      <inkml:brushProperty name="width" value="0.3" units="cm"/>
+      <inkml:brushProperty name="height" value="0.6" units="cm"/>
+      <inkml:brushProperty name="color" value="#FFFC00"/>
+      <inkml:brushProperty name="tip" value="rectangle"/>
+      <inkml:brushProperty name="rasterOp" value="maskPen"/>
+      <inkml:brushProperty name="ignorePressure" value="1"/>
+    </inkml:brush>
+  </inkml:definitions>
+  <inkml:trace contextRef="#ctx0" brushRef="#br0">825 1085,'-2'30,"-1"0,-8 34,7-44,0 0,1 1,1-1,1 0,1 1,3 25,7-20,-9-26,-1 1,0-1,1 0,0 1,-1-1,1 0,-1 1,1-1,-1 0,1 0,0 1,-1-1,1 0,-1 0,1 0,0 0,-1 0,1 0,0 0,-1 0,1 0,-1 0,1-1,0 1,-1 0,1 0,-1-1,1 1,0 0,-1 0,1-1,-1 1,1-1,-1 1,0-1,1 1,-1 0,1-1,-1 1,0-1,1 0,-1 1,0-1,1 1,-1-1,0-1,9-14,0-2,-2 1,0-1,-1 0,-1 0,0-1,3-35,0-10,-3 0,-3-1,-11-116,-47-193,46 317,3 16,-6-40,-31-99,41 171,1 0,-2 0,1 0,-2 0,1 0,-1 1,0 0,-1 0,-9-10,14 16,-1 1,0-1,0 1,0 0,0 0,0 0,0 0,0 0,0 0,0 1,0-1,-1 1,1 0,0-1,0 1,-1 0,-3 1,1 0,1 0,-1 0,1 1,-1 0,1 0,0 0,0 0,0 1,0 0,0 0,-5 4,-33 37,2 2,1 1,-36 60,55-77,-46 64,6 2,3 3,-67 163,105-212,2 1,2 0,2 1,3 1,2 0,3 0,2 0,2 1,10 94,0-102,2 0,1-1,3 0,1-1,3 0,1-2,2 0,2-1,2-2,1-1,2 0,2-3,1 0,1-2,2-1,2-2,0-2,2-1,1-2,73 33,-93-49,-1-1,2-1,-1-1,1 0,0-2,36 4,-45-8,0 0,0-1,0 0,0-1,0 0,0-1,-1 0,1-1,-1 0,0-1,0 0,19-12,-9 1,0-2,0 0,-2-1,-1-1,0 0,-1-1,-1-2,20-38,-13 17,-2-1,-1-1,22-85,-40 123,4-9,-2 1,0-1,0-1,-2 1,0 0,-1-1,0 1,-2-1,-3-24,3 39,0 0,0 0,-1 0,1 0,-1 0,1 1,-1-1,0 1,0-1,0 1,0 0,-1 0,1-1,0 2,-1-1,0 0,1 0,-1 1,0 0,0-1,0 1,-5-1,-5-1,0 1,0 0,0 1,-13 0,9 1,-83-2</inkml:trace>
+</inkml:ink>
+</file>
+
 <file path=ppt/ink/ink3.xml><?xml version="1.0" encoding="utf-8"?>
 <inkml:ink xmlns:inkml="http://www.w3.org/2003/InkML">
   <inkml:definitions>
@@ -940,7 +1126,7 @@
           <a:p>
             <a:fld id="{A323B7C5-9ED9-4209-AD82-4E7D58CDB7A1}" type="datetimeFigureOut">
               <a:rPr lang="es-GT" smtClean="0"/>
-              <a:t>6/04/2026</a:t>
+              <a:t>7/04/2026</a:t>
             </a:fld>
             <a:endParaRPr lang="es-GT"/>
           </a:p>
@@ -1140,7 +1326,7 @@
           <a:p>
             <a:fld id="{A323B7C5-9ED9-4209-AD82-4E7D58CDB7A1}" type="datetimeFigureOut">
               <a:rPr lang="es-GT" smtClean="0"/>
-              <a:t>6/04/2026</a:t>
+              <a:t>7/04/2026</a:t>
             </a:fld>
             <a:endParaRPr lang="es-GT"/>
           </a:p>
@@ -1350,7 +1536,7 @@
           <a:p>
             <a:fld id="{A323B7C5-9ED9-4209-AD82-4E7D58CDB7A1}" type="datetimeFigureOut">
               <a:rPr lang="es-GT" smtClean="0"/>
-              <a:t>6/04/2026</a:t>
+              <a:t>7/04/2026</a:t>
             </a:fld>
             <a:endParaRPr lang="es-GT"/>
           </a:p>
@@ -1550,7 +1736,7 @@
           <a:p>
             <a:fld id="{A323B7C5-9ED9-4209-AD82-4E7D58CDB7A1}" type="datetimeFigureOut">
               <a:rPr lang="es-GT" smtClean="0"/>
-              <a:t>6/04/2026</a:t>
+              <a:t>7/04/2026</a:t>
             </a:fld>
             <a:endParaRPr lang="es-GT"/>
           </a:p>
@@ -1826,7 +2012,7 @@
           <a:p>
             <a:fld id="{A323B7C5-9ED9-4209-AD82-4E7D58CDB7A1}" type="datetimeFigureOut">
               <a:rPr lang="es-GT" smtClean="0"/>
-              <a:t>6/04/2026</a:t>
+              <a:t>7/04/2026</a:t>
             </a:fld>
             <a:endParaRPr lang="es-GT"/>
           </a:p>
@@ -2094,7 +2280,7 @@
           <a:p>
             <a:fld id="{A323B7C5-9ED9-4209-AD82-4E7D58CDB7A1}" type="datetimeFigureOut">
               <a:rPr lang="es-GT" smtClean="0"/>
-              <a:t>6/04/2026</a:t>
+              <a:t>7/04/2026</a:t>
             </a:fld>
             <a:endParaRPr lang="es-GT"/>
           </a:p>
@@ -2509,7 +2695,7 @@
           <a:p>
             <a:fld id="{A323B7C5-9ED9-4209-AD82-4E7D58CDB7A1}" type="datetimeFigureOut">
               <a:rPr lang="es-GT" smtClean="0"/>
-              <a:t>6/04/2026</a:t>
+              <a:t>7/04/2026</a:t>
             </a:fld>
             <a:endParaRPr lang="es-GT"/>
           </a:p>
@@ -2651,7 +2837,7 @@
           <a:p>
             <a:fld id="{A323B7C5-9ED9-4209-AD82-4E7D58CDB7A1}" type="datetimeFigureOut">
               <a:rPr lang="es-GT" smtClean="0"/>
-              <a:t>6/04/2026</a:t>
+              <a:t>7/04/2026</a:t>
             </a:fld>
             <a:endParaRPr lang="es-GT"/>
           </a:p>
@@ -2764,7 +2950,7 @@
           <a:p>
             <a:fld id="{A323B7C5-9ED9-4209-AD82-4E7D58CDB7A1}" type="datetimeFigureOut">
               <a:rPr lang="es-GT" smtClean="0"/>
-              <a:t>6/04/2026</a:t>
+              <a:t>7/04/2026</a:t>
             </a:fld>
             <a:endParaRPr lang="es-GT"/>
           </a:p>
@@ -3077,7 +3263,7 @@
           <a:p>
             <a:fld id="{A323B7C5-9ED9-4209-AD82-4E7D58CDB7A1}" type="datetimeFigureOut">
               <a:rPr lang="es-GT" smtClean="0"/>
-              <a:t>6/04/2026</a:t>
+              <a:t>7/04/2026</a:t>
             </a:fld>
             <a:endParaRPr lang="es-GT"/>
           </a:p>
@@ -3366,7 +3552,7 @@
           <a:p>
             <a:fld id="{A323B7C5-9ED9-4209-AD82-4E7D58CDB7A1}" type="datetimeFigureOut">
               <a:rPr lang="es-GT" smtClean="0"/>
-              <a:t>6/04/2026</a:t>
+              <a:t>7/04/2026</a:t>
             </a:fld>
             <a:endParaRPr lang="es-GT"/>
           </a:p>
@@ -3609,7 +3795,7 @@
           <a:p>
             <a:fld id="{A323B7C5-9ED9-4209-AD82-4E7D58CDB7A1}" type="datetimeFigureOut">
               <a:rPr lang="es-GT" smtClean="0"/>
-              <a:t>6/04/2026</a:t>
+              <a:t>7/04/2026</a:t>
             </a:fld>
             <a:endParaRPr lang="es-GT"/>
           </a:p>
@@ -5815,8 +6001,8 @@
           </a:prstGeom>
         </p:spPr>
       </p:pic>
-      <mc:AlternateContent xmlns:mc="http://schemas.openxmlformats.org/markup-compatibility/2006">
-        <mc:Choice xmlns:p14="http://schemas.microsoft.com/office/powerpoint/2010/main" Requires="p14">
+      <mc:AlternateContent xmlns:mc="http://schemas.openxmlformats.org/markup-compatibility/2006" xmlns:p14="http://schemas.microsoft.com/office/powerpoint/2010/main">
+        <mc:Choice Requires="p14">
           <p:contentPart p14:bwMode="auto" r:id="rId3">
             <p14:nvContentPartPr>
               <p14:cNvPr id="5" name="Entrada de lápiz 4">
@@ -5835,7 +6021,7 @@
             </p14:xfrm>
           </p:contentPart>
         </mc:Choice>
-        <mc:Fallback>
+        <mc:Fallback xmlns="">
           <p:pic>
             <p:nvPicPr>
               <p:cNvPr id="5" name="Entrada de lápiz 4">
@@ -6165,8 +6351,8 @@
           </a:prstGeom>
         </p:spPr>
       </p:pic>
-      <mc:AlternateContent xmlns:mc="http://schemas.openxmlformats.org/markup-compatibility/2006">
-        <mc:Choice xmlns:p14="http://schemas.microsoft.com/office/powerpoint/2010/main" Requires="p14">
+      <mc:AlternateContent xmlns:mc="http://schemas.openxmlformats.org/markup-compatibility/2006" xmlns:p14="http://schemas.microsoft.com/office/powerpoint/2010/main">
+        <mc:Choice Requires="p14">
           <p:contentPart p14:bwMode="auto" r:id="rId3">
             <p14:nvContentPartPr>
               <p14:cNvPr id="5" name="Entrada de lápiz 4">
@@ -6185,7 +6371,7 @@
             </p14:xfrm>
           </p:contentPart>
         </mc:Choice>
-        <mc:Fallback>
+        <mc:Fallback xmlns="">
           <p:pic>
             <p:nvPicPr>
               <p:cNvPr id="5" name="Entrada de lápiz 4">
@@ -6216,8 +6402,8 @@
           </p:pic>
         </mc:Fallback>
       </mc:AlternateContent>
-      <mc:AlternateContent xmlns:mc="http://schemas.openxmlformats.org/markup-compatibility/2006">
-        <mc:Choice xmlns:p14="http://schemas.microsoft.com/office/powerpoint/2010/main" Requires="p14">
+      <mc:AlternateContent xmlns:mc="http://schemas.openxmlformats.org/markup-compatibility/2006" xmlns:p14="http://schemas.microsoft.com/office/powerpoint/2010/main">
+        <mc:Choice Requires="p14">
           <p:contentPart p14:bwMode="auto" r:id="rId5">
             <p14:nvContentPartPr>
               <p14:cNvPr id="6" name="Entrada de lápiz 5">
@@ -6236,7 +6422,7 @@
             </p14:xfrm>
           </p:contentPart>
         </mc:Choice>
-        <mc:Fallback>
+        <mc:Fallback xmlns="">
           <p:pic>
             <p:nvPicPr>
               <p:cNvPr id="6" name="Entrada de lápiz 5">
@@ -6267,8 +6453,8 @@
           </p:pic>
         </mc:Fallback>
       </mc:AlternateContent>
-      <mc:AlternateContent xmlns:mc="http://schemas.openxmlformats.org/markup-compatibility/2006">
-        <mc:Choice xmlns:p14="http://schemas.microsoft.com/office/powerpoint/2010/main" Requires="p14">
+      <mc:AlternateContent xmlns:mc="http://schemas.openxmlformats.org/markup-compatibility/2006" xmlns:p14="http://schemas.microsoft.com/office/powerpoint/2010/main">
+        <mc:Choice Requires="p14">
           <p:contentPart p14:bwMode="auto" r:id="rId7">
             <p14:nvContentPartPr>
               <p14:cNvPr id="7" name="Entrada de lápiz 6">
@@ -6287,7 +6473,7 @@
             </p14:xfrm>
           </p:contentPart>
         </mc:Choice>
-        <mc:Fallback>
+        <mc:Fallback xmlns="">
           <p:pic>
             <p:nvPicPr>
               <p:cNvPr id="7" name="Entrada de lápiz 6">
@@ -6377,8 +6563,8 @@
           </a:p>
         </p:txBody>
       </p:sp>
-      <mc:AlternateContent xmlns:mc="http://schemas.openxmlformats.org/markup-compatibility/2006">
-        <mc:Choice xmlns:p14="http://schemas.microsoft.com/office/powerpoint/2010/main" Requires="p14">
+      <mc:AlternateContent xmlns:mc="http://schemas.openxmlformats.org/markup-compatibility/2006" xmlns:p14="http://schemas.microsoft.com/office/powerpoint/2010/main">
+        <mc:Choice Requires="p14">
           <p:contentPart p14:bwMode="auto" r:id="rId2">
             <p14:nvContentPartPr>
               <p14:cNvPr id="3" name="Entrada de lápiz 2">
@@ -6397,7 +6583,7 @@
             </p14:xfrm>
           </p:contentPart>
         </mc:Choice>
-        <mc:Fallback>
+        <mc:Fallback xmlns="">
           <p:pic>
             <p:nvPicPr>
               <p:cNvPr id="3" name="Entrada de lápiz 2">
@@ -6547,8 +6733,8 @@
           </a:prstGeom>
         </p:spPr>
       </p:pic>
-      <mc:AlternateContent xmlns:mc="http://schemas.openxmlformats.org/markup-compatibility/2006">
-        <mc:Choice xmlns:p14="http://schemas.microsoft.com/office/powerpoint/2010/main" Requires="p14">
+      <mc:AlternateContent xmlns:mc="http://schemas.openxmlformats.org/markup-compatibility/2006" xmlns:p14="http://schemas.microsoft.com/office/powerpoint/2010/main">
+        <mc:Choice Requires="p14">
           <p:contentPart p14:bwMode="auto" r:id="rId3">
             <p14:nvContentPartPr>
               <p14:cNvPr id="5" name="Entrada de lápiz 4">
@@ -6567,7 +6753,7 @@
             </p14:xfrm>
           </p:contentPart>
         </mc:Choice>
-        <mc:Fallback>
+        <mc:Fallback xmlns="">
           <p:pic>
             <p:nvPicPr>
               <p:cNvPr id="5" name="Entrada de lápiz 4">
@@ -6598,8 +6784,8 @@
           </p:pic>
         </mc:Fallback>
       </mc:AlternateContent>
-      <mc:AlternateContent xmlns:mc="http://schemas.openxmlformats.org/markup-compatibility/2006">
-        <mc:Choice xmlns:p14="http://schemas.microsoft.com/office/powerpoint/2010/main" Requires="p14">
+      <mc:AlternateContent xmlns:mc="http://schemas.openxmlformats.org/markup-compatibility/2006" xmlns:p14="http://schemas.microsoft.com/office/powerpoint/2010/main">
+        <mc:Choice Requires="p14">
           <p:contentPart p14:bwMode="auto" r:id="rId5">
             <p14:nvContentPartPr>
               <p14:cNvPr id="6" name="Entrada de lápiz 5">
@@ -6618,7 +6804,7 @@
             </p14:xfrm>
           </p:contentPart>
         </mc:Choice>
-        <mc:Fallback>
+        <mc:Fallback xmlns="">
           <p:pic>
             <p:nvPicPr>
               <p:cNvPr id="6" name="Entrada de lápiz 5">
@@ -7085,8 +7271,8 @@
           </a:prstGeom>
         </p:spPr>
       </p:pic>
-      <mc:AlternateContent xmlns:mc="http://schemas.openxmlformats.org/markup-compatibility/2006">
-        <mc:Choice xmlns:p14="http://schemas.microsoft.com/office/powerpoint/2010/main" Requires="p14">
+      <mc:AlternateContent xmlns:mc="http://schemas.openxmlformats.org/markup-compatibility/2006" xmlns:p14="http://schemas.microsoft.com/office/powerpoint/2010/main">
+        <mc:Choice Requires="p14">
           <p:contentPart p14:bwMode="auto" r:id="rId3">
             <p14:nvContentPartPr>
               <p14:cNvPr id="5" name="Entrada de lápiz 4">
@@ -7105,7 +7291,7 @@
             </p14:xfrm>
           </p:contentPart>
         </mc:Choice>
-        <mc:Fallback>
+        <mc:Fallback xmlns="">
           <p:pic>
             <p:nvPicPr>
               <p:cNvPr id="5" name="Entrada de lápiz 4">
@@ -7136,8 +7322,8 @@
           </p:pic>
         </mc:Fallback>
       </mc:AlternateContent>
-      <mc:AlternateContent xmlns:mc="http://schemas.openxmlformats.org/markup-compatibility/2006">
-        <mc:Choice xmlns:p14="http://schemas.microsoft.com/office/powerpoint/2010/main" Requires="p14">
+      <mc:AlternateContent xmlns:mc="http://schemas.openxmlformats.org/markup-compatibility/2006" xmlns:p14="http://schemas.microsoft.com/office/powerpoint/2010/main">
+        <mc:Choice Requires="p14">
           <p:contentPart p14:bwMode="auto" r:id="rId5">
             <p14:nvContentPartPr>
               <p14:cNvPr id="6" name="Entrada de lápiz 5">
@@ -7156,7 +7342,7 @@
             </p14:xfrm>
           </p:contentPart>
         </mc:Choice>
-        <mc:Fallback>
+        <mc:Fallback xmlns="">
           <p:pic>
             <p:nvPicPr>
               <p:cNvPr id="6" name="Entrada de lápiz 5">
@@ -7187,8 +7373,8 @@
           </p:pic>
         </mc:Fallback>
       </mc:AlternateContent>
-      <mc:AlternateContent xmlns:mc="http://schemas.openxmlformats.org/markup-compatibility/2006">
-        <mc:Choice xmlns:p14="http://schemas.microsoft.com/office/powerpoint/2010/main" Requires="p14">
+      <mc:AlternateContent xmlns:mc="http://schemas.openxmlformats.org/markup-compatibility/2006" xmlns:p14="http://schemas.microsoft.com/office/powerpoint/2010/main">
+        <mc:Choice Requires="p14">
           <p:contentPart p14:bwMode="auto" r:id="rId7">
             <p14:nvContentPartPr>
               <p14:cNvPr id="7" name="Entrada de lápiz 6">
@@ -7207,7 +7393,7 @@
             </p14:xfrm>
           </p:contentPart>
         </mc:Choice>
-        <mc:Fallback>
+        <mc:Fallback xmlns="">
           <p:pic>
             <p:nvPicPr>
               <p:cNvPr id="7" name="Entrada de lápiz 6">
@@ -7335,8 +7521,8 @@
           </a:prstGeom>
         </p:spPr>
       </p:pic>
-      <mc:AlternateContent xmlns:mc="http://schemas.openxmlformats.org/markup-compatibility/2006">
-        <mc:Choice xmlns:p14="http://schemas.microsoft.com/office/powerpoint/2010/main" Requires="p14">
+      <mc:AlternateContent xmlns:mc="http://schemas.openxmlformats.org/markup-compatibility/2006" xmlns:p14="http://schemas.microsoft.com/office/powerpoint/2010/main">
+        <mc:Choice Requires="p14">
           <p:contentPart p14:bwMode="auto" r:id="rId3">
             <p14:nvContentPartPr>
               <p14:cNvPr id="5" name="Entrada de lápiz 4">
@@ -7355,7 +7541,7 @@
             </p14:xfrm>
           </p:contentPart>
         </mc:Choice>
-        <mc:Fallback>
+        <mc:Fallback xmlns="">
           <p:pic>
             <p:nvPicPr>
               <p:cNvPr id="5" name="Entrada de lápiz 4">
@@ -7386,8 +7572,8 @@
           </p:pic>
         </mc:Fallback>
       </mc:AlternateContent>
-      <mc:AlternateContent xmlns:mc="http://schemas.openxmlformats.org/markup-compatibility/2006">
-        <mc:Choice xmlns:p14="http://schemas.microsoft.com/office/powerpoint/2010/main" Requires="p14">
+      <mc:AlternateContent xmlns:mc="http://schemas.openxmlformats.org/markup-compatibility/2006" xmlns:p14="http://schemas.microsoft.com/office/powerpoint/2010/main">
+        <mc:Choice Requires="p14">
           <p:contentPart p14:bwMode="auto" r:id="rId5">
             <p14:nvContentPartPr>
               <p14:cNvPr id="6" name="Entrada de lápiz 5">
@@ -7406,7 +7592,7 @@
             </p14:xfrm>
           </p:contentPart>
         </mc:Choice>
-        <mc:Fallback>
+        <mc:Fallback xmlns="">
           <p:pic>
             <p:nvPicPr>
               <p:cNvPr id="6" name="Entrada de lápiz 5">
@@ -7522,8 +7708,8 @@
           </a:prstGeom>
         </p:spPr>
       </p:pic>
-      <mc:AlternateContent xmlns:mc="http://schemas.openxmlformats.org/markup-compatibility/2006">
-        <mc:Choice xmlns:p14="http://schemas.microsoft.com/office/powerpoint/2010/main" Requires="p14">
+      <mc:AlternateContent xmlns:mc="http://schemas.openxmlformats.org/markup-compatibility/2006" xmlns:p14="http://schemas.microsoft.com/office/powerpoint/2010/main">
+        <mc:Choice Requires="p14">
           <p:contentPart p14:bwMode="auto" r:id="rId3">
             <p14:nvContentPartPr>
               <p14:cNvPr id="5" name="Entrada de lápiz 4">
@@ -7542,7 +7728,7 @@
             </p14:xfrm>
           </p:contentPart>
         </mc:Choice>
-        <mc:Fallback>
+        <mc:Fallback xmlns="">
           <p:pic>
             <p:nvPicPr>
               <p:cNvPr id="5" name="Entrada de lápiz 4">
@@ -8058,7 +8244,7 @@
               <p14:nvPr/>
             </p14:nvContentPartPr>
             <p14:xfrm>
-              <a:off x="3016558" y="424793"/>
+              <a:off x="3016558" y="525752"/>
               <a:ext cx="7843320" cy="4239720"/>
             </p14:xfrm>
           </p:contentPart>
@@ -8084,7 +8270,7 @@
             </p:blipFill>
             <p:spPr>
               <a:xfrm>
-                <a:off x="2944918" y="281153"/>
+                <a:off x="2944558" y="381752"/>
                 <a:ext cx="7986960" cy="4527360"/>
               </a:xfrm>
               <a:prstGeom prst="rect">
@@ -8142,12 +8328,22 @@
         </p:nvSpPr>
         <p:spPr/>
         <p:txBody>
-          <a:bodyPr/>
+          <a:bodyPr>
+            <a:normAutofit fontScale="90000"/>
+          </a:bodyPr>
           <a:lstStyle/>
           <a:p>
             <a:r>
               <a:rPr lang="es-MX" dirty="0"/>
-              <a:t>CON POINT</a:t>
+              <a:t>CON POINT, estas son las islas, que hay que decirles al Hatch como que las detecte o </a:t>
+            </a:r>
+            <a:r>
+              <a:rPr lang="es-MX" dirty="0" err="1"/>
+              <a:t>comoaplcar</a:t>
+            </a:r>
+            <a:r>
+              <a:rPr lang="es-MX" dirty="0"/>
+              <a:t> el relleno </a:t>
             </a:r>
             <a:endParaRPr lang="es-GT" dirty="0"/>
           </a:p>
@@ -8175,7 +8371,7 @@
         </p:blipFill>
         <p:spPr>
           <a:xfrm>
-            <a:off x="1348435" y="2518592"/>
+            <a:off x="2276903" y="1690688"/>
             <a:ext cx="6899827" cy="4227440"/>
           </a:xfrm>
           <a:prstGeom prst="rect">
@@ -8234,10 +8430,196 @@
           <a:bodyPr/>
           <a:lstStyle/>
           <a:p>
-            <a:endParaRPr lang="es-GT"/>
-          </a:p>
-        </p:txBody>
-      </p:sp>
+            <a:r>
+              <a:rPr lang="es-GT" dirty="0"/>
+              <a:t>Estos son los demás patrones </a:t>
+            </a:r>
+          </a:p>
+        </p:txBody>
+      </p:sp>
+      <p:pic>
+        <p:nvPicPr>
+          <p:cNvPr id="4" name="Imagen 3">
+            <a:extLst>
+              <a:ext uri="{FF2B5EF4-FFF2-40B4-BE49-F238E27FC236}">
+                <a16:creationId xmlns:a16="http://schemas.microsoft.com/office/drawing/2014/main" id="{F6F69074-0823-DF4D-FD2B-8B57529E219D}"/>
+              </a:ext>
+            </a:extLst>
+          </p:cNvPr>
+          <p:cNvPicPr>
+            <a:picLocks noChangeAspect="1"/>
+          </p:cNvPicPr>
+          <p:nvPr/>
+        </p:nvPicPr>
+        <p:blipFill>
+          <a:blip r:embed="rId2"/>
+          <a:stretch>
+            <a:fillRect/>
+          </a:stretch>
+        </p:blipFill>
+        <p:spPr>
+          <a:xfrm>
+            <a:off x="2903042" y="1690688"/>
+            <a:ext cx="4280055" cy="4645285"/>
+          </a:xfrm>
+          <a:prstGeom prst="rect">
+            <a:avLst/>
+          </a:prstGeom>
+        </p:spPr>
+      </p:pic>
+      <mc:AlternateContent xmlns:mc="http://schemas.openxmlformats.org/markup-compatibility/2006">
+        <mc:Choice xmlns:p14="http://schemas.microsoft.com/office/powerpoint/2010/main" Requires="p14">
+          <p:contentPart p14:bwMode="auto" r:id="rId3">
+            <p14:nvContentPartPr>
+              <p14:cNvPr id="5" name="Entrada de lápiz 4">
+                <a:extLst>
+                  <a:ext uri="{FF2B5EF4-FFF2-40B4-BE49-F238E27FC236}">
+                    <a16:creationId xmlns:a16="http://schemas.microsoft.com/office/drawing/2014/main" id="{278DE36F-60DB-4139-0748-98DDB4D056CE}"/>
+                  </a:ext>
+                </a:extLst>
+              </p14:cNvPr>
+              <p14:cNvContentPartPr/>
+              <p14:nvPr/>
+            </p14:nvContentPartPr>
+            <p14:xfrm>
+              <a:off x="1665886" y="3449188"/>
+              <a:ext cx="4620960" cy="900000"/>
+            </p14:xfrm>
+          </p:contentPart>
+        </mc:Choice>
+        <mc:Fallback>
+          <p:pic>
+            <p:nvPicPr>
+              <p:cNvPr id="5" name="Entrada de lápiz 4">
+                <a:extLst>
+                  <a:ext uri="{FF2B5EF4-FFF2-40B4-BE49-F238E27FC236}">
+                    <a16:creationId xmlns:a16="http://schemas.microsoft.com/office/drawing/2014/main" id="{278DE36F-60DB-4139-0748-98DDB4D056CE}"/>
+                  </a:ext>
+                </a:extLst>
+              </p:cNvPr>
+              <p:cNvPicPr/>
+              <p:nvPr/>
+            </p:nvPicPr>
+            <p:blipFill>
+              <a:blip r:embed="rId4"/>
+              <a:stretch>
+                <a:fillRect/>
+              </a:stretch>
+            </p:blipFill>
+            <p:spPr>
+              <a:xfrm>
+                <a:off x="1612246" y="3341188"/>
+                <a:ext cx="4728600" cy="1115640"/>
+              </a:xfrm>
+              <a:prstGeom prst="rect">
+                <a:avLst/>
+              </a:prstGeom>
+            </p:spPr>
+          </p:pic>
+        </mc:Fallback>
+      </mc:AlternateContent>
+      <mc:AlternateContent xmlns:mc="http://schemas.openxmlformats.org/markup-compatibility/2006">
+        <mc:Choice xmlns:p14="http://schemas.microsoft.com/office/powerpoint/2010/main" Requires="p14">
+          <p:contentPart p14:bwMode="auto" r:id="rId5">
+            <p14:nvContentPartPr>
+              <p14:cNvPr id="6" name="Entrada de lápiz 5">
+                <a:extLst>
+                  <a:ext uri="{FF2B5EF4-FFF2-40B4-BE49-F238E27FC236}">
+                    <a16:creationId xmlns:a16="http://schemas.microsoft.com/office/drawing/2014/main" id="{23895258-33B8-F116-CE33-709A732A7F8C}"/>
+                  </a:ext>
+                </a:extLst>
+              </p14:cNvPr>
+              <p14:cNvContentPartPr/>
+              <p14:nvPr/>
+            </p14:nvContentPartPr>
+            <p14:xfrm>
+              <a:off x="719086" y="4533508"/>
+              <a:ext cx="4809240" cy="138240"/>
+            </p14:xfrm>
+          </p:contentPart>
+        </mc:Choice>
+        <mc:Fallback>
+          <p:pic>
+            <p:nvPicPr>
+              <p:cNvPr id="6" name="Entrada de lápiz 5">
+                <a:extLst>
+                  <a:ext uri="{FF2B5EF4-FFF2-40B4-BE49-F238E27FC236}">
+                    <a16:creationId xmlns:a16="http://schemas.microsoft.com/office/drawing/2014/main" id="{23895258-33B8-F116-CE33-709A732A7F8C}"/>
+                  </a:ext>
+                </a:extLst>
+              </p:cNvPr>
+              <p:cNvPicPr/>
+              <p:nvPr/>
+            </p:nvPicPr>
+            <p:blipFill>
+              <a:blip r:embed="rId6"/>
+              <a:stretch>
+                <a:fillRect/>
+              </a:stretch>
+            </p:blipFill>
+            <p:spPr>
+              <a:xfrm>
+                <a:off x="665086" y="4425508"/>
+                <a:ext cx="4916880" cy="353880"/>
+              </a:xfrm>
+              <a:prstGeom prst="rect">
+                <a:avLst/>
+              </a:prstGeom>
+            </p:spPr>
+          </p:pic>
+        </mc:Fallback>
+      </mc:AlternateContent>
+      <mc:AlternateContent xmlns:mc="http://schemas.openxmlformats.org/markup-compatibility/2006">
+        <mc:Choice xmlns:p14="http://schemas.microsoft.com/office/powerpoint/2010/main" Requires="p14">
+          <p:contentPart p14:bwMode="auto" r:id="rId7">
+            <p14:nvContentPartPr>
+              <p14:cNvPr id="7" name="Entrada de lápiz 6">
+                <a:extLst>
+                  <a:ext uri="{FF2B5EF4-FFF2-40B4-BE49-F238E27FC236}">
+                    <a16:creationId xmlns:a16="http://schemas.microsoft.com/office/drawing/2014/main" id="{72577D2F-F0C8-2B1C-0F26-B9052E75CA30}"/>
+                  </a:ext>
+                </a:extLst>
+              </p14:cNvPr>
+              <p14:cNvContentPartPr/>
+              <p14:nvPr/>
+            </p14:nvContentPartPr>
+            <p14:xfrm>
+              <a:off x="3673606" y="4233268"/>
+              <a:ext cx="3153600" cy="1464480"/>
+            </p14:xfrm>
+          </p:contentPart>
+        </mc:Choice>
+        <mc:Fallback>
+          <p:pic>
+            <p:nvPicPr>
+              <p:cNvPr id="7" name="Entrada de lápiz 6">
+                <a:extLst>
+                  <a:ext uri="{FF2B5EF4-FFF2-40B4-BE49-F238E27FC236}">
+                    <a16:creationId xmlns:a16="http://schemas.microsoft.com/office/drawing/2014/main" id="{72577D2F-F0C8-2B1C-0F26-B9052E75CA30}"/>
+                  </a:ext>
+                </a:extLst>
+              </p:cNvPr>
+              <p:cNvPicPr/>
+              <p:nvPr/>
+            </p:nvPicPr>
+            <p:blipFill>
+              <a:blip r:embed="rId8"/>
+              <a:stretch>
+                <a:fillRect/>
+              </a:stretch>
+            </p:blipFill>
+            <p:spPr>
+              <a:xfrm>
+                <a:off x="3619966" y="4125268"/>
+                <a:ext cx="3261240" cy="1680120"/>
+              </a:xfrm>
+              <a:prstGeom prst="rect">
+                <a:avLst/>
+              </a:prstGeom>
+            </p:spPr>
+          </p:pic>
+        </mc:Fallback>
+      </mc:AlternateContent>
     </p:spTree>
     <p:extLst>
       <p:ext uri="{BB962C8B-B14F-4D97-AF65-F5344CB8AC3E}">
@@ -8418,6 +8800,189 @@
           </a:p>
         </p:txBody>
       </p:sp>
+      <p:pic>
+        <p:nvPicPr>
+          <p:cNvPr id="4" name="Imagen 3">
+            <a:extLst>
+              <a:ext uri="{FF2B5EF4-FFF2-40B4-BE49-F238E27FC236}">
+                <a16:creationId xmlns:a16="http://schemas.microsoft.com/office/drawing/2014/main" id="{D27FF5EB-0E87-F282-FB8E-A749F3E24C04}"/>
+              </a:ext>
+            </a:extLst>
+          </p:cNvPr>
+          <p:cNvPicPr>
+            <a:picLocks noChangeAspect="1"/>
+          </p:cNvPicPr>
+          <p:nvPr/>
+        </p:nvPicPr>
+        <p:blipFill>
+          <a:blip r:embed="rId2"/>
+          <a:stretch>
+            <a:fillRect/>
+          </a:stretch>
+        </p:blipFill>
+        <p:spPr>
+          <a:xfrm>
+            <a:off x="957982" y="900333"/>
+            <a:ext cx="10314174" cy="5106572"/>
+          </a:xfrm>
+          <a:prstGeom prst="rect">
+            <a:avLst/>
+          </a:prstGeom>
+        </p:spPr>
+      </p:pic>
+      <mc:AlternateContent xmlns:mc="http://schemas.openxmlformats.org/markup-compatibility/2006">
+        <mc:Choice xmlns:p14="http://schemas.microsoft.com/office/powerpoint/2010/main" Requires="p14">
+          <p:contentPart p14:bwMode="auto" r:id="rId3">
+            <p14:nvContentPartPr>
+              <p14:cNvPr id="5" name="Entrada de lápiz 4">
+                <a:extLst>
+                  <a:ext uri="{FF2B5EF4-FFF2-40B4-BE49-F238E27FC236}">
+                    <a16:creationId xmlns:a16="http://schemas.microsoft.com/office/drawing/2014/main" id="{223519F1-5361-FB4B-0E7B-DB257A734C18}"/>
+                  </a:ext>
+                </a:extLst>
+              </p14:cNvPr>
+              <p14:cNvContentPartPr/>
+              <p14:nvPr/>
+            </p14:nvContentPartPr>
+            <p14:xfrm>
+              <a:off x="9374206" y="2956708"/>
+              <a:ext cx="2285280" cy="578160"/>
+            </p14:xfrm>
+          </p:contentPart>
+        </mc:Choice>
+        <mc:Fallback>
+          <p:pic>
+            <p:nvPicPr>
+              <p:cNvPr id="5" name="Entrada de lápiz 4">
+                <a:extLst>
+                  <a:ext uri="{FF2B5EF4-FFF2-40B4-BE49-F238E27FC236}">
+                    <a16:creationId xmlns:a16="http://schemas.microsoft.com/office/drawing/2014/main" id="{223519F1-5361-FB4B-0E7B-DB257A734C18}"/>
+                  </a:ext>
+                </a:extLst>
+              </p:cNvPr>
+              <p:cNvPicPr/>
+              <p:nvPr/>
+            </p:nvPicPr>
+            <p:blipFill>
+              <a:blip r:embed="rId4"/>
+              <a:stretch>
+                <a:fillRect/>
+              </a:stretch>
+            </p:blipFill>
+            <p:spPr>
+              <a:xfrm>
+                <a:off x="9320206" y="2849068"/>
+                <a:ext cx="2392920" cy="793800"/>
+              </a:xfrm>
+              <a:prstGeom prst="rect">
+                <a:avLst/>
+              </a:prstGeom>
+            </p:spPr>
+          </p:pic>
+        </mc:Fallback>
+      </mc:AlternateContent>
+      <mc:AlternateContent xmlns:mc="http://schemas.openxmlformats.org/markup-compatibility/2006">
+        <mc:Choice xmlns:p14="http://schemas.microsoft.com/office/powerpoint/2010/main" Requires="p14">
+          <p:contentPart p14:bwMode="auto" r:id="rId5">
+            <p14:nvContentPartPr>
+              <p14:cNvPr id="6" name="Entrada de lápiz 5">
+                <a:extLst>
+                  <a:ext uri="{FF2B5EF4-FFF2-40B4-BE49-F238E27FC236}">
+                    <a16:creationId xmlns:a16="http://schemas.microsoft.com/office/drawing/2014/main" id="{1775EC11-F030-323B-8699-890A5A161520}"/>
+                  </a:ext>
+                </a:extLst>
+              </p14:cNvPr>
+              <p14:cNvContentPartPr/>
+              <p14:nvPr/>
+            </p14:nvContentPartPr>
+            <p14:xfrm>
+              <a:off x="6451366" y="4290508"/>
+              <a:ext cx="2342160" cy="1563840"/>
+            </p14:xfrm>
+          </p:contentPart>
+        </mc:Choice>
+        <mc:Fallback>
+          <p:pic>
+            <p:nvPicPr>
+              <p:cNvPr id="6" name="Entrada de lápiz 5">
+                <a:extLst>
+                  <a:ext uri="{FF2B5EF4-FFF2-40B4-BE49-F238E27FC236}">
+                    <a16:creationId xmlns:a16="http://schemas.microsoft.com/office/drawing/2014/main" id="{1775EC11-F030-323B-8699-890A5A161520}"/>
+                  </a:ext>
+                </a:extLst>
+              </p:cNvPr>
+              <p:cNvPicPr/>
+              <p:nvPr/>
+            </p:nvPicPr>
+            <p:blipFill>
+              <a:blip r:embed="rId6"/>
+              <a:stretch>
+                <a:fillRect/>
+              </a:stretch>
+            </p:blipFill>
+            <p:spPr>
+              <a:xfrm>
+                <a:off x="6397366" y="4182508"/>
+                <a:ext cx="2449800" cy="1779480"/>
+              </a:xfrm>
+              <a:prstGeom prst="rect">
+                <a:avLst/>
+              </a:prstGeom>
+            </p:spPr>
+          </p:pic>
+        </mc:Fallback>
+      </mc:AlternateContent>
+      <mc:AlternateContent xmlns:mc="http://schemas.openxmlformats.org/markup-compatibility/2006">
+        <mc:Choice xmlns:p14="http://schemas.microsoft.com/office/powerpoint/2010/main" Requires="p14">
+          <p:contentPart p14:bwMode="auto" r:id="rId7">
+            <p14:nvContentPartPr>
+              <p14:cNvPr id="7" name="Entrada de lápiz 6">
+                <a:extLst>
+                  <a:ext uri="{FF2B5EF4-FFF2-40B4-BE49-F238E27FC236}">
+                    <a16:creationId xmlns:a16="http://schemas.microsoft.com/office/drawing/2014/main" id="{07C91BCE-54F6-534B-0B8C-7DCAD4BB1D29}"/>
+                  </a:ext>
+                </a:extLst>
+              </p14:cNvPr>
+              <p14:cNvContentPartPr/>
+              <p14:nvPr/>
+            </p14:nvContentPartPr>
+            <p14:xfrm>
+              <a:off x="997006" y="1269028"/>
+              <a:ext cx="469800" cy="840600"/>
+            </p14:xfrm>
+          </p:contentPart>
+        </mc:Choice>
+        <mc:Fallback>
+          <p:pic>
+            <p:nvPicPr>
+              <p:cNvPr id="7" name="Entrada de lápiz 6">
+                <a:extLst>
+                  <a:ext uri="{FF2B5EF4-FFF2-40B4-BE49-F238E27FC236}">
+                    <a16:creationId xmlns:a16="http://schemas.microsoft.com/office/drawing/2014/main" id="{07C91BCE-54F6-534B-0B8C-7DCAD4BB1D29}"/>
+                  </a:ext>
+                </a:extLst>
+              </p:cNvPr>
+              <p:cNvPicPr/>
+              <p:nvPr/>
+            </p:nvPicPr>
+            <p:blipFill>
+              <a:blip r:embed="rId8"/>
+              <a:stretch>
+                <a:fillRect/>
+              </a:stretch>
+            </p:blipFill>
+            <p:spPr>
+              <a:xfrm>
+                <a:off x="943366" y="1161028"/>
+                <a:ext cx="577440" cy="1056240"/>
+              </a:xfrm>
+              <a:prstGeom prst="rect">
+                <a:avLst/>
+              </a:prstGeom>
+            </p:spPr>
+          </p:pic>
+        </mc:Fallback>
+      </mc:AlternateContent>
     </p:spTree>
     <p:extLst>
       <p:ext uri="{BB962C8B-B14F-4D97-AF65-F5344CB8AC3E}">
@@ -8436,7 +9001,13 @@
   <p:cSld>
     <p:spTree>
       <p:nvGrpSpPr>
-        <p:cNvPr id="1" name=""/>
+        <p:cNvPr id="1" name="">
+          <a:extLst>
+            <a:ext uri="{FF2B5EF4-FFF2-40B4-BE49-F238E27FC236}">
+              <a16:creationId xmlns:a16="http://schemas.microsoft.com/office/drawing/2014/main" id="{9330576B-8DEF-4CB6-DBD9-3DB0233A141F}"/>
+            </a:ext>
+          </a:extLst>
+        </p:cNvPr>
         <p:cNvGrpSpPr/>
         <p:nvPr/>
       </p:nvGrpSpPr>
@@ -8453,7 +9024,7 @@
           <p:cNvPr id="2" name="Título 1">
             <a:extLst>
               <a:ext uri="{FF2B5EF4-FFF2-40B4-BE49-F238E27FC236}">
-                <a16:creationId xmlns:a16="http://schemas.microsoft.com/office/drawing/2014/main" id="{82E95889-F16C-32A0-3ED5-3743146E6AEA}"/>
+                <a16:creationId xmlns:a16="http://schemas.microsoft.com/office/drawing/2014/main" id="{A003437A-4ED1-F7C5-E4ED-96117D6EE4D7}"/>
               </a:ext>
             </a:extLst>
           </p:cNvPr>
@@ -8469,14 +9040,47 @@
           <a:bodyPr/>
           <a:lstStyle/>
           <a:p>
-            <a:endParaRPr lang="es-GT"/>
-          </a:p>
-        </p:txBody>
-      </p:sp>
+            <a:r>
+              <a:rPr lang="es-GT" dirty="0"/>
+              <a:t>ESTE ES EL OTRO PATRON </a:t>
+            </a:r>
+          </a:p>
+        </p:txBody>
+      </p:sp>
+      <p:pic>
+        <p:nvPicPr>
+          <p:cNvPr id="4" name="Imagen 3">
+            <a:extLst>
+              <a:ext uri="{FF2B5EF4-FFF2-40B4-BE49-F238E27FC236}">
+                <a16:creationId xmlns:a16="http://schemas.microsoft.com/office/drawing/2014/main" id="{DEB6DBCC-C0D9-8B4F-4591-BDE6F15A2217}"/>
+              </a:ext>
+            </a:extLst>
+          </p:cNvPr>
+          <p:cNvPicPr>
+            <a:picLocks noChangeAspect="1"/>
+          </p:cNvPicPr>
+          <p:nvPr/>
+        </p:nvPicPr>
+        <p:blipFill>
+          <a:blip r:embed="rId2"/>
+          <a:stretch>
+            <a:fillRect/>
+          </a:stretch>
+        </p:blipFill>
+        <p:spPr>
+          <a:xfrm>
+            <a:off x="2938688" y="1533378"/>
+            <a:ext cx="4897034" cy="4814668"/>
+          </a:xfrm>
+          <a:prstGeom prst="rect">
+            <a:avLst/>
+          </a:prstGeom>
+        </p:spPr>
+      </p:pic>
     </p:spTree>
     <p:extLst>
       <p:ext uri="{BB962C8B-B14F-4D97-AF65-F5344CB8AC3E}">
-        <p14:creationId xmlns:p14="http://schemas.microsoft.com/office/powerpoint/2010/main" val="1028162872"/>
+        <p14:creationId xmlns:p14="http://schemas.microsoft.com/office/powerpoint/2010/main" val="3293309252"/>
       </p:ext>
     </p:extLst>
   </p:cSld>
@@ -8487,6 +9091,100 @@
 </file>
 
 <file path=ppt/slides/slide42.xml><?xml version="1.0" encoding="utf-8"?>
+<p:sld xmlns:a="http://schemas.openxmlformats.org/drawingml/2006/main" xmlns:r="http://schemas.openxmlformats.org/officeDocument/2006/relationships" xmlns:p="http://schemas.openxmlformats.org/presentationml/2006/main">
+  <p:cSld>
+    <p:spTree>
+      <p:nvGrpSpPr>
+        <p:cNvPr id="1" name="">
+          <a:extLst>
+            <a:ext uri="{FF2B5EF4-FFF2-40B4-BE49-F238E27FC236}">
+              <a16:creationId xmlns:a16="http://schemas.microsoft.com/office/drawing/2014/main" id="{27E7BB25-C39F-E51F-BFD2-2E36EFE5275F}"/>
+            </a:ext>
+          </a:extLst>
+        </p:cNvPr>
+        <p:cNvGrpSpPr/>
+        <p:nvPr/>
+      </p:nvGrpSpPr>
+      <p:grpSpPr>
+        <a:xfrm>
+          <a:off x="0" y="0"/>
+          <a:ext cx="0" cy="0"/>
+          <a:chOff x="0" y="0"/>
+          <a:chExt cx="0" cy="0"/>
+        </a:xfrm>
+      </p:grpSpPr>
+      <p:sp>
+        <p:nvSpPr>
+          <p:cNvPr id="2" name="Título 1">
+            <a:extLst>
+              <a:ext uri="{FF2B5EF4-FFF2-40B4-BE49-F238E27FC236}">
+                <a16:creationId xmlns:a16="http://schemas.microsoft.com/office/drawing/2014/main" id="{948A3726-0BB4-1BE8-8FF5-B19953EB7096}"/>
+              </a:ext>
+            </a:extLst>
+          </p:cNvPr>
+          <p:cNvSpPr>
+            <a:spLocks noGrp="1"/>
+          </p:cNvSpPr>
+          <p:nvPr>
+            <p:ph type="title"/>
+          </p:nvPr>
+        </p:nvSpPr>
+        <p:spPr/>
+        <p:txBody>
+          <a:bodyPr/>
+          <a:lstStyle/>
+          <a:p>
+            <a:r>
+              <a:rPr lang="es-GT" dirty="0"/>
+              <a:t>ESTOS SON PARA ORDENAR EL HATCH </a:t>
+            </a:r>
+          </a:p>
+        </p:txBody>
+      </p:sp>
+      <p:pic>
+        <p:nvPicPr>
+          <p:cNvPr id="4" name="Imagen 3">
+            <a:extLst>
+              <a:ext uri="{FF2B5EF4-FFF2-40B4-BE49-F238E27FC236}">
+                <a16:creationId xmlns:a16="http://schemas.microsoft.com/office/drawing/2014/main" id="{27420843-0FE7-2A15-EE8B-E2A78707C511}"/>
+              </a:ext>
+            </a:extLst>
+          </p:cNvPr>
+          <p:cNvPicPr>
+            <a:picLocks noChangeAspect="1"/>
+          </p:cNvPicPr>
+          <p:nvPr/>
+        </p:nvPicPr>
+        <p:blipFill>
+          <a:blip r:embed="rId2"/>
+          <a:stretch>
+            <a:fillRect/>
+          </a:stretch>
+        </p:blipFill>
+        <p:spPr>
+          <a:xfrm>
+            <a:off x="3810906" y="1796395"/>
+            <a:ext cx="3810532" cy="4696480"/>
+          </a:xfrm>
+          <a:prstGeom prst="rect">
+            <a:avLst/>
+          </a:prstGeom>
+        </p:spPr>
+      </p:pic>
+    </p:spTree>
+    <p:extLst>
+      <p:ext uri="{BB962C8B-B14F-4D97-AF65-F5344CB8AC3E}">
+        <p14:creationId xmlns:p14="http://schemas.microsoft.com/office/powerpoint/2010/main" val="2249617004"/>
+      </p:ext>
+    </p:extLst>
+  </p:cSld>
+  <p:clrMapOvr>
+    <a:masterClrMapping/>
+  </p:clrMapOvr>
+</p:sld>
+</file>
+
+<file path=ppt/slides/slide43.xml><?xml version="1.0" encoding="utf-8"?>
 <p:sld xmlns:a="http://schemas.openxmlformats.org/drawingml/2006/main" xmlns:r="http://schemas.openxmlformats.org/officeDocument/2006/relationships" xmlns:p="http://schemas.openxmlformats.org/presentationml/2006/main">
   <p:cSld>
     <p:spTree>
@@ -8508,7 +9206,7 @@
           <p:cNvPr id="2" name="Título 1">
             <a:extLst>
               <a:ext uri="{FF2B5EF4-FFF2-40B4-BE49-F238E27FC236}">
-                <a16:creationId xmlns:a16="http://schemas.microsoft.com/office/drawing/2014/main" id="{7E70E31A-5B05-49C6-3DE5-7CF7CA5BB4E2}"/>
+                <a16:creationId xmlns:a16="http://schemas.microsoft.com/office/drawing/2014/main" id="{82E95889-F16C-32A0-3ED5-3743146E6AEA}"/>
               </a:ext>
             </a:extLst>
           </p:cNvPr>
@@ -8524,14 +9222,566 @@
           <a:bodyPr/>
           <a:lstStyle/>
           <a:p>
-            <a:endParaRPr lang="es-GT"/>
-          </a:p>
-        </p:txBody>
-      </p:sp>
+            <a:r>
+              <a:rPr lang="es-GT" dirty="0"/>
+              <a:t>AHORITA USAR SELECT NO PICK POINTS </a:t>
+            </a:r>
+          </a:p>
+        </p:txBody>
+      </p:sp>
+      <p:pic>
+        <p:nvPicPr>
+          <p:cNvPr id="4" name="Imagen 3">
+            <a:extLst>
+              <a:ext uri="{FF2B5EF4-FFF2-40B4-BE49-F238E27FC236}">
+                <a16:creationId xmlns:a16="http://schemas.microsoft.com/office/drawing/2014/main" id="{15E067DA-7C7C-5D0D-37AC-D941EC7492C5}"/>
+              </a:ext>
+            </a:extLst>
+          </p:cNvPr>
+          <p:cNvPicPr>
+            <a:picLocks noChangeAspect="1"/>
+          </p:cNvPicPr>
+          <p:nvPr/>
+        </p:nvPicPr>
+        <p:blipFill>
+          <a:blip r:embed="rId2"/>
+          <a:stretch>
+            <a:fillRect/>
+          </a:stretch>
+        </p:blipFill>
+        <p:spPr>
+          <a:xfrm>
+            <a:off x="1250825" y="1437052"/>
+            <a:ext cx="9690349" cy="4709835"/>
+          </a:xfrm>
+          <a:prstGeom prst="rect">
+            <a:avLst/>
+          </a:prstGeom>
+        </p:spPr>
+      </p:pic>
+    </p:spTree>
+    <p:extLst>
+      <p:ext uri="{BB962C8B-B14F-4D97-AF65-F5344CB8AC3E}">
+        <p14:creationId xmlns:p14="http://schemas.microsoft.com/office/powerpoint/2010/main" val="1028162872"/>
+      </p:ext>
+    </p:extLst>
+  </p:cSld>
+  <p:clrMapOvr>
+    <a:masterClrMapping/>
+  </p:clrMapOvr>
+</p:sld>
+</file>
+
+<file path=ppt/slides/slide44.xml><?xml version="1.0" encoding="utf-8"?>
+<p:sld xmlns:a="http://schemas.openxmlformats.org/drawingml/2006/main" xmlns:r="http://schemas.openxmlformats.org/officeDocument/2006/relationships" xmlns:p="http://schemas.openxmlformats.org/presentationml/2006/main">
+  <p:cSld>
+    <p:spTree>
+      <p:nvGrpSpPr>
+        <p:cNvPr id="1" name=""/>
+        <p:cNvGrpSpPr/>
+        <p:nvPr/>
+      </p:nvGrpSpPr>
+      <p:grpSpPr>
+        <a:xfrm>
+          <a:off x="0" y="0"/>
+          <a:ext cx="0" cy="0"/>
+          <a:chOff x="0" y="0"/>
+          <a:chExt cx="0" cy="0"/>
+        </a:xfrm>
+      </p:grpSpPr>
+      <p:sp>
+        <p:nvSpPr>
+          <p:cNvPr id="2" name="Título 1">
+            <a:extLst>
+              <a:ext uri="{FF2B5EF4-FFF2-40B4-BE49-F238E27FC236}">
+                <a16:creationId xmlns:a16="http://schemas.microsoft.com/office/drawing/2014/main" id="{7E70E31A-5B05-49C6-3DE5-7CF7CA5BB4E2}"/>
+              </a:ext>
+            </a:extLst>
+          </p:cNvPr>
+          <p:cNvSpPr>
+            <a:spLocks noGrp="1"/>
+          </p:cNvSpPr>
+          <p:nvPr>
+            <p:ph type="title"/>
+          </p:nvPr>
+        </p:nvSpPr>
+        <p:spPr/>
+        <p:txBody>
+          <a:bodyPr/>
+          <a:lstStyle/>
+          <a:p>
+            <a:r>
+              <a:rPr lang="es-GT" dirty="0"/>
+              <a:t>AHORTA EL SEND TO BACH </a:t>
+            </a:r>
+          </a:p>
+        </p:txBody>
+      </p:sp>
+      <p:pic>
+        <p:nvPicPr>
+          <p:cNvPr id="4" name="Imagen 3">
+            <a:extLst>
+              <a:ext uri="{FF2B5EF4-FFF2-40B4-BE49-F238E27FC236}">
+                <a16:creationId xmlns:a16="http://schemas.microsoft.com/office/drawing/2014/main" id="{8492E1CA-1B8E-340D-3401-CA3E915C8582}"/>
+              </a:ext>
+            </a:extLst>
+          </p:cNvPr>
+          <p:cNvPicPr>
+            <a:picLocks noChangeAspect="1"/>
+          </p:cNvPicPr>
+          <p:nvPr/>
+        </p:nvPicPr>
+        <p:blipFill>
+          <a:blip r:embed="rId2"/>
+          <a:stretch>
+            <a:fillRect/>
+          </a:stretch>
+        </p:blipFill>
+        <p:spPr>
+          <a:xfrm>
+            <a:off x="4023929" y="1822156"/>
+            <a:ext cx="3417880" cy="4112572"/>
+          </a:xfrm>
+          <a:prstGeom prst="rect">
+            <a:avLst/>
+          </a:prstGeom>
+        </p:spPr>
+      </p:pic>
     </p:spTree>
     <p:extLst>
       <p:ext uri="{BB962C8B-B14F-4D97-AF65-F5344CB8AC3E}">
         <p14:creationId xmlns:p14="http://schemas.microsoft.com/office/powerpoint/2010/main" val="844889059"/>
+      </p:ext>
+    </p:extLst>
+  </p:cSld>
+  <p:clrMapOvr>
+    <a:masterClrMapping/>
+  </p:clrMapOvr>
+</p:sld>
+</file>
+
+<file path=ppt/slides/slide45.xml><?xml version="1.0" encoding="utf-8"?>
+<p:sld xmlns:a="http://schemas.openxmlformats.org/drawingml/2006/main" xmlns:r="http://schemas.openxmlformats.org/officeDocument/2006/relationships" xmlns:p="http://schemas.openxmlformats.org/presentationml/2006/main">
+  <p:cSld>
+    <p:spTree>
+      <p:nvGrpSpPr>
+        <p:cNvPr id="1" name=""/>
+        <p:cNvGrpSpPr/>
+        <p:nvPr/>
+      </p:nvGrpSpPr>
+      <p:grpSpPr>
+        <a:xfrm>
+          <a:off x="0" y="0"/>
+          <a:ext cx="0" cy="0"/>
+          <a:chOff x="0" y="0"/>
+          <a:chExt cx="0" cy="0"/>
+        </a:xfrm>
+      </p:grpSpPr>
+      <p:sp>
+        <p:nvSpPr>
+          <p:cNvPr id="2" name="Título 1">
+            <a:extLst>
+              <a:ext uri="{FF2B5EF4-FFF2-40B4-BE49-F238E27FC236}">
+                <a16:creationId xmlns:a16="http://schemas.microsoft.com/office/drawing/2014/main" id="{21065721-A879-E0EA-3FED-1EF3E84918B4}"/>
+              </a:ext>
+            </a:extLst>
+          </p:cNvPr>
+          <p:cNvSpPr>
+            <a:spLocks noGrp="1"/>
+          </p:cNvSpPr>
+          <p:nvPr>
+            <p:ph type="title"/>
+          </p:nvPr>
+        </p:nvSpPr>
+        <p:spPr/>
+        <p:txBody>
+          <a:bodyPr/>
+          <a:lstStyle/>
+          <a:p>
+            <a:r>
+              <a:rPr lang="es-GT" dirty="0"/>
+              <a:t>DIFERENTES OPCIONES PARA MANDAR ATRÁS O ADELANTE </a:t>
+            </a:r>
+          </a:p>
+        </p:txBody>
+      </p:sp>
+      <p:pic>
+        <p:nvPicPr>
+          <p:cNvPr id="4" name="Imagen 3">
+            <a:extLst>
+              <a:ext uri="{FF2B5EF4-FFF2-40B4-BE49-F238E27FC236}">
+                <a16:creationId xmlns:a16="http://schemas.microsoft.com/office/drawing/2014/main" id="{80CD2E47-5FF6-9D33-891A-1C80605F5677}"/>
+              </a:ext>
+            </a:extLst>
+          </p:cNvPr>
+          <p:cNvPicPr>
+            <a:picLocks noChangeAspect="1"/>
+          </p:cNvPicPr>
+          <p:nvPr/>
+        </p:nvPicPr>
+        <p:blipFill>
+          <a:blip r:embed="rId2"/>
+          <a:stretch>
+            <a:fillRect/>
+          </a:stretch>
+        </p:blipFill>
+        <p:spPr>
+          <a:xfrm>
+            <a:off x="1515294" y="1927909"/>
+            <a:ext cx="5563784" cy="4564966"/>
+          </a:xfrm>
+          <a:prstGeom prst="rect">
+            <a:avLst/>
+          </a:prstGeom>
+        </p:spPr>
+      </p:pic>
+      <p:pic>
+        <p:nvPicPr>
+          <p:cNvPr id="5" name="Imagen 4">
+            <a:extLst>
+              <a:ext uri="{FF2B5EF4-FFF2-40B4-BE49-F238E27FC236}">
+                <a16:creationId xmlns:a16="http://schemas.microsoft.com/office/drawing/2014/main" id="{2D4260E5-6057-8042-9204-1ADCE1402D72}"/>
+              </a:ext>
+            </a:extLst>
+          </p:cNvPr>
+          <p:cNvPicPr>
+            <a:picLocks noChangeAspect="1"/>
+          </p:cNvPicPr>
+          <p:nvPr/>
+        </p:nvPicPr>
+        <p:blipFill>
+          <a:blip r:embed="rId3"/>
+          <a:stretch>
+            <a:fillRect/>
+          </a:stretch>
+        </p:blipFill>
+        <p:spPr>
+          <a:xfrm>
+            <a:off x="7428311" y="1927909"/>
+            <a:ext cx="3417880" cy="4112572"/>
+          </a:xfrm>
+          <a:prstGeom prst="rect">
+            <a:avLst/>
+          </a:prstGeom>
+        </p:spPr>
+      </p:pic>
+    </p:spTree>
+    <p:extLst>
+      <p:ext uri="{BB962C8B-B14F-4D97-AF65-F5344CB8AC3E}">
+        <p14:creationId xmlns:p14="http://schemas.microsoft.com/office/powerpoint/2010/main" val="3526373812"/>
+      </p:ext>
+    </p:extLst>
+  </p:cSld>
+  <p:clrMapOvr>
+    <a:masterClrMapping/>
+  </p:clrMapOvr>
+</p:sld>
+</file>
+
+<file path=ppt/slides/slide46.xml><?xml version="1.0" encoding="utf-8"?>
+<p:sld xmlns:a="http://schemas.openxmlformats.org/drawingml/2006/main" xmlns:r="http://schemas.openxmlformats.org/officeDocument/2006/relationships" xmlns:p="http://schemas.openxmlformats.org/presentationml/2006/main">
+  <p:cSld>
+    <p:spTree>
+      <p:nvGrpSpPr>
+        <p:cNvPr id="1" name=""/>
+        <p:cNvGrpSpPr/>
+        <p:nvPr/>
+      </p:nvGrpSpPr>
+      <p:grpSpPr>
+        <a:xfrm>
+          <a:off x="0" y="0"/>
+          <a:ext cx="0" cy="0"/>
+          <a:chOff x="0" y="0"/>
+          <a:chExt cx="0" cy="0"/>
+        </a:xfrm>
+      </p:grpSpPr>
+      <p:sp>
+        <p:nvSpPr>
+          <p:cNvPr id="2" name="Título 1">
+            <a:extLst>
+              <a:ext uri="{FF2B5EF4-FFF2-40B4-BE49-F238E27FC236}">
+                <a16:creationId xmlns:a16="http://schemas.microsoft.com/office/drawing/2014/main" id="{4FBC6689-CCDF-3F40-E8C4-02CB299FCE48}"/>
+              </a:ext>
+            </a:extLst>
+          </p:cNvPr>
+          <p:cNvSpPr>
+            <a:spLocks noGrp="1"/>
+          </p:cNvSpPr>
+          <p:nvPr>
+            <p:ph type="title"/>
+          </p:nvPr>
+        </p:nvSpPr>
+        <p:spPr/>
+        <p:txBody>
+          <a:bodyPr/>
+          <a:lstStyle/>
+          <a:p>
+            <a:r>
+              <a:rPr lang="es-GT" dirty="0"/>
+              <a:t>AHORA PARA VER DONDE INICIA EL PATRON YA SEA PISOS O ALGUN DISEÑO CON EL SET </a:t>
+            </a:r>
+          </a:p>
+        </p:txBody>
+      </p:sp>
+      <p:pic>
+        <p:nvPicPr>
+          <p:cNvPr id="4" name="Imagen 3">
+            <a:extLst>
+              <a:ext uri="{FF2B5EF4-FFF2-40B4-BE49-F238E27FC236}">
+                <a16:creationId xmlns:a16="http://schemas.microsoft.com/office/drawing/2014/main" id="{7A00095A-376E-7B2F-9950-71E223CCA325}"/>
+              </a:ext>
+            </a:extLst>
+          </p:cNvPr>
+          <p:cNvPicPr>
+            <a:picLocks noChangeAspect="1"/>
+          </p:cNvPicPr>
+          <p:nvPr/>
+        </p:nvPicPr>
+        <p:blipFill>
+          <a:blip r:embed="rId2"/>
+          <a:stretch>
+            <a:fillRect/>
+          </a:stretch>
+        </p:blipFill>
+        <p:spPr>
+          <a:xfrm>
+            <a:off x="2433127" y="2065719"/>
+            <a:ext cx="6148166" cy="4277333"/>
+          </a:xfrm>
+          <a:prstGeom prst="rect">
+            <a:avLst/>
+          </a:prstGeom>
+        </p:spPr>
+      </p:pic>
+    </p:spTree>
+    <p:extLst>
+      <p:ext uri="{BB962C8B-B14F-4D97-AF65-F5344CB8AC3E}">
+        <p14:creationId xmlns:p14="http://schemas.microsoft.com/office/powerpoint/2010/main" val="2877513264"/>
+      </p:ext>
+    </p:extLst>
+  </p:cSld>
+  <p:clrMapOvr>
+    <a:masterClrMapping/>
+  </p:clrMapOvr>
+</p:sld>
+</file>
+
+<file path=ppt/slides/slide47.xml><?xml version="1.0" encoding="utf-8"?>
+<p:sld xmlns:a="http://schemas.openxmlformats.org/drawingml/2006/main" xmlns:r="http://schemas.openxmlformats.org/officeDocument/2006/relationships" xmlns:p="http://schemas.openxmlformats.org/presentationml/2006/main">
+  <p:cSld>
+    <p:spTree>
+      <p:nvGrpSpPr>
+        <p:cNvPr id="1" name=""/>
+        <p:cNvGrpSpPr/>
+        <p:nvPr/>
+      </p:nvGrpSpPr>
+      <p:grpSpPr>
+        <a:xfrm>
+          <a:off x="0" y="0"/>
+          <a:ext cx="0" cy="0"/>
+          <a:chOff x="0" y="0"/>
+          <a:chExt cx="0" cy="0"/>
+        </a:xfrm>
+      </p:grpSpPr>
+      <p:sp>
+        <p:nvSpPr>
+          <p:cNvPr id="2" name="Título 1">
+            <a:extLst>
+              <a:ext uri="{FF2B5EF4-FFF2-40B4-BE49-F238E27FC236}">
+                <a16:creationId xmlns:a16="http://schemas.microsoft.com/office/drawing/2014/main" id="{B2D2E617-EF2F-76B4-E51A-2A2C7A99E866}"/>
+              </a:ext>
+            </a:extLst>
+          </p:cNvPr>
+          <p:cNvSpPr>
+            <a:spLocks noGrp="1"/>
+          </p:cNvSpPr>
+          <p:nvPr>
+            <p:ph type="title"/>
+          </p:nvPr>
+        </p:nvSpPr>
+        <p:spPr/>
+        <p:txBody>
+          <a:bodyPr/>
+          <a:lstStyle/>
+          <a:p>
+            <a:endParaRPr lang="es-GT"/>
+          </a:p>
+        </p:txBody>
+      </p:sp>
+      <p:pic>
+        <p:nvPicPr>
+          <p:cNvPr id="4" name="Imagen 3">
+            <a:extLst>
+              <a:ext uri="{FF2B5EF4-FFF2-40B4-BE49-F238E27FC236}">
+                <a16:creationId xmlns:a16="http://schemas.microsoft.com/office/drawing/2014/main" id="{0D4628B6-4624-6830-BDD3-7CFEE3390EDD}"/>
+              </a:ext>
+            </a:extLst>
+          </p:cNvPr>
+          <p:cNvPicPr>
+            <a:picLocks noChangeAspect="1"/>
+          </p:cNvPicPr>
+          <p:nvPr/>
+        </p:nvPicPr>
+        <p:blipFill>
+          <a:blip r:embed="rId2"/>
+          <a:stretch>
+            <a:fillRect/>
+          </a:stretch>
+        </p:blipFill>
+        <p:spPr>
+          <a:xfrm>
+            <a:off x="2671962" y="914049"/>
+            <a:ext cx="5553850" cy="5029902"/>
+          </a:xfrm>
+          <a:prstGeom prst="rect">
+            <a:avLst/>
+          </a:prstGeom>
+        </p:spPr>
+      </p:pic>
+    </p:spTree>
+    <p:extLst>
+      <p:ext uri="{BB962C8B-B14F-4D97-AF65-F5344CB8AC3E}">
+        <p14:creationId xmlns:p14="http://schemas.microsoft.com/office/powerpoint/2010/main" val="1988472915"/>
+      </p:ext>
+    </p:extLst>
+  </p:cSld>
+  <p:clrMapOvr>
+    <a:masterClrMapping/>
+  </p:clrMapOvr>
+</p:sld>
+</file>
+
+<file path=ppt/slides/slide48.xml><?xml version="1.0" encoding="utf-8"?>
+<p:sld xmlns:a="http://schemas.openxmlformats.org/drawingml/2006/main" xmlns:r="http://schemas.openxmlformats.org/officeDocument/2006/relationships" xmlns:p="http://schemas.openxmlformats.org/presentationml/2006/main">
+  <p:cSld>
+    <p:spTree>
+      <p:nvGrpSpPr>
+        <p:cNvPr id="1" name=""/>
+        <p:cNvGrpSpPr/>
+        <p:nvPr/>
+      </p:nvGrpSpPr>
+      <p:grpSpPr>
+        <a:xfrm>
+          <a:off x="0" y="0"/>
+          <a:ext cx="0" cy="0"/>
+          <a:chOff x="0" y="0"/>
+          <a:chExt cx="0" cy="0"/>
+        </a:xfrm>
+      </p:grpSpPr>
+      <p:sp>
+        <p:nvSpPr>
+          <p:cNvPr id="2" name="Título 1">
+            <a:extLst>
+              <a:ext uri="{FF2B5EF4-FFF2-40B4-BE49-F238E27FC236}">
+                <a16:creationId xmlns:a16="http://schemas.microsoft.com/office/drawing/2014/main" id="{7E9B6C10-649A-7A20-99CE-8AECB26FCCC0}"/>
+              </a:ext>
+            </a:extLst>
+          </p:cNvPr>
+          <p:cNvSpPr>
+            <a:spLocks noGrp="1"/>
+          </p:cNvSpPr>
+          <p:nvPr>
+            <p:ph type="title"/>
+          </p:nvPr>
+        </p:nvSpPr>
+        <p:spPr/>
+        <p:txBody>
+          <a:bodyPr/>
+          <a:lstStyle/>
+          <a:p>
+            <a:endParaRPr lang="es-GT"/>
+          </a:p>
+        </p:txBody>
+      </p:sp>
+      <p:pic>
+        <p:nvPicPr>
+          <p:cNvPr id="4" name="Imagen 3">
+            <a:extLst>
+              <a:ext uri="{FF2B5EF4-FFF2-40B4-BE49-F238E27FC236}">
+                <a16:creationId xmlns:a16="http://schemas.microsoft.com/office/drawing/2014/main" id="{234012F3-752E-8EF0-60CA-FA1086055BAA}"/>
+              </a:ext>
+            </a:extLst>
+          </p:cNvPr>
+          <p:cNvPicPr>
+            <a:picLocks noChangeAspect="1"/>
+          </p:cNvPicPr>
+          <p:nvPr/>
+        </p:nvPicPr>
+        <p:blipFill>
+          <a:blip r:embed="rId2"/>
+          <a:stretch>
+            <a:fillRect/>
+          </a:stretch>
+        </p:blipFill>
+        <p:spPr>
+          <a:xfrm>
+            <a:off x="2899916" y="671127"/>
+            <a:ext cx="6392167" cy="5515745"/>
+          </a:xfrm>
+          <a:prstGeom prst="rect">
+            <a:avLst/>
+          </a:prstGeom>
+        </p:spPr>
+      </p:pic>
+    </p:spTree>
+    <p:extLst>
+      <p:ext uri="{BB962C8B-B14F-4D97-AF65-F5344CB8AC3E}">
+        <p14:creationId xmlns:p14="http://schemas.microsoft.com/office/powerpoint/2010/main" val="2691094719"/>
+      </p:ext>
+    </p:extLst>
+  </p:cSld>
+  <p:clrMapOvr>
+    <a:masterClrMapping/>
+  </p:clrMapOvr>
+</p:sld>
+</file>
+
+<file path=ppt/slides/slide49.xml><?xml version="1.0" encoding="utf-8"?>
+<p:sld xmlns:a="http://schemas.openxmlformats.org/drawingml/2006/main" xmlns:r="http://schemas.openxmlformats.org/officeDocument/2006/relationships" xmlns:p="http://schemas.openxmlformats.org/presentationml/2006/main">
+  <p:cSld>
+    <p:spTree>
+      <p:nvGrpSpPr>
+        <p:cNvPr id="1" name=""/>
+        <p:cNvGrpSpPr/>
+        <p:nvPr/>
+      </p:nvGrpSpPr>
+      <p:grpSpPr>
+        <a:xfrm>
+          <a:off x="0" y="0"/>
+          <a:ext cx="0" cy="0"/>
+          <a:chOff x="0" y="0"/>
+          <a:chExt cx="0" cy="0"/>
+        </a:xfrm>
+      </p:grpSpPr>
+      <p:sp>
+        <p:nvSpPr>
+          <p:cNvPr id="2" name="Título 1">
+            <a:extLst>
+              <a:ext uri="{FF2B5EF4-FFF2-40B4-BE49-F238E27FC236}">
+                <a16:creationId xmlns:a16="http://schemas.microsoft.com/office/drawing/2014/main" id="{C64FFFFD-0FE6-7784-D0D2-B8C3475116C4}"/>
+              </a:ext>
+            </a:extLst>
+          </p:cNvPr>
+          <p:cNvSpPr>
+            <a:spLocks noGrp="1"/>
+          </p:cNvSpPr>
+          <p:nvPr>
+            <p:ph type="title"/>
+          </p:nvPr>
+        </p:nvSpPr>
+        <p:spPr/>
+        <p:txBody>
+          <a:bodyPr/>
+          <a:lstStyle/>
+          <a:p>
+            <a:endParaRPr lang="es-GT"/>
+          </a:p>
+        </p:txBody>
+      </p:sp>
+    </p:spTree>
+    <p:extLst>
+      <p:ext uri="{BB962C8B-B14F-4D97-AF65-F5344CB8AC3E}">
+        <p14:creationId xmlns:p14="http://schemas.microsoft.com/office/powerpoint/2010/main" val="1694693777"/>
       </p:ext>
     </p:extLst>
   </p:cSld>
@@ -8655,6 +9905,281 @@
     <p:extLst>
       <p:ext uri="{BB962C8B-B14F-4D97-AF65-F5344CB8AC3E}">
         <p14:creationId xmlns:p14="http://schemas.microsoft.com/office/powerpoint/2010/main" val="2321171437"/>
+      </p:ext>
+    </p:extLst>
+  </p:cSld>
+  <p:clrMapOvr>
+    <a:masterClrMapping/>
+  </p:clrMapOvr>
+</p:sld>
+</file>
+
+<file path=ppt/slides/slide50.xml><?xml version="1.0" encoding="utf-8"?>
+<p:sld xmlns:a="http://schemas.openxmlformats.org/drawingml/2006/main" xmlns:r="http://schemas.openxmlformats.org/officeDocument/2006/relationships" xmlns:p="http://schemas.openxmlformats.org/presentationml/2006/main">
+  <p:cSld>
+    <p:spTree>
+      <p:nvGrpSpPr>
+        <p:cNvPr id="1" name=""/>
+        <p:cNvGrpSpPr/>
+        <p:nvPr/>
+      </p:nvGrpSpPr>
+      <p:grpSpPr>
+        <a:xfrm>
+          <a:off x="0" y="0"/>
+          <a:ext cx="0" cy="0"/>
+          <a:chOff x="0" y="0"/>
+          <a:chExt cx="0" cy="0"/>
+        </a:xfrm>
+      </p:grpSpPr>
+      <p:sp>
+        <p:nvSpPr>
+          <p:cNvPr id="2" name="Título 1">
+            <a:extLst>
+              <a:ext uri="{FF2B5EF4-FFF2-40B4-BE49-F238E27FC236}">
+                <a16:creationId xmlns:a16="http://schemas.microsoft.com/office/drawing/2014/main" id="{89C74FCE-F30C-6266-8960-04D27D3B0D0F}"/>
+              </a:ext>
+            </a:extLst>
+          </p:cNvPr>
+          <p:cNvSpPr>
+            <a:spLocks noGrp="1"/>
+          </p:cNvSpPr>
+          <p:nvPr>
+            <p:ph type="title"/>
+          </p:nvPr>
+        </p:nvSpPr>
+        <p:spPr/>
+        <p:txBody>
+          <a:bodyPr/>
+          <a:lstStyle/>
+          <a:p>
+            <a:endParaRPr lang="es-GT"/>
+          </a:p>
+        </p:txBody>
+      </p:sp>
+    </p:spTree>
+    <p:extLst>
+      <p:ext uri="{BB962C8B-B14F-4D97-AF65-F5344CB8AC3E}">
+        <p14:creationId xmlns:p14="http://schemas.microsoft.com/office/powerpoint/2010/main" val="2268175330"/>
+      </p:ext>
+    </p:extLst>
+  </p:cSld>
+  <p:clrMapOvr>
+    <a:masterClrMapping/>
+  </p:clrMapOvr>
+</p:sld>
+</file>
+
+<file path=ppt/slides/slide51.xml><?xml version="1.0" encoding="utf-8"?>
+<p:sld xmlns:a="http://schemas.openxmlformats.org/drawingml/2006/main" xmlns:r="http://schemas.openxmlformats.org/officeDocument/2006/relationships" xmlns:p="http://schemas.openxmlformats.org/presentationml/2006/main">
+  <p:cSld>
+    <p:spTree>
+      <p:nvGrpSpPr>
+        <p:cNvPr id="1" name=""/>
+        <p:cNvGrpSpPr/>
+        <p:nvPr/>
+      </p:nvGrpSpPr>
+      <p:grpSpPr>
+        <a:xfrm>
+          <a:off x="0" y="0"/>
+          <a:ext cx="0" cy="0"/>
+          <a:chOff x="0" y="0"/>
+          <a:chExt cx="0" cy="0"/>
+        </a:xfrm>
+      </p:grpSpPr>
+      <p:sp>
+        <p:nvSpPr>
+          <p:cNvPr id="2" name="Título 1">
+            <a:extLst>
+              <a:ext uri="{FF2B5EF4-FFF2-40B4-BE49-F238E27FC236}">
+                <a16:creationId xmlns:a16="http://schemas.microsoft.com/office/drawing/2014/main" id="{AA9BAA05-2BFC-68B8-D0FA-BDDC5BAA3EAE}"/>
+              </a:ext>
+            </a:extLst>
+          </p:cNvPr>
+          <p:cNvSpPr>
+            <a:spLocks noGrp="1"/>
+          </p:cNvSpPr>
+          <p:nvPr>
+            <p:ph type="title"/>
+          </p:nvPr>
+        </p:nvSpPr>
+        <p:spPr/>
+        <p:txBody>
+          <a:bodyPr/>
+          <a:lstStyle/>
+          <a:p>
+            <a:endParaRPr lang="es-GT"/>
+          </a:p>
+        </p:txBody>
+      </p:sp>
+    </p:spTree>
+    <p:extLst>
+      <p:ext uri="{BB962C8B-B14F-4D97-AF65-F5344CB8AC3E}">
+        <p14:creationId xmlns:p14="http://schemas.microsoft.com/office/powerpoint/2010/main" val="483737765"/>
+      </p:ext>
+    </p:extLst>
+  </p:cSld>
+  <p:clrMapOvr>
+    <a:masterClrMapping/>
+  </p:clrMapOvr>
+</p:sld>
+</file>
+
+<file path=ppt/slides/slide52.xml><?xml version="1.0" encoding="utf-8"?>
+<p:sld xmlns:a="http://schemas.openxmlformats.org/drawingml/2006/main" xmlns:r="http://schemas.openxmlformats.org/officeDocument/2006/relationships" xmlns:p="http://schemas.openxmlformats.org/presentationml/2006/main">
+  <p:cSld>
+    <p:spTree>
+      <p:nvGrpSpPr>
+        <p:cNvPr id="1" name=""/>
+        <p:cNvGrpSpPr/>
+        <p:nvPr/>
+      </p:nvGrpSpPr>
+      <p:grpSpPr>
+        <a:xfrm>
+          <a:off x="0" y="0"/>
+          <a:ext cx="0" cy="0"/>
+          <a:chOff x="0" y="0"/>
+          <a:chExt cx="0" cy="0"/>
+        </a:xfrm>
+      </p:grpSpPr>
+      <p:sp>
+        <p:nvSpPr>
+          <p:cNvPr id="2" name="Título 1">
+            <a:extLst>
+              <a:ext uri="{FF2B5EF4-FFF2-40B4-BE49-F238E27FC236}">
+                <a16:creationId xmlns:a16="http://schemas.microsoft.com/office/drawing/2014/main" id="{DB98CF7A-0E7D-7248-D9DB-6C008D379773}"/>
+              </a:ext>
+            </a:extLst>
+          </p:cNvPr>
+          <p:cNvSpPr>
+            <a:spLocks noGrp="1"/>
+          </p:cNvSpPr>
+          <p:nvPr>
+            <p:ph type="title"/>
+          </p:nvPr>
+        </p:nvSpPr>
+        <p:spPr/>
+        <p:txBody>
+          <a:bodyPr/>
+          <a:lstStyle/>
+          <a:p>
+            <a:endParaRPr lang="es-GT"/>
+          </a:p>
+        </p:txBody>
+      </p:sp>
+    </p:spTree>
+    <p:extLst>
+      <p:ext uri="{BB962C8B-B14F-4D97-AF65-F5344CB8AC3E}">
+        <p14:creationId xmlns:p14="http://schemas.microsoft.com/office/powerpoint/2010/main" val="3012083452"/>
+      </p:ext>
+    </p:extLst>
+  </p:cSld>
+  <p:clrMapOvr>
+    <a:masterClrMapping/>
+  </p:clrMapOvr>
+</p:sld>
+</file>
+
+<file path=ppt/slides/slide53.xml><?xml version="1.0" encoding="utf-8"?>
+<p:sld xmlns:a="http://schemas.openxmlformats.org/drawingml/2006/main" xmlns:r="http://schemas.openxmlformats.org/officeDocument/2006/relationships" xmlns:p="http://schemas.openxmlformats.org/presentationml/2006/main">
+  <p:cSld>
+    <p:spTree>
+      <p:nvGrpSpPr>
+        <p:cNvPr id="1" name=""/>
+        <p:cNvGrpSpPr/>
+        <p:nvPr/>
+      </p:nvGrpSpPr>
+      <p:grpSpPr>
+        <a:xfrm>
+          <a:off x="0" y="0"/>
+          <a:ext cx="0" cy="0"/>
+          <a:chOff x="0" y="0"/>
+          <a:chExt cx="0" cy="0"/>
+        </a:xfrm>
+      </p:grpSpPr>
+      <p:sp>
+        <p:nvSpPr>
+          <p:cNvPr id="2" name="Título 1">
+            <a:extLst>
+              <a:ext uri="{FF2B5EF4-FFF2-40B4-BE49-F238E27FC236}">
+                <a16:creationId xmlns:a16="http://schemas.microsoft.com/office/drawing/2014/main" id="{EBA65296-D256-D039-AD39-015051024F2D}"/>
+              </a:ext>
+            </a:extLst>
+          </p:cNvPr>
+          <p:cNvSpPr>
+            <a:spLocks noGrp="1"/>
+          </p:cNvSpPr>
+          <p:nvPr>
+            <p:ph type="title"/>
+          </p:nvPr>
+        </p:nvSpPr>
+        <p:spPr/>
+        <p:txBody>
+          <a:bodyPr/>
+          <a:lstStyle/>
+          <a:p>
+            <a:endParaRPr lang="es-GT"/>
+          </a:p>
+        </p:txBody>
+      </p:sp>
+    </p:spTree>
+    <p:extLst>
+      <p:ext uri="{BB962C8B-B14F-4D97-AF65-F5344CB8AC3E}">
+        <p14:creationId xmlns:p14="http://schemas.microsoft.com/office/powerpoint/2010/main" val="2487286524"/>
+      </p:ext>
+    </p:extLst>
+  </p:cSld>
+  <p:clrMapOvr>
+    <a:masterClrMapping/>
+  </p:clrMapOvr>
+</p:sld>
+</file>
+
+<file path=ppt/slides/slide54.xml><?xml version="1.0" encoding="utf-8"?>
+<p:sld xmlns:a="http://schemas.openxmlformats.org/drawingml/2006/main" xmlns:r="http://schemas.openxmlformats.org/officeDocument/2006/relationships" xmlns:p="http://schemas.openxmlformats.org/presentationml/2006/main">
+  <p:cSld>
+    <p:spTree>
+      <p:nvGrpSpPr>
+        <p:cNvPr id="1" name=""/>
+        <p:cNvGrpSpPr/>
+        <p:nvPr/>
+      </p:nvGrpSpPr>
+      <p:grpSpPr>
+        <a:xfrm>
+          <a:off x="0" y="0"/>
+          <a:ext cx="0" cy="0"/>
+          <a:chOff x="0" y="0"/>
+          <a:chExt cx="0" cy="0"/>
+        </a:xfrm>
+      </p:grpSpPr>
+      <p:sp>
+        <p:nvSpPr>
+          <p:cNvPr id="2" name="Título 1">
+            <a:extLst>
+              <a:ext uri="{FF2B5EF4-FFF2-40B4-BE49-F238E27FC236}">
+                <a16:creationId xmlns:a16="http://schemas.microsoft.com/office/drawing/2014/main" id="{3D774A01-639C-0676-F796-A6E3693916AA}"/>
+              </a:ext>
+            </a:extLst>
+          </p:cNvPr>
+          <p:cNvSpPr>
+            <a:spLocks noGrp="1"/>
+          </p:cNvSpPr>
+          <p:nvPr>
+            <p:ph type="title"/>
+          </p:nvPr>
+        </p:nvSpPr>
+        <p:spPr/>
+        <p:txBody>
+          <a:bodyPr/>
+          <a:lstStyle/>
+          <a:p>
+            <a:endParaRPr lang="es-GT"/>
+          </a:p>
+        </p:txBody>
+      </p:sp>
+    </p:spTree>
+    <p:extLst>
+      <p:ext uri="{BB962C8B-B14F-4D97-AF65-F5344CB8AC3E}">
+        <p14:creationId xmlns:p14="http://schemas.microsoft.com/office/powerpoint/2010/main" val="1225220923"/>
       </p:ext>
     </p:extLst>
   </p:cSld>
